--- a/Img/AnovaModeling.pptx
+++ b/Img/AnovaModeling.pptx
@@ -4,28 +4,32 @@
   <p:sldMasterIdLst>
     <p:sldMasterId id="2147483660" r:id="rId1"/>
   </p:sldMasterIdLst>
+  <p:notesMasterIdLst>
+    <p:notesMasterId r:id="rId24"/>
+  </p:notesMasterIdLst>
   <p:sldIdLst>
     <p:sldId id="274" r:id="rId2"/>
     <p:sldId id="264" r:id="rId3"/>
     <p:sldId id="265" r:id="rId4"/>
-    <p:sldId id="275" r:id="rId5"/>
-    <p:sldId id="276" r:id="rId6"/>
-    <p:sldId id="256" r:id="rId7"/>
-    <p:sldId id="258" r:id="rId8"/>
-    <p:sldId id="257" r:id="rId9"/>
-    <p:sldId id="259" r:id="rId10"/>
-    <p:sldId id="260" r:id="rId11"/>
-    <p:sldId id="261" r:id="rId12"/>
-    <p:sldId id="262" r:id="rId13"/>
-    <p:sldId id="263" r:id="rId14"/>
-    <p:sldId id="266" r:id="rId15"/>
-    <p:sldId id="267" r:id="rId16"/>
-    <p:sldId id="268" r:id="rId17"/>
-    <p:sldId id="269" r:id="rId18"/>
-    <p:sldId id="270" r:id="rId19"/>
-    <p:sldId id="271" r:id="rId20"/>
-    <p:sldId id="272" r:id="rId21"/>
-    <p:sldId id="273" r:id="rId22"/>
+    <p:sldId id="277" r:id="rId5"/>
+    <p:sldId id="275" r:id="rId6"/>
+    <p:sldId id="276" r:id="rId7"/>
+    <p:sldId id="256" r:id="rId8"/>
+    <p:sldId id="258" r:id="rId9"/>
+    <p:sldId id="257" r:id="rId10"/>
+    <p:sldId id="259" r:id="rId11"/>
+    <p:sldId id="260" r:id="rId12"/>
+    <p:sldId id="261" r:id="rId13"/>
+    <p:sldId id="262" r:id="rId14"/>
+    <p:sldId id="263" r:id="rId15"/>
+    <p:sldId id="266" r:id="rId16"/>
+    <p:sldId id="267" r:id="rId17"/>
+    <p:sldId id="268" r:id="rId18"/>
+    <p:sldId id="269" r:id="rId19"/>
+    <p:sldId id="270" r:id="rId20"/>
+    <p:sldId id="271" r:id="rId21"/>
+    <p:sldId id="272" r:id="rId22"/>
+    <p:sldId id="273" r:id="rId23"/>
   </p:sldIdLst>
   <p:sldSz cx="12192000" cy="6858000"/>
   <p:notesSz cx="6858000" cy="9144000"/>
@@ -354,6 +358,471 @@
 </pc:chgInfo>
 </file>
 
+<file path=ppt/notesMasters/notesMaster1.xml><?xml version="1.0" encoding="utf-8"?>
+<p:notesMaster xmlns:a="http://schemas.openxmlformats.org/drawingml/2006/main" xmlns:r="http://schemas.openxmlformats.org/officeDocument/2006/relationships" xmlns:p="http://schemas.openxmlformats.org/presentationml/2006/main">
+  <p:cSld>
+    <p:bg>
+      <p:bgRef idx="1001">
+        <a:schemeClr val="bg1"/>
+      </p:bgRef>
+    </p:bg>
+    <p:spTree>
+      <p:nvGrpSpPr>
+        <p:cNvPr id="1" name=""/>
+        <p:cNvGrpSpPr/>
+        <p:nvPr/>
+      </p:nvGrpSpPr>
+      <p:grpSpPr>
+        <a:xfrm>
+          <a:off x="0" y="0"/>
+          <a:ext cx="0" cy="0"/>
+          <a:chOff x="0" y="0"/>
+          <a:chExt cx="0" cy="0"/>
+        </a:xfrm>
+      </p:grpSpPr>
+      <p:sp>
+        <p:nvSpPr>
+          <p:cNvPr id="2" name="ヘッダー プレースホルダー 1"/>
+          <p:cNvSpPr>
+            <a:spLocks noGrp="1"/>
+          </p:cNvSpPr>
+          <p:nvPr>
+            <p:ph type="hdr" sz="quarter"/>
+          </p:nvPr>
+        </p:nvSpPr>
+        <p:spPr>
+          <a:xfrm>
+            <a:off x="0" y="0"/>
+            <a:ext cx="2971800" cy="458788"/>
+          </a:xfrm>
+          <a:prstGeom prst="rect">
+            <a:avLst/>
+          </a:prstGeom>
+        </p:spPr>
+        <p:txBody>
+          <a:bodyPr vert="horz" lIns="91440" tIns="45720" rIns="91440" bIns="45720" rtlCol="0"/>
+          <a:lstStyle>
+            <a:lvl1pPr algn="l">
+              <a:defRPr sz="1200"/>
+            </a:lvl1pPr>
+          </a:lstStyle>
+          <a:p>
+            <a:endParaRPr kumimoji="1" lang="ja-JP" altLang="en-US"/>
+          </a:p>
+        </p:txBody>
+      </p:sp>
+      <p:sp>
+        <p:nvSpPr>
+          <p:cNvPr id="3" name="日付プレースホルダー 2"/>
+          <p:cNvSpPr>
+            <a:spLocks noGrp="1"/>
+          </p:cNvSpPr>
+          <p:nvPr>
+            <p:ph type="dt" idx="1"/>
+          </p:nvPr>
+        </p:nvSpPr>
+        <p:spPr>
+          <a:xfrm>
+            <a:off x="3884613" y="0"/>
+            <a:ext cx="2971800" cy="458788"/>
+          </a:xfrm>
+          <a:prstGeom prst="rect">
+            <a:avLst/>
+          </a:prstGeom>
+        </p:spPr>
+        <p:txBody>
+          <a:bodyPr vert="horz" lIns="91440" tIns="45720" rIns="91440" bIns="45720" rtlCol="0"/>
+          <a:lstStyle>
+            <a:lvl1pPr algn="r">
+              <a:defRPr sz="1200"/>
+            </a:lvl1pPr>
+          </a:lstStyle>
+          <a:p>
+            <a:fld id="{74503653-7382-4EF5-850F-AEDF0B3BD356}" type="datetimeFigureOut">
+              <a:rPr kumimoji="1" lang="ja-JP" altLang="en-US" smtClean="0"/>
+              <a:t>2025/1/6</a:t>
+            </a:fld>
+            <a:endParaRPr kumimoji="1" lang="ja-JP" altLang="en-US"/>
+          </a:p>
+        </p:txBody>
+      </p:sp>
+      <p:sp>
+        <p:nvSpPr>
+          <p:cNvPr id="4" name="スライド イメージ プレースホルダー 3"/>
+          <p:cNvSpPr>
+            <a:spLocks noGrp="1" noRot="1" noChangeAspect="1"/>
+          </p:cNvSpPr>
+          <p:nvPr>
+            <p:ph type="sldImg" idx="2"/>
+          </p:nvPr>
+        </p:nvSpPr>
+        <p:spPr>
+          <a:xfrm>
+            <a:off x="685800" y="1143000"/>
+            <a:ext cx="5486400" cy="3086100"/>
+          </a:xfrm>
+          <a:prstGeom prst="rect">
+            <a:avLst/>
+          </a:prstGeom>
+          <a:noFill/>
+          <a:ln w="12700">
+            <a:solidFill>
+              <a:prstClr val="black"/>
+            </a:solidFill>
+          </a:ln>
+        </p:spPr>
+        <p:txBody>
+          <a:bodyPr vert="horz" lIns="91440" tIns="45720" rIns="91440" bIns="45720" rtlCol="0" anchor="ctr"/>
+          <a:lstStyle/>
+          <a:p>
+            <a:endParaRPr lang="ja-JP" altLang="en-US"/>
+          </a:p>
+        </p:txBody>
+      </p:sp>
+      <p:sp>
+        <p:nvSpPr>
+          <p:cNvPr id="5" name="ノート プレースホルダー 4"/>
+          <p:cNvSpPr>
+            <a:spLocks noGrp="1"/>
+          </p:cNvSpPr>
+          <p:nvPr>
+            <p:ph type="body" sz="quarter" idx="3"/>
+          </p:nvPr>
+        </p:nvSpPr>
+        <p:spPr>
+          <a:xfrm>
+            <a:off x="685800" y="4400550"/>
+            <a:ext cx="5486400" cy="3600450"/>
+          </a:xfrm>
+          <a:prstGeom prst="rect">
+            <a:avLst/>
+          </a:prstGeom>
+        </p:spPr>
+        <p:txBody>
+          <a:bodyPr vert="horz" lIns="91440" tIns="45720" rIns="91440" bIns="45720" rtlCol="0"/>
+          <a:lstStyle/>
+          <a:p>
+            <a:pPr lvl="0"/>
+            <a:r>
+              <a:rPr kumimoji="1" lang="ja-JP" altLang="en-US"/>
+              <a:t>マスター テキストの書式設定</a:t>
+            </a:r>
+          </a:p>
+          <a:p>
+            <a:pPr lvl="1"/>
+            <a:r>
+              <a:rPr kumimoji="1" lang="ja-JP" altLang="en-US"/>
+              <a:t>第 </a:t>
+            </a:r>
+            <a:r>
+              <a:rPr kumimoji="1" lang="en-US" altLang="ja-JP"/>
+              <a:t>2 </a:t>
+            </a:r>
+            <a:r>
+              <a:rPr kumimoji="1" lang="ja-JP" altLang="en-US"/>
+              <a:t>レベル</a:t>
+            </a:r>
+          </a:p>
+          <a:p>
+            <a:pPr lvl="2"/>
+            <a:r>
+              <a:rPr kumimoji="1" lang="ja-JP" altLang="en-US"/>
+              <a:t>第 </a:t>
+            </a:r>
+            <a:r>
+              <a:rPr kumimoji="1" lang="en-US" altLang="ja-JP"/>
+              <a:t>3 </a:t>
+            </a:r>
+            <a:r>
+              <a:rPr kumimoji="1" lang="ja-JP" altLang="en-US"/>
+              <a:t>レベル</a:t>
+            </a:r>
+          </a:p>
+          <a:p>
+            <a:pPr lvl="3"/>
+            <a:r>
+              <a:rPr kumimoji="1" lang="ja-JP" altLang="en-US"/>
+              <a:t>第 </a:t>
+            </a:r>
+            <a:r>
+              <a:rPr kumimoji="1" lang="en-US" altLang="ja-JP"/>
+              <a:t>4 </a:t>
+            </a:r>
+            <a:r>
+              <a:rPr kumimoji="1" lang="ja-JP" altLang="en-US"/>
+              <a:t>レベル</a:t>
+            </a:r>
+          </a:p>
+          <a:p>
+            <a:pPr lvl="4"/>
+            <a:r>
+              <a:rPr kumimoji="1" lang="ja-JP" altLang="en-US"/>
+              <a:t>第 </a:t>
+            </a:r>
+            <a:r>
+              <a:rPr kumimoji="1" lang="en-US" altLang="ja-JP"/>
+              <a:t>5 </a:t>
+            </a:r>
+            <a:r>
+              <a:rPr kumimoji="1" lang="ja-JP" altLang="en-US"/>
+              <a:t>レベル</a:t>
+            </a:r>
+          </a:p>
+        </p:txBody>
+      </p:sp>
+      <p:sp>
+        <p:nvSpPr>
+          <p:cNvPr id="6" name="フッター プレースホルダー 5"/>
+          <p:cNvSpPr>
+            <a:spLocks noGrp="1"/>
+          </p:cNvSpPr>
+          <p:nvPr>
+            <p:ph type="ftr" sz="quarter" idx="4"/>
+          </p:nvPr>
+        </p:nvSpPr>
+        <p:spPr>
+          <a:xfrm>
+            <a:off x="0" y="8685213"/>
+            <a:ext cx="2971800" cy="458787"/>
+          </a:xfrm>
+          <a:prstGeom prst="rect">
+            <a:avLst/>
+          </a:prstGeom>
+        </p:spPr>
+        <p:txBody>
+          <a:bodyPr vert="horz" lIns="91440" tIns="45720" rIns="91440" bIns="45720" rtlCol="0" anchor="b"/>
+          <a:lstStyle>
+            <a:lvl1pPr algn="l">
+              <a:defRPr sz="1200"/>
+            </a:lvl1pPr>
+          </a:lstStyle>
+          <a:p>
+            <a:endParaRPr kumimoji="1" lang="ja-JP" altLang="en-US"/>
+          </a:p>
+        </p:txBody>
+      </p:sp>
+      <p:sp>
+        <p:nvSpPr>
+          <p:cNvPr id="7" name="スライド番号プレースホルダー 6"/>
+          <p:cNvSpPr>
+            <a:spLocks noGrp="1"/>
+          </p:cNvSpPr>
+          <p:nvPr>
+            <p:ph type="sldNum" sz="quarter" idx="5"/>
+          </p:nvPr>
+        </p:nvSpPr>
+        <p:spPr>
+          <a:xfrm>
+            <a:off x="3884613" y="8685213"/>
+            <a:ext cx="2971800" cy="458787"/>
+          </a:xfrm>
+          <a:prstGeom prst="rect">
+            <a:avLst/>
+          </a:prstGeom>
+        </p:spPr>
+        <p:txBody>
+          <a:bodyPr vert="horz" lIns="91440" tIns="45720" rIns="91440" bIns="45720" rtlCol="0" anchor="b"/>
+          <a:lstStyle>
+            <a:lvl1pPr algn="r">
+              <a:defRPr sz="1200"/>
+            </a:lvl1pPr>
+          </a:lstStyle>
+          <a:p>
+            <a:fld id="{89012953-8B50-4F21-94CF-FFD51115489D}" type="slidenum">
+              <a:rPr kumimoji="1" lang="ja-JP" altLang="en-US" smtClean="0"/>
+              <a:t>‹#›</a:t>
+            </a:fld>
+            <a:endParaRPr kumimoji="1" lang="ja-JP" altLang="en-US"/>
+          </a:p>
+        </p:txBody>
+      </p:sp>
+    </p:spTree>
+    <p:extLst>
+      <p:ext uri="{BB962C8B-B14F-4D97-AF65-F5344CB8AC3E}">
+        <p14:creationId xmlns:p14="http://schemas.microsoft.com/office/powerpoint/2010/main" val="2190776565"/>
+      </p:ext>
+    </p:extLst>
+  </p:cSld>
+  <p:clrMap bg1="lt1" tx1="dk1" bg2="lt2" tx2="dk2" accent1="accent1" accent2="accent2" accent3="accent3" accent4="accent4" accent5="accent5" accent6="accent6" hlink="hlink" folHlink="folHlink"/>
+  <p:notesStyle>
+    <a:lvl1pPr marL="0" algn="l" defTabSz="914400" rtl="0" eaLnBrk="1" latinLnBrk="0" hangingPunct="1">
+      <a:defRPr kumimoji="1" sz="1200" kern="1200">
+        <a:solidFill>
+          <a:schemeClr val="tx1"/>
+        </a:solidFill>
+        <a:latin typeface="+mn-lt"/>
+        <a:ea typeface="+mn-ea"/>
+        <a:cs typeface="+mn-cs"/>
+      </a:defRPr>
+    </a:lvl1pPr>
+    <a:lvl2pPr marL="457200" algn="l" defTabSz="914400" rtl="0" eaLnBrk="1" latinLnBrk="0" hangingPunct="1">
+      <a:defRPr kumimoji="1" sz="1200" kern="1200">
+        <a:solidFill>
+          <a:schemeClr val="tx1"/>
+        </a:solidFill>
+        <a:latin typeface="+mn-lt"/>
+        <a:ea typeface="+mn-ea"/>
+        <a:cs typeface="+mn-cs"/>
+      </a:defRPr>
+    </a:lvl2pPr>
+    <a:lvl3pPr marL="914400" algn="l" defTabSz="914400" rtl="0" eaLnBrk="1" latinLnBrk="0" hangingPunct="1">
+      <a:defRPr kumimoji="1" sz="1200" kern="1200">
+        <a:solidFill>
+          <a:schemeClr val="tx1"/>
+        </a:solidFill>
+        <a:latin typeface="+mn-lt"/>
+        <a:ea typeface="+mn-ea"/>
+        <a:cs typeface="+mn-cs"/>
+      </a:defRPr>
+    </a:lvl3pPr>
+    <a:lvl4pPr marL="1371600" algn="l" defTabSz="914400" rtl="0" eaLnBrk="1" latinLnBrk="0" hangingPunct="1">
+      <a:defRPr kumimoji="1" sz="1200" kern="1200">
+        <a:solidFill>
+          <a:schemeClr val="tx1"/>
+        </a:solidFill>
+        <a:latin typeface="+mn-lt"/>
+        <a:ea typeface="+mn-ea"/>
+        <a:cs typeface="+mn-cs"/>
+      </a:defRPr>
+    </a:lvl4pPr>
+    <a:lvl5pPr marL="1828800" algn="l" defTabSz="914400" rtl="0" eaLnBrk="1" latinLnBrk="0" hangingPunct="1">
+      <a:defRPr kumimoji="1" sz="1200" kern="1200">
+        <a:solidFill>
+          <a:schemeClr val="tx1"/>
+        </a:solidFill>
+        <a:latin typeface="+mn-lt"/>
+        <a:ea typeface="+mn-ea"/>
+        <a:cs typeface="+mn-cs"/>
+      </a:defRPr>
+    </a:lvl5pPr>
+    <a:lvl6pPr marL="2286000" algn="l" defTabSz="914400" rtl="0" eaLnBrk="1" latinLnBrk="0" hangingPunct="1">
+      <a:defRPr kumimoji="1" sz="1200" kern="1200">
+        <a:solidFill>
+          <a:schemeClr val="tx1"/>
+        </a:solidFill>
+        <a:latin typeface="+mn-lt"/>
+        <a:ea typeface="+mn-ea"/>
+        <a:cs typeface="+mn-cs"/>
+      </a:defRPr>
+    </a:lvl6pPr>
+    <a:lvl7pPr marL="2743200" algn="l" defTabSz="914400" rtl="0" eaLnBrk="1" latinLnBrk="0" hangingPunct="1">
+      <a:defRPr kumimoji="1" sz="1200" kern="1200">
+        <a:solidFill>
+          <a:schemeClr val="tx1"/>
+        </a:solidFill>
+        <a:latin typeface="+mn-lt"/>
+        <a:ea typeface="+mn-ea"/>
+        <a:cs typeface="+mn-cs"/>
+      </a:defRPr>
+    </a:lvl7pPr>
+    <a:lvl8pPr marL="3200400" algn="l" defTabSz="914400" rtl="0" eaLnBrk="1" latinLnBrk="0" hangingPunct="1">
+      <a:defRPr kumimoji="1" sz="1200" kern="1200">
+        <a:solidFill>
+          <a:schemeClr val="tx1"/>
+        </a:solidFill>
+        <a:latin typeface="+mn-lt"/>
+        <a:ea typeface="+mn-ea"/>
+        <a:cs typeface="+mn-cs"/>
+      </a:defRPr>
+    </a:lvl8pPr>
+    <a:lvl9pPr marL="3657600" algn="l" defTabSz="914400" rtl="0" eaLnBrk="1" latinLnBrk="0" hangingPunct="1">
+      <a:defRPr kumimoji="1" sz="1200" kern="1200">
+        <a:solidFill>
+          <a:schemeClr val="tx1"/>
+        </a:solidFill>
+        <a:latin typeface="+mn-lt"/>
+        <a:ea typeface="+mn-ea"/>
+        <a:cs typeface="+mn-cs"/>
+      </a:defRPr>
+    </a:lvl9pPr>
+  </p:notesStyle>
+</p:notesMaster>
+</file>
+
+<file path=ppt/notesSlides/notesSlide1.xml><?xml version="1.0" encoding="utf-8"?>
+<p:notes xmlns:a="http://schemas.openxmlformats.org/drawingml/2006/main" xmlns:r="http://schemas.openxmlformats.org/officeDocument/2006/relationships" xmlns:p="http://schemas.openxmlformats.org/presentationml/2006/main">
+  <p:cSld>
+    <p:spTree>
+      <p:nvGrpSpPr>
+        <p:cNvPr id="1" name=""/>
+        <p:cNvGrpSpPr/>
+        <p:nvPr/>
+      </p:nvGrpSpPr>
+      <p:grpSpPr>
+        <a:xfrm>
+          <a:off x="0" y="0"/>
+          <a:ext cx="0" cy="0"/>
+          <a:chOff x="0" y="0"/>
+          <a:chExt cx="0" cy="0"/>
+        </a:xfrm>
+      </p:grpSpPr>
+      <p:sp>
+        <p:nvSpPr>
+          <p:cNvPr id="2" name="スライド イメージ プレースホルダー 1"/>
+          <p:cNvSpPr>
+            <a:spLocks noGrp="1" noRot="1" noChangeAspect="1"/>
+          </p:cNvSpPr>
+          <p:nvPr>
+            <p:ph type="sldImg"/>
+          </p:nvPr>
+        </p:nvSpPr>
+        <p:spPr/>
+      </p:sp>
+      <p:sp>
+        <p:nvSpPr>
+          <p:cNvPr id="3" name="ノート プレースホルダー 2"/>
+          <p:cNvSpPr>
+            <a:spLocks noGrp="1"/>
+          </p:cNvSpPr>
+          <p:nvPr>
+            <p:ph type="body" idx="1"/>
+          </p:nvPr>
+        </p:nvSpPr>
+        <p:spPr/>
+        <p:txBody>
+          <a:bodyPr/>
+          <a:lstStyle/>
+          <a:p>
+            <a:endParaRPr kumimoji="1" lang="ja-JP" altLang="en-US" dirty="0"/>
+          </a:p>
+        </p:txBody>
+      </p:sp>
+      <p:sp>
+        <p:nvSpPr>
+          <p:cNvPr id="4" name="スライド番号プレースホルダー 3"/>
+          <p:cNvSpPr>
+            <a:spLocks noGrp="1"/>
+          </p:cNvSpPr>
+          <p:nvPr>
+            <p:ph type="sldNum" sz="quarter" idx="5"/>
+          </p:nvPr>
+        </p:nvSpPr>
+        <p:spPr/>
+        <p:txBody>
+          <a:bodyPr/>
+          <a:lstStyle/>
+          <a:p>
+            <a:fld id="{89012953-8B50-4F21-94CF-FFD51115489D}" type="slidenum">
+              <a:rPr kumimoji="1" lang="ja-JP" altLang="en-US" smtClean="0"/>
+              <a:t>4</a:t>
+            </a:fld>
+            <a:endParaRPr kumimoji="1" lang="ja-JP" altLang="en-US"/>
+          </a:p>
+        </p:txBody>
+      </p:sp>
+    </p:spTree>
+    <p:extLst>
+      <p:ext uri="{BB962C8B-B14F-4D97-AF65-F5344CB8AC3E}">
+        <p14:creationId xmlns:p14="http://schemas.microsoft.com/office/powerpoint/2010/main" val="1487822316"/>
+      </p:ext>
+    </p:extLst>
+  </p:cSld>
+  <p:clrMapOvr>
+    <a:masterClrMapping/>
+  </p:clrMapOvr>
+</p:notes>
+</file>
+
 <file path=ppt/slideLayouts/slideLayout1.xml><?xml version="1.0" encoding="utf-8"?>
 <p:sldLayout xmlns:a="http://schemas.openxmlformats.org/drawingml/2006/main" xmlns:r="http://schemas.openxmlformats.org/officeDocument/2006/relationships" xmlns:p="http://schemas.openxmlformats.org/presentationml/2006/main" type="title" preserve="1">
   <p:cSld name="タイトル スライド">
@@ -496,7 +965,7 @@
           <a:p>
             <a:fld id="{E3020441-CB21-445C-817D-199401EC5197}" type="datetimeFigureOut">
               <a:rPr kumimoji="1" lang="ja-JP" altLang="en-US" smtClean="0"/>
-              <a:t>2024/12/9</a:t>
+              <a:t>2025/1/6</a:t>
             </a:fld>
             <a:endParaRPr kumimoji="1" lang="ja-JP" altLang="en-US"/>
           </a:p>
@@ -698,7 +1167,7 @@
           <a:p>
             <a:fld id="{E3020441-CB21-445C-817D-199401EC5197}" type="datetimeFigureOut">
               <a:rPr kumimoji="1" lang="ja-JP" altLang="en-US" smtClean="0"/>
-              <a:t>2024/12/9</a:t>
+              <a:t>2025/1/6</a:t>
             </a:fld>
             <a:endParaRPr kumimoji="1" lang="ja-JP" altLang="en-US"/>
           </a:p>
@@ -910,7 +1379,7 @@
           <a:p>
             <a:fld id="{E3020441-CB21-445C-817D-199401EC5197}" type="datetimeFigureOut">
               <a:rPr kumimoji="1" lang="ja-JP" altLang="en-US" smtClean="0"/>
-              <a:t>2024/12/9</a:t>
+              <a:t>2025/1/6</a:t>
             </a:fld>
             <a:endParaRPr kumimoji="1" lang="ja-JP" altLang="en-US"/>
           </a:p>
@@ -1112,7 +1581,7 @@
           <a:p>
             <a:fld id="{E3020441-CB21-445C-817D-199401EC5197}" type="datetimeFigureOut">
               <a:rPr kumimoji="1" lang="ja-JP" altLang="en-US" smtClean="0"/>
-              <a:t>2024/12/9</a:t>
+              <a:t>2025/1/6</a:t>
             </a:fld>
             <a:endParaRPr kumimoji="1" lang="ja-JP" altLang="en-US"/>
           </a:p>
@@ -1363,7 +1832,7 @@
           <a:p>
             <a:fld id="{E3020441-CB21-445C-817D-199401EC5197}" type="datetimeFigureOut">
               <a:rPr kumimoji="1" lang="ja-JP" altLang="en-US" smtClean="0"/>
-              <a:t>2024/12/9</a:t>
+              <a:t>2025/1/6</a:t>
             </a:fld>
             <a:endParaRPr kumimoji="1" lang="ja-JP" altLang="en-US"/>
           </a:p>
@@ -1659,7 +2128,7 @@
           <a:p>
             <a:fld id="{E3020441-CB21-445C-817D-199401EC5197}" type="datetimeFigureOut">
               <a:rPr kumimoji="1" lang="ja-JP" altLang="en-US" smtClean="0"/>
-              <a:t>2024/12/9</a:t>
+              <a:t>2025/1/6</a:t>
             </a:fld>
             <a:endParaRPr kumimoji="1" lang="ja-JP" altLang="en-US"/>
           </a:p>
@@ -2070,7 +2539,7 @@
           <a:p>
             <a:fld id="{E3020441-CB21-445C-817D-199401EC5197}" type="datetimeFigureOut">
               <a:rPr kumimoji="1" lang="ja-JP" altLang="en-US" smtClean="0"/>
-              <a:t>2024/12/9</a:t>
+              <a:t>2025/1/6</a:t>
             </a:fld>
             <a:endParaRPr kumimoji="1" lang="ja-JP" altLang="en-US"/>
           </a:p>
@@ -2188,7 +2657,7 @@
           <a:p>
             <a:fld id="{E3020441-CB21-445C-817D-199401EC5197}" type="datetimeFigureOut">
               <a:rPr kumimoji="1" lang="ja-JP" altLang="en-US" smtClean="0"/>
-              <a:t>2024/12/9</a:t>
+              <a:t>2025/1/6</a:t>
             </a:fld>
             <a:endParaRPr kumimoji="1" lang="ja-JP" altLang="en-US"/>
           </a:p>
@@ -2306,7 +2775,7 @@
           <a:p>
             <a:fld id="{E3020441-CB21-445C-817D-199401EC5197}" type="datetimeFigureOut">
               <a:rPr kumimoji="1" lang="ja-JP" altLang="en-US" smtClean="0"/>
-              <a:t>2024/12/9</a:t>
+              <a:t>2025/1/6</a:t>
             </a:fld>
             <a:endParaRPr kumimoji="1" lang="ja-JP" altLang="en-US"/>
           </a:p>
@@ -2622,7 +3091,7 @@
           <a:p>
             <a:fld id="{E3020441-CB21-445C-817D-199401EC5197}" type="datetimeFigureOut">
               <a:rPr kumimoji="1" lang="ja-JP" altLang="en-US" smtClean="0"/>
-              <a:t>2024/12/9</a:t>
+              <a:t>2025/1/6</a:t>
             </a:fld>
             <a:endParaRPr kumimoji="1" lang="ja-JP" altLang="en-US"/>
           </a:p>
@@ -2886,7 +3355,7 @@
           <a:p>
             <a:fld id="{E3020441-CB21-445C-817D-199401EC5197}" type="datetimeFigureOut">
               <a:rPr kumimoji="1" lang="ja-JP" altLang="en-US" smtClean="0"/>
-              <a:t>2024/12/9</a:t>
+              <a:t>2025/1/6</a:t>
             </a:fld>
             <a:endParaRPr kumimoji="1" lang="ja-JP" altLang="en-US"/>
           </a:p>
@@ -3132,7 +3601,7 @@
           <a:p>
             <a:fld id="{E3020441-CB21-445C-817D-199401EC5197}" type="datetimeFigureOut">
               <a:rPr kumimoji="1" lang="ja-JP" altLang="en-US" smtClean="0"/>
-              <a:t>2024/12/9</a:t>
+              <a:t>2025/1/6</a:t>
             </a:fld>
             <a:endParaRPr kumimoji="1" lang="ja-JP" altLang="en-US"/>
           </a:p>
@@ -5215,6 +5684,365 @@
           </a:fontRef>
         </p:style>
       </p:cxnSp>
+    </p:spTree>
+    <p:extLst>
+      <p:ext uri="{BB962C8B-B14F-4D97-AF65-F5344CB8AC3E}">
+        <p14:creationId xmlns:p14="http://schemas.microsoft.com/office/powerpoint/2010/main" val="2192949783"/>
+      </p:ext>
+    </p:extLst>
+  </p:cSld>
+  <p:clrMapOvr>
+    <a:masterClrMapping/>
+  </p:clrMapOvr>
+</p:sld>
+</file>
+
+<file path=ppt/slides/slide11.xml><?xml version="1.0" encoding="utf-8"?>
+<p:sld xmlns:a="http://schemas.openxmlformats.org/drawingml/2006/main" xmlns:r="http://schemas.openxmlformats.org/officeDocument/2006/relationships" xmlns:p="http://schemas.openxmlformats.org/presentationml/2006/main">
+  <p:cSld>
+    <p:spTree>
+      <p:nvGrpSpPr>
+        <p:cNvPr id="1" name=""/>
+        <p:cNvGrpSpPr/>
+        <p:nvPr/>
+      </p:nvGrpSpPr>
+      <p:grpSpPr>
+        <a:xfrm>
+          <a:off x="0" y="0"/>
+          <a:ext cx="0" cy="0"/>
+          <a:chOff x="0" y="0"/>
+          <a:chExt cx="0" cy="0"/>
+        </a:xfrm>
+      </p:grpSpPr>
+      <p:sp>
+        <p:nvSpPr>
+          <p:cNvPr id="4" name="正方形/長方形 3">
+            <a:extLst>
+              <a:ext uri="{FF2B5EF4-FFF2-40B4-BE49-F238E27FC236}">
+                <a16:creationId xmlns:a16="http://schemas.microsoft.com/office/drawing/2014/main" id="{D1E12261-89B1-F2A3-34A0-BBE7B31A48CA}"/>
+              </a:ext>
+            </a:extLst>
+          </p:cNvPr>
+          <p:cNvSpPr/>
+          <p:nvPr/>
+        </p:nvSpPr>
+        <p:spPr>
+          <a:xfrm>
+            <a:off x="6934200" y="2916936"/>
+            <a:ext cx="2476500" cy="1024128"/>
+          </a:xfrm>
+          <a:prstGeom prst="rect">
+            <a:avLst/>
+          </a:prstGeom>
+        </p:spPr>
+        <p:style>
+          <a:lnRef idx="2">
+            <a:schemeClr val="accent3">
+              <a:shade val="15000"/>
+            </a:schemeClr>
+          </a:lnRef>
+          <a:fillRef idx="1">
+            <a:schemeClr val="accent3"/>
+          </a:fillRef>
+          <a:effectRef idx="0">
+            <a:schemeClr val="accent3"/>
+          </a:effectRef>
+          <a:fontRef idx="minor">
+            <a:schemeClr val="lt1"/>
+          </a:fontRef>
+        </p:style>
+        <p:txBody>
+          <a:bodyPr rtlCol="0" anchor="ctr"/>
+          <a:lstStyle/>
+          <a:p>
+            <a:pPr algn="ctr"/>
+            <a:r>
+              <a:rPr kumimoji="1" lang="ja-JP" altLang="en-US" dirty="0"/>
+              <a:t>目的変数：</a:t>
+            </a:r>
+            <a:endParaRPr kumimoji="1" lang="en-US" altLang="ja-JP" dirty="0"/>
+          </a:p>
+          <a:p>
+            <a:pPr algn="ctr"/>
+            <a:r>
+              <a:rPr kumimoji="1" lang="ja-JP" altLang="en-US" dirty="0"/>
+              <a:t>収穫量</a:t>
+            </a:r>
+            <a:endParaRPr kumimoji="1" lang="en-US" altLang="ja-JP" dirty="0"/>
+          </a:p>
+          <a:p>
+            <a:pPr algn="ctr"/>
+            <a:r>
+              <a:rPr lang="ja-JP" altLang="en-US" dirty="0"/>
+              <a:t>（連続変数）</a:t>
+            </a:r>
+            <a:endParaRPr kumimoji="1" lang="ja-JP" altLang="en-US" dirty="0"/>
+          </a:p>
+        </p:txBody>
+      </p:sp>
+      <p:sp>
+        <p:nvSpPr>
+          <p:cNvPr id="5" name="正方形/長方形 4">
+            <a:extLst>
+              <a:ext uri="{FF2B5EF4-FFF2-40B4-BE49-F238E27FC236}">
+                <a16:creationId xmlns:a16="http://schemas.microsoft.com/office/drawing/2014/main" id="{AC2650BC-2D2B-5AF3-86DA-8F1504AF3245}"/>
+              </a:ext>
+            </a:extLst>
+          </p:cNvPr>
+          <p:cNvSpPr/>
+          <p:nvPr/>
+        </p:nvSpPr>
+        <p:spPr>
+          <a:xfrm>
+            <a:off x="2514600" y="1695449"/>
+            <a:ext cx="2371725" cy="1485900"/>
+          </a:xfrm>
+          <a:prstGeom prst="rect">
+            <a:avLst/>
+          </a:prstGeom>
+        </p:spPr>
+        <p:style>
+          <a:lnRef idx="2">
+            <a:schemeClr val="accent3">
+              <a:shade val="15000"/>
+            </a:schemeClr>
+          </a:lnRef>
+          <a:fillRef idx="1">
+            <a:schemeClr val="accent3"/>
+          </a:fillRef>
+          <a:effectRef idx="0">
+            <a:schemeClr val="accent3"/>
+          </a:effectRef>
+          <a:fontRef idx="minor">
+            <a:schemeClr val="lt1"/>
+          </a:fontRef>
+        </p:style>
+        <p:txBody>
+          <a:bodyPr rtlCol="0" anchor="ctr"/>
+          <a:lstStyle/>
+          <a:p>
+            <a:pPr algn="ctr"/>
+            <a:r>
+              <a:rPr kumimoji="1" lang="ja-JP" altLang="en-US" dirty="0"/>
+              <a:t>説明変数</a:t>
+            </a:r>
+            <a:r>
+              <a:rPr kumimoji="1" lang="en-US" altLang="ja-JP" dirty="0"/>
+              <a:t>1</a:t>
+            </a:r>
+            <a:r>
+              <a:rPr kumimoji="1" lang="ja-JP" altLang="en-US" dirty="0"/>
+              <a:t>：</a:t>
+            </a:r>
+            <a:br>
+              <a:rPr kumimoji="1" lang="en-US" altLang="ja-JP" dirty="0"/>
+            </a:br>
+            <a:r>
+              <a:rPr kumimoji="1" lang="ja-JP" altLang="en-US" dirty="0"/>
+              <a:t>小麦品種</a:t>
+            </a:r>
+            <a:endParaRPr kumimoji="1" lang="en-US" altLang="ja-JP" dirty="0"/>
+          </a:p>
+          <a:p>
+            <a:pPr algn="ctr"/>
+            <a:endParaRPr kumimoji="1" lang="en-US" altLang="ja-JP" sz="500" dirty="0"/>
+          </a:p>
+          <a:p>
+            <a:pPr algn="ctr"/>
+            <a:r>
+              <a:rPr kumimoji="1" lang="ja-JP" altLang="en-US" dirty="0"/>
+              <a:t>水準：</a:t>
+            </a:r>
+            <a:r>
+              <a:rPr kumimoji="1" lang="en-US" altLang="ja-JP" dirty="0"/>
+              <a:t>A</a:t>
+            </a:r>
+            <a:r>
+              <a:rPr lang="en-US" altLang="ja-JP" dirty="0"/>
+              <a:t>,B</a:t>
+            </a:r>
+          </a:p>
+        </p:txBody>
+      </p:sp>
+      <p:cxnSp>
+        <p:nvCxnSpPr>
+          <p:cNvPr id="6" name="直線矢印コネクタ 5">
+            <a:extLst>
+              <a:ext uri="{FF2B5EF4-FFF2-40B4-BE49-F238E27FC236}">
+                <a16:creationId xmlns:a16="http://schemas.microsoft.com/office/drawing/2014/main" id="{78716ED2-DF3B-D92E-7BD8-3AA09D91A477}"/>
+              </a:ext>
+            </a:extLst>
+          </p:cNvPr>
+          <p:cNvCxnSpPr>
+            <a:cxnSpLocks/>
+            <a:stCxn id="5" idx="3"/>
+            <a:endCxn id="4" idx="1"/>
+          </p:cNvCxnSpPr>
+          <p:nvPr/>
+        </p:nvCxnSpPr>
+        <p:spPr>
+          <a:xfrm>
+            <a:off x="4886325" y="2438399"/>
+            <a:ext cx="2047875" cy="990601"/>
+          </a:xfrm>
+          <a:prstGeom prst="straightConnector1">
+            <a:avLst/>
+          </a:prstGeom>
+          <a:ln>
+            <a:tailEnd type="triangle"/>
+          </a:ln>
+        </p:spPr>
+        <p:style>
+          <a:lnRef idx="2">
+            <a:schemeClr val="accent3">
+              <a:shade val="15000"/>
+            </a:schemeClr>
+          </a:lnRef>
+          <a:fillRef idx="1">
+            <a:schemeClr val="accent3"/>
+          </a:fillRef>
+          <a:effectRef idx="0">
+            <a:schemeClr val="accent3"/>
+          </a:effectRef>
+          <a:fontRef idx="minor">
+            <a:schemeClr val="lt1"/>
+          </a:fontRef>
+        </p:style>
+      </p:cxnSp>
+      <p:sp>
+        <p:nvSpPr>
+          <p:cNvPr id="9" name="正方形/長方形 8">
+            <a:extLst>
+              <a:ext uri="{FF2B5EF4-FFF2-40B4-BE49-F238E27FC236}">
+                <a16:creationId xmlns:a16="http://schemas.microsoft.com/office/drawing/2014/main" id="{CBC8A939-E168-8640-4151-6E3418F38040}"/>
+              </a:ext>
+            </a:extLst>
+          </p:cNvPr>
+          <p:cNvSpPr/>
+          <p:nvPr/>
+        </p:nvSpPr>
+        <p:spPr>
+          <a:xfrm>
+            <a:off x="2514600" y="3724276"/>
+            <a:ext cx="2371725" cy="1485900"/>
+          </a:xfrm>
+          <a:prstGeom prst="rect">
+            <a:avLst/>
+          </a:prstGeom>
+        </p:spPr>
+        <p:style>
+          <a:lnRef idx="2">
+            <a:schemeClr val="accent3">
+              <a:shade val="50000"/>
+            </a:schemeClr>
+          </a:lnRef>
+          <a:fillRef idx="1">
+            <a:schemeClr val="accent3"/>
+          </a:fillRef>
+          <a:effectRef idx="0">
+            <a:schemeClr val="accent3"/>
+          </a:effectRef>
+          <a:fontRef idx="minor">
+            <a:schemeClr val="lt1"/>
+          </a:fontRef>
+        </p:style>
+        <p:txBody>
+          <a:bodyPr rtlCol="0" anchor="ctr"/>
+          <a:lstStyle/>
+          <a:p>
+            <a:pPr algn="ctr"/>
+            <a:r>
+              <a:rPr kumimoji="1" lang="ja-JP" altLang="en-US" dirty="0"/>
+              <a:t>説明変数</a:t>
+            </a:r>
+            <a:r>
+              <a:rPr kumimoji="1" lang="en-US" altLang="ja-JP" dirty="0"/>
+              <a:t>2</a:t>
+            </a:r>
+            <a:r>
+              <a:rPr kumimoji="1" lang="ja-JP" altLang="en-US" dirty="0"/>
+              <a:t>：</a:t>
+            </a:r>
+            <a:br>
+              <a:rPr kumimoji="1" lang="en-US" altLang="ja-JP" dirty="0"/>
+            </a:br>
+            <a:r>
+              <a:rPr kumimoji="1" lang="ja-JP" altLang="en-US" dirty="0"/>
+              <a:t>肥料</a:t>
+            </a:r>
+            <a:endParaRPr kumimoji="1" lang="en-US" altLang="ja-JP" dirty="0"/>
+          </a:p>
+          <a:p>
+            <a:pPr algn="ctr"/>
+            <a:endParaRPr kumimoji="1" lang="en-US" altLang="ja-JP" sz="900" dirty="0"/>
+          </a:p>
+          <a:p>
+            <a:pPr algn="ctr"/>
+            <a:r>
+              <a:rPr kumimoji="1" lang="ja-JP" altLang="en-US" dirty="0"/>
+              <a:t>水準：</a:t>
+            </a:r>
+            <a:r>
+              <a:rPr kumimoji="1" lang="en-US" altLang="ja-JP" dirty="0"/>
+              <a:t>X,</a:t>
+            </a:r>
+            <a:r>
+              <a:rPr kumimoji="1" lang="ja-JP" altLang="en-US" dirty="0"/>
+              <a:t> </a:t>
+            </a:r>
+            <a:r>
+              <a:rPr kumimoji="1" lang="en-US" altLang="ja-JP" dirty="0"/>
+              <a:t>Y</a:t>
+            </a:r>
+            <a:endParaRPr lang="en-US" altLang="ja-JP" dirty="0"/>
+          </a:p>
+        </p:txBody>
+      </p:sp>
+      <p:cxnSp>
+        <p:nvCxnSpPr>
+          <p:cNvPr id="10" name="直線矢印コネクタ 9">
+            <a:extLst>
+              <a:ext uri="{FF2B5EF4-FFF2-40B4-BE49-F238E27FC236}">
+                <a16:creationId xmlns:a16="http://schemas.microsoft.com/office/drawing/2014/main" id="{3692A9EC-9D53-BBF8-6010-1B3560DD9FC6}"/>
+              </a:ext>
+            </a:extLst>
+          </p:cNvPr>
+          <p:cNvCxnSpPr>
+            <a:cxnSpLocks/>
+            <a:stCxn id="9" idx="3"/>
+            <a:endCxn id="4" idx="1"/>
+          </p:cNvCxnSpPr>
+          <p:nvPr/>
+        </p:nvCxnSpPr>
+        <p:spPr>
+          <a:xfrm flipV="1">
+            <a:off x="4886325" y="3429000"/>
+            <a:ext cx="2047875" cy="1038226"/>
+          </a:xfrm>
+          <a:prstGeom prst="straightConnector1">
+            <a:avLst/>
+          </a:prstGeom>
+          <a:ln>
+            <a:tailEnd type="triangle"/>
+          </a:ln>
+        </p:spPr>
+        <p:style>
+          <a:lnRef idx="2">
+            <a:schemeClr val="accent3">
+              <a:shade val="15000"/>
+            </a:schemeClr>
+          </a:lnRef>
+          <a:fillRef idx="1">
+            <a:schemeClr val="accent3"/>
+          </a:fillRef>
+          <a:effectRef idx="0">
+            <a:schemeClr val="accent3"/>
+          </a:effectRef>
+          <a:fontRef idx="minor">
+            <a:schemeClr val="lt1"/>
+          </a:fontRef>
+        </p:style>
+      </p:cxnSp>
       <p:sp>
         <p:nvSpPr>
           <p:cNvPr id="2" name="楕円 1"/>
@@ -5467,7 +6295,7 @@
 </p:sld>
 </file>
 
-<file path=ppt/slides/slide11.xml><?xml version="1.0" encoding="utf-8"?>
+<file path=ppt/slides/slide12.xml><?xml version="1.0" encoding="utf-8"?>
 <p:sld xmlns:a="http://schemas.openxmlformats.org/drawingml/2006/main" xmlns:r="http://schemas.openxmlformats.org/officeDocument/2006/relationships" xmlns:p="http://schemas.openxmlformats.org/presentationml/2006/main">
   <p:cSld>
     <p:spTree>
@@ -5965,7 +6793,7 @@
 </p:sld>
 </file>
 
-<file path=ppt/slides/slide12.xml><?xml version="1.0" encoding="utf-8"?>
+<file path=ppt/slides/slide13.xml><?xml version="1.0" encoding="utf-8"?>
 <p:sld xmlns:a="http://schemas.openxmlformats.org/drawingml/2006/main" xmlns:r="http://schemas.openxmlformats.org/officeDocument/2006/relationships" xmlns:p="http://schemas.openxmlformats.org/presentationml/2006/main">
   <p:cSld>
     <p:spTree>
@@ -6445,7 +7273,7 @@
 </p:sld>
 </file>
 
-<file path=ppt/slides/slide13.xml><?xml version="1.0" encoding="utf-8"?>
+<file path=ppt/slides/slide14.xml><?xml version="1.0" encoding="utf-8"?>
 <p:sld xmlns:a="http://schemas.openxmlformats.org/drawingml/2006/main" xmlns:r="http://schemas.openxmlformats.org/officeDocument/2006/relationships" xmlns:p="http://schemas.openxmlformats.org/presentationml/2006/main">
   <p:cSld>
     <p:spTree>
@@ -7124,7 +7952,7 @@
 </p:sld>
 </file>
 
-<file path=ppt/slides/slide14.xml><?xml version="1.0" encoding="utf-8"?>
+<file path=ppt/slides/slide15.xml><?xml version="1.0" encoding="utf-8"?>
 <p:sld xmlns:a="http://schemas.openxmlformats.org/drawingml/2006/main" xmlns:r="http://schemas.openxmlformats.org/officeDocument/2006/relationships" xmlns:p="http://schemas.openxmlformats.org/presentationml/2006/main">
   <p:cSld>
     <p:spTree>
@@ -7204,104 +8032,6 @@
     <p:extLst>
       <p:ext uri="{BB962C8B-B14F-4D97-AF65-F5344CB8AC3E}">
         <p14:creationId xmlns:p14="http://schemas.microsoft.com/office/powerpoint/2010/main" val="3106651656"/>
-      </p:ext>
-    </p:extLst>
-  </p:cSld>
-  <p:clrMapOvr>
-    <a:masterClrMapping/>
-  </p:clrMapOvr>
-</p:sld>
-</file>
-
-<file path=ppt/slides/slide15.xml><?xml version="1.0" encoding="utf-8"?>
-<p:sld xmlns:a="http://schemas.openxmlformats.org/drawingml/2006/main" xmlns:r="http://schemas.openxmlformats.org/officeDocument/2006/relationships" xmlns:p="http://schemas.openxmlformats.org/presentationml/2006/main">
-  <p:cSld>
-    <p:spTree>
-      <p:nvGrpSpPr>
-        <p:cNvPr id="1" name=""/>
-        <p:cNvGrpSpPr/>
-        <p:nvPr/>
-      </p:nvGrpSpPr>
-      <p:grpSpPr>
-        <a:xfrm>
-          <a:off x="0" y="0"/>
-          <a:ext cx="0" cy="0"/>
-          <a:chOff x="0" y="0"/>
-          <a:chExt cx="0" cy="0"/>
-        </a:xfrm>
-      </p:grpSpPr>
-      <p:sp>
-        <p:nvSpPr>
-          <p:cNvPr id="2" name="タイトル 1">
-            <a:extLst>
-              <a:ext uri="{FF2B5EF4-FFF2-40B4-BE49-F238E27FC236}">
-                <a16:creationId xmlns:a16="http://schemas.microsoft.com/office/drawing/2014/main" id="{E90A3F46-1EED-5E3A-163E-0B3B7CB9F129}"/>
-              </a:ext>
-            </a:extLst>
-          </p:cNvPr>
-          <p:cNvSpPr>
-            <a:spLocks noGrp="1"/>
-          </p:cNvSpPr>
-          <p:nvPr>
-            <p:ph type="title"/>
-          </p:nvPr>
-        </p:nvSpPr>
-        <p:spPr/>
-        <p:txBody>
-          <a:bodyPr/>
-          <a:lstStyle/>
-          <a:p>
-            <a:r>
-              <a:rPr kumimoji="1" lang="ja-JP" altLang="en-US" dirty="0"/>
-              <a:t>相関</a:t>
-            </a:r>
-            <a:r>
-              <a:rPr kumimoji="1" lang="en-US" altLang="ja-JP" dirty="0"/>
-              <a:t>0.200</a:t>
-            </a:r>
-            <a:br>
-              <a:rPr kumimoji="1" lang="en-US" altLang="ja-JP" dirty="0"/>
-            </a:br>
-            <a:endParaRPr kumimoji="1" lang="ja-JP" altLang="en-US" dirty="0"/>
-          </a:p>
-        </p:txBody>
-      </p:sp>
-      <p:pic>
-        <p:nvPicPr>
-          <p:cNvPr id="4" name="コンテンツ プレースホルダー 3">
-            <a:extLst>
-              <a:ext uri="{FF2B5EF4-FFF2-40B4-BE49-F238E27FC236}">
-                <a16:creationId xmlns:a16="http://schemas.microsoft.com/office/drawing/2014/main" id="{3904CA60-7C01-0FD0-E53C-5A529A43F63D}"/>
-              </a:ext>
-            </a:extLst>
-          </p:cNvPr>
-          <p:cNvPicPr>
-            <a:picLocks noGrp="1" noChangeAspect="1"/>
-          </p:cNvPicPr>
-          <p:nvPr>
-            <p:ph idx="1"/>
-          </p:nvPr>
-        </p:nvPicPr>
-        <p:blipFill>
-          <a:blip r:embed="rId2"/>
-          <a:stretch>
-            <a:fillRect/>
-          </a:stretch>
-        </p:blipFill>
-        <p:spPr>
-          <a:xfrm>
-            <a:off x="3657642" y="2132835"/>
-            <a:ext cx="4889416" cy="3743268"/>
-          </a:xfrm>
-          <a:prstGeom prst="rect">
-            <a:avLst/>
-          </a:prstGeom>
-        </p:spPr>
-      </p:pic>
-    </p:spTree>
-    <p:extLst>
-      <p:ext uri="{BB962C8B-B14F-4D97-AF65-F5344CB8AC3E}">
-        <p14:creationId xmlns:p14="http://schemas.microsoft.com/office/powerpoint/2010/main" val="1624990458"/>
       </p:ext>
     </p:extLst>
   </p:cSld>
@@ -7333,7 +8063,7 @@
           <p:cNvPr id="2" name="タイトル 1">
             <a:extLst>
               <a:ext uri="{FF2B5EF4-FFF2-40B4-BE49-F238E27FC236}">
-                <a16:creationId xmlns:a16="http://schemas.microsoft.com/office/drawing/2014/main" id="{424D4A5E-223E-8982-C14E-80509BE1BD07}"/>
+                <a16:creationId xmlns:a16="http://schemas.microsoft.com/office/drawing/2014/main" id="{E90A3F46-1EED-5E3A-163E-0B3B7CB9F129}"/>
               </a:ext>
             </a:extLst>
           </p:cNvPr>
@@ -7355,18 +8085,21 @@
             </a:r>
             <a:r>
               <a:rPr kumimoji="1" lang="en-US" altLang="ja-JP" dirty="0"/>
-              <a:t>0.441</a:t>
-            </a:r>
+              <a:t>0.200</a:t>
+            </a:r>
+            <a:br>
+              <a:rPr kumimoji="1" lang="en-US" altLang="ja-JP" dirty="0"/>
+            </a:br>
             <a:endParaRPr kumimoji="1" lang="ja-JP" altLang="en-US" dirty="0"/>
           </a:p>
         </p:txBody>
       </p:sp>
       <p:pic>
         <p:nvPicPr>
-          <p:cNvPr id="5" name="コンテンツ プレースホルダー 4">
+          <p:cNvPr id="4" name="コンテンツ プレースホルダー 3">
             <a:extLst>
               <a:ext uri="{FF2B5EF4-FFF2-40B4-BE49-F238E27FC236}">
-                <a16:creationId xmlns:a16="http://schemas.microsoft.com/office/drawing/2014/main" id="{F75D3519-7909-7EAE-2E9B-73460C4447BC}"/>
+                <a16:creationId xmlns:a16="http://schemas.microsoft.com/office/drawing/2014/main" id="{3904CA60-7C01-0FD0-E53C-5A529A43F63D}"/>
               </a:ext>
             </a:extLst>
           </p:cNvPr>
@@ -7396,7 +8129,7 @@
     </p:spTree>
     <p:extLst>
       <p:ext uri="{BB962C8B-B14F-4D97-AF65-F5344CB8AC3E}">
-        <p14:creationId xmlns:p14="http://schemas.microsoft.com/office/powerpoint/2010/main" val="678897031"/>
+        <p14:creationId xmlns:p14="http://schemas.microsoft.com/office/powerpoint/2010/main" val="1624990458"/>
       </p:ext>
     </p:extLst>
   </p:cSld>
@@ -7428,7 +8161,7 @@
           <p:cNvPr id="2" name="タイトル 1">
             <a:extLst>
               <a:ext uri="{FF2B5EF4-FFF2-40B4-BE49-F238E27FC236}">
-                <a16:creationId xmlns:a16="http://schemas.microsoft.com/office/drawing/2014/main" id="{078590EC-3551-7798-D26C-ACB846F74B4F}"/>
+                <a16:creationId xmlns:a16="http://schemas.microsoft.com/office/drawing/2014/main" id="{424D4A5E-223E-8982-C14E-80509BE1BD07}"/>
               </a:ext>
             </a:extLst>
           </p:cNvPr>
@@ -7450,7 +8183,7 @@
             </a:r>
             <a:r>
               <a:rPr kumimoji="1" lang="en-US" altLang="ja-JP" dirty="0"/>
-              <a:t>0.542</a:t>
+              <a:t>0.441</a:t>
             </a:r>
             <a:endParaRPr kumimoji="1" lang="ja-JP" altLang="en-US" dirty="0"/>
           </a:p>
@@ -7458,10 +8191,10 @@
       </p:sp>
       <p:pic>
         <p:nvPicPr>
-          <p:cNvPr id="4" name="コンテンツ プレースホルダー 3">
+          <p:cNvPr id="5" name="コンテンツ プレースホルダー 4">
             <a:extLst>
               <a:ext uri="{FF2B5EF4-FFF2-40B4-BE49-F238E27FC236}">
-                <a16:creationId xmlns:a16="http://schemas.microsoft.com/office/drawing/2014/main" id="{8F9D458B-836E-CC07-37D7-241DBA03244B}"/>
+                <a16:creationId xmlns:a16="http://schemas.microsoft.com/office/drawing/2014/main" id="{F75D3519-7909-7EAE-2E9B-73460C4447BC}"/>
               </a:ext>
             </a:extLst>
           </p:cNvPr>
@@ -7491,7 +8224,7 @@
     </p:spTree>
     <p:extLst>
       <p:ext uri="{BB962C8B-B14F-4D97-AF65-F5344CB8AC3E}">
-        <p14:creationId xmlns:p14="http://schemas.microsoft.com/office/powerpoint/2010/main" val="3981072813"/>
+        <p14:creationId xmlns:p14="http://schemas.microsoft.com/office/powerpoint/2010/main" val="678897031"/>
       </p:ext>
     </p:extLst>
   </p:cSld>
@@ -7523,7 +8256,7 @@
           <p:cNvPr id="2" name="タイトル 1">
             <a:extLst>
               <a:ext uri="{FF2B5EF4-FFF2-40B4-BE49-F238E27FC236}">
-                <a16:creationId xmlns:a16="http://schemas.microsoft.com/office/drawing/2014/main" id="{408B8A56-D7B0-32F3-915D-088686A1CFE1}"/>
+                <a16:creationId xmlns:a16="http://schemas.microsoft.com/office/drawing/2014/main" id="{078590EC-3551-7798-D26C-ACB846F74B4F}"/>
               </a:ext>
             </a:extLst>
           </p:cNvPr>
@@ -7545,21 +8278,18 @@
             </a:r>
             <a:r>
               <a:rPr kumimoji="1" lang="en-US" altLang="ja-JP" dirty="0"/>
-              <a:t>0.712</a:t>
-            </a:r>
-            <a:br>
-              <a:rPr kumimoji="1" lang="en-US" altLang="ja-JP" dirty="0"/>
-            </a:br>
+              <a:t>0.542</a:t>
+            </a:r>
             <a:endParaRPr kumimoji="1" lang="ja-JP" altLang="en-US" dirty="0"/>
           </a:p>
         </p:txBody>
       </p:sp>
       <p:pic>
         <p:nvPicPr>
-          <p:cNvPr id="5" name="コンテンツ プレースホルダー 4">
+          <p:cNvPr id="4" name="コンテンツ プレースホルダー 3">
             <a:extLst>
               <a:ext uri="{FF2B5EF4-FFF2-40B4-BE49-F238E27FC236}">
-                <a16:creationId xmlns:a16="http://schemas.microsoft.com/office/drawing/2014/main" id="{424F2261-F694-769C-97BE-344F1E103D80}"/>
+                <a16:creationId xmlns:a16="http://schemas.microsoft.com/office/drawing/2014/main" id="{8F9D458B-836E-CC07-37D7-241DBA03244B}"/>
               </a:ext>
             </a:extLst>
           </p:cNvPr>
@@ -7589,7 +8319,7 @@
     </p:spTree>
     <p:extLst>
       <p:ext uri="{BB962C8B-B14F-4D97-AF65-F5344CB8AC3E}">
-        <p14:creationId xmlns:p14="http://schemas.microsoft.com/office/powerpoint/2010/main" val="1599585600"/>
+        <p14:creationId xmlns:p14="http://schemas.microsoft.com/office/powerpoint/2010/main" val="3981072813"/>
       </p:ext>
     </p:extLst>
   </p:cSld>
@@ -7621,7 +8351,7 @@
           <p:cNvPr id="2" name="タイトル 1">
             <a:extLst>
               <a:ext uri="{FF2B5EF4-FFF2-40B4-BE49-F238E27FC236}">
-                <a16:creationId xmlns:a16="http://schemas.microsoft.com/office/drawing/2014/main" id="{B5825973-7C3A-7DEF-97B0-8EB6A8D4B61D}"/>
+                <a16:creationId xmlns:a16="http://schemas.microsoft.com/office/drawing/2014/main" id="{408B8A56-D7B0-32F3-915D-088686A1CFE1}"/>
               </a:ext>
             </a:extLst>
           </p:cNvPr>
@@ -7638,37 +8368,26 @@
           <a:lstStyle/>
           <a:p>
             <a:r>
-              <a:rPr lang="ja-JP" altLang="en-US" sz="1800" b="0" i="0" u="none" strike="noStrike" dirty="0">
-                <a:solidFill>
-                  <a:srgbClr val="000000"/>
-                </a:solidFill>
-                <a:effectLst/>
-                <a:latin typeface="游ゴシック" panose="020B0400000000000000" pitchFamily="50" charset="-128"/>
-                <a:ea typeface="游ゴシック" panose="020B0400000000000000" pitchFamily="50" charset="-128"/>
-              </a:rPr>
+              <a:rPr kumimoji="1" lang="ja-JP" altLang="en-US" dirty="0"/>
               <a:t>相関</a:t>
             </a:r>
             <a:r>
-              <a:rPr lang="en-US" altLang="ja-JP" sz="1800" b="0" i="0" u="none" strike="noStrike" dirty="0">
-                <a:solidFill>
-                  <a:srgbClr val="000000"/>
-                </a:solidFill>
-                <a:effectLst/>
-                <a:latin typeface="游ゴシック" panose="020B0400000000000000" pitchFamily="50" charset="-128"/>
-                <a:ea typeface="游ゴシック" panose="020B0400000000000000" pitchFamily="50" charset="-128"/>
-              </a:rPr>
-              <a:t>0.905</a:t>
-            </a:r>
+              <a:rPr kumimoji="1" lang="en-US" altLang="ja-JP" dirty="0"/>
+              <a:t>0.712</a:t>
+            </a:r>
+            <a:br>
+              <a:rPr kumimoji="1" lang="en-US" altLang="ja-JP" dirty="0"/>
+            </a:br>
             <a:endParaRPr kumimoji="1" lang="ja-JP" altLang="en-US" dirty="0"/>
           </a:p>
         </p:txBody>
       </p:sp>
       <p:pic>
         <p:nvPicPr>
-          <p:cNvPr id="4" name="コンテンツ プレースホルダー 3">
+          <p:cNvPr id="5" name="コンテンツ プレースホルダー 4">
             <a:extLst>
               <a:ext uri="{FF2B5EF4-FFF2-40B4-BE49-F238E27FC236}">
-                <a16:creationId xmlns:a16="http://schemas.microsoft.com/office/drawing/2014/main" id="{341D7BD3-E56B-8269-F527-303B94AF8C6B}"/>
+                <a16:creationId xmlns:a16="http://schemas.microsoft.com/office/drawing/2014/main" id="{424F2261-F694-769C-97BE-344F1E103D80}"/>
               </a:ext>
             </a:extLst>
           </p:cNvPr>
@@ -7698,7 +8417,7 @@
     </p:spTree>
     <p:extLst>
       <p:ext uri="{BB962C8B-B14F-4D97-AF65-F5344CB8AC3E}">
-        <p14:creationId xmlns:p14="http://schemas.microsoft.com/office/powerpoint/2010/main" val="3867585930"/>
+        <p14:creationId xmlns:p14="http://schemas.microsoft.com/office/powerpoint/2010/main" val="1599585600"/>
       </p:ext>
     </p:extLst>
   </p:cSld>
@@ -7827,6 +8546,115 @@
       </p:grpSpPr>
       <p:sp>
         <p:nvSpPr>
+          <p:cNvPr id="2" name="タイトル 1">
+            <a:extLst>
+              <a:ext uri="{FF2B5EF4-FFF2-40B4-BE49-F238E27FC236}">
+                <a16:creationId xmlns:a16="http://schemas.microsoft.com/office/drawing/2014/main" id="{B5825973-7C3A-7DEF-97B0-8EB6A8D4B61D}"/>
+              </a:ext>
+            </a:extLst>
+          </p:cNvPr>
+          <p:cNvSpPr>
+            <a:spLocks noGrp="1"/>
+          </p:cNvSpPr>
+          <p:nvPr>
+            <p:ph type="title"/>
+          </p:nvPr>
+        </p:nvSpPr>
+        <p:spPr/>
+        <p:txBody>
+          <a:bodyPr/>
+          <a:lstStyle/>
+          <a:p>
+            <a:r>
+              <a:rPr lang="ja-JP" altLang="en-US" sz="1800" b="0" i="0" u="none" strike="noStrike" dirty="0">
+                <a:solidFill>
+                  <a:srgbClr val="000000"/>
+                </a:solidFill>
+                <a:effectLst/>
+                <a:latin typeface="游ゴシック" panose="020B0400000000000000" pitchFamily="50" charset="-128"/>
+                <a:ea typeface="游ゴシック" panose="020B0400000000000000" pitchFamily="50" charset="-128"/>
+              </a:rPr>
+              <a:t>相関</a:t>
+            </a:r>
+            <a:r>
+              <a:rPr lang="en-US" altLang="ja-JP" sz="1800" b="0" i="0" u="none" strike="noStrike" dirty="0">
+                <a:solidFill>
+                  <a:srgbClr val="000000"/>
+                </a:solidFill>
+                <a:effectLst/>
+                <a:latin typeface="游ゴシック" panose="020B0400000000000000" pitchFamily="50" charset="-128"/>
+                <a:ea typeface="游ゴシック" panose="020B0400000000000000" pitchFamily="50" charset="-128"/>
+              </a:rPr>
+              <a:t>0.905</a:t>
+            </a:r>
+            <a:endParaRPr kumimoji="1" lang="ja-JP" altLang="en-US" dirty="0"/>
+          </a:p>
+        </p:txBody>
+      </p:sp>
+      <p:pic>
+        <p:nvPicPr>
+          <p:cNvPr id="4" name="コンテンツ プレースホルダー 3">
+            <a:extLst>
+              <a:ext uri="{FF2B5EF4-FFF2-40B4-BE49-F238E27FC236}">
+                <a16:creationId xmlns:a16="http://schemas.microsoft.com/office/drawing/2014/main" id="{341D7BD3-E56B-8269-F527-303B94AF8C6B}"/>
+              </a:ext>
+            </a:extLst>
+          </p:cNvPr>
+          <p:cNvPicPr>
+            <a:picLocks noGrp="1" noChangeAspect="1"/>
+          </p:cNvPicPr>
+          <p:nvPr>
+            <p:ph idx="1"/>
+          </p:nvPr>
+        </p:nvPicPr>
+        <p:blipFill>
+          <a:blip r:embed="rId2"/>
+          <a:stretch>
+            <a:fillRect/>
+          </a:stretch>
+        </p:blipFill>
+        <p:spPr>
+          <a:xfrm>
+            <a:off x="3657642" y="2132835"/>
+            <a:ext cx="4889416" cy="3743268"/>
+          </a:xfrm>
+          <a:prstGeom prst="rect">
+            <a:avLst/>
+          </a:prstGeom>
+        </p:spPr>
+      </p:pic>
+    </p:spTree>
+    <p:extLst>
+      <p:ext uri="{BB962C8B-B14F-4D97-AF65-F5344CB8AC3E}">
+        <p14:creationId xmlns:p14="http://schemas.microsoft.com/office/powerpoint/2010/main" val="3867585930"/>
+      </p:ext>
+    </p:extLst>
+  </p:cSld>
+  <p:clrMapOvr>
+    <a:masterClrMapping/>
+  </p:clrMapOvr>
+</p:sld>
+</file>
+
+<file path=ppt/slides/slide21.xml><?xml version="1.0" encoding="utf-8"?>
+<p:sld xmlns:a="http://schemas.openxmlformats.org/drawingml/2006/main" xmlns:r="http://schemas.openxmlformats.org/officeDocument/2006/relationships" xmlns:p="http://schemas.openxmlformats.org/presentationml/2006/main">
+  <p:cSld>
+    <p:spTree>
+      <p:nvGrpSpPr>
+        <p:cNvPr id="1" name=""/>
+        <p:cNvGrpSpPr/>
+        <p:nvPr/>
+      </p:nvGrpSpPr>
+      <p:grpSpPr>
+        <a:xfrm>
+          <a:off x="0" y="0"/>
+          <a:ext cx="0" cy="0"/>
+          <a:chOff x="0" y="0"/>
+          <a:chExt cx="0" cy="0"/>
+        </a:xfrm>
+      </p:grpSpPr>
+      <p:sp>
+        <p:nvSpPr>
           <p:cNvPr id="2" name="タイトル 1"/>
           <p:cNvSpPr>
             <a:spLocks noGrp="1"/>
@@ -8162,7 +8990,7 @@
 </p:sld>
 </file>
 
-<file path=ppt/slides/slide21.xml><?xml version="1.0" encoding="utf-8"?>
+<file path=ppt/slides/slide22.xml><?xml version="1.0" encoding="utf-8"?>
 <p:sld xmlns:a="http://schemas.openxmlformats.org/drawingml/2006/main" xmlns:r="http://schemas.openxmlformats.org/officeDocument/2006/relationships" xmlns:p="http://schemas.openxmlformats.org/presentationml/2006/main">
   <p:cSld>
     <p:spTree>
@@ -8543,6 +9371,499 @@
           <a:chExt cx="0" cy="0"/>
         </a:xfrm>
       </p:grpSpPr>
+      <p:grpSp>
+        <p:nvGrpSpPr>
+          <p:cNvPr id="17" name="グループ化 16">
+            <a:extLst>
+              <a:ext uri="{FF2B5EF4-FFF2-40B4-BE49-F238E27FC236}">
+                <a16:creationId xmlns:a16="http://schemas.microsoft.com/office/drawing/2014/main" id="{C30135DB-9CA4-BD4C-2E30-4C8A1AE71777}"/>
+              </a:ext>
+            </a:extLst>
+          </p:cNvPr>
+          <p:cNvGrpSpPr/>
+          <p:nvPr/>
+        </p:nvGrpSpPr>
+        <p:grpSpPr>
+          <a:xfrm>
+            <a:off x="-72223" y="580001"/>
+            <a:ext cx="12264223" cy="6124230"/>
+            <a:chOff x="-72223" y="580001"/>
+            <a:chExt cx="12264223" cy="6124230"/>
+          </a:xfrm>
+        </p:grpSpPr>
+        <p:sp>
+          <p:nvSpPr>
+            <p:cNvPr id="6" name="テキスト ボックス 5">
+              <a:extLst>
+                <a:ext uri="{FF2B5EF4-FFF2-40B4-BE49-F238E27FC236}">
+                  <a16:creationId xmlns:a16="http://schemas.microsoft.com/office/drawing/2014/main" id="{E6FDB475-EA06-5B9A-C153-713E0BBC2649}"/>
+                </a:ext>
+              </a:extLst>
+            </p:cNvPr>
+            <p:cNvSpPr txBox="1"/>
+            <p:nvPr/>
+          </p:nvSpPr>
+          <p:spPr>
+            <a:xfrm>
+              <a:off x="-72223" y="1030172"/>
+              <a:ext cx="2133600" cy="738664"/>
+            </a:xfrm>
+            <a:prstGeom prst="rect">
+              <a:avLst/>
+            </a:prstGeom>
+            <a:noFill/>
+          </p:spPr>
+          <p:txBody>
+            <a:bodyPr wrap="square" rtlCol="0">
+              <a:spAutoFit/>
+            </a:bodyPr>
+            <a:lstStyle/>
+            <a:p>
+              <a:pPr algn="ctr"/>
+              <a:r>
+                <a:rPr kumimoji="1" lang="ja-JP" altLang="en-US" sz="1400" dirty="0"/>
+                <a:t>一要因分散分析</a:t>
+              </a:r>
+              <a:endParaRPr kumimoji="1" lang="en-US" altLang="ja-JP" sz="1400" dirty="0"/>
+            </a:p>
+            <a:p>
+              <a:pPr algn="ctr"/>
+              <a:endParaRPr kumimoji="1" lang="en-US" altLang="ja-JP" sz="1400" dirty="0"/>
+            </a:p>
+            <a:p>
+              <a:pPr algn="ctr"/>
+              <a:r>
+                <a:rPr kumimoji="1" lang="ja-JP" altLang="en-US" sz="1400" dirty="0"/>
+                <a:t>一元配置分散分析</a:t>
+              </a:r>
+            </a:p>
+          </p:txBody>
+        </p:sp>
+        <p:sp>
+          <p:nvSpPr>
+            <p:cNvPr id="7" name="テキスト ボックス 6">
+              <a:extLst>
+                <a:ext uri="{FF2B5EF4-FFF2-40B4-BE49-F238E27FC236}">
+                  <a16:creationId xmlns:a16="http://schemas.microsoft.com/office/drawing/2014/main" id="{F0FBBB67-CEA6-CF2A-1D22-DEC86C082A20}"/>
+                </a:ext>
+              </a:extLst>
+            </p:cNvPr>
+            <p:cNvSpPr txBox="1"/>
+            <p:nvPr/>
+          </p:nvSpPr>
+          <p:spPr>
+            <a:xfrm>
+              <a:off x="2757487" y="580001"/>
+              <a:ext cx="2133600" cy="1169551"/>
+            </a:xfrm>
+            <a:prstGeom prst="rect">
+              <a:avLst/>
+            </a:prstGeom>
+            <a:noFill/>
+          </p:spPr>
+          <p:txBody>
+            <a:bodyPr wrap="square" rtlCol="0">
+              <a:spAutoFit/>
+            </a:bodyPr>
+            <a:lstStyle/>
+            <a:p>
+              <a:pPr algn="ctr"/>
+              <a:r>
+                <a:rPr kumimoji="1" lang="ja-JP" altLang="en-US" sz="1400" dirty="0"/>
+                <a:t>一要因分散分析</a:t>
+              </a:r>
+              <a:br>
+                <a:rPr kumimoji="1" lang="en-US" altLang="ja-JP" sz="1400" dirty="0"/>
+              </a:br>
+              <a:r>
+                <a:rPr kumimoji="1" lang="ja-JP" altLang="en-US" sz="1400" dirty="0"/>
+                <a:t>（対応あり）</a:t>
+              </a:r>
+              <a:endParaRPr kumimoji="1" lang="en-US" altLang="ja-JP" sz="1400" dirty="0"/>
+            </a:p>
+            <a:p>
+              <a:pPr algn="ctr"/>
+              <a:endParaRPr kumimoji="1" lang="en-US" altLang="ja-JP" sz="1400" dirty="0"/>
+            </a:p>
+            <a:p>
+              <a:pPr algn="ctr"/>
+              <a:r>
+                <a:rPr kumimoji="1" lang="ja-JP" altLang="en-US" sz="1400" dirty="0"/>
+                <a:t>二元配置分散分析</a:t>
+              </a:r>
+              <a:br>
+                <a:rPr kumimoji="1" lang="en-US" altLang="ja-JP" sz="1400" dirty="0"/>
+              </a:br>
+              <a:r>
+                <a:rPr kumimoji="1" lang="ja-JP" altLang="en-US" sz="1400" dirty="0"/>
+                <a:t>（対応あり・繰り返しなし）</a:t>
+              </a:r>
+            </a:p>
+          </p:txBody>
+        </p:sp>
+        <p:sp>
+          <p:nvSpPr>
+            <p:cNvPr id="8" name="テキスト ボックス 7">
+              <a:extLst>
+                <a:ext uri="{FF2B5EF4-FFF2-40B4-BE49-F238E27FC236}">
+                  <a16:creationId xmlns:a16="http://schemas.microsoft.com/office/drawing/2014/main" id="{D8152839-7E25-419C-7F95-558C6B4FB696}"/>
+                </a:ext>
+              </a:extLst>
+            </p:cNvPr>
+            <p:cNvSpPr txBox="1"/>
+            <p:nvPr/>
+          </p:nvSpPr>
+          <p:spPr>
+            <a:xfrm>
+              <a:off x="6096000" y="586433"/>
+              <a:ext cx="2133600" cy="1169551"/>
+            </a:xfrm>
+            <a:prstGeom prst="rect">
+              <a:avLst/>
+            </a:prstGeom>
+            <a:noFill/>
+          </p:spPr>
+          <p:txBody>
+            <a:bodyPr wrap="square" rtlCol="0">
+              <a:spAutoFit/>
+            </a:bodyPr>
+            <a:lstStyle/>
+            <a:p>
+              <a:pPr algn="ctr"/>
+              <a:r>
+                <a:rPr kumimoji="1" lang="ja-JP" altLang="en-US" sz="1400" dirty="0"/>
+                <a:t>二要因分散分析</a:t>
+              </a:r>
+              <a:br>
+                <a:rPr kumimoji="1" lang="en-US" altLang="ja-JP" sz="1400" dirty="0"/>
+              </a:br>
+              <a:r>
+                <a:rPr kumimoji="1" lang="ja-JP" altLang="en-US" sz="1400" dirty="0"/>
+                <a:t>（対応なし）</a:t>
+              </a:r>
+              <a:endParaRPr kumimoji="1" lang="en-US" altLang="ja-JP" sz="1400" dirty="0"/>
+            </a:p>
+            <a:p>
+              <a:pPr algn="ctr"/>
+              <a:endParaRPr kumimoji="1" lang="en-US" altLang="ja-JP" sz="1400" dirty="0"/>
+            </a:p>
+            <a:p>
+              <a:pPr algn="ctr"/>
+              <a:r>
+                <a:rPr kumimoji="1" lang="ja-JP" altLang="en-US" sz="1400" dirty="0"/>
+                <a:t>二元配置分散分析</a:t>
+              </a:r>
+              <a:br>
+                <a:rPr kumimoji="1" lang="en-US" altLang="ja-JP" sz="1400" dirty="0"/>
+              </a:br>
+              <a:r>
+                <a:rPr kumimoji="1" lang="ja-JP" altLang="en-US" sz="1400" dirty="0"/>
+                <a:t>（対応なし・繰り返しあり）</a:t>
+              </a:r>
+            </a:p>
+          </p:txBody>
+        </p:sp>
+        <p:pic>
+          <p:nvPicPr>
+            <p:cNvPr id="10" name="図 9">
+              <a:extLst>
+                <a:ext uri="{FF2B5EF4-FFF2-40B4-BE49-F238E27FC236}">
+                  <a16:creationId xmlns:a16="http://schemas.microsoft.com/office/drawing/2014/main" id="{B2CC2E8F-8159-769C-9275-ED926EFAB4C9}"/>
+                </a:ext>
+              </a:extLst>
+            </p:cNvPr>
+            <p:cNvPicPr>
+              <a:picLocks noChangeAspect="1"/>
+            </p:cNvPicPr>
+            <p:nvPr/>
+          </p:nvPicPr>
+          <p:blipFill>
+            <a:blip r:embed="rId3"/>
+            <a:stretch>
+              <a:fillRect/>
+            </a:stretch>
+          </p:blipFill>
+          <p:spPr>
+            <a:xfrm>
+              <a:off x="0" y="1791834"/>
+              <a:ext cx="12192000" cy="4912397"/>
+            </a:xfrm>
+            <a:prstGeom prst="rect">
+              <a:avLst/>
+            </a:prstGeom>
+          </p:spPr>
+        </p:pic>
+        <p:sp>
+          <p:nvSpPr>
+            <p:cNvPr id="11" name="大かっこ 10">
+              <a:extLst>
+                <a:ext uri="{FF2B5EF4-FFF2-40B4-BE49-F238E27FC236}">
+                  <a16:creationId xmlns:a16="http://schemas.microsoft.com/office/drawing/2014/main" id="{D06FFB5C-8475-F3AB-1C68-56887B3D2428}"/>
+                </a:ext>
+              </a:extLst>
+            </p:cNvPr>
+            <p:cNvSpPr/>
+            <p:nvPr/>
+          </p:nvSpPr>
+          <p:spPr>
+            <a:xfrm>
+              <a:off x="2774497" y="1207058"/>
+              <a:ext cx="2028616" cy="471017"/>
+            </a:xfrm>
+            <a:prstGeom prst="bracketPair">
+              <a:avLst/>
+            </a:prstGeom>
+          </p:spPr>
+          <p:style>
+            <a:lnRef idx="1">
+              <a:schemeClr val="accent1"/>
+            </a:lnRef>
+            <a:fillRef idx="0">
+              <a:schemeClr val="accent1"/>
+            </a:fillRef>
+            <a:effectRef idx="0">
+              <a:schemeClr val="accent1"/>
+            </a:effectRef>
+            <a:fontRef idx="minor">
+              <a:schemeClr val="tx1"/>
+            </a:fontRef>
+          </p:style>
+          <p:txBody>
+            <a:bodyPr rtlCol="0" anchor="ctr"/>
+            <a:lstStyle/>
+            <a:p>
+              <a:pPr algn="ctr"/>
+              <a:endParaRPr kumimoji="1" lang="ja-JP" altLang="en-US"/>
+            </a:p>
+          </p:txBody>
+        </p:sp>
+        <p:sp>
+          <p:nvSpPr>
+            <p:cNvPr id="13" name="大かっこ 12">
+              <a:extLst>
+                <a:ext uri="{FF2B5EF4-FFF2-40B4-BE49-F238E27FC236}">
+                  <a16:creationId xmlns:a16="http://schemas.microsoft.com/office/drawing/2014/main" id="{BF4E37F7-41CE-B4F8-B4A1-4FBA7DC88A4B}"/>
+                </a:ext>
+              </a:extLst>
+            </p:cNvPr>
+            <p:cNvSpPr/>
+            <p:nvPr/>
+          </p:nvSpPr>
+          <p:spPr>
+            <a:xfrm>
+              <a:off x="6166965" y="1207058"/>
+              <a:ext cx="2062636" cy="471017"/>
+            </a:xfrm>
+            <a:prstGeom prst="bracketPair">
+              <a:avLst/>
+            </a:prstGeom>
+          </p:spPr>
+          <p:style>
+            <a:lnRef idx="1">
+              <a:schemeClr val="accent1"/>
+            </a:lnRef>
+            <a:fillRef idx="0">
+              <a:schemeClr val="accent1"/>
+            </a:fillRef>
+            <a:effectRef idx="0">
+              <a:schemeClr val="accent1"/>
+            </a:effectRef>
+            <a:fontRef idx="minor">
+              <a:schemeClr val="tx1"/>
+            </a:fontRef>
+          </p:style>
+          <p:txBody>
+            <a:bodyPr rtlCol="0" anchor="ctr"/>
+            <a:lstStyle/>
+            <a:p>
+              <a:pPr algn="ctr"/>
+              <a:endParaRPr kumimoji="1" lang="ja-JP" altLang="en-US"/>
+            </a:p>
+          </p:txBody>
+        </p:sp>
+        <p:sp>
+          <p:nvSpPr>
+            <p:cNvPr id="14" name="大かっこ 13">
+              <a:extLst>
+                <a:ext uri="{FF2B5EF4-FFF2-40B4-BE49-F238E27FC236}">
+                  <a16:creationId xmlns:a16="http://schemas.microsoft.com/office/drawing/2014/main" id="{8BF4A6CB-5896-0039-7CD7-F67BEE2876BB}"/>
+                </a:ext>
+              </a:extLst>
+            </p:cNvPr>
+            <p:cNvSpPr/>
+            <p:nvPr/>
+          </p:nvSpPr>
+          <p:spPr>
+            <a:xfrm>
+              <a:off x="223838" y="1492545"/>
+              <a:ext cx="1590518" cy="219078"/>
+            </a:xfrm>
+            <a:prstGeom prst="bracketPair">
+              <a:avLst>
+                <a:gd name="adj" fmla="val 29710"/>
+              </a:avLst>
+            </a:prstGeom>
+          </p:spPr>
+          <p:style>
+            <a:lnRef idx="1">
+              <a:schemeClr val="accent1"/>
+            </a:lnRef>
+            <a:fillRef idx="0">
+              <a:schemeClr val="accent1"/>
+            </a:fillRef>
+            <a:effectRef idx="0">
+              <a:schemeClr val="accent1"/>
+            </a:effectRef>
+            <a:fontRef idx="minor">
+              <a:schemeClr val="tx1"/>
+            </a:fontRef>
+          </p:style>
+          <p:txBody>
+            <a:bodyPr rtlCol="0" anchor="ctr"/>
+            <a:lstStyle/>
+            <a:p>
+              <a:pPr algn="ctr"/>
+              <a:endParaRPr kumimoji="1" lang="ja-JP" altLang="en-US"/>
+            </a:p>
+          </p:txBody>
+        </p:sp>
+        <p:sp>
+          <p:nvSpPr>
+            <p:cNvPr id="15" name="テキスト ボックス 14">
+              <a:extLst>
+                <a:ext uri="{FF2B5EF4-FFF2-40B4-BE49-F238E27FC236}">
+                  <a16:creationId xmlns:a16="http://schemas.microsoft.com/office/drawing/2014/main" id="{A914D632-835E-9F31-5B5E-001D4FCC5800}"/>
+                </a:ext>
+              </a:extLst>
+            </p:cNvPr>
+            <p:cNvSpPr txBox="1"/>
+            <p:nvPr/>
+          </p:nvSpPr>
+          <p:spPr>
+            <a:xfrm>
+              <a:off x="9512440" y="586433"/>
+              <a:ext cx="2133600" cy="1169551"/>
+            </a:xfrm>
+            <a:prstGeom prst="rect">
+              <a:avLst/>
+            </a:prstGeom>
+            <a:noFill/>
+          </p:spPr>
+          <p:txBody>
+            <a:bodyPr wrap="square" rtlCol="0">
+              <a:spAutoFit/>
+            </a:bodyPr>
+            <a:lstStyle/>
+            <a:p>
+              <a:pPr algn="ctr"/>
+              <a:r>
+                <a:rPr kumimoji="1" lang="ja-JP" altLang="en-US" sz="1400" dirty="0"/>
+                <a:t>二要因分散分析</a:t>
+              </a:r>
+              <a:br>
+                <a:rPr kumimoji="1" lang="en-US" altLang="ja-JP" sz="1400" dirty="0"/>
+              </a:br>
+              <a:r>
+                <a:rPr kumimoji="1" lang="ja-JP" altLang="en-US" sz="1400" dirty="0"/>
+                <a:t>（対応あり）</a:t>
+              </a:r>
+              <a:endParaRPr kumimoji="1" lang="en-US" altLang="ja-JP" sz="1400" dirty="0"/>
+            </a:p>
+            <a:p>
+              <a:pPr algn="ctr"/>
+              <a:endParaRPr kumimoji="1" lang="en-US" altLang="ja-JP" sz="1400" dirty="0"/>
+            </a:p>
+            <a:p>
+              <a:pPr algn="ctr"/>
+              <a:r>
+                <a:rPr kumimoji="1" lang="ja-JP" altLang="en-US" sz="1400" dirty="0"/>
+                <a:t>二元配置分散分析</a:t>
+              </a:r>
+              <a:br>
+                <a:rPr kumimoji="1" lang="en-US" altLang="ja-JP" sz="1400" dirty="0"/>
+              </a:br>
+              <a:r>
+                <a:rPr kumimoji="1" lang="ja-JP" altLang="en-US" sz="1400" dirty="0"/>
+                <a:t>（対応あり・繰り返しあり）</a:t>
+              </a:r>
+            </a:p>
+          </p:txBody>
+        </p:sp>
+        <p:sp>
+          <p:nvSpPr>
+            <p:cNvPr id="16" name="大かっこ 15">
+              <a:extLst>
+                <a:ext uri="{FF2B5EF4-FFF2-40B4-BE49-F238E27FC236}">
+                  <a16:creationId xmlns:a16="http://schemas.microsoft.com/office/drawing/2014/main" id="{4327B81A-95BC-FD0D-564E-8DC7405726E8}"/>
+                </a:ext>
+              </a:extLst>
+            </p:cNvPr>
+            <p:cNvSpPr/>
+            <p:nvPr/>
+          </p:nvSpPr>
+          <p:spPr>
+            <a:xfrm>
+              <a:off x="9583405" y="1207058"/>
+              <a:ext cx="2062636" cy="471017"/>
+            </a:xfrm>
+            <a:prstGeom prst="bracketPair">
+              <a:avLst/>
+            </a:prstGeom>
+          </p:spPr>
+          <p:style>
+            <a:lnRef idx="1">
+              <a:schemeClr val="accent1"/>
+            </a:lnRef>
+            <a:fillRef idx="0">
+              <a:schemeClr val="accent1"/>
+            </a:fillRef>
+            <a:effectRef idx="0">
+              <a:schemeClr val="accent1"/>
+            </a:effectRef>
+            <a:fontRef idx="minor">
+              <a:schemeClr val="tx1"/>
+            </a:fontRef>
+          </p:style>
+          <p:txBody>
+            <a:bodyPr rtlCol="0" anchor="ctr"/>
+            <a:lstStyle/>
+            <a:p>
+              <a:pPr algn="ctr"/>
+              <a:endParaRPr kumimoji="1" lang="ja-JP" altLang="en-US"/>
+            </a:p>
+          </p:txBody>
+        </p:sp>
+      </p:grpSp>
+    </p:spTree>
+    <p:extLst>
+      <p:ext uri="{BB962C8B-B14F-4D97-AF65-F5344CB8AC3E}">
+        <p14:creationId xmlns:p14="http://schemas.microsoft.com/office/powerpoint/2010/main" val="13407765"/>
+      </p:ext>
+    </p:extLst>
+  </p:cSld>
+  <p:clrMapOvr>
+    <a:masterClrMapping/>
+  </p:clrMapOvr>
+</p:sld>
+</file>
+
+<file path=ppt/slides/slide5.xml><?xml version="1.0" encoding="utf-8"?>
+<p:sld xmlns:a="http://schemas.openxmlformats.org/drawingml/2006/main" xmlns:r="http://schemas.openxmlformats.org/officeDocument/2006/relationships" xmlns:p="http://schemas.openxmlformats.org/presentationml/2006/main">
+  <p:cSld>
+    <p:spTree>
+      <p:nvGrpSpPr>
+        <p:cNvPr id="1" name=""/>
+        <p:cNvGrpSpPr/>
+        <p:nvPr/>
+      </p:nvGrpSpPr>
+      <p:grpSpPr>
+        <a:xfrm>
+          <a:off x="0" y="0"/>
+          <a:ext cx="0" cy="0"/>
+          <a:chOff x="0" y="0"/>
+          <a:chExt cx="0" cy="0"/>
+        </a:xfrm>
+      </p:grpSpPr>
       <p:sp>
         <p:nvSpPr>
           <p:cNvPr id="4" name="楕円 3">
@@ -9043,7 +10364,7 @@
 </p:sld>
 </file>
 
-<file path=ppt/slides/slide5.xml><?xml version="1.0" encoding="utf-8"?>
+<file path=ppt/slides/slide6.xml><?xml version="1.0" encoding="utf-8"?>
 <p:sld xmlns:a="http://schemas.openxmlformats.org/drawingml/2006/main" xmlns:r="http://schemas.openxmlformats.org/officeDocument/2006/relationships" xmlns:p="http://schemas.openxmlformats.org/presentationml/2006/main">
   <p:cSld>
     <p:spTree>
@@ -9913,7 +11234,7 @@
 </p:sld>
 </file>
 
-<file path=ppt/slides/slide6.xml><?xml version="1.0" encoding="utf-8"?>
+<file path=ppt/slides/slide7.xml><?xml version="1.0" encoding="utf-8"?>
 <p:sld xmlns:a="http://schemas.openxmlformats.org/drawingml/2006/main" xmlns:r="http://schemas.openxmlformats.org/officeDocument/2006/relationships" xmlns:p="http://schemas.openxmlformats.org/presentationml/2006/main">
   <p:cSld>
     <p:spTree>
@@ -10222,7 +11543,7 @@
 </p:sld>
 </file>
 
-<file path=ppt/slides/slide7.xml><?xml version="1.0" encoding="utf-8"?>
+<file path=ppt/slides/slide8.xml><?xml version="1.0" encoding="utf-8"?>
 <p:sld xmlns:a="http://schemas.openxmlformats.org/drawingml/2006/main" xmlns:r="http://schemas.openxmlformats.org/officeDocument/2006/relationships" xmlns:p="http://schemas.openxmlformats.org/presentationml/2006/main">
   <p:cSld>
     <p:spTree>
@@ -10437,7 +11758,7 @@
 </p:sld>
 </file>
 
-<file path=ppt/slides/slide8.xml><?xml version="1.0" encoding="utf-8"?>
+<file path=ppt/slides/slide9.xml><?xml version="1.0" encoding="utf-8"?>
 <p:sld xmlns:a="http://schemas.openxmlformats.org/drawingml/2006/main" xmlns:r="http://schemas.openxmlformats.org/officeDocument/2006/relationships" xmlns:p="http://schemas.openxmlformats.org/presentationml/2006/main">
   <p:cSld>
     <p:spTree>
@@ -10781,365 +12102,6 @@
     <p:extLst>
       <p:ext uri="{BB962C8B-B14F-4D97-AF65-F5344CB8AC3E}">
         <p14:creationId xmlns:p14="http://schemas.microsoft.com/office/powerpoint/2010/main" val="1241106311"/>
-      </p:ext>
-    </p:extLst>
-  </p:cSld>
-  <p:clrMapOvr>
-    <a:masterClrMapping/>
-  </p:clrMapOvr>
-</p:sld>
-</file>
-
-<file path=ppt/slides/slide9.xml><?xml version="1.0" encoding="utf-8"?>
-<p:sld xmlns:a="http://schemas.openxmlformats.org/drawingml/2006/main" xmlns:r="http://schemas.openxmlformats.org/officeDocument/2006/relationships" xmlns:p="http://schemas.openxmlformats.org/presentationml/2006/main">
-  <p:cSld>
-    <p:spTree>
-      <p:nvGrpSpPr>
-        <p:cNvPr id="1" name=""/>
-        <p:cNvGrpSpPr/>
-        <p:nvPr/>
-      </p:nvGrpSpPr>
-      <p:grpSpPr>
-        <a:xfrm>
-          <a:off x="0" y="0"/>
-          <a:ext cx="0" cy="0"/>
-          <a:chOff x="0" y="0"/>
-          <a:chExt cx="0" cy="0"/>
-        </a:xfrm>
-      </p:grpSpPr>
-      <p:sp>
-        <p:nvSpPr>
-          <p:cNvPr id="4" name="正方形/長方形 3">
-            <a:extLst>
-              <a:ext uri="{FF2B5EF4-FFF2-40B4-BE49-F238E27FC236}">
-                <a16:creationId xmlns:a16="http://schemas.microsoft.com/office/drawing/2014/main" id="{D1E12261-89B1-F2A3-34A0-BBE7B31A48CA}"/>
-              </a:ext>
-            </a:extLst>
-          </p:cNvPr>
-          <p:cNvSpPr/>
-          <p:nvPr/>
-        </p:nvSpPr>
-        <p:spPr>
-          <a:xfrm>
-            <a:off x="6934200" y="2916936"/>
-            <a:ext cx="2476500" cy="1024128"/>
-          </a:xfrm>
-          <a:prstGeom prst="rect">
-            <a:avLst/>
-          </a:prstGeom>
-        </p:spPr>
-        <p:style>
-          <a:lnRef idx="2">
-            <a:schemeClr val="accent3">
-              <a:shade val="15000"/>
-            </a:schemeClr>
-          </a:lnRef>
-          <a:fillRef idx="1">
-            <a:schemeClr val="accent3"/>
-          </a:fillRef>
-          <a:effectRef idx="0">
-            <a:schemeClr val="accent3"/>
-          </a:effectRef>
-          <a:fontRef idx="minor">
-            <a:schemeClr val="lt1"/>
-          </a:fontRef>
-        </p:style>
-        <p:txBody>
-          <a:bodyPr rtlCol="0" anchor="ctr"/>
-          <a:lstStyle/>
-          <a:p>
-            <a:pPr algn="ctr"/>
-            <a:r>
-              <a:rPr kumimoji="1" lang="ja-JP" altLang="en-US" dirty="0"/>
-              <a:t>目的変数：</a:t>
-            </a:r>
-            <a:endParaRPr kumimoji="1" lang="en-US" altLang="ja-JP" dirty="0"/>
-          </a:p>
-          <a:p>
-            <a:pPr algn="ctr"/>
-            <a:r>
-              <a:rPr kumimoji="1" lang="ja-JP" altLang="en-US" dirty="0"/>
-              <a:t>収穫量</a:t>
-            </a:r>
-            <a:endParaRPr kumimoji="1" lang="en-US" altLang="ja-JP" dirty="0"/>
-          </a:p>
-          <a:p>
-            <a:pPr algn="ctr"/>
-            <a:r>
-              <a:rPr lang="ja-JP" altLang="en-US" dirty="0"/>
-              <a:t>（連続変数）</a:t>
-            </a:r>
-            <a:endParaRPr kumimoji="1" lang="ja-JP" altLang="en-US" dirty="0"/>
-          </a:p>
-        </p:txBody>
-      </p:sp>
-      <p:sp>
-        <p:nvSpPr>
-          <p:cNvPr id="5" name="正方形/長方形 4">
-            <a:extLst>
-              <a:ext uri="{FF2B5EF4-FFF2-40B4-BE49-F238E27FC236}">
-                <a16:creationId xmlns:a16="http://schemas.microsoft.com/office/drawing/2014/main" id="{AC2650BC-2D2B-5AF3-86DA-8F1504AF3245}"/>
-              </a:ext>
-            </a:extLst>
-          </p:cNvPr>
-          <p:cNvSpPr/>
-          <p:nvPr/>
-        </p:nvSpPr>
-        <p:spPr>
-          <a:xfrm>
-            <a:off x="2514600" y="1695449"/>
-            <a:ext cx="2371725" cy="1485900"/>
-          </a:xfrm>
-          <a:prstGeom prst="rect">
-            <a:avLst/>
-          </a:prstGeom>
-        </p:spPr>
-        <p:style>
-          <a:lnRef idx="2">
-            <a:schemeClr val="accent3">
-              <a:shade val="15000"/>
-            </a:schemeClr>
-          </a:lnRef>
-          <a:fillRef idx="1">
-            <a:schemeClr val="accent3"/>
-          </a:fillRef>
-          <a:effectRef idx="0">
-            <a:schemeClr val="accent3"/>
-          </a:effectRef>
-          <a:fontRef idx="minor">
-            <a:schemeClr val="lt1"/>
-          </a:fontRef>
-        </p:style>
-        <p:txBody>
-          <a:bodyPr rtlCol="0" anchor="ctr"/>
-          <a:lstStyle/>
-          <a:p>
-            <a:pPr algn="ctr"/>
-            <a:r>
-              <a:rPr kumimoji="1" lang="ja-JP" altLang="en-US" dirty="0"/>
-              <a:t>説明変数</a:t>
-            </a:r>
-            <a:r>
-              <a:rPr kumimoji="1" lang="en-US" altLang="ja-JP" dirty="0"/>
-              <a:t>1</a:t>
-            </a:r>
-            <a:r>
-              <a:rPr kumimoji="1" lang="ja-JP" altLang="en-US" dirty="0"/>
-              <a:t>：</a:t>
-            </a:r>
-            <a:br>
-              <a:rPr kumimoji="1" lang="en-US" altLang="ja-JP" dirty="0"/>
-            </a:br>
-            <a:r>
-              <a:rPr kumimoji="1" lang="ja-JP" altLang="en-US" dirty="0"/>
-              <a:t>小麦品種</a:t>
-            </a:r>
-            <a:endParaRPr kumimoji="1" lang="en-US" altLang="ja-JP" dirty="0"/>
-          </a:p>
-          <a:p>
-            <a:pPr algn="ctr"/>
-            <a:endParaRPr kumimoji="1" lang="en-US" altLang="ja-JP" sz="500" dirty="0"/>
-          </a:p>
-          <a:p>
-            <a:pPr algn="ctr"/>
-            <a:r>
-              <a:rPr kumimoji="1" lang="ja-JP" altLang="en-US" dirty="0"/>
-              <a:t>水準：</a:t>
-            </a:r>
-            <a:r>
-              <a:rPr kumimoji="1" lang="en-US" altLang="ja-JP" dirty="0"/>
-              <a:t>A</a:t>
-            </a:r>
-            <a:r>
-              <a:rPr lang="en-US" altLang="ja-JP" dirty="0"/>
-              <a:t>,B</a:t>
-            </a:r>
-          </a:p>
-        </p:txBody>
-      </p:sp>
-      <p:cxnSp>
-        <p:nvCxnSpPr>
-          <p:cNvPr id="6" name="直線矢印コネクタ 5">
-            <a:extLst>
-              <a:ext uri="{FF2B5EF4-FFF2-40B4-BE49-F238E27FC236}">
-                <a16:creationId xmlns:a16="http://schemas.microsoft.com/office/drawing/2014/main" id="{78716ED2-DF3B-D92E-7BD8-3AA09D91A477}"/>
-              </a:ext>
-            </a:extLst>
-          </p:cNvPr>
-          <p:cNvCxnSpPr>
-            <a:cxnSpLocks/>
-            <a:stCxn id="5" idx="3"/>
-            <a:endCxn id="4" idx="1"/>
-          </p:cNvCxnSpPr>
-          <p:nvPr/>
-        </p:nvCxnSpPr>
-        <p:spPr>
-          <a:xfrm>
-            <a:off x="4886325" y="2438399"/>
-            <a:ext cx="2047875" cy="990601"/>
-          </a:xfrm>
-          <a:prstGeom prst="straightConnector1">
-            <a:avLst/>
-          </a:prstGeom>
-          <a:ln>
-            <a:tailEnd type="triangle"/>
-          </a:ln>
-        </p:spPr>
-        <p:style>
-          <a:lnRef idx="2">
-            <a:schemeClr val="accent3">
-              <a:shade val="15000"/>
-            </a:schemeClr>
-          </a:lnRef>
-          <a:fillRef idx="1">
-            <a:schemeClr val="accent3"/>
-          </a:fillRef>
-          <a:effectRef idx="0">
-            <a:schemeClr val="accent3"/>
-          </a:effectRef>
-          <a:fontRef idx="minor">
-            <a:schemeClr val="lt1"/>
-          </a:fontRef>
-        </p:style>
-      </p:cxnSp>
-      <p:sp>
-        <p:nvSpPr>
-          <p:cNvPr id="9" name="正方形/長方形 8">
-            <a:extLst>
-              <a:ext uri="{FF2B5EF4-FFF2-40B4-BE49-F238E27FC236}">
-                <a16:creationId xmlns:a16="http://schemas.microsoft.com/office/drawing/2014/main" id="{CBC8A939-E168-8640-4151-6E3418F38040}"/>
-              </a:ext>
-            </a:extLst>
-          </p:cNvPr>
-          <p:cNvSpPr/>
-          <p:nvPr/>
-        </p:nvSpPr>
-        <p:spPr>
-          <a:xfrm>
-            <a:off x="2514600" y="3724276"/>
-            <a:ext cx="2371725" cy="1485900"/>
-          </a:xfrm>
-          <a:prstGeom prst="rect">
-            <a:avLst/>
-          </a:prstGeom>
-        </p:spPr>
-        <p:style>
-          <a:lnRef idx="2">
-            <a:schemeClr val="accent3">
-              <a:shade val="50000"/>
-            </a:schemeClr>
-          </a:lnRef>
-          <a:fillRef idx="1">
-            <a:schemeClr val="accent3"/>
-          </a:fillRef>
-          <a:effectRef idx="0">
-            <a:schemeClr val="accent3"/>
-          </a:effectRef>
-          <a:fontRef idx="minor">
-            <a:schemeClr val="lt1"/>
-          </a:fontRef>
-        </p:style>
-        <p:txBody>
-          <a:bodyPr rtlCol="0" anchor="ctr"/>
-          <a:lstStyle/>
-          <a:p>
-            <a:pPr algn="ctr"/>
-            <a:r>
-              <a:rPr kumimoji="1" lang="ja-JP" altLang="en-US" dirty="0"/>
-              <a:t>説明変数</a:t>
-            </a:r>
-            <a:r>
-              <a:rPr kumimoji="1" lang="en-US" altLang="ja-JP" dirty="0"/>
-              <a:t>2</a:t>
-            </a:r>
-            <a:r>
-              <a:rPr kumimoji="1" lang="ja-JP" altLang="en-US" dirty="0"/>
-              <a:t>：</a:t>
-            </a:r>
-            <a:br>
-              <a:rPr kumimoji="1" lang="en-US" altLang="ja-JP" dirty="0"/>
-            </a:br>
-            <a:r>
-              <a:rPr kumimoji="1" lang="ja-JP" altLang="en-US" dirty="0"/>
-              <a:t>肥料</a:t>
-            </a:r>
-            <a:endParaRPr kumimoji="1" lang="en-US" altLang="ja-JP" dirty="0"/>
-          </a:p>
-          <a:p>
-            <a:pPr algn="ctr"/>
-            <a:endParaRPr kumimoji="1" lang="en-US" altLang="ja-JP" sz="900" dirty="0"/>
-          </a:p>
-          <a:p>
-            <a:pPr algn="ctr"/>
-            <a:r>
-              <a:rPr kumimoji="1" lang="ja-JP" altLang="en-US" dirty="0"/>
-              <a:t>水準：</a:t>
-            </a:r>
-            <a:r>
-              <a:rPr kumimoji="1" lang="en-US" altLang="ja-JP" dirty="0"/>
-              <a:t>X,</a:t>
-            </a:r>
-            <a:r>
-              <a:rPr kumimoji="1" lang="ja-JP" altLang="en-US" dirty="0"/>
-              <a:t> </a:t>
-            </a:r>
-            <a:r>
-              <a:rPr kumimoji="1" lang="en-US" altLang="ja-JP" dirty="0"/>
-              <a:t>Y</a:t>
-            </a:r>
-            <a:endParaRPr lang="en-US" altLang="ja-JP" dirty="0"/>
-          </a:p>
-        </p:txBody>
-      </p:sp>
-      <p:cxnSp>
-        <p:nvCxnSpPr>
-          <p:cNvPr id="10" name="直線矢印コネクタ 9">
-            <a:extLst>
-              <a:ext uri="{FF2B5EF4-FFF2-40B4-BE49-F238E27FC236}">
-                <a16:creationId xmlns:a16="http://schemas.microsoft.com/office/drawing/2014/main" id="{3692A9EC-9D53-BBF8-6010-1B3560DD9FC6}"/>
-              </a:ext>
-            </a:extLst>
-          </p:cNvPr>
-          <p:cNvCxnSpPr>
-            <a:cxnSpLocks/>
-            <a:stCxn id="9" idx="3"/>
-            <a:endCxn id="4" idx="1"/>
-          </p:cNvCxnSpPr>
-          <p:nvPr/>
-        </p:nvCxnSpPr>
-        <p:spPr>
-          <a:xfrm flipV="1">
-            <a:off x="4886325" y="3429000"/>
-            <a:ext cx="2047875" cy="1038226"/>
-          </a:xfrm>
-          <a:prstGeom prst="straightConnector1">
-            <a:avLst/>
-          </a:prstGeom>
-          <a:ln>
-            <a:tailEnd type="triangle"/>
-          </a:ln>
-        </p:spPr>
-        <p:style>
-          <a:lnRef idx="2">
-            <a:schemeClr val="accent3">
-              <a:shade val="15000"/>
-            </a:schemeClr>
-          </a:lnRef>
-          <a:fillRef idx="1">
-            <a:schemeClr val="accent3"/>
-          </a:fillRef>
-          <a:effectRef idx="0">
-            <a:schemeClr val="accent3"/>
-          </a:effectRef>
-          <a:fontRef idx="minor">
-            <a:schemeClr val="lt1"/>
-          </a:fontRef>
-        </p:style>
-      </p:cxnSp>
-    </p:spTree>
-    <p:extLst>
-      <p:ext uri="{BB962C8B-B14F-4D97-AF65-F5344CB8AC3E}">
-        <p14:creationId xmlns:p14="http://schemas.microsoft.com/office/powerpoint/2010/main" val="2192949783"/>
       </p:ext>
     </p:extLst>
   </p:cSld>
@@ -11400,4 +12362,299 @@
   <a:objectDefaults/>
   <a:extraClrSchemeLst/>
 </a:theme>
+</file>
+
+<file path=ppt/theme/theme2.xml><?xml version="1.0" encoding="utf-8"?>
+<a:theme xmlns:a="http://schemas.openxmlformats.org/drawingml/2006/main" name="Office テーマ">
+  <a:themeElements>
+    <a:clrScheme name="Office">
+      <a:dk1>
+        <a:sysClr val="windowText" lastClr="000000"/>
+      </a:dk1>
+      <a:lt1>
+        <a:sysClr val="window" lastClr="FFFFFF"/>
+      </a:lt1>
+      <a:dk2>
+        <a:srgbClr val="44546A"/>
+      </a:dk2>
+      <a:lt2>
+        <a:srgbClr val="E7E6E6"/>
+      </a:lt2>
+      <a:accent1>
+        <a:srgbClr val="4472C4"/>
+      </a:accent1>
+      <a:accent2>
+        <a:srgbClr val="ED7D31"/>
+      </a:accent2>
+      <a:accent3>
+        <a:srgbClr val="A5A5A5"/>
+      </a:accent3>
+      <a:accent4>
+        <a:srgbClr val="FFC000"/>
+      </a:accent4>
+      <a:accent5>
+        <a:srgbClr val="5B9BD5"/>
+      </a:accent5>
+      <a:accent6>
+        <a:srgbClr val="70AD47"/>
+      </a:accent6>
+      <a:hlink>
+        <a:srgbClr val="0563C1"/>
+      </a:hlink>
+      <a:folHlink>
+        <a:srgbClr val="954F72"/>
+      </a:folHlink>
+    </a:clrScheme>
+    <a:fontScheme name="Office">
+      <a:majorFont>
+        <a:latin typeface="游ゴシック Light" panose="020F0302020204030204"/>
+        <a:ea typeface=""/>
+        <a:cs typeface=""/>
+        <a:font script="Jpan" typeface="游ゴシック Light"/>
+        <a:font script="Hang" typeface="맑은 고딕"/>
+        <a:font script="Hans" typeface="等线 Light"/>
+        <a:font script="Hant" typeface="新細明體"/>
+        <a:font script="Arab" typeface="Times New Roman"/>
+        <a:font script="Hebr" typeface="Times New Roman"/>
+        <a:font script="Thai" typeface="Angsana New"/>
+        <a:font script="Ethi" typeface="Nyala"/>
+        <a:font script="Beng" typeface="Vrinda"/>
+        <a:font script="Gujr" typeface="Shruti"/>
+        <a:font script="Khmr" typeface="MoolBoran"/>
+        <a:font script="Knda" typeface="Tunga"/>
+        <a:font script="Guru" typeface="Raavi"/>
+        <a:font script="Cans" typeface="Euphemia"/>
+        <a:font script="Cher" typeface="Plantagenet Cherokee"/>
+        <a:font script="Yiii" typeface="Microsoft Yi Baiti"/>
+        <a:font script="Tibt" typeface="Microsoft Himalaya"/>
+        <a:font script="Thaa" typeface="MV Boli"/>
+        <a:font script="Deva" typeface="Mangal"/>
+        <a:font script="Telu" typeface="Gautami"/>
+        <a:font script="Taml" typeface="Latha"/>
+        <a:font script="Syrc" typeface="Estrangelo Edessa"/>
+        <a:font script="Orya" typeface="Kalinga"/>
+        <a:font script="Mlym" typeface="Kartika"/>
+        <a:font script="Laoo" typeface="DokChampa"/>
+        <a:font script="Sinh" typeface="Iskoola Pota"/>
+        <a:font script="Mong" typeface="Mongolian Baiti"/>
+        <a:font script="Viet" typeface="Times New Roman"/>
+        <a:font script="Uigh" typeface="Microsoft Uighur"/>
+        <a:font script="Geor" typeface="Sylfaen"/>
+        <a:font script="Armn" typeface="Arial"/>
+        <a:font script="Bugi" typeface="Leelawadee UI"/>
+        <a:font script="Bopo" typeface="Microsoft JhengHei"/>
+        <a:font script="Java" typeface="Javanese Text"/>
+        <a:font script="Lisu" typeface="Segoe UI"/>
+        <a:font script="Mymr" typeface="Myanmar Text"/>
+        <a:font script="Nkoo" typeface="Ebrima"/>
+        <a:font script="Olck" typeface="Nirmala UI"/>
+        <a:font script="Osma" typeface="Ebrima"/>
+        <a:font script="Phag" typeface="Phagspa"/>
+        <a:font script="Syrn" typeface="Estrangelo Edessa"/>
+        <a:font script="Syrj" typeface="Estrangelo Edessa"/>
+        <a:font script="Syre" typeface="Estrangelo Edessa"/>
+        <a:font script="Sora" typeface="Nirmala UI"/>
+        <a:font script="Tale" typeface="Microsoft Tai Le"/>
+        <a:font script="Talu" typeface="Microsoft New Tai Lue"/>
+        <a:font script="Tfng" typeface="Ebrima"/>
+      </a:majorFont>
+      <a:minorFont>
+        <a:latin typeface="游ゴシック" panose="020F0502020204030204"/>
+        <a:ea typeface=""/>
+        <a:cs typeface=""/>
+        <a:font script="Jpan" typeface="游ゴシック"/>
+        <a:font script="Hang" typeface="맑은 고딕"/>
+        <a:font script="Hans" typeface="等线"/>
+        <a:font script="Hant" typeface="新細明體"/>
+        <a:font script="Arab" typeface="Arial"/>
+        <a:font script="Hebr" typeface="Arial"/>
+        <a:font script="Thai" typeface="Cordia New"/>
+        <a:font script="Ethi" typeface="Nyala"/>
+        <a:font script="Beng" typeface="Vrinda"/>
+        <a:font script="Gujr" typeface="Shruti"/>
+        <a:font script="Khmr" typeface="DaunPenh"/>
+        <a:font script="Knda" typeface="Tunga"/>
+        <a:font script="Guru" typeface="Raavi"/>
+        <a:font script="Cans" typeface="Euphemia"/>
+        <a:font script="Cher" typeface="Plantagenet Cherokee"/>
+        <a:font script="Yiii" typeface="Microsoft Yi Baiti"/>
+        <a:font script="Tibt" typeface="Microsoft Himalaya"/>
+        <a:font script="Thaa" typeface="MV Boli"/>
+        <a:font script="Deva" typeface="Mangal"/>
+        <a:font script="Telu" typeface="Gautami"/>
+        <a:font script="Taml" typeface="Latha"/>
+        <a:font script="Syrc" typeface="Estrangelo Edessa"/>
+        <a:font script="Orya" typeface="Kalinga"/>
+        <a:font script="Mlym" typeface="Kartika"/>
+        <a:font script="Laoo" typeface="DokChampa"/>
+        <a:font script="Sinh" typeface="Iskoola Pota"/>
+        <a:font script="Mong" typeface="Mongolian Baiti"/>
+        <a:font script="Viet" typeface="Arial"/>
+        <a:font script="Uigh" typeface="Microsoft Uighur"/>
+        <a:font script="Geor" typeface="Sylfaen"/>
+        <a:font script="Armn" typeface="Arial"/>
+        <a:font script="Bugi" typeface="Leelawadee UI"/>
+        <a:font script="Bopo" typeface="Microsoft JhengHei"/>
+        <a:font script="Java" typeface="Javanese Text"/>
+        <a:font script="Lisu" typeface="Segoe UI"/>
+        <a:font script="Mymr" typeface="Myanmar Text"/>
+        <a:font script="Nkoo" typeface="Ebrima"/>
+        <a:font script="Olck" typeface="Nirmala UI"/>
+        <a:font script="Osma" typeface="Ebrima"/>
+        <a:font script="Phag" typeface="Phagspa"/>
+        <a:font script="Syrn" typeface="Estrangelo Edessa"/>
+        <a:font script="Syrj" typeface="Estrangelo Edessa"/>
+        <a:font script="Syre" typeface="Estrangelo Edessa"/>
+        <a:font script="Sora" typeface="Nirmala UI"/>
+        <a:font script="Tale" typeface="Microsoft Tai Le"/>
+        <a:font script="Talu" typeface="Microsoft New Tai Lue"/>
+        <a:font script="Tfng" typeface="Ebrima"/>
+      </a:minorFont>
+    </a:fontScheme>
+    <a:fmtScheme name="Office">
+      <a:fillStyleLst>
+        <a:solidFill>
+          <a:schemeClr val="phClr"/>
+        </a:solidFill>
+        <a:gradFill rotWithShape="1">
+          <a:gsLst>
+            <a:gs pos="0">
+              <a:schemeClr val="phClr">
+                <a:lumMod val="110000"/>
+                <a:satMod val="105000"/>
+                <a:tint val="67000"/>
+              </a:schemeClr>
+            </a:gs>
+            <a:gs pos="50000">
+              <a:schemeClr val="phClr">
+                <a:lumMod val="105000"/>
+                <a:satMod val="103000"/>
+                <a:tint val="73000"/>
+              </a:schemeClr>
+            </a:gs>
+            <a:gs pos="100000">
+              <a:schemeClr val="phClr">
+                <a:lumMod val="105000"/>
+                <a:satMod val="109000"/>
+                <a:tint val="81000"/>
+              </a:schemeClr>
+            </a:gs>
+          </a:gsLst>
+          <a:lin ang="5400000" scaled="0"/>
+        </a:gradFill>
+        <a:gradFill rotWithShape="1">
+          <a:gsLst>
+            <a:gs pos="0">
+              <a:schemeClr val="phClr">
+                <a:satMod val="103000"/>
+                <a:lumMod val="102000"/>
+                <a:tint val="94000"/>
+              </a:schemeClr>
+            </a:gs>
+            <a:gs pos="50000">
+              <a:schemeClr val="phClr">
+                <a:satMod val="110000"/>
+                <a:lumMod val="100000"/>
+                <a:shade val="100000"/>
+              </a:schemeClr>
+            </a:gs>
+            <a:gs pos="100000">
+              <a:schemeClr val="phClr">
+                <a:lumMod val="99000"/>
+                <a:satMod val="120000"/>
+                <a:shade val="78000"/>
+              </a:schemeClr>
+            </a:gs>
+          </a:gsLst>
+          <a:lin ang="5400000" scaled="0"/>
+        </a:gradFill>
+      </a:fillStyleLst>
+      <a:lnStyleLst>
+        <a:ln w="6350" cap="flat" cmpd="sng" algn="ctr">
+          <a:solidFill>
+            <a:schemeClr val="phClr"/>
+          </a:solidFill>
+          <a:prstDash val="solid"/>
+          <a:miter lim="800000"/>
+        </a:ln>
+        <a:ln w="12700" cap="flat" cmpd="sng" algn="ctr">
+          <a:solidFill>
+            <a:schemeClr val="phClr"/>
+          </a:solidFill>
+          <a:prstDash val="solid"/>
+          <a:miter lim="800000"/>
+        </a:ln>
+        <a:ln w="19050" cap="flat" cmpd="sng" algn="ctr">
+          <a:solidFill>
+            <a:schemeClr val="phClr"/>
+          </a:solidFill>
+          <a:prstDash val="solid"/>
+          <a:miter lim="800000"/>
+        </a:ln>
+      </a:lnStyleLst>
+      <a:effectStyleLst>
+        <a:effectStyle>
+          <a:effectLst/>
+        </a:effectStyle>
+        <a:effectStyle>
+          <a:effectLst/>
+        </a:effectStyle>
+        <a:effectStyle>
+          <a:effectLst>
+            <a:outerShdw blurRad="57150" dist="19050" dir="5400000" algn="ctr" rotWithShape="0">
+              <a:srgbClr val="000000">
+                <a:alpha val="63000"/>
+              </a:srgbClr>
+            </a:outerShdw>
+          </a:effectLst>
+        </a:effectStyle>
+      </a:effectStyleLst>
+      <a:bgFillStyleLst>
+        <a:solidFill>
+          <a:schemeClr val="phClr"/>
+        </a:solidFill>
+        <a:solidFill>
+          <a:schemeClr val="phClr">
+            <a:tint val="95000"/>
+            <a:satMod val="170000"/>
+          </a:schemeClr>
+        </a:solidFill>
+        <a:gradFill rotWithShape="1">
+          <a:gsLst>
+            <a:gs pos="0">
+              <a:schemeClr val="phClr">
+                <a:tint val="93000"/>
+                <a:satMod val="150000"/>
+                <a:shade val="98000"/>
+                <a:lumMod val="102000"/>
+              </a:schemeClr>
+            </a:gs>
+            <a:gs pos="50000">
+              <a:schemeClr val="phClr">
+                <a:tint val="98000"/>
+                <a:satMod val="130000"/>
+                <a:shade val="90000"/>
+                <a:lumMod val="103000"/>
+              </a:schemeClr>
+            </a:gs>
+            <a:gs pos="100000">
+              <a:schemeClr val="phClr">
+                <a:shade val="63000"/>
+                <a:satMod val="120000"/>
+              </a:schemeClr>
+            </a:gs>
+          </a:gsLst>
+          <a:lin ang="5400000" scaled="0"/>
+        </a:gradFill>
+      </a:bgFillStyleLst>
+    </a:fmtScheme>
+  </a:themeElements>
+  <a:objectDefaults/>
+  <a:extraClrSchemeLst/>
+  <a:extLst>
+    <a:ext uri="{05A4C25C-085E-4340-85A3-A5531E510DB2}">
+      <thm15:themeFamily xmlns:thm15="http://schemas.microsoft.com/office/thememl/2012/main" name="Office Theme" id="{62F939B6-93AF-4DB8-9C6B-D6C7DFDC589F}" vid="{4A3C46E8-61CC-4603-A589-7422A47A8E4A}"/>
+    </a:ext>
+  </a:extLst>
+</a:theme>
 </file>
--- a/Img/AnovaModeling.pptx
+++ b/Img/AnovaModeling.pptx
@@ -5,31 +5,32 @@
     <p:sldMasterId id="2147483660" r:id="rId1"/>
   </p:sldMasterIdLst>
   <p:notesMasterIdLst>
-    <p:notesMasterId r:id="rId24"/>
+    <p:notesMasterId r:id="rId25"/>
   </p:notesMasterIdLst>
   <p:sldIdLst>
     <p:sldId id="274" r:id="rId2"/>
     <p:sldId id="264" r:id="rId3"/>
     <p:sldId id="265" r:id="rId4"/>
     <p:sldId id="277" r:id="rId5"/>
-    <p:sldId id="275" r:id="rId6"/>
-    <p:sldId id="276" r:id="rId7"/>
-    <p:sldId id="256" r:id="rId8"/>
-    <p:sldId id="258" r:id="rId9"/>
-    <p:sldId id="257" r:id="rId10"/>
-    <p:sldId id="259" r:id="rId11"/>
-    <p:sldId id="260" r:id="rId12"/>
-    <p:sldId id="261" r:id="rId13"/>
-    <p:sldId id="262" r:id="rId14"/>
-    <p:sldId id="263" r:id="rId15"/>
-    <p:sldId id="266" r:id="rId16"/>
-    <p:sldId id="267" r:id="rId17"/>
-    <p:sldId id="268" r:id="rId18"/>
-    <p:sldId id="269" r:id="rId19"/>
-    <p:sldId id="270" r:id="rId20"/>
-    <p:sldId id="271" r:id="rId21"/>
-    <p:sldId id="272" r:id="rId22"/>
-    <p:sldId id="273" r:id="rId23"/>
+    <p:sldId id="278" r:id="rId6"/>
+    <p:sldId id="275" r:id="rId7"/>
+    <p:sldId id="276" r:id="rId8"/>
+    <p:sldId id="256" r:id="rId9"/>
+    <p:sldId id="258" r:id="rId10"/>
+    <p:sldId id="257" r:id="rId11"/>
+    <p:sldId id="259" r:id="rId12"/>
+    <p:sldId id="260" r:id="rId13"/>
+    <p:sldId id="261" r:id="rId14"/>
+    <p:sldId id="262" r:id="rId15"/>
+    <p:sldId id="263" r:id="rId16"/>
+    <p:sldId id="266" r:id="rId17"/>
+    <p:sldId id="267" r:id="rId18"/>
+    <p:sldId id="268" r:id="rId19"/>
+    <p:sldId id="269" r:id="rId20"/>
+    <p:sldId id="270" r:id="rId21"/>
+    <p:sldId id="271" r:id="rId22"/>
+    <p:sldId id="272" r:id="rId23"/>
+    <p:sldId id="273" r:id="rId24"/>
   </p:sldIdLst>
   <p:sldSz cx="12192000" cy="6858000"/>
   <p:notesSz cx="6858000" cy="9144000"/>
@@ -440,7 +441,7 @@
           <a:p>
             <a:fld id="{74503653-7382-4EF5-850F-AEDF0B3BD356}" type="datetimeFigureOut">
               <a:rPr kumimoji="1" lang="ja-JP" altLang="en-US" smtClean="0"/>
-              <a:t>2025/1/6</a:t>
+              <a:t>2025/1/7</a:t>
             </a:fld>
             <a:endParaRPr kumimoji="1" lang="ja-JP" altLang="en-US"/>
           </a:p>
@@ -965,7 +966,7 @@
           <a:p>
             <a:fld id="{E3020441-CB21-445C-817D-199401EC5197}" type="datetimeFigureOut">
               <a:rPr kumimoji="1" lang="ja-JP" altLang="en-US" smtClean="0"/>
-              <a:t>2025/1/6</a:t>
+              <a:t>2025/1/7</a:t>
             </a:fld>
             <a:endParaRPr kumimoji="1" lang="ja-JP" altLang="en-US"/>
           </a:p>
@@ -1167,7 +1168,7 @@
           <a:p>
             <a:fld id="{E3020441-CB21-445C-817D-199401EC5197}" type="datetimeFigureOut">
               <a:rPr kumimoji="1" lang="ja-JP" altLang="en-US" smtClean="0"/>
-              <a:t>2025/1/6</a:t>
+              <a:t>2025/1/7</a:t>
             </a:fld>
             <a:endParaRPr kumimoji="1" lang="ja-JP" altLang="en-US"/>
           </a:p>
@@ -1379,7 +1380,7 @@
           <a:p>
             <a:fld id="{E3020441-CB21-445C-817D-199401EC5197}" type="datetimeFigureOut">
               <a:rPr kumimoji="1" lang="ja-JP" altLang="en-US" smtClean="0"/>
-              <a:t>2025/1/6</a:t>
+              <a:t>2025/1/7</a:t>
             </a:fld>
             <a:endParaRPr kumimoji="1" lang="ja-JP" altLang="en-US"/>
           </a:p>
@@ -1581,7 +1582,7 @@
           <a:p>
             <a:fld id="{E3020441-CB21-445C-817D-199401EC5197}" type="datetimeFigureOut">
               <a:rPr kumimoji="1" lang="ja-JP" altLang="en-US" smtClean="0"/>
-              <a:t>2025/1/6</a:t>
+              <a:t>2025/1/7</a:t>
             </a:fld>
             <a:endParaRPr kumimoji="1" lang="ja-JP" altLang="en-US"/>
           </a:p>
@@ -1832,7 +1833,7 @@
           <a:p>
             <a:fld id="{E3020441-CB21-445C-817D-199401EC5197}" type="datetimeFigureOut">
               <a:rPr kumimoji="1" lang="ja-JP" altLang="en-US" smtClean="0"/>
-              <a:t>2025/1/6</a:t>
+              <a:t>2025/1/7</a:t>
             </a:fld>
             <a:endParaRPr kumimoji="1" lang="ja-JP" altLang="en-US"/>
           </a:p>
@@ -2128,7 +2129,7 @@
           <a:p>
             <a:fld id="{E3020441-CB21-445C-817D-199401EC5197}" type="datetimeFigureOut">
               <a:rPr kumimoji="1" lang="ja-JP" altLang="en-US" smtClean="0"/>
-              <a:t>2025/1/6</a:t>
+              <a:t>2025/1/7</a:t>
             </a:fld>
             <a:endParaRPr kumimoji="1" lang="ja-JP" altLang="en-US"/>
           </a:p>
@@ -2539,7 +2540,7 @@
           <a:p>
             <a:fld id="{E3020441-CB21-445C-817D-199401EC5197}" type="datetimeFigureOut">
               <a:rPr kumimoji="1" lang="ja-JP" altLang="en-US" smtClean="0"/>
-              <a:t>2025/1/6</a:t>
+              <a:t>2025/1/7</a:t>
             </a:fld>
             <a:endParaRPr kumimoji="1" lang="ja-JP" altLang="en-US"/>
           </a:p>
@@ -2657,7 +2658,7 @@
           <a:p>
             <a:fld id="{E3020441-CB21-445C-817D-199401EC5197}" type="datetimeFigureOut">
               <a:rPr kumimoji="1" lang="ja-JP" altLang="en-US" smtClean="0"/>
-              <a:t>2025/1/6</a:t>
+              <a:t>2025/1/7</a:t>
             </a:fld>
             <a:endParaRPr kumimoji="1" lang="ja-JP" altLang="en-US"/>
           </a:p>
@@ -2775,7 +2776,7 @@
           <a:p>
             <a:fld id="{E3020441-CB21-445C-817D-199401EC5197}" type="datetimeFigureOut">
               <a:rPr kumimoji="1" lang="ja-JP" altLang="en-US" smtClean="0"/>
-              <a:t>2025/1/6</a:t>
+              <a:t>2025/1/7</a:t>
             </a:fld>
             <a:endParaRPr kumimoji="1" lang="ja-JP" altLang="en-US"/>
           </a:p>
@@ -3091,7 +3092,7 @@
           <a:p>
             <a:fld id="{E3020441-CB21-445C-817D-199401EC5197}" type="datetimeFigureOut">
               <a:rPr kumimoji="1" lang="ja-JP" altLang="en-US" smtClean="0"/>
-              <a:t>2025/1/6</a:t>
+              <a:t>2025/1/7</a:t>
             </a:fld>
             <a:endParaRPr kumimoji="1" lang="ja-JP" altLang="en-US"/>
           </a:p>
@@ -3355,7 +3356,7 @@
           <a:p>
             <a:fld id="{E3020441-CB21-445C-817D-199401EC5197}" type="datetimeFigureOut">
               <a:rPr kumimoji="1" lang="ja-JP" altLang="en-US" smtClean="0"/>
-              <a:t>2025/1/6</a:t>
+              <a:t>2025/1/7</a:t>
             </a:fld>
             <a:endParaRPr kumimoji="1" lang="ja-JP" altLang="en-US"/>
           </a:p>
@@ -3601,7 +3602,7 @@
           <a:p>
             <a:fld id="{E3020441-CB21-445C-817D-199401EC5197}" type="datetimeFigureOut">
               <a:rPr kumimoji="1" lang="ja-JP" altLang="en-US" smtClean="0"/>
-              <a:t>2025/1/6</a:t>
+              <a:t>2025/1/7</a:t>
             </a:fld>
             <a:endParaRPr kumimoji="1" lang="ja-JP" altLang="en-US"/>
           </a:p>
@@ -5369,6 +5370,359 @@
         </p:nvSpPr>
         <p:spPr>
           <a:xfrm>
+            <a:off x="6934200" y="2990850"/>
+            <a:ext cx="2476500" cy="876300"/>
+          </a:xfrm>
+          <a:prstGeom prst="rect">
+            <a:avLst/>
+          </a:prstGeom>
+        </p:spPr>
+        <p:style>
+          <a:lnRef idx="2">
+            <a:schemeClr val="accent3">
+              <a:shade val="15000"/>
+            </a:schemeClr>
+          </a:lnRef>
+          <a:fillRef idx="1">
+            <a:schemeClr val="accent3"/>
+          </a:fillRef>
+          <a:effectRef idx="0">
+            <a:schemeClr val="accent3"/>
+          </a:effectRef>
+          <a:fontRef idx="minor">
+            <a:schemeClr val="lt1"/>
+          </a:fontRef>
+        </p:style>
+        <p:txBody>
+          <a:bodyPr rtlCol="0" anchor="ctr"/>
+          <a:lstStyle/>
+          <a:p>
+            <a:pPr algn="ctr"/>
+            <a:r>
+              <a:rPr kumimoji="1" lang="ja-JP" altLang="en-US" dirty="0"/>
+              <a:t>目的変数：</a:t>
+            </a:r>
+            <a:endParaRPr kumimoji="1" lang="en-US" altLang="ja-JP" dirty="0"/>
+          </a:p>
+          <a:p>
+            <a:pPr algn="ctr"/>
+            <a:r>
+              <a:rPr kumimoji="1" lang="ja-JP" altLang="en-US" dirty="0"/>
+              <a:t>厚揚げ購入頻度</a:t>
+            </a:r>
+          </a:p>
+        </p:txBody>
+      </p:sp>
+      <p:sp>
+        <p:nvSpPr>
+          <p:cNvPr id="5" name="正方形/長方形 4">
+            <a:extLst>
+              <a:ext uri="{FF2B5EF4-FFF2-40B4-BE49-F238E27FC236}">
+                <a16:creationId xmlns:a16="http://schemas.microsoft.com/office/drawing/2014/main" id="{AC2650BC-2D2B-5AF3-86DA-8F1504AF3245}"/>
+              </a:ext>
+            </a:extLst>
+          </p:cNvPr>
+          <p:cNvSpPr/>
+          <p:nvPr/>
+        </p:nvSpPr>
+        <p:spPr>
+          <a:xfrm>
+            <a:off x="2514600" y="1695449"/>
+            <a:ext cx="2371725" cy="1485900"/>
+          </a:xfrm>
+          <a:prstGeom prst="rect">
+            <a:avLst/>
+          </a:prstGeom>
+        </p:spPr>
+        <p:style>
+          <a:lnRef idx="2">
+            <a:schemeClr val="accent3">
+              <a:shade val="15000"/>
+            </a:schemeClr>
+          </a:lnRef>
+          <a:fillRef idx="1">
+            <a:schemeClr val="accent3"/>
+          </a:fillRef>
+          <a:effectRef idx="0">
+            <a:schemeClr val="accent3"/>
+          </a:effectRef>
+          <a:fontRef idx="minor">
+            <a:schemeClr val="lt1"/>
+          </a:fontRef>
+        </p:style>
+        <p:txBody>
+          <a:bodyPr rtlCol="0" anchor="ctr"/>
+          <a:lstStyle/>
+          <a:p>
+            <a:pPr algn="ctr"/>
+            <a:r>
+              <a:rPr kumimoji="1" lang="ja-JP" altLang="en-US" dirty="0"/>
+              <a:t>説明変数</a:t>
+            </a:r>
+            <a:r>
+              <a:rPr kumimoji="1" lang="en-US" altLang="ja-JP" dirty="0"/>
+              <a:t>1</a:t>
+            </a:r>
+            <a:r>
+              <a:rPr kumimoji="1" lang="ja-JP" altLang="en-US" dirty="0"/>
+              <a:t>：</a:t>
+            </a:r>
+            <a:br>
+              <a:rPr kumimoji="1" lang="en-US" altLang="ja-JP" dirty="0"/>
+            </a:br>
+            <a:r>
+              <a:rPr kumimoji="1" lang="ja-JP" altLang="en-US" dirty="0"/>
+              <a:t>パンの種類</a:t>
+            </a:r>
+            <a:endParaRPr kumimoji="1" lang="en-US" altLang="ja-JP" dirty="0"/>
+          </a:p>
+          <a:p>
+            <a:pPr algn="ctr"/>
+            <a:endParaRPr kumimoji="1" lang="en-US" altLang="ja-JP" dirty="0"/>
+          </a:p>
+          <a:p>
+            <a:pPr algn="ctr"/>
+            <a:r>
+              <a:rPr kumimoji="1" lang="ja-JP" altLang="en-US" dirty="0"/>
+              <a:t>水準：</a:t>
+            </a:r>
+            <a:r>
+              <a:rPr kumimoji="1" lang="en-US" altLang="ja-JP" dirty="0"/>
+              <a:t>A</a:t>
+            </a:r>
+            <a:r>
+              <a:rPr lang="en-US" altLang="ja-JP" dirty="0"/>
+              <a:t>,B,C</a:t>
+            </a:r>
+          </a:p>
+        </p:txBody>
+      </p:sp>
+      <p:cxnSp>
+        <p:nvCxnSpPr>
+          <p:cNvPr id="6" name="直線矢印コネクタ 5">
+            <a:extLst>
+              <a:ext uri="{FF2B5EF4-FFF2-40B4-BE49-F238E27FC236}">
+                <a16:creationId xmlns:a16="http://schemas.microsoft.com/office/drawing/2014/main" id="{78716ED2-DF3B-D92E-7BD8-3AA09D91A477}"/>
+              </a:ext>
+            </a:extLst>
+          </p:cNvPr>
+          <p:cNvCxnSpPr>
+            <a:cxnSpLocks/>
+            <a:stCxn id="5" idx="3"/>
+            <a:endCxn id="4" idx="1"/>
+          </p:cNvCxnSpPr>
+          <p:nvPr/>
+        </p:nvCxnSpPr>
+        <p:spPr>
+          <a:xfrm>
+            <a:off x="4886325" y="2438399"/>
+            <a:ext cx="2047875" cy="990601"/>
+          </a:xfrm>
+          <a:prstGeom prst="straightConnector1">
+            <a:avLst/>
+          </a:prstGeom>
+          <a:ln>
+            <a:tailEnd type="triangle"/>
+          </a:ln>
+        </p:spPr>
+        <p:style>
+          <a:lnRef idx="2">
+            <a:schemeClr val="accent3">
+              <a:shade val="15000"/>
+            </a:schemeClr>
+          </a:lnRef>
+          <a:fillRef idx="1">
+            <a:schemeClr val="accent3"/>
+          </a:fillRef>
+          <a:effectRef idx="0">
+            <a:schemeClr val="accent3"/>
+          </a:effectRef>
+          <a:fontRef idx="minor">
+            <a:schemeClr val="lt1"/>
+          </a:fontRef>
+        </p:style>
+      </p:cxnSp>
+      <p:sp>
+        <p:nvSpPr>
+          <p:cNvPr id="9" name="正方形/長方形 8">
+            <a:extLst>
+              <a:ext uri="{FF2B5EF4-FFF2-40B4-BE49-F238E27FC236}">
+                <a16:creationId xmlns:a16="http://schemas.microsoft.com/office/drawing/2014/main" id="{CBC8A939-E168-8640-4151-6E3418F38040}"/>
+              </a:ext>
+            </a:extLst>
+          </p:cNvPr>
+          <p:cNvSpPr/>
+          <p:nvPr/>
+        </p:nvSpPr>
+        <p:spPr>
+          <a:xfrm>
+            <a:off x="2514600" y="3724276"/>
+            <a:ext cx="2371725" cy="1485900"/>
+          </a:xfrm>
+          <a:prstGeom prst="rect">
+            <a:avLst/>
+          </a:prstGeom>
+        </p:spPr>
+        <p:style>
+          <a:lnRef idx="2">
+            <a:schemeClr val="accent4">
+              <a:shade val="15000"/>
+            </a:schemeClr>
+          </a:lnRef>
+          <a:fillRef idx="1">
+            <a:schemeClr val="accent4"/>
+          </a:fillRef>
+          <a:effectRef idx="0">
+            <a:schemeClr val="accent4"/>
+          </a:effectRef>
+          <a:fontRef idx="minor">
+            <a:schemeClr val="lt1"/>
+          </a:fontRef>
+        </p:style>
+        <p:txBody>
+          <a:bodyPr rtlCol="0" anchor="ctr"/>
+          <a:lstStyle/>
+          <a:p>
+            <a:pPr algn="ctr"/>
+            <a:r>
+              <a:rPr kumimoji="1" lang="ja-JP" altLang="en-US" dirty="0"/>
+              <a:t>説明変数</a:t>
+            </a:r>
+            <a:r>
+              <a:rPr kumimoji="1" lang="en-US" altLang="ja-JP" dirty="0"/>
+              <a:t>2</a:t>
+            </a:r>
+            <a:r>
+              <a:rPr kumimoji="1" lang="ja-JP" altLang="en-US" dirty="0"/>
+              <a:t>：</a:t>
+            </a:r>
+            <a:br>
+              <a:rPr kumimoji="1" lang="en-US" altLang="ja-JP" dirty="0"/>
+            </a:br>
+            <a:r>
+              <a:rPr kumimoji="1" lang="ja-JP" altLang="en-US" dirty="0"/>
+              <a:t>被験者</a:t>
+            </a:r>
+            <a:r>
+              <a:rPr kumimoji="1" lang="en-US" altLang="ja-JP" dirty="0"/>
+              <a:t>No.</a:t>
+            </a:r>
+          </a:p>
+          <a:p>
+            <a:pPr algn="ctr"/>
+            <a:endParaRPr kumimoji="1" lang="en-US" altLang="ja-JP" dirty="0"/>
+          </a:p>
+          <a:p>
+            <a:pPr algn="ctr"/>
+            <a:r>
+              <a:rPr kumimoji="1" lang="ja-JP" altLang="en-US" dirty="0"/>
+              <a:t>水準：</a:t>
+            </a:r>
+            <a:r>
+              <a:rPr kumimoji="1" lang="en-US" altLang="ja-JP" dirty="0"/>
+              <a:t>1,2,</a:t>
+            </a:r>
+            <a:r>
+              <a:rPr kumimoji="1" lang="ja-JP" altLang="en-US" dirty="0"/>
+              <a:t>・・・</a:t>
+            </a:r>
+            <a:r>
+              <a:rPr kumimoji="1" lang="en-US" altLang="ja-JP" dirty="0"/>
+              <a:t>20</a:t>
+            </a:r>
+            <a:endParaRPr lang="en-US" altLang="ja-JP" dirty="0"/>
+          </a:p>
+        </p:txBody>
+      </p:sp>
+      <p:cxnSp>
+        <p:nvCxnSpPr>
+          <p:cNvPr id="10" name="直線矢印コネクタ 9">
+            <a:extLst>
+              <a:ext uri="{FF2B5EF4-FFF2-40B4-BE49-F238E27FC236}">
+                <a16:creationId xmlns:a16="http://schemas.microsoft.com/office/drawing/2014/main" id="{3692A9EC-9D53-BBF8-6010-1B3560DD9FC6}"/>
+              </a:ext>
+            </a:extLst>
+          </p:cNvPr>
+          <p:cNvCxnSpPr>
+            <a:cxnSpLocks/>
+            <a:stCxn id="9" idx="3"/>
+            <a:endCxn id="4" idx="1"/>
+          </p:cNvCxnSpPr>
+          <p:nvPr/>
+        </p:nvCxnSpPr>
+        <p:spPr>
+          <a:xfrm flipV="1">
+            <a:off x="4886325" y="3429000"/>
+            <a:ext cx="2047875" cy="1038226"/>
+          </a:xfrm>
+          <a:prstGeom prst="straightConnector1">
+            <a:avLst/>
+          </a:prstGeom>
+          <a:ln>
+            <a:tailEnd type="triangle"/>
+          </a:ln>
+        </p:spPr>
+        <p:style>
+          <a:lnRef idx="2">
+            <a:schemeClr val="accent3">
+              <a:shade val="15000"/>
+            </a:schemeClr>
+          </a:lnRef>
+          <a:fillRef idx="1">
+            <a:schemeClr val="accent3"/>
+          </a:fillRef>
+          <a:effectRef idx="0">
+            <a:schemeClr val="accent3"/>
+          </a:effectRef>
+          <a:fontRef idx="minor">
+            <a:schemeClr val="lt1"/>
+          </a:fontRef>
+        </p:style>
+      </p:cxnSp>
+    </p:spTree>
+    <p:extLst>
+      <p:ext uri="{BB962C8B-B14F-4D97-AF65-F5344CB8AC3E}">
+        <p14:creationId xmlns:p14="http://schemas.microsoft.com/office/powerpoint/2010/main" val="1241106311"/>
+      </p:ext>
+    </p:extLst>
+  </p:cSld>
+  <p:clrMapOvr>
+    <a:masterClrMapping/>
+  </p:clrMapOvr>
+</p:sld>
+</file>
+
+<file path=ppt/slides/slide11.xml><?xml version="1.0" encoding="utf-8"?>
+<p:sld xmlns:a="http://schemas.openxmlformats.org/drawingml/2006/main" xmlns:r="http://schemas.openxmlformats.org/officeDocument/2006/relationships" xmlns:p="http://schemas.openxmlformats.org/presentationml/2006/main">
+  <p:cSld>
+    <p:spTree>
+      <p:nvGrpSpPr>
+        <p:cNvPr id="1" name=""/>
+        <p:cNvGrpSpPr/>
+        <p:nvPr/>
+      </p:nvGrpSpPr>
+      <p:grpSpPr>
+        <a:xfrm>
+          <a:off x="0" y="0"/>
+          <a:ext cx="0" cy="0"/>
+          <a:chOff x="0" y="0"/>
+          <a:chExt cx="0" cy="0"/>
+        </a:xfrm>
+      </p:grpSpPr>
+      <p:sp>
+        <p:nvSpPr>
+          <p:cNvPr id="4" name="正方形/長方形 3">
+            <a:extLst>
+              <a:ext uri="{FF2B5EF4-FFF2-40B4-BE49-F238E27FC236}">
+                <a16:creationId xmlns:a16="http://schemas.microsoft.com/office/drawing/2014/main" id="{D1E12261-89B1-F2A3-34A0-BBE7B31A48CA}"/>
+              </a:ext>
+            </a:extLst>
+          </p:cNvPr>
+          <p:cNvSpPr/>
+          <p:nvPr/>
+        </p:nvSpPr>
+        <p:spPr>
+          <a:xfrm>
             <a:off x="6934200" y="2916936"/>
             <a:ext cx="2476500" cy="1024128"/>
           </a:xfrm>
@@ -5697,7 +6051,7 @@
 </p:sld>
 </file>
 
-<file path=ppt/slides/slide11.xml><?xml version="1.0" encoding="utf-8"?>
+<file path=ppt/slides/slide12.xml><?xml version="1.0" encoding="utf-8"?>
 <p:sld xmlns:a="http://schemas.openxmlformats.org/drawingml/2006/main" xmlns:r="http://schemas.openxmlformats.org/officeDocument/2006/relationships" xmlns:p="http://schemas.openxmlformats.org/presentationml/2006/main">
   <p:cSld>
     <p:spTree>
@@ -6295,7 +6649,7 @@
 </p:sld>
 </file>
 
-<file path=ppt/slides/slide12.xml><?xml version="1.0" encoding="utf-8"?>
+<file path=ppt/slides/slide13.xml><?xml version="1.0" encoding="utf-8"?>
 <p:sld xmlns:a="http://schemas.openxmlformats.org/drawingml/2006/main" xmlns:r="http://schemas.openxmlformats.org/officeDocument/2006/relationships" xmlns:p="http://schemas.openxmlformats.org/presentationml/2006/main">
   <p:cSld>
     <p:spTree>
@@ -6793,7 +7147,7 @@
 </p:sld>
 </file>
 
-<file path=ppt/slides/slide13.xml><?xml version="1.0" encoding="utf-8"?>
+<file path=ppt/slides/slide14.xml><?xml version="1.0" encoding="utf-8"?>
 <p:sld xmlns:a="http://schemas.openxmlformats.org/drawingml/2006/main" xmlns:r="http://schemas.openxmlformats.org/officeDocument/2006/relationships" xmlns:p="http://schemas.openxmlformats.org/presentationml/2006/main">
   <p:cSld>
     <p:spTree>
@@ -7273,7 +7627,7 @@
 </p:sld>
 </file>
 
-<file path=ppt/slides/slide14.xml><?xml version="1.0" encoding="utf-8"?>
+<file path=ppt/slides/slide15.xml><?xml version="1.0" encoding="utf-8"?>
 <p:sld xmlns:a="http://schemas.openxmlformats.org/drawingml/2006/main" xmlns:r="http://schemas.openxmlformats.org/officeDocument/2006/relationships" xmlns:p="http://schemas.openxmlformats.org/presentationml/2006/main">
   <p:cSld>
     <p:spTree>
@@ -7952,7 +8306,7 @@
 </p:sld>
 </file>
 
-<file path=ppt/slides/slide15.xml><?xml version="1.0" encoding="utf-8"?>
+<file path=ppt/slides/slide16.xml><?xml version="1.0" encoding="utf-8"?>
 <p:sld xmlns:a="http://schemas.openxmlformats.org/drawingml/2006/main" xmlns:r="http://schemas.openxmlformats.org/officeDocument/2006/relationships" xmlns:p="http://schemas.openxmlformats.org/presentationml/2006/main">
   <p:cSld>
     <p:spTree>
@@ -8032,104 +8386,6 @@
     <p:extLst>
       <p:ext uri="{BB962C8B-B14F-4D97-AF65-F5344CB8AC3E}">
         <p14:creationId xmlns:p14="http://schemas.microsoft.com/office/powerpoint/2010/main" val="3106651656"/>
-      </p:ext>
-    </p:extLst>
-  </p:cSld>
-  <p:clrMapOvr>
-    <a:masterClrMapping/>
-  </p:clrMapOvr>
-</p:sld>
-</file>
-
-<file path=ppt/slides/slide16.xml><?xml version="1.0" encoding="utf-8"?>
-<p:sld xmlns:a="http://schemas.openxmlformats.org/drawingml/2006/main" xmlns:r="http://schemas.openxmlformats.org/officeDocument/2006/relationships" xmlns:p="http://schemas.openxmlformats.org/presentationml/2006/main">
-  <p:cSld>
-    <p:spTree>
-      <p:nvGrpSpPr>
-        <p:cNvPr id="1" name=""/>
-        <p:cNvGrpSpPr/>
-        <p:nvPr/>
-      </p:nvGrpSpPr>
-      <p:grpSpPr>
-        <a:xfrm>
-          <a:off x="0" y="0"/>
-          <a:ext cx="0" cy="0"/>
-          <a:chOff x="0" y="0"/>
-          <a:chExt cx="0" cy="0"/>
-        </a:xfrm>
-      </p:grpSpPr>
-      <p:sp>
-        <p:nvSpPr>
-          <p:cNvPr id="2" name="タイトル 1">
-            <a:extLst>
-              <a:ext uri="{FF2B5EF4-FFF2-40B4-BE49-F238E27FC236}">
-                <a16:creationId xmlns:a16="http://schemas.microsoft.com/office/drawing/2014/main" id="{E90A3F46-1EED-5E3A-163E-0B3B7CB9F129}"/>
-              </a:ext>
-            </a:extLst>
-          </p:cNvPr>
-          <p:cNvSpPr>
-            <a:spLocks noGrp="1"/>
-          </p:cNvSpPr>
-          <p:nvPr>
-            <p:ph type="title"/>
-          </p:nvPr>
-        </p:nvSpPr>
-        <p:spPr/>
-        <p:txBody>
-          <a:bodyPr/>
-          <a:lstStyle/>
-          <a:p>
-            <a:r>
-              <a:rPr kumimoji="1" lang="ja-JP" altLang="en-US" dirty="0"/>
-              <a:t>相関</a:t>
-            </a:r>
-            <a:r>
-              <a:rPr kumimoji="1" lang="en-US" altLang="ja-JP" dirty="0"/>
-              <a:t>0.200</a:t>
-            </a:r>
-            <a:br>
-              <a:rPr kumimoji="1" lang="en-US" altLang="ja-JP" dirty="0"/>
-            </a:br>
-            <a:endParaRPr kumimoji="1" lang="ja-JP" altLang="en-US" dirty="0"/>
-          </a:p>
-        </p:txBody>
-      </p:sp>
-      <p:pic>
-        <p:nvPicPr>
-          <p:cNvPr id="4" name="コンテンツ プレースホルダー 3">
-            <a:extLst>
-              <a:ext uri="{FF2B5EF4-FFF2-40B4-BE49-F238E27FC236}">
-                <a16:creationId xmlns:a16="http://schemas.microsoft.com/office/drawing/2014/main" id="{3904CA60-7C01-0FD0-E53C-5A529A43F63D}"/>
-              </a:ext>
-            </a:extLst>
-          </p:cNvPr>
-          <p:cNvPicPr>
-            <a:picLocks noGrp="1" noChangeAspect="1"/>
-          </p:cNvPicPr>
-          <p:nvPr>
-            <p:ph idx="1"/>
-          </p:nvPr>
-        </p:nvPicPr>
-        <p:blipFill>
-          <a:blip r:embed="rId2"/>
-          <a:stretch>
-            <a:fillRect/>
-          </a:stretch>
-        </p:blipFill>
-        <p:spPr>
-          <a:xfrm>
-            <a:off x="3657642" y="2132835"/>
-            <a:ext cx="4889416" cy="3743268"/>
-          </a:xfrm>
-          <a:prstGeom prst="rect">
-            <a:avLst/>
-          </a:prstGeom>
-        </p:spPr>
-      </p:pic>
-    </p:spTree>
-    <p:extLst>
-      <p:ext uri="{BB962C8B-B14F-4D97-AF65-F5344CB8AC3E}">
-        <p14:creationId xmlns:p14="http://schemas.microsoft.com/office/powerpoint/2010/main" val="1624990458"/>
       </p:ext>
     </p:extLst>
   </p:cSld>
@@ -8161,7 +8417,7 @@
           <p:cNvPr id="2" name="タイトル 1">
             <a:extLst>
               <a:ext uri="{FF2B5EF4-FFF2-40B4-BE49-F238E27FC236}">
-                <a16:creationId xmlns:a16="http://schemas.microsoft.com/office/drawing/2014/main" id="{424D4A5E-223E-8982-C14E-80509BE1BD07}"/>
+                <a16:creationId xmlns:a16="http://schemas.microsoft.com/office/drawing/2014/main" id="{E90A3F46-1EED-5E3A-163E-0B3B7CB9F129}"/>
               </a:ext>
             </a:extLst>
           </p:cNvPr>
@@ -8183,18 +8439,21 @@
             </a:r>
             <a:r>
               <a:rPr kumimoji="1" lang="en-US" altLang="ja-JP" dirty="0"/>
-              <a:t>0.441</a:t>
-            </a:r>
+              <a:t>0.200</a:t>
+            </a:r>
+            <a:br>
+              <a:rPr kumimoji="1" lang="en-US" altLang="ja-JP" dirty="0"/>
+            </a:br>
             <a:endParaRPr kumimoji="1" lang="ja-JP" altLang="en-US" dirty="0"/>
           </a:p>
         </p:txBody>
       </p:sp>
       <p:pic>
         <p:nvPicPr>
-          <p:cNvPr id="5" name="コンテンツ プレースホルダー 4">
+          <p:cNvPr id="4" name="コンテンツ プレースホルダー 3">
             <a:extLst>
               <a:ext uri="{FF2B5EF4-FFF2-40B4-BE49-F238E27FC236}">
-                <a16:creationId xmlns:a16="http://schemas.microsoft.com/office/drawing/2014/main" id="{F75D3519-7909-7EAE-2E9B-73460C4447BC}"/>
+                <a16:creationId xmlns:a16="http://schemas.microsoft.com/office/drawing/2014/main" id="{3904CA60-7C01-0FD0-E53C-5A529A43F63D}"/>
               </a:ext>
             </a:extLst>
           </p:cNvPr>
@@ -8224,7 +8483,7 @@
     </p:spTree>
     <p:extLst>
       <p:ext uri="{BB962C8B-B14F-4D97-AF65-F5344CB8AC3E}">
-        <p14:creationId xmlns:p14="http://schemas.microsoft.com/office/powerpoint/2010/main" val="678897031"/>
+        <p14:creationId xmlns:p14="http://schemas.microsoft.com/office/powerpoint/2010/main" val="1624990458"/>
       </p:ext>
     </p:extLst>
   </p:cSld>
@@ -8256,7 +8515,7 @@
           <p:cNvPr id="2" name="タイトル 1">
             <a:extLst>
               <a:ext uri="{FF2B5EF4-FFF2-40B4-BE49-F238E27FC236}">
-                <a16:creationId xmlns:a16="http://schemas.microsoft.com/office/drawing/2014/main" id="{078590EC-3551-7798-D26C-ACB846F74B4F}"/>
+                <a16:creationId xmlns:a16="http://schemas.microsoft.com/office/drawing/2014/main" id="{424D4A5E-223E-8982-C14E-80509BE1BD07}"/>
               </a:ext>
             </a:extLst>
           </p:cNvPr>
@@ -8278,7 +8537,7 @@
             </a:r>
             <a:r>
               <a:rPr kumimoji="1" lang="en-US" altLang="ja-JP" dirty="0"/>
-              <a:t>0.542</a:t>
+              <a:t>0.441</a:t>
             </a:r>
             <a:endParaRPr kumimoji="1" lang="ja-JP" altLang="en-US" dirty="0"/>
           </a:p>
@@ -8286,10 +8545,10 @@
       </p:sp>
       <p:pic>
         <p:nvPicPr>
-          <p:cNvPr id="4" name="コンテンツ プレースホルダー 3">
+          <p:cNvPr id="5" name="コンテンツ プレースホルダー 4">
             <a:extLst>
               <a:ext uri="{FF2B5EF4-FFF2-40B4-BE49-F238E27FC236}">
-                <a16:creationId xmlns:a16="http://schemas.microsoft.com/office/drawing/2014/main" id="{8F9D458B-836E-CC07-37D7-241DBA03244B}"/>
+                <a16:creationId xmlns:a16="http://schemas.microsoft.com/office/drawing/2014/main" id="{F75D3519-7909-7EAE-2E9B-73460C4447BC}"/>
               </a:ext>
             </a:extLst>
           </p:cNvPr>
@@ -8319,7 +8578,7 @@
     </p:spTree>
     <p:extLst>
       <p:ext uri="{BB962C8B-B14F-4D97-AF65-F5344CB8AC3E}">
-        <p14:creationId xmlns:p14="http://schemas.microsoft.com/office/powerpoint/2010/main" val="3981072813"/>
+        <p14:creationId xmlns:p14="http://schemas.microsoft.com/office/powerpoint/2010/main" val="678897031"/>
       </p:ext>
     </p:extLst>
   </p:cSld>
@@ -8351,7 +8610,7 @@
           <p:cNvPr id="2" name="タイトル 1">
             <a:extLst>
               <a:ext uri="{FF2B5EF4-FFF2-40B4-BE49-F238E27FC236}">
-                <a16:creationId xmlns:a16="http://schemas.microsoft.com/office/drawing/2014/main" id="{408B8A56-D7B0-32F3-915D-088686A1CFE1}"/>
+                <a16:creationId xmlns:a16="http://schemas.microsoft.com/office/drawing/2014/main" id="{078590EC-3551-7798-D26C-ACB846F74B4F}"/>
               </a:ext>
             </a:extLst>
           </p:cNvPr>
@@ -8373,21 +8632,18 @@
             </a:r>
             <a:r>
               <a:rPr kumimoji="1" lang="en-US" altLang="ja-JP" dirty="0"/>
-              <a:t>0.712</a:t>
-            </a:r>
-            <a:br>
-              <a:rPr kumimoji="1" lang="en-US" altLang="ja-JP" dirty="0"/>
-            </a:br>
+              <a:t>0.542</a:t>
+            </a:r>
             <a:endParaRPr kumimoji="1" lang="ja-JP" altLang="en-US" dirty="0"/>
           </a:p>
         </p:txBody>
       </p:sp>
       <p:pic>
         <p:nvPicPr>
-          <p:cNvPr id="5" name="コンテンツ プレースホルダー 4">
+          <p:cNvPr id="4" name="コンテンツ プレースホルダー 3">
             <a:extLst>
               <a:ext uri="{FF2B5EF4-FFF2-40B4-BE49-F238E27FC236}">
-                <a16:creationId xmlns:a16="http://schemas.microsoft.com/office/drawing/2014/main" id="{424F2261-F694-769C-97BE-344F1E103D80}"/>
+                <a16:creationId xmlns:a16="http://schemas.microsoft.com/office/drawing/2014/main" id="{8F9D458B-836E-CC07-37D7-241DBA03244B}"/>
               </a:ext>
             </a:extLst>
           </p:cNvPr>
@@ -8417,7 +8673,7 @@
     </p:spTree>
     <p:extLst>
       <p:ext uri="{BB962C8B-B14F-4D97-AF65-F5344CB8AC3E}">
-        <p14:creationId xmlns:p14="http://schemas.microsoft.com/office/powerpoint/2010/main" val="1599585600"/>
+        <p14:creationId xmlns:p14="http://schemas.microsoft.com/office/powerpoint/2010/main" val="3981072813"/>
       </p:ext>
     </p:extLst>
   </p:cSld>
@@ -8549,7 +8805,7 @@
           <p:cNvPr id="2" name="タイトル 1">
             <a:extLst>
               <a:ext uri="{FF2B5EF4-FFF2-40B4-BE49-F238E27FC236}">
-                <a16:creationId xmlns:a16="http://schemas.microsoft.com/office/drawing/2014/main" id="{B5825973-7C3A-7DEF-97B0-8EB6A8D4B61D}"/>
+                <a16:creationId xmlns:a16="http://schemas.microsoft.com/office/drawing/2014/main" id="{408B8A56-D7B0-32F3-915D-088686A1CFE1}"/>
               </a:ext>
             </a:extLst>
           </p:cNvPr>
@@ -8566,37 +8822,26 @@
           <a:lstStyle/>
           <a:p>
             <a:r>
-              <a:rPr lang="ja-JP" altLang="en-US" sz="1800" b="0" i="0" u="none" strike="noStrike" dirty="0">
-                <a:solidFill>
-                  <a:srgbClr val="000000"/>
-                </a:solidFill>
-                <a:effectLst/>
-                <a:latin typeface="游ゴシック" panose="020B0400000000000000" pitchFamily="50" charset="-128"/>
-                <a:ea typeface="游ゴシック" panose="020B0400000000000000" pitchFamily="50" charset="-128"/>
-              </a:rPr>
+              <a:rPr kumimoji="1" lang="ja-JP" altLang="en-US" dirty="0"/>
               <a:t>相関</a:t>
             </a:r>
             <a:r>
-              <a:rPr lang="en-US" altLang="ja-JP" sz="1800" b="0" i="0" u="none" strike="noStrike" dirty="0">
-                <a:solidFill>
-                  <a:srgbClr val="000000"/>
-                </a:solidFill>
-                <a:effectLst/>
-                <a:latin typeface="游ゴシック" panose="020B0400000000000000" pitchFamily="50" charset="-128"/>
-                <a:ea typeface="游ゴシック" panose="020B0400000000000000" pitchFamily="50" charset="-128"/>
-              </a:rPr>
-              <a:t>0.905</a:t>
-            </a:r>
+              <a:rPr kumimoji="1" lang="en-US" altLang="ja-JP" dirty="0"/>
+              <a:t>0.712</a:t>
+            </a:r>
+            <a:br>
+              <a:rPr kumimoji="1" lang="en-US" altLang="ja-JP" dirty="0"/>
+            </a:br>
             <a:endParaRPr kumimoji="1" lang="ja-JP" altLang="en-US" dirty="0"/>
           </a:p>
         </p:txBody>
       </p:sp>
       <p:pic>
         <p:nvPicPr>
-          <p:cNvPr id="4" name="コンテンツ プレースホルダー 3">
+          <p:cNvPr id="5" name="コンテンツ プレースホルダー 4">
             <a:extLst>
               <a:ext uri="{FF2B5EF4-FFF2-40B4-BE49-F238E27FC236}">
-                <a16:creationId xmlns:a16="http://schemas.microsoft.com/office/drawing/2014/main" id="{341D7BD3-E56B-8269-F527-303B94AF8C6B}"/>
+                <a16:creationId xmlns:a16="http://schemas.microsoft.com/office/drawing/2014/main" id="{424F2261-F694-769C-97BE-344F1E103D80}"/>
               </a:ext>
             </a:extLst>
           </p:cNvPr>
@@ -8626,7 +8871,7 @@
     </p:spTree>
     <p:extLst>
       <p:ext uri="{BB962C8B-B14F-4D97-AF65-F5344CB8AC3E}">
-        <p14:creationId xmlns:p14="http://schemas.microsoft.com/office/powerpoint/2010/main" val="3867585930"/>
+        <p14:creationId xmlns:p14="http://schemas.microsoft.com/office/powerpoint/2010/main" val="1599585600"/>
       </p:ext>
     </p:extLst>
   </p:cSld>
@@ -8655,6 +8900,115 @@
       </p:grpSpPr>
       <p:sp>
         <p:nvSpPr>
+          <p:cNvPr id="2" name="タイトル 1">
+            <a:extLst>
+              <a:ext uri="{FF2B5EF4-FFF2-40B4-BE49-F238E27FC236}">
+                <a16:creationId xmlns:a16="http://schemas.microsoft.com/office/drawing/2014/main" id="{B5825973-7C3A-7DEF-97B0-8EB6A8D4B61D}"/>
+              </a:ext>
+            </a:extLst>
+          </p:cNvPr>
+          <p:cNvSpPr>
+            <a:spLocks noGrp="1"/>
+          </p:cNvSpPr>
+          <p:nvPr>
+            <p:ph type="title"/>
+          </p:nvPr>
+        </p:nvSpPr>
+        <p:spPr/>
+        <p:txBody>
+          <a:bodyPr/>
+          <a:lstStyle/>
+          <a:p>
+            <a:r>
+              <a:rPr lang="ja-JP" altLang="en-US" sz="1800" b="0" i="0" u="none" strike="noStrike" dirty="0">
+                <a:solidFill>
+                  <a:srgbClr val="000000"/>
+                </a:solidFill>
+                <a:effectLst/>
+                <a:latin typeface="游ゴシック" panose="020B0400000000000000" pitchFamily="50" charset="-128"/>
+                <a:ea typeface="游ゴシック" panose="020B0400000000000000" pitchFamily="50" charset="-128"/>
+              </a:rPr>
+              <a:t>相関</a:t>
+            </a:r>
+            <a:r>
+              <a:rPr lang="en-US" altLang="ja-JP" sz="1800" b="0" i="0" u="none" strike="noStrike" dirty="0">
+                <a:solidFill>
+                  <a:srgbClr val="000000"/>
+                </a:solidFill>
+                <a:effectLst/>
+                <a:latin typeface="游ゴシック" panose="020B0400000000000000" pitchFamily="50" charset="-128"/>
+                <a:ea typeface="游ゴシック" panose="020B0400000000000000" pitchFamily="50" charset="-128"/>
+              </a:rPr>
+              <a:t>0.905</a:t>
+            </a:r>
+            <a:endParaRPr kumimoji="1" lang="ja-JP" altLang="en-US" dirty="0"/>
+          </a:p>
+        </p:txBody>
+      </p:sp>
+      <p:pic>
+        <p:nvPicPr>
+          <p:cNvPr id="4" name="コンテンツ プレースホルダー 3">
+            <a:extLst>
+              <a:ext uri="{FF2B5EF4-FFF2-40B4-BE49-F238E27FC236}">
+                <a16:creationId xmlns:a16="http://schemas.microsoft.com/office/drawing/2014/main" id="{341D7BD3-E56B-8269-F527-303B94AF8C6B}"/>
+              </a:ext>
+            </a:extLst>
+          </p:cNvPr>
+          <p:cNvPicPr>
+            <a:picLocks noGrp="1" noChangeAspect="1"/>
+          </p:cNvPicPr>
+          <p:nvPr>
+            <p:ph idx="1"/>
+          </p:nvPr>
+        </p:nvPicPr>
+        <p:blipFill>
+          <a:blip r:embed="rId2"/>
+          <a:stretch>
+            <a:fillRect/>
+          </a:stretch>
+        </p:blipFill>
+        <p:spPr>
+          <a:xfrm>
+            <a:off x="3657642" y="2132835"/>
+            <a:ext cx="4889416" cy="3743268"/>
+          </a:xfrm>
+          <a:prstGeom prst="rect">
+            <a:avLst/>
+          </a:prstGeom>
+        </p:spPr>
+      </p:pic>
+    </p:spTree>
+    <p:extLst>
+      <p:ext uri="{BB962C8B-B14F-4D97-AF65-F5344CB8AC3E}">
+        <p14:creationId xmlns:p14="http://schemas.microsoft.com/office/powerpoint/2010/main" val="3867585930"/>
+      </p:ext>
+    </p:extLst>
+  </p:cSld>
+  <p:clrMapOvr>
+    <a:masterClrMapping/>
+  </p:clrMapOvr>
+</p:sld>
+</file>
+
+<file path=ppt/slides/slide22.xml><?xml version="1.0" encoding="utf-8"?>
+<p:sld xmlns:a="http://schemas.openxmlformats.org/drawingml/2006/main" xmlns:r="http://schemas.openxmlformats.org/officeDocument/2006/relationships" xmlns:p="http://schemas.openxmlformats.org/presentationml/2006/main">
+  <p:cSld>
+    <p:spTree>
+      <p:nvGrpSpPr>
+        <p:cNvPr id="1" name=""/>
+        <p:cNvGrpSpPr/>
+        <p:nvPr/>
+      </p:nvGrpSpPr>
+      <p:grpSpPr>
+        <a:xfrm>
+          <a:off x="0" y="0"/>
+          <a:ext cx="0" cy="0"/>
+          <a:chOff x="0" y="0"/>
+          <a:chExt cx="0" cy="0"/>
+        </a:xfrm>
+      </p:grpSpPr>
+      <p:sp>
+        <p:nvSpPr>
           <p:cNvPr id="2" name="タイトル 1"/>
           <p:cNvSpPr>
             <a:spLocks noGrp="1"/>
@@ -8990,7 +9344,7 @@
 </p:sld>
 </file>
 
-<file path=ppt/slides/slide22.xml><?xml version="1.0" encoding="utf-8"?>
+<file path=ppt/slides/slide23.xml><?xml version="1.0" encoding="utf-8"?>
 <p:sld xmlns:a="http://schemas.openxmlformats.org/drawingml/2006/main" xmlns:r="http://schemas.openxmlformats.org/officeDocument/2006/relationships" xmlns:p="http://schemas.openxmlformats.org/presentationml/2006/main">
   <p:cSld>
     <p:spTree>
@@ -9371,469 +9725,448 @@
           <a:chExt cx="0" cy="0"/>
         </a:xfrm>
       </p:grpSpPr>
-      <p:grpSp>
-        <p:nvGrpSpPr>
-          <p:cNvPr id="17" name="グループ化 16">
+      <p:sp>
+        <p:nvSpPr>
+          <p:cNvPr id="6" name="テキスト ボックス 5">
             <a:extLst>
               <a:ext uri="{FF2B5EF4-FFF2-40B4-BE49-F238E27FC236}">
-                <a16:creationId xmlns:a16="http://schemas.microsoft.com/office/drawing/2014/main" id="{C30135DB-9CA4-BD4C-2E30-4C8A1AE71777}"/>
+                <a16:creationId xmlns:a16="http://schemas.microsoft.com/office/drawing/2014/main" id="{E6FDB475-EA06-5B9A-C153-713E0BBC2649}"/>
               </a:ext>
             </a:extLst>
           </p:cNvPr>
-          <p:cNvGrpSpPr/>
-          <p:nvPr/>
-        </p:nvGrpSpPr>
-        <p:grpSpPr>
-          <a:xfrm>
-            <a:off x="-72223" y="580001"/>
-            <a:ext cx="12264223" cy="6124230"/>
-            <a:chOff x="-72223" y="580001"/>
-            <a:chExt cx="12264223" cy="6124230"/>
-          </a:xfrm>
-        </p:grpSpPr>
-        <p:sp>
-          <p:nvSpPr>
-            <p:cNvPr id="6" name="テキスト ボックス 5">
-              <a:extLst>
-                <a:ext uri="{FF2B5EF4-FFF2-40B4-BE49-F238E27FC236}">
-                  <a16:creationId xmlns:a16="http://schemas.microsoft.com/office/drawing/2014/main" id="{E6FDB475-EA06-5B9A-C153-713E0BBC2649}"/>
-                </a:ext>
-              </a:extLst>
-            </p:cNvPr>
-            <p:cNvSpPr txBox="1"/>
-            <p:nvPr/>
-          </p:nvSpPr>
-          <p:spPr>
-            <a:xfrm>
-              <a:off x="-72223" y="1030172"/>
-              <a:ext cx="2133600" cy="738664"/>
-            </a:xfrm>
-            <a:prstGeom prst="rect">
-              <a:avLst/>
-            </a:prstGeom>
-            <a:noFill/>
-          </p:spPr>
-          <p:txBody>
-            <a:bodyPr wrap="square" rtlCol="0">
-              <a:spAutoFit/>
-            </a:bodyPr>
-            <a:lstStyle/>
-            <a:p>
-              <a:pPr algn="ctr"/>
-              <a:r>
-                <a:rPr kumimoji="1" lang="ja-JP" altLang="en-US" sz="1400" dirty="0"/>
-                <a:t>一要因分散分析</a:t>
-              </a:r>
-              <a:endParaRPr kumimoji="1" lang="en-US" altLang="ja-JP" sz="1400" dirty="0"/>
-            </a:p>
-            <a:p>
-              <a:pPr algn="ctr"/>
-              <a:endParaRPr kumimoji="1" lang="en-US" altLang="ja-JP" sz="1400" dirty="0"/>
-            </a:p>
-            <a:p>
-              <a:pPr algn="ctr"/>
-              <a:r>
-                <a:rPr kumimoji="1" lang="ja-JP" altLang="en-US" sz="1400" dirty="0"/>
-                <a:t>一元配置分散分析</a:t>
-              </a:r>
-            </a:p>
-          </p:txBody>
-        </p:sp>
-        <p:sp>
-          <p:nvSpPr>
-            <p:cNvPr id="7" name="テキスト ボックス 6">
-              <a:extLst>
-                <a:ext uri="{FF2B5EF4-FFF2-40B4-BE49-F238E27FC236}">
-                  <a16:creationId xmlns:a16="http://schemas.microsoft.com/office/drawing/2014/main" id="{F0FBBB67-CEA6-CF2A-1D22-DEC86C082A20}"/>
-                </a:ext>
-              </a:extLst>
-            </p:cNvPr>
-            <p:cNvSpPr txBox="1"/>
-            <p:nvPr/>
-          </p:nvSpPr>
-          <p:spPr>
-            <a:xfrm>
-              <a:off x="2757487" y="580001"/>
-              <a:ext cx="2133600" cy="1169551"/>
-            </a:xfrm>
-            <a:prstGeom prst="rect">
-              <a:avLst/>
-            </a:prstGeom>
-            <a:noFill/>
-          </p:spPr>
-          <p:txBody>
-            <a:bodyPr wrap="square" rtlCol="0">
-              <a:spAutoFit/>
-            </a:bodyPr>
-            <a:lstStyle/>
-            <a:p>
-              <a:pPr algn="ctr"/>
-              <a:r>
-                <a:rPr kumimoji="1" lang="ja-JP" altLang="en-US" sz="1400" dirty="0"/>
-                <a:t>一要因分散分析</a:t>
-              </a:r>
-              <a:br>
-                <a:rPr kumimoji="1" lang="en-US" altLang="ja-JP" sz="1400" dirty="0"/>
-              </a:br>
-              <a:r>
-                <a:rPr kumimoji="1" lang="ja-JP" altLang="en-US" sz="1400" dirty="0"/>
-                <a:t>（対応あり）</a:t>
-              </a:r>
-              <a:endParaRPr kumimoji="1" lang="en-US" altLang="ja-JP" sz="1400" dirty="0"/>
-            </a:p>
-            <a:p>
-              <a:pPr algn="ctr"/>
-              <a:endParaRPr kumimoji="1" lang="en-US" altLang="ja-JP" sz="1400" dirty="0"/>
-            </a:p>
-            <a:p>
-              <a:pPr algn="ctr"/>
-              <a:r>
-                <a:rPr kumimoji="1" lang="ja-JP" altLang="en-US" sz="1400" dirty="0"/>
-                <a:t>二元配置分散分析</a:t>
-              </a:r>
-              <a:br>
-                <a:rPr kumimoji="1" lang="en-US" altLang="ja-JP" sz="1400" dirty="0"/>
-              </a:br>
-              <a:r>
-                <a:rPr kumimoji="1" lang="ja-JP" altLang="en-US" sz="1400" dirty="0"/>
-                <a:t>（対応あり・繰り返しなし）</a:t>
-              </a:r>
-            </a:p>
-          </p:txBody>
-        </p:sp>
-        <p:sp>
-          <p:nvSpPr>
-            <p:cNvPr id="8" name="テキスト ボックス 7">
-              <a:extLst>
-                <a:ext uri="{FF2B5EF4-FFF2-40B4-BE49-F238E27FC236}">
-                  <a16:creationId xmlns:a16="http://schemas.microsoft.com/office/drawing/2014/main" id="{D8152839-7E25-419C-7F95-558C6B4FB696}"/>
-                </a:ext>
-              </a:extLst>
-            </p:cNvPr>
-            <p:cNvSpPr txBox="1"/>
-            <p:nvPr/>
-          </p:nvSpPr>
-          <p:spPr>
-            <a:xfrm>
-              <a:off x="6096000" y="586433"/>
-              <a:ext cx="2133600" cy="1169551"/>
-            </a:xfrm>
-            <a:prstGeom prst="rect">
-              <a:avLst/>
-            </a:prstGeom>
-            <a:noFill/>
-          </p:spPr>
-          <p:txBody>
-            <a:bodyPr wrap="square" rtlCol="0">
-              <a:spAutoFit/>
-            </a:bodyPr>
-            <a:lstStyle/>
-            <a:p>
-              <a:pPr algn="ctr"/>
-              <a:r>
-                <a:rPr kumimoji="1" lang="ja-JP" altLang="en-US" sz="1400" dirty="0"/>
-                <a:t>二要因分散分析</a:t>
-              </a:r>
-              <a:br>
-                <a:rPr kumimoji="1" lang="en-US" altLang="ja-JP" sz="1400" dirty="0"/>
-              </a:br>
-              <a:r>
-                <a:rPr kumimoji="1" lang="ja-JP" altLang="en-US" sz="1400" dirty="0"/>
-                <a:t>（対応なし）</a:t>
-              </a:r>
-              <a:endParaRPr kumimoji="1" lang="en-US" altLang="ja-JP" sz="1400" dirty="0"/>
-            </a:p>
-            <a:p>
-              <a:pPr algn="ctr"/>
-              <a:endParaRPr kumimoji="1" lang="en-US" altLang="ja-JP" sz="1400" dirty="0"/>
-            </a:p>
-            <a:p>
-              <a:pPr algn="ctr"/>
-              <a:r>
-                <a:rPr kumimoji="1" lang="ja-JP" altLang="en-US" sz="1400" dirty="0"/>
-                <a:t>二元配置分散分析</a:t>
-              </a:r>
-              <a:br>
-                <a:rPr kumimoji="1" lang="en-US" altLang="ja-JP" sz="1400" dirty="0"/>
-              </a:br>
-              <a:r>
-                <a:rPr kumimoji="1" lang="ja-JP" altLang="en-US" sz="1400" dirty="0"/>
-                <a:t>（対応なし・繰り返しあり）</a:t>
-              </a:r>
-            </a:p>
-          </p:txBody>
-        </p:sp>
-        <p:pic>
-          <p:nvPicPr>
-            <p:cNvPr id="10" name="図 9">
-              <a:extLst>
-                <a:ext uri="{FF2B5EF4-FFF2-40B4-BE49-F238E27FC236}">
-                  <a16:creationId xmlns:a16="http://schemas.microsoft.com/office/drawing/2014/main" id="{B2CC2E8F-8159-769C-9275-ED926EFAB4C9}"/>
-                </a:ext>
-              </a:extLst>
-            </p:cNvPr>
-            <p:cNvPicPr>
-              <a:picLocks noChangeAspect="1"/>
-            </p:cNvPicPr>
-            <p:nvPr/>
-          </p:nvPicPr>
-          <p:blipFill>
-            <a:blip r:embed="rId3"/>
-            <a:stretch>
-              <a:fillRect/>
-            </a:stretch>
-          </p:blipFill>
-          <p:spPr>
-            <a:xfrm>
-              <a:off x="0" y="1791834"/>
-              <a:ext cx="12192000" cy="4912397"/>
-            </a:xfrm>
-            <a:prstGeom prst="rect">
-              <a:avLst/>
-            </a:prstGeom>
-          </p:spPr>
-        </p:pic>
-        <p:sp>
-          <p:nvSpPr>
-            <p:cNvPr id="11" name="大かっこ 10">
-              <a:extLst>
-                <a:ext uri="{FF2B5EF4-FFF2-40B4-BE49-F238E27FC236}">
-                  <a16:creationId xmlns:a16="http://schemas.microsoft.com/office/drawing/2014/main" id="{D06FFB5C-8475-F3AB-1C68-56887B3D2428}"/>
-                </a:ext>
-              </a:extLst>
-            </p:cNvPr>
-            <p:cNvSpPr/>
-            <p:nvPr/>
-          </p:nvSpPr>
-          <p:spPr>
-            <a:xfrm>
-              <a:off x="2774497" y="1207058"/>
-              <a:ext cx="2028616" cy="471017"/>
-            </a:xfrm>
-            <a:prstGeom prst="bracketPair">
-              <a:avLst/>
-            </a:prstGeom>
-          </p:spPr>
-          <p:style>
-            <a:lnRef idx="1">
-              <a:schemeClr val="accent1"/>
-            </a:lnRef>
-            <a:fillRef idx="0">
-              <a:schemeClr val="accent1"/>
-            </a:fillRef>
-            <a:effectRef idx="0">
-              <a:schemeClr val="accent1"/>
-            </a:effectRef>
-            <a:fontRef idx="minor">
-              <a:schemeClr val="tx1"/>
-            </a:fontRef>
-          </p:style>
-          <p:txBody>
-            <a:bodyPr rtlCol="0" anchor="ctr"/>
-            <a:lstStyle/>
-            <a:p>
-              <a:pPr algn="ctr"/>
-              <a:endParaRPr kumimoji="1" lang="ja-JP" altLang="en-US"/>
-            </a:p>
-          </p:txBody>
-        </p:sp>
-        <p:sp>
-          <p:nvSpPr>
-            <p:cNvPr id="13" name="大かっこ 12">
-              <a:extLst>
-                <a:ext uri="{FF2B5EF4-FFF2-40B4-BE49-F238E27FC236}">
-                  <a16:creationId xmlns:a16="http://schemas.microsoft.com/office/drawing/2014/main" id="{BF4E37F7-41CE-B4F8-B4A1-4FBA7DC88A4B}"/>
-                </a:ext>
-              </a:extLst>
-            </p:cNvPr>
-            <p:cNvSpPr/>
-            <p:nvPr/>
-          </p:nvSpPr>
-          <p:spPr>
-            <a:xfrm>
-              <a:off x="6166965" y="1207058"/>
-              <a:ext cx="2062636" cy="471017"/>
-            </a:xfrm>
-            <a:prstGeom prst="bracketPair">
-              <a:avLst/>
-            </a:prstGeom>
-          </p:spPr>
-          <p:style>
-            <a:lnRef idx="1">
-              <a:schemeClr val="accent1"/>
-            </a:lnRef>
-            <a:fillRef idx="0">
-              <a:schemeClr val="accent1"/>
-            </a:fillRef>
-            <a:effectRef idx="0">
-              <a:schemeClr val="accent1"/>
-            </a:effectRef>
-            <a:fontRef idx="minor">
-              <a:schemeClr val="tx1"/>
-            </a:fontRef>
-          </p:style>
-          <p:txBody>
-            <a:bodyPr rtlCol="0" anchor="ctr"/>
-            <a:lstStyle/>
-            <a:p>
-              <a:pPr algn="ctr"/>
-              <a:endParaRPr kumimoji="1" lang="ja-JP" altLang="en-US"/>
-            </a:p>
-          </p:txBody>
-        </p:sp>
-        <p:sp>
-          <p:nvSpPr>
-            <p:cNvPr id="14" name="大かっこ 13">
-              <a:extLst>
-                <a:ext uri="{FF2B5EF4-FFF2-40B4-BE49-F238E27FC236}">
-                  <a16:creationId xmlns:a16="http://schemas.microsoft.com/office/drawing/2014/main" id="{8BF4A6CB-5896-0039-7CD7-F67BEE2876BB}"/>
-                </a:ext>
-              </a:extLst>
-            </p:cNvPr>
-            <p:cNvSpPr/>
-            <p:nvPr/>
-          </p:nvSpPr>
-          <p:spPr>
-            <a:xfrm>
-              <a:off x="223838" y="1492545"/>
-              <a:ext cx="1590518" cy="219078"/>
-            </a:xfrm>
-            <a:prstGeom prst="bracketPair">
-              <a:avLst>
-                <a:gd name="adj" fmla="val 29710"/>
-              </a:avLst>
-            </a:prstGeom>
-          </p:spPr>
-          <p:style>
-            <a:lnRef idx="1">
-              <a:schemeClr val="accent1"/>
-            </a:lnRef>
-            <a:fillRef idx="0">
-              <a:schemeClr val="accent1"/>
-            </a:fillRef>
-            <a:effectRef idx="0">
-              <a:schemeClr val="accent1"/>
-            </a:effectRef>
-            <a:fontRef idx="minor">
-              <a:schemeClr val="tx1"/>
-            </a:fontRef>
-          </p:style>
-          <p:txBody>
-            <a:bodyPr rtlCol="0" anchor="ctr"/>
-            <a:lstStyle/>
-            <a:p>
-              <a:pPr algn="ctr"/>
-              <a:endParaRPr kumimoji="1" lang="ja-JP" altLang="en-US"/>
-            </a:p>
-          </p:txBody>
-        </p:sp>
-        <p:sp>
-          <p:nvSpPr>
-            <p:cNvPr id="15" name="テキスト ボックス 14">
-              <a:extLst>
-                <a:ext uri="{FF2B5EF4-FFF2-40B4-BE49-F238E27FC236}">
-                  <a16:creationId xmlns:a16="http://schemas.microsoft.com/office/drawing/2014/main" id="{A914D632-835E-9F31-5B5E-001D4FCC5800}"/>
-                </a:ext>
-              </a:extLst>
-            </p:cNvPr>
-            <p:cNvSpPr txBox="1"/>
-            <p:nvPr/>
-          </p:nvSpPr>
-          <p:spPr>
-            <a:xfrm>
-              <a:off x="9512440" y="586433"/>
-              <a:ext cx="2133600" cy="1169551"/>
-            </a:xfrm>
-            <a:prstGeom prst="rect">
-              <a:avLst/>
-            </a:prstGeom>
-            <a:noFill/>
-          </p:spPr>
-          <p:txBody>
-            <a:bodyPr wrap="square" rtlCol="0">
-              <a:spAutoFit/>
-            </a:bodyPr>
-            <a:lstStyle/>
-            <a:p>
-              <a:pPr algn="ctr"/>
-              <a:r>
-                <a:rPr kumimoji="1" lang="ja-JP" altLang="en-US" sz="1400" dirty="0"/>
-                <a:t>二要因分散分析</a:t>
-              </a:r>
-              <a:br>
-                <a:rPr kumimoji="1" lang="en-US" altLang="ja-JP" sz="1400" dirty="0"/>
-              </a:br>
-              <a:r>
-                <a:rPr kumimoji="1" lang="ja-JP" altLang="en-US" sz="1400" dirty="0"/>
-                <a:t>（対応あり）</a:t>
-              </a:r>
-              <a:endParaRPr kumimoji="1" lang="en-US" altLang="ja-JP" sz="1400" dirty="0"/>
-            </a:p>
-            <a:p>
-              <a:pPr algn="ctr"/>
-              <a:endParaRPr kumimoji="1" lang="en-US" altLang="ja-JP" sz="1400" dirty="0"/>
-            </a:p>
-            <a:p>
-              <a:pPr algn="ctr"/>
-              <a:r>
-                <a:rPr kumimoji="1" lang="ja-JP" altLang="en-US" sz="1400" dirty="0"/>
-                <a:t>二元配置分散分析</a:t>
-              </a:r>
-              <a:br>
-                <a:rPr kumimoji="1" lang="en-US" altLang="ja-JP" sz="1400" dirty="0"/>
-              </a:br>
-              <a:r>
-                <a:rPr kumimoji="1" lang="ja-JP" altLang="en-US" sz="1400" dirty="0"/>
-                <a:t>（対応あり・繰り返しあり）</a:t>
-              </a:r>
-            </a:p>
-          </p:txBody>
-        </p:sp>
-        <p:sp>
-          <p:nvSpPr>
-            <p:cNvPr id="16" name="大かっこ 15">
-              <a:extLst>
-                <a:ext uri="{FF2B5EF4-FFF2-40B4-BE49-F238E27FC236}">
-                  <a16:creationId xmlns:a16="http://schemas.microsoft.com/office/drawing/2014/main" id="{4327B81A-95BC-FD0D-564E-8DC7405726E8}"/>
-                </a:ext>
-              </a:extLst>
-            </p:cNvPr>
-            <p:cNvSpPr/>
-            <p:nvPr/>
-          </p:nvSpPr>
-          <p:spPr>
-            <a:xfrm>
-              <a:off x="9583405" y="1207058"/>
-              <a:ext cx="2062636" cy="471017"/>
-            </a:xfrm>
-            <a:prstGeom prst="bracketPair">
-              <a:avLst/>
-            </a:prstGeom>
-          </p:spPr>
-          <p:style>
-            <a:lnRef idx="1">
-              <a:schemeClr val="accent1"/>
-            </a:lnRef>
-            <a:fillRef idx="0">
-              <a:schemeClr val="accent1"/>
-            </a:fillRef>
-            <a:effectRef idx="0">
-              <a:schemeClr val="accent1"/>
-            </a:effectRef>
-            <a:fontRef idx="minor">
-              <a:schemeClr val="tx1"/>
-            </a:fontRef>
-          </p:style>
-          <p:txBody>
-            <a:bodyPr rtlCol="0" anchor="ctr"/>
-            <a:lstStyle/>
-            <a:p>
-              <a:pPr algn="ctr"/>
-              <a:endParaRPr kumimoji="1" lang="ja-JP" altLang="en-US"/>
-            </a:p>
-          </p:txBody>
-        </p:sp>
-      </p:grpSp>
+          <p:cNvSpPr txBox="1"/>
+          <p:nvPr/>
+        </p:nvSpPr>
+        <p:spPr>
+          <a:xfrm>
+            <a:off x="-72223" y="1030172"/>
+            <a:ext cx="2133600" cy="738664"/>
+          </a:xfrm>
+          <a:prstGeom prst="rect">
+            <a:avLst/>
+          </a:prstGeom>
+          <a:noFill/>
+        </p:spPr>
+        <p:txBody>
+          <a:bodyPr wrap="square" rtlCol="0">
+            <a:spAutoFit/>
+          </a:bodyPr>
+          <a:lstStyle/>
+          <a:p>
+            <a:pPr algn="ctr"/>
+            <a:r>
+              <a:rPr kumimoji="1" lang="ja-JP" altLang="en-US" sz="1400" dirty="0"/>
+              <a:t>一要因分散分析</a:t>
+            </a:r>
+            <a:endParaRPr kumimoji="1" lang="en-US" altLang="ja-JP" sz="1400" dirty="0"/>
+          </a:p>
+          <a:p>
+            <a:pPr algn="ctr"/>
+            <a:endParaRPr kumimoji="1" lang="en-US" altLang="ja-JP" sz="1400" dirty="0"/>
+          </a:p>
+          <a:p>
+            <a:pPr algn="ctr"/>
+            <a:r>
+              <a:rPr kumimoji="1" lang="ja-JP" altLang="en-US" sz="1400" dirty="0"/>
+              <a:t>一元配置分散分析</a:t>
+            </a:r>
+          </a:p>
+        </p:txBody>
+      </p:sp>
+      <p:sp>
+        <p:nvSpPr>
+          <p:cNvPr id="7" name="テキスト ボックス 6">
+            <a:extLst>
+              <a:ext uri="{FF2B5EF4-FFF2-40B4-BE49-F238E27FC236}">
+                <a16:creationId xmlns:a16="http://schemas.microsoft.com/office/drawing/2014/main" id="{F0FBBB67-CEA6-CF2A-1D22-DEC86C082A20}"/>
+              </a:ext>
+            </a:extLst>
+          </p:cNvPr>
+          <p:cNvSpPr txBox="1"/>
+          <p:nvPr/>
+        </p:nvSpPr>
+        <p:spPr>
+          <a:xfrm>
+            <a:off x="2757487" y="580001"/>
+            <a:ext cx="2133600" cy="1169551"/>
+          </a:xfrm>
+          <a:prstGeom prst="rect">
+            <a:avLst/>
+          </a:prstGeom>
+          <a:noFill/>
+        </p:spPr>
+        <p:txBody>
+          <a:bodyPr wrap="square" rtlCol="0">
+            <a:spAutoFit/>
+          </a:bodyPr>
+          <a:lstStyle/>
+          <a:p>
+            <a:pPr algn="ctr"/>
+            <a:r>
+              <a:rPr kumimoji="1" lang="ja-JP" altLang="en-US" sz="1400" dirty="0"/>
+              <a:t>一要因分散分析</a:t>
+            </a:r>
+            <a:br>
+              <a:rPr kumimoji="1" lang="en-US" altLang="ja-JP" sz="1400" dirty="0"/>
+            </a:br>
+            <a:r>
+              <a:rPr kumimoji="1" lang="ja-JP" altLang="en-US" sz="1400" dirty="0"/>
+              <a:t>（対応あり）</a:t>
+            </a:r>
+            <a:endParaRPr kumimoji="1" lang="en-US" altLang="ja-JP" sz="1400" dirty="0"/>
+          </a:p>
+          <a:p>
+            <a:pPr algn="ctr"/>
+            <a:endParaRPr kumimoji="1" lang="en-US" altLang="ja-JP" sz="1400" dirty="0"/>
+          </a:p>
+          <a:p>
+            <a:pPr algn="ctr"/>
+            <a:r>
+              <a:rPr kumimoji="1" lang="ja-JP" altLang="en-US" sz="1400" dirty="0"/>
+              <a:t>二元配置分散分析</a:t>
+            </a:r>
+            <a:br>
+              <a:rPr kumimoji="1" lang="en-US" altLang="ja-JP" sz="1400" dirty="0"/>
+            </a:br>
+            <a:r>
+              <a:rPr kumimoji="1" lang="ja-JP" altLang="en-US" sz="1400" dirty="0"/>
+              <a:t>（対応あり・繰り返しなし）</a:t>
+            </a:r>
+          </a:p>
+        </p:txBody>
+      </p:sp>
+      <p:sp>
+        <p:nvSpPr>
+          <p:cNvPr id="8" name="テキスト ボックス 7">
+            <a:extLst>
+              <a:ext uri="{FF2B5EF4-FFF2-40B4-BE49-F238E27FC236}">
+                <a16:creationId xmlns:a16="http://schemas.microsoft.com/office/drawing/2014/main" id="{D8152839-7E25-419C-7F95-558C6B4FB696}"/>
+              </a:ext>
+            </a:extLst>
+          </p:cNvPr>
+          <p:cNvSpPr txBox="1"/>
+          <p:nvPr/>
+        </p:nvSpPr>
+        <p:spPr>
+          <a:xfrm>
+            <a:off x="6096000" y="586433"/>
+            <a:ext cx="2133600" cy="1169551"/>
+          </a:xfrm>
+          <a:prstGeom prst="rect">
+            <a:avLst/>
+          </a:prstGeom>
+          <a:noFill/>
+        </p:spPr>
+        <p:txBody>
+          <a:bodyPr wrap="square" rtlCol="0">
+            <a:spAutoFit/>
+          </a:bodyPr>
+          <a:lstStyle/>
+          <a:p>
+            <a:pPr algn="ctr"/>
+            <a:r>
+              <a:rPr kumimoji="1" lang="ja-JP" altLang="en-US" sz="1400" dirty="0"/>
+              <a:t>二要因分散分析</a:t>
+            </a:r>
+            <a:br>
+              <a:rPr kumimoji="1" lang="en-US" altLang="ja-JP" sz="1400" dirty="0"/>
+            </a:br>
+            <a:r>
+              <a:rPr kumimoji="1" lang="ja-JP" altLang="en-US" sz="1400" dirty="0"/>
+              <a:t>（対応なし）</a:t>
+            </a:r>
+            <a:endParaRPr kumimoji="1" lang="en-US" altLang="ja-JP" sz="1400" dirty="0"/>
+          </a:p>
+          <a:p>
+            <a:pPr algn="ctr"/>
+            <a:endParaRPr kumimoji="1" lang="en-US" altLang="ja-JP" sz="1400" dirty="0"/>
+          </a:p>
+          <a:p>
+            <a:pPr algn="ctr"/>
+            <a:r>
+              <a:rPr kumimoji="1" lang="ja-JP" altLang="en-US" sz="1400" dirty="0"/>
+              <a:t>二元配置分散分析</a:t>
+            </a:r>
+            <a:br>
+              <a:rPr kumimoji="1" lang="en-US" altLang="ja-JP" sz="1400" dirty="0"/>
+            </a:br>
+            <a:r>
+              <a:rPr kumimoji="1" lang="ja-JP" altLang="en-US" sz="1400" dirty="0"/>
+              <a:t>（対応なし・繰り返しあり）</a:t>
+            </a:r>
+          </a:p>
+        </p:txBody>
+      </p:sp>
+      <p:sp>
+        <p:nvSpPr>
+          <p:cNvPr id="11" name="大かっこ 10">
+            <a:extLst>
+              <a:ext uri="{FF2B5EF4-FFF2-40B4-BE49-F238E27FC236}">
+                <a16:creationId xmlns:a16="http://schemas.microsoft.com/office/drawing/2014/main" id="{D06FFB5C-8475-F3AB-1C68-56887B3D2428}"/>
+              </a:ext>
+            </a:extLst>
+          </p:cNvPr>
+          <p:cNvSpPr/>
+          <p:nvPr/>
+        </p:nvSpPr>
+        <p:spPr>
+          <a:xfrm>
+            <a:off x="2774497" y="1207058"/>
+            <a:ext cx="2028616" cy="471017"/>
+          </a:xfrm>
+          <a:prstGeom prst="bracketPair">
+            <a:avLst/>
+          </a:prstGeom>
+        </p:spPr>
+        <p:style>
+          <a:lnRef idx="1">
+            <a:schemeClr val="accent1"/>
+          </a:lnRef>
+          <a:fillRef idx="0">
+            <a:schemeClr val="accent1"/>
+          </a:fillRef>
+          <a:effectRef idx="0">
+            <a:schemeClr val="accent1"/>
+          </a:effectRef>
+          <a:fontRef idx="minor">
+            <a:schemeClr val="tx1"/>
+          </a:fontRef>
+        </p:style>
+        <p:txBody>
+          <a:bodyPr rtlCol="0" anchor="ctr"/>
+          <a:lstStyle/>
+          <a:p>
+            <a:pPr algn="ctr"/>
+            <a:endParaRPr kumimoji="1" lang="ja-JP" altLang="en-US"/>
+          </a:p>
+        </p:txBody>
+      </p:sp>
+      <p:sp>
+        <p:nvSpPr>
+          <p:cNvPr id="13" name="大かっこ 12">
+            <a:extLst>
+              <a:ext uri="{FF2B5EF4-FFF2-40B4-BE49-F238E27FC236}">
+                <a16:creationId xmlns:a16="http://schemas.microsoft.com/office/drawing/2014/main" id="{BF4E37F7-41CE-B4F8-B4A1-4FBA7DC88A4B}"/>
+              </a:ext>
+            </a:extLst>
+          </p:cNvPr>
+          <p:cNvSpPr/>
+          <p:nvPr/>
+        </p:nvSpPr>
+        <p:spPr>
+          <a:xfrm>
+            <a:off x="6166965" y="1207058"/>
+            <a:ext cx="2062636" cy="471017"/>
+          </a:xfrm>
+          <a:prstGeom prst="bracketPair">
+            <a:avLst/>
+          </a:prstGeom>
+        </p:spPr>
+        <p:style>
+          <a:lnRef idx="1">
+            <a:schemeClr val="accent1"/>
+          </a:lnRef>
+          <a:fillRef idx="0">
+            <a:schemeClr val="accent1"/>
+          </a:fillRef>
+          <a:effectRef idx="0">
+            <a:schemeClr val="accent1"/>
+          </a:effectRef>
+          <a:fontRef idx="minor">
+            <a:schemeClr val="tx1"/>
+          </a:fontRef>
+        </p:style>
+        <p:txBody>
+          <a:bodyPr rtlCol="0" anchor="ctr"/>
+          <a:lstStyle/>
+          <a:p>
+            <a:pPr algn="ctr"/>
+            <a:endParaRPr kumimoji="1" lang="ja-JP" altLang="en-US"/>
+          </a:p>
+        </p:txBody>
+      </p:sp>
+      <p:sp>
+        <p:nvSpPr>
+          <p:cNvPr id="14" name="大かっこ 13">
+            <a:extLst>
+              <a:ext uri="{FF2B5EF4-FFF2-40B4-BE49-F238E27FC236}">
+                <a16:creationId xmlns:a16="http://schemas.microsoft.com/office/drawing/2014/main" id="{8BF4A6CB-5896-0039-7CD7-F67BEE2876BB}"/>
+              </a:ext>
+            </a:extLst>
+          </p:cNvPr>
+          <p:cNvSpPr/>
+          <p:nvPr/>
+        </p:nvSpPr>
+        <p:spPr>
+          <a:xfrm>
+            <a:off x="223838" y="1492545"/>
+            <a:ext cx="1590518" cy="219078"/>
+          </a:xfrm>
+          <a:prstGeom prst="bracketPair">
+            <a:avLst>
+              <a:gd name="adj" fmla="val 29710"/>
+            </a:avLst>
+          </a:prstGeom>
+        </p:spPr>
+        <p:style>
+          <a:lnRef idx="1">
+            <a:schemeClr val="accent1"/>
+          </a:lnRef>
+          <a:fillRef idx="0">
+            <a:schemeClr val="accent1"/>
+          </a:fillRef>
+          <a:effectRef idx="0">
+            <a:schemeClr val="accent1"/>
+          </a:effectRef>
+          <a:fontRef idx="minor">
+            <a:schemeClr val="tx1"/>
+          </a:fontRef>
+        </p:style>
+        <p:txBody>
+          <a:bodyPr rtlCol="0" anchor="ctr"/>
+          <a:lstStyle/>
+          <a:p>
+            <a:pPr algn="ctr"/>
+            <a:endParaRPr kumimoji="1" lang="ja-JP" altLang="en-US"/>
+          </a:p>
+        </p:txBody>
+      </p:sp>
+      <p:sp>
+        <p:nvSpPr>
+          <p:cNvPr id="15" name="テキスト ボックス 14">
+            <a:extLst>
+              <a:ext uri="{FF2B5EF4-FFF2-40B4-BE49-F238E27FC236}">
+                <a16:creationId xmlns:a16="http://schemas.microsoft.com/office/drawing/2014/main" id="{A914D632-835E-9F31-5B5E-001D4FCC5800}"/>
+              </a:ext>
+            </a:extLst>
+          </p:cNvPr>
+          <p:cNvSpPr txBox="1"/>
+          <p:nvPr/>
+        </p:nvSpPr>
+        <p:spPr>
+          <a:xfrm>
+            <a:off x="9512440" y="586433"/>
+            <a:ext cx="2133600" cy="1169551"/>
+          </a:xfrm>
+          <a:prstGeom prst="rect">
+            <a:avLst/>
+          </a:prstGeom>
+          <a:noFill/>
+        </p:spPr>
+        <p:txBody>
+          <a:bodyPr wrap="square" rtlCol="0">
+            <a:spAutoFit/>
+          </a:bodyPr>
+          <a:lstStyle/>
+          <a:p>
+            <a:pPr algn="ctr"/>
+            <a:r>
+              <a:rPr kumimoji="1" lang="ja-JP" altLang="en-US" sz="1400" dirty="0"/>
+              <a:t>二要因分散分析</a:t>
+            </a:r>
+            <a:br>
+              <a:rPr kumimoji="1" lang="en-US" altLang="ja-JP" sz="1400" dirty="0"/>
+            </a:br>
+            <a:r>
+              <a:rPr kumimoji="1" lang="ja-JP" altLang="en-US" sz="1400" dirty="0"/>
+              <a:t>（対応あり）</a:t>
+            </a:r>
+            <a:endParaRPr kumimoji="1" lang="en-US" altLang="ja-JP" sz="1400" dirty="0"/>
+          </a:p>
+          <a:p>
+            <a:pPr algn="ctr"/>
+            <a:endParaRPr kumimoji="1" lang="en-US" altLang="ja-JP" sz="1400" dirty="0"/>
+          </a:p>
+          <a:p>
+            <a:pPr algn="ctr"/>
+            <a:r>
+              <a:rPr kumimoji="1" lang="ja-JP" altLang="en-US" sz="1400" dirty="0"/>
+              <a:t>二元配置分散分析</a:t>
+            </a:r>
+            <a:br>
+              <a:rPr kumimoji="1" lang="en-US" altLang="ja-JP" sz="1400" dirty="0"/>
+            </a:br>
+            <a:r>
+              <a:rPr kumimoji="1" lang="ja-JP" altLang="en-US" sz="1400" dirty="0"/>
+              <a:t>（対応あり・繰り返しあり）</a:t>
+            </a:r>
+          </a:p>
+        </p:txBody>
+      </p:sp>
+      <p:sp>
+        <p:nvSpPr>
+          <p:cNvPr id="16" name="大かっこ 15">
+            <a:extLst>
+              <a:ext uri="{FF2B5EF4-FFF2-40B4-BE49-F238E27FC236}">
+                <a16:creationId xmlns:a16="http://schemas.microsoft.com/office/drawing/2014/main" id="{4327B81A-95BC-FD0D-564E-8DC7405726E8}"/>
+              </a:ext>
+            </a:extLst>
+          </p:cNvPr>
+          <p:cNvSpPr/>
+          <p:nvPr/>
+        </p:nvSpPr>
+        <p:spPr>
+          <a:xfrm>
+            <a:off x="9583405" y="1207058"/>
+            <a:ext cx="2062636" cy="471017"/>
+          </a:xfrm>
+          <a:prstGeom prst="bracketPair">
+            <a:avLst/>
+          </a:prstGeom>
+        </p:spPr>
+        <p:style>
+          <a:lnRef idx="1">
+            <a:schemeClr val="accent1"/>
+          </a:lnRef>
+          <a:fillRef idx="0">
+            <a:schemeClr val="accent1"/>
+          </a:fillRef>
+          <a:effectRef idx="0">
+            <a:schemeClr val="accent1"/>
+          </a:effectRef>
+          <a:fontRef idx="minor">
+            <a:schemeClr val="tx1"/>
+          </a:fontRef>
+        </p:style>
+        <p:txBody>
+          <a:bodyPr rtlCol="0" anchor="ctr"/>
+          <a:lstStyle/>
+          <a:p>
+            <a:pPr algn="ctr"/>
+            <a:endParaRPr kumimoji="1" lang="ja-JP" altLang="en-US"/>
+          </a:p>
+        </p:txBody>
+      </p:sp>
+      <p:pic>
+        <p:nvPicPr>
+          <p:cNvPr id="3" name="図 2">
+            <a:extLst>
+              <a:ext uri="{FF2B5EF4-FFF2-40B4-BE49-F238E27FC236}">
+                <a16:creationId xmlns:a16="http://schemas.microsoft.com/office/drawing/2014/main" id="{A443EEE1-EDD2-BE1B-44F4-C8CAB64E6F48}"/>
+              </a:ext>
+            </a:extLst>
+          </p:cNvPr>
+          <p:cNvPicPr>
+            <a:picLocks noChangeAspect="1"/>
+          </p:cNvPicPr>
+          <p:nvPr/>
+        </p:nvPicPr>
+        <p:blipFill>
+          <a:blip r:embed="rId3"/>
+          <a:stretch>
+            <a:fillRect/>
+          </a:stretch>
+        </p:blipFill>
+        <p:spPr>
+          <a:xfrm>
+            <a:off x="-4762" y="1755984"/>
+            <a:ext cx="12192000" cy="4912397"/>
+          </a:xfrm>
+          <a:prstGeom prst="rect">
+            <a:avLst/>
+          </a:prstGeom>
+        </p:spPr>
+      </p:pic>
     </p:spTree>
     <p:extLst>
       <p:ext uri="{BB962C8B-B14F-4D97-AF65-F5344CB8AC3E}">
@@ -9864,6 +10197,478 @@
           <a:chExt cx="0" cy="0"/>
         </a:xfrm>
       </p:grpSpPr>
+      <p:pic>
+        <p:nvPicPr>
+          <p:cNvPr id="5" name="図 4">
+            <a:extLst>
+              <a:ext uri="{FF2B5EF4-FFF2-40B4-BE49-F238E27FC236}">
+                <a16:creationId xmlns:a16="http://schemas.microsoft.com/office/drawing/2014/main" id="{546826F0-9665-683D-B8B7-65CE4DCA3E22}"/>
+              </a:ext>
+            </a:extLst>
+          </p:cNvPr>
+          <p:cNvPicPr>
+            <a:picLocks noChangeAspect="1"/>
+          </p:cNvPicPr>
+          <p:nvPr/>
+        </p:nvPicPr>
+        <p:blipFill>
+          <a:blip r:embed="rId2"/>
+          <a:stretch>
+            <a:fillRect/>
+          </a:stretch>
+        </p:blipFill>
+        <p:spPr>
+          <a:xfrm>
+            <a:off x="572137" y="1856068"/>
+            <a:ext cx="11120751" cy="13219814"/>
+          </a:xfrm>
+          <a:prstGeom prst="rect">
+            <a:avLst/>
+          </a:prstGeom>
+        </p:spPr>
+      </p:pic>
+      <p:sp>
+        <p:nvSpPr>
+          <p:cNvPr id="6" name="テキスト ボックス 5">
+            <a:extLst>
+              <a:ext uri="{FF2B5EF4-FFF2-40B4-BE49-F238E27FC236}">
+                <a16:creationId xmlns:a16="http://schemas.microsoft.com/office/drawing/2014/main" id="{5FA43AD0-3B11-F8C8-EA50-72B1A597DAFA}"/>
+              </a:ext>
+            </a:extLst>
+          </p:cNvPr>
+          <p:cNvSpPr txBox="1"/>
+          <p:nvPr/>
+        </p:nvSpPr>
+        <p:spPr>
+          <a:xfrm>
+            <a:off x="128744" y="1028408"/>
+            <a:ext cx="2133600" cy="738664"/>
+          </a:xfrm>
+          <a:prstGeom prst="rect">
+            <a:avLst/>
+          </a:prstGeom>
+          <a:noFill/>
+        </p:spPr>
+        <p:txBody>
+          <a:bodyPr wrap="square" rtlCol="0">
+            <a:spAutoFit/>
+          </a:bodyPr>
+          <a:lstStyle/>
+          <a:p>
+            <a:pPr algn="ctr"/>
+            <a:r>
+              <a:rPr kumimoji="1" lang="ja-JP" altLang="en-US" sz="1400" dirty="0"/>
+              <a:t>一要因分散分析</a:t>
+            </a:r>
+            <a:endParaRPr kumimoji="1" lang="en-US" altLang="ja-JP" sz="1400" dirty="0"/>
+          </a:p>
+          <a:p>
+            <a:pPr algn="ctr"/>
+            <a:endParaRPr kumimoji="1" lang="en-US" altLang="ja-JP" sz="1400" dirty="0"/>
+          </a:p>
+          <a:p>
+            <a:pPr algn="ctr"/>
+            <a:r>
+              <a:rPr kumimoji="1" lang="ja-JP" altLang="en-US" sz="1400" dirty="0"/>
+              <a:t>一元配置分散分析</a:t>
+            </a:r>
+          </a:p>
+        </p:txBody>
+      </p:sp>
+      <p:sp>
+        <p:nvSpPr>
+          <p:cNvPr id="7" name="テキスト ボックス 6">
+            <a:extLst>
+              <a:ext uri="{FF2B5EF4-FFF2-40B4-BE49-F238E27FC236}">
+                <a16:creationId xmlns:a16="http://schemas.microsoft.com/office/drawing/2014/main" id="{DD4C318E-C5C9-F409-8C6D-0911407E409D}"/>
+              </a:ext>
+            </a:extLst>
+          </p:cNvPr>
+          <p:cNvSpPr txBox="1"/>
+          <p:nvPr/>
+        </p:nvSpPr>
+        <p:spPr>
+          <a:xfrm>
+            <a:off x="2948092" y="597737"/>
+            <a:ext cx="2133600" cy="1169551"/>
+          </a:xfrm>
+          <a:prstGeom prst="rect">
+            <a:avLst/>
+          </a:prstGeom>
+          <a:noFill/>
+        </p:spPr>
+        <p:txBody>
+          <a:bodyPr wrap="square" rtlCol="0">
+            <a:spAutoFit/>
+          </a:bodyPr>
+          <a:lstStyle/>
+          <a:p>
+            <a:pPr algn="ctr"/>
+            <a:r>
+              <a:rPr kumimoji="1" lang="ja-JP" altLang="en-US" sz="1400" dirty="0"/>
+              <a:t>一要因分散分析</a:t>
+            </a:r>
+            <a:br>
+              <a:rPr kumimoji="1" lang="en-US" altLang="ja-JP" sz="1400" dirty="0"/>
+            </a:br>
+            <a:r>
+              <a:rPr kumimoji="1" lang="ja-JP" altLang="en-US" sz="1400" dirty="0"/>
+              <a:t>（対応あり）</a:t>
+            </a:r>
+            <a:endParaRPr kumimoji="1" lang="en-US" altLang="ja-JP" sz="1400" dirty="0"/>
+          </a:p>
+          <a:p>
+            <a:pPr algn="ctr"/>
+            <a:endParaRPr kumimoji="1" lang="en-US" altLang="ja-JP" sz="1400" dirty="0"/>
+          </a:p>
+          <a:p>
+            <a:pPr algn="ctr"/>
+            <a:r>
+              <a:rPr kumimoji="1" lang="ja-JP" altLang="en-US" sz="1400" dirty="0"/>
+              <a:t>二元配置分散分析</a:t>
+            </a:r>
+            <a:br>
+              <a:rPr kumimoji="1" lang="en-US" altLang="ja-JP" sz="1400" dirty="0"/>
+            </a:br>
+            <a:r>
+              <a:rPr kumimoji="1" lang="ja-JP" altLang="en-US" sz="1400" dirty="0"/>
+              <a:t>（対応あり・繰り返しなし）</a:t>
+            </a:r>
+          </a:p>
+        </p:txBody>
+      </p:sp>
+      <p:sp>
+        <p:nvSpPr>
+          <p:cNvPr id="8" name="テキスト ボックス 7">
+            <a:extLst>
+              <a:ext uri="{FF2B5EF4-FFF2-40B4-BE49-F238E27FC236}">
+                <a16:creationId xmlns:a16="http://schemas.microsoft.com/office/drawing/2014/main" id="{7271B12B-D695-017B-2134-E67FBFE559CB}"/>
+              </a:ext>
+            </a:extLst>
+          </p:cNvPr>
+          <p:cNvSpPr txBox="1"/>
+          <p:nvPr/>
+        </p:nvSpPr>
+        <p:spPr>
+          <a:xfrm>
+            <a:off x="5935227" y="618217"/>
+            <a:ext cx="2133600" cy="1169551"/>
+          </a:xfrm>
+          <a:prstGeom prst="rect">
+            <a:avLst/>
+          </a:prstGeom>
+          <a:noFill/>
+        </p:spPr>
+        <p:txBody>
+          <a:bodyPr wrap="square" rtlCol="0">
+            <a:spAutoFit/>
+          </a:bodyPr>
+          <a:lstStyle/>
+          <a:p>
+            <a:pPr algn="ctr"/>
+            <a:r>
+              <a:rPr kumimoji="1" lang="ja-JP" altLang="en-US" sz="1400" dirty="0"/>
+              <a:t>二要因分散分析</a:t>
+            </a:r>
+            <a:br>
+              <a:rPr kumimoji="1" lang="en-US" altLang="ja-JP" sz="1400" dirty="0"/>
+            </a:br>
+            <a:r>
+              <a:rPr kumimoji="1" lang="ja-JP" altLang="en-US" sz="1400" dirty="0"/>
+              <a:t>（対応なし）</a:t>
+            </a:r>
+            <a:endParaRPr kumimoji="1" lang="en-US" altLang="ja-JP" sz="1400" dirty="0"/>
+          </a:p>
+          <a:p>
+            <a:pPr algn="ctr"/>
+            <a:endParaRPr kumimoji="1" lang="en-US" altLang="ja-JP" sz="1400" dirty="0"/>
+          </a:p>
+          <a:p>
+            <a:pPr algn="ctr"/>
+            <a:r>
+              <a:rPr kumimoji="1" lang="ja-JP" altLang="en-US" sz="1400" dirty="0"/>
+              <a:t>二元配置分散分析</a:t>
+            </a:r>
+            <a:br>
+              <a:rPr kumimoji="1" lang="en-US" altLang="ja-JP" sz="1400" dirty="0"/>
+            </a:br>
+            <a:r>
+              <a:rPr kumimoji="1" lang="ja-JP" altLang="en-US" sz="1400" dirty="0"/>
+              <a:t>（対応なし・繰り返しあり）</a:t>
+            </a:r>
+          </a:p>
+        </p:txBody>
+      </p:sp>
+      <p:sp>
+        <p:nvSpPr>
+          <p:cNvPr id="9" name="テキスト ボックス 8">
+            <a:extLst>
+              <a:ext uri="{FF2B5EF4-FFF2-40B4-BE49-F238E27FC236}">
+                <a16:creationId xmlns:a16="http://schemas.microsoft.com/office/drawing/2014/main" id="{6C157E73-7B32-A0BF-84CE-FEF3A2804D29}"/>
+              </a:ext>
+            </a:extLst>
+          </p:cNvPr>
+          <p:cNvSpPr txBox="1"/>
+          <p:nvPr/>
+        </p:nvSpPr>
+        <p:spPr>
+          <a:xfrm>
+            <a:off x="9361715" y="597521"/>
+            <a:ext cx="2133600" cy="1169551"/>
+          </a:xfrm>
+          <a:prstGeom prst="rect">
+            <a:avLst/>
+          </a:prstGeom>
+          <a:noFill/>
+        </p:spPr>
+        <p:txBody>
+          <a:bodyPr wrap="square" rtlCol="0">
+            <a:spAutoFit/>
+          </a:bodyPr>
+          <a:lstStyle/>
+          <a:p>
+            <a:pPr algn="ctr"/>
+            <a:r>
+              <a:rPr kumimoji="1" lang="ja-JP" altLang="en-US" sz="1400" dirty="0"/>
+              <a:t>二要因分散分析</a:t>
+            </a:r>
+            <a:br>
+              <a:rPr kumimoji="1" lang="en-US" altLang="ja-JP" sz="1400" dirty="0"/>
+            </a:br>
+            <a:r>
+              <a:rPr kumimoji="1" lang="ja-JP" altLang="en-US" sz="1400" dirty="0"/>
+              <a:t>（対応あり）</a:t>
+            </a:r>
+            <a:endParaRPr kumimoji="1" lang="en-US" altLang="ja-JP" sz="1400" dirty="0"/>
+          </a:p>
+          <a:p>
+            <a:pPr algn="ctr"/>
+            <a:endParaRPr kumimoji="1" lang="en-US" altLang="ja-JP" sz="1400" dirty="0"/>
+          </a:p>
+          <a:p>
+            <a:pPr algn="ctr"/>
+            <a:r>
+              <a:rPr kumimoji="1" lang="ja-JP" altLang="en-US" sz="1400" dirty="0"/>
+              <a:t>二元配置分散分析</a:t>
+            </a:r>
+            <a:br>
+              <a:rPr kumimoji="1" lang="en-US" altLang="ja-JP" sz="1400" dirty="0"/>
+            </a:br>
+            <a:r>
+              <a:rPr kumimoji="1" lang="ja-JP" altLang="en-US" sz="1400" dirty="0"/>
+              <a:t>（対応あり・繰り返しあり）</a:t>
+            </a:r>
+          </a:p>
+        </p:txBody>
+      </p:sp>
+      <p:sp>
+        <p:nvSpPr>
+          <p:cNvPr id="10" name="大かっこ 9">
+            <a:extLst>
+              <a:ext uri="{FF2B5EF4-FFF2-40B4-BE49-F238E27FC236}">
+                <a16:creationId xmlns:a16="http://schemas.microsoft.com/office/drawing/2014/main" id="{CA1C2C88-3A5E-AABA-84D4-E740B04A231F}"/>
+              </a:ext>
+            </a:extLst>
+          </p:cNvPr>
+          <p:cNvSpPr/>
+          <p:nvPr/>
+        </p:nvSpPr>
+        <p:spPr>
+          <a:xfrm>
+            <a:off x="2965102" y="1224794"/>
+            <a:ext cx="2028616" cy="471017"/>
+          </a:xfrm>
+          <a:prstGeom prst="bracketPair">
+            <a:avLst/>
+          </a:prstGeom>
+        </p:spPr>
+        <p:style>
+          <a:lnRef idx="1">
+            <a:schemeClr val="accent1"/>
+          </a:lnRef>
+          <a:fillRef idx="0">
+            <a:schemeClr val="accent1"/>
+          </a:fillRef>
+          <a:effectRef idx="0">
+            <a:schemeClr val="accent1"/>
+          </a:effectRef>
+          <a:fontRef idx="minor">
+            <a:schemeClr val="tx1"/>
+          </a:fontRef>
+        </p:style>
+        <p:txBody>
+          <a:bodyPr rtlCol="0" anchor="ctr"/>
+          <a:lstStyle/>
+          <a:p>
+            <a:pPr algn="ctr"/>
+            <a:endParaRPr kumimoji="1" lang="ja-JP" altLang="en-US"/>
+          </a:p>
+        </p:txBody>
+      </p:sp>
+      <p:sp>
+        <p:nvSpPr>
+          <p:cNvPr id="11" name="大かっこ 10">
+            <a:extLst>
+              <a:ext uri="{FF2B5EF4-FFF2-40B4-BE49-F238E27FC236}">
+                <a16:creationId xmlns:a16="http://schemas.microsoft.com/office/drawing/2014/main" id="{C06F7171-5ABC-8781-AE41-058AA7008B7F}"/>
+              </a:ext>
+            </a:extLst>
+          </p:cNvPr>
+          <p:cNvSpPr/>
+          <p:nvPr/>
+        </p:nvSpPr>
+        <p:spPr>
+          <a:xfrm>
+            <a:off x="6006192" y="1238842"/>
+            <a:ext cx="2062636" cy="471017"/>
+          </a:xfrm>
+          <a:prstGeom prst="bracketPair">
+            <a:avLst/>
+          </a:prstGeom>
+        </p:spPr>
+        <p:style>
+          <a:lnRef idx="1">
+            <a:schemeClr val="accent1"/>
+          </a:lnRef>
+          <a:fillRef idx="0">
+            <a:schemeClr val="accent1"/>
+          </a:fillRef>
+          <a:effectRef idx="0">
+            <a:schemeClr val="accent1"/>
+          </a:effectRef>
+          <a:fontRef idx="minor">
+            <a:schemeClr val="tx1"/>
+          </a:fontRef>
+        </p:style>
+        <p:txBody>
+          <a:bodyPr rtlCol="0" anchor="ctr"/>
+          <a:lstStyle/>
+          <a:p>
+            <a:pPr algn="ctr"/>
+            <a:endParaRPr kumimoji="1" lang="ja-JP" altLang="en-US"/>
+          </a:p>
+        </p:txBody>
+      </p:sp>
+      <p:sp>
+        <p:nvSpPr>
+          <p:cNvPr id="12" name="大かっこ 11">
+            <a:extLst>
+              <a:ext uri="{FF2B5EF4-FFF2-40B4-BE49-F238E27FC236}">
+                <a16:creationId xmlns:a16="http://schemas.microsoft.com/office/drawing/2014/main" id="{DD5A26DD-964A-3DF4-3DB0-F60BBFC32D20}"/>
+              </a:ext>
+            </a:extLst>
+          </p:cNvPr>
+          <p:cNvSpPr/>
+          <p:nvPr/>
+        </p:nvSpPr>
+        <p:spPr>
+          <a:xfrm>
+            <a:off x="424805" y="1490781"/>
+            <a:ext cx="1590518" cy="219078"/>
+          </a:xfrm>
+          <a:prstGeom prst="bracketPair">
+            <a:avLst>
+              <a:gd name="adj" fmla="val 29710"/>
+            </a:avLst>
+          </a:prstGeom>
+        </p:spPr>
+        <p:style>
+          <a:lnRef idx="1">
+            <a:schemeClr val="accent1"/>
+          </a:lnRef>
+          <a:fillRef idx="0">
+            <a:schemeClr val="accent1"/>
+          </a:fillRef>
+          <a:effectRef idx="0">
+            <a:schemeClr val="accent1"/>
+          </a:effectRef>
+          <a:fontRef idx="minor">
+            <a:schemeClr val="tx1"/>
+          </a:fontRef>
+        </p:style>
+        <p:txBody>
+          <a:bodyPr rtlCol="0" anchor="ctr"/>
+          <a:lstStyle/>
+          <a:p>
+            <a:pPr algn="ctr"/>
+            <a:endParaRPr kumimoji="1" lang="ja-JP" altLang="en-US"/>
+          </a:p>
+        </p:txBody>
+      </p:sp>
+      <p:sp>
+        <p:nvSpPr>
+          <p:cNvPr id="13" name="大かっこ 12">
+            <a:extLst>
+              <a:ext uri="{FF2B5EF4-FFF2-40B4-BE49-F238E27FC236}">
+                <a16:creationId xmlns:a16="http://schemas.microsoft.com/office/drawing/2014/main" id="{C7DAA8A9-4CFD-DAA1-2656-C11F8128167E}"/>
+              </a:ext>
+            </a:extLst>
+          </p:cNvPr>
+          <p:cNvSpPr/>
+          <p:nvPr/>
+        </p:nvSpPr>
+        <p:spPr>
+          <a:xfrm>
+            <a:off x="9432680" y="1218146"/>
+            <a:ext cx="2062636" cy="471017"/>
+          </a:xfrm>
+          <a:prstGeom prst="bracketPair">
+            <a:avLst/>
+          </a:prstGeom>
+        </p:spPr>
+        <p:style>
+          <a:lnRef idx="1">
+            <a:schemeClr val="accent1"/>
+          </a:lnRef>
+          <a:fillRef idx="0">
+            <a:schemeClr val="accent1"/>
+          </a:fillRef>
+          <a:effectRef idx="0">
+            <a:schemeClr val="accent1"/>
+          </a:effectRef>
+          <a:fontRef idx="minor">
+            <a:schemeClr val="tx1"/>
+          </a:fontRef>
+        </p:style>
+        <p:txBody>
+          <a:bodyPr rtlCol="0" anchor="ctr"/>
+          <a:lstStyle/>
+          <a:p>
+            <a:pPr algn="ctr"/>
+            <a:endParaRPr kumimoji="1" lang="ja-JP" altLang="en-US"/>
+          </a:p>
+        </p:txBody>
+      </p:sp>
+    </p:spTree>
+    <p:extLst>
+      <p:ext uri="{BB962C8B-B14F-4D97-AF65-F5344CB8AC3E}">
+        <p14:creationId xmlns:p14="http://schemas.microsoft.com/office/powerpoint/2010/main" val="4140335322"/>
+      </p:ext>
+    </p:extLst>
+  </p:cSld>
+  <p:clrMapOvr>
+    <a:masterClrMapping/>
+  </p:clrMapOvr>
+</p:sld>
+</file>
+
+<file path=ppt/slides/slide6.xml><?xml version="1.0" encoding="utf-8"?>
+<p:sld xmlns:a="http://schemas.openxmlformats.org/drawingml/2006/main" xmlns:r="http://schemas.openxmlformats.org/officeDocument/2006/relationships" xmlns:p="http://schemas.openxmlformats.org/presentationml/2006/main">
+  <p:cSld>
+    <p:spTree>
+      <p:nvGrpSpPr>
+        <p:cNvPr id="1" name=""/>
+        <p:cNvGrpSpPr/>
+        <p:nvPr/>
+      </p:nvGrpSpPr>
+      <p:grpSpPr>
+        <a:xfrm>
+          <a:off x="0" y="0"/>
+          <a:ext cx="0" cy="0"/>
+          <a:chOff x="0" y="0"/>
+          <a:chExt cx="0" cy="0"/>
+        </a:xfrm>
+      </p:grpSpPr>
       <p:sp>
         <p:nvSpPr>
           <p:cNvPr id="4" name="楕円 3">
@@ -10364,7 +11169,7 @@
 </p:sld>
 </file>
 
-<file path=ppt/slides/slide6.xml><?xml version="1.0" encoding="utf-8"?>
+<file path=ppt/slides/slide7.xml><?xml version="1.0" encoding="utf-8"?>
 <p:sld xmlns:a="http://schemas.openxmlformats.org/drawingml/2006/main" xmlns:r="http://schemas.openxmlformats.org/officeDocument/2006/relationships" xmlns:p="http://schemas.openxmlformats.org/presentationml/2006/main">
   <p:cSld>
     <p:spTree>
@@ -11234,7 +12039,7 @@
 </p:sld>
 </file>
 
-<file path=ppt/slides/slide7.xml><?xml version="1.0" encoding="utf-8"?>
+<file path=ppt/slides/slide8.xml><?xml version="1.0" encoding="utf-8"?>
 <p:sld xmlns:a="http://schemas.openxmlformats.org/drawingml/2006/main" xmlns:r="http://schemas.openxmlformats.org/officeDocument/2006/relationships" xmlns:p="http://schemas.openxmlformats.org/presentationml/2006/main">
   <p:cSld>
     <p:spTree>
@@ -11543,7 +12348,7 @@
 </p:sld>
 </file>
 
-<file path=ppt/slides/slide8.xml><?xml version="1.0" encoding="utf-8"?>
+<file path=ppt/slides/slide9.xml><?xml version="1.0" encoding="utf-8"?>
 <p:sld xmlns:a="http://schemas.openxmlformats.org/drawingml/2006/main" xmlns:r="http://schemas.openxmlformats.org/officeDocument/2006/relationships" xmlns:p="http://schemas.openxmlformats.org/presentationml/2006/main">
   <p:cSld>
     <p:spTree>
@@ -11749,359 +12554,6 @@
     <p:extLst>
       <p:ext uri="{BB962C8B-B14F-4D97-AF65-F5344CB8AC3E}">
         <p14:creationId xmlns:p14="http://schemas.microsoft.com/office/powerpoint/2010/main" val="780364332"/>
-      </p:ext>
-    </p:extLst>
-  </p:cSld>
-  <p:clrMapOvr>
-    <a:masterClrMapping/>
-  </p:clrMapOvr>
-</p:sld>
-</file>
-
-<file path=ppt/slides/slide9.xml><?xml version="1.0" encoding="utf-8"?>
-<p:sld xmlns:a="http://schemas.openxmlformats.org/drawingml/2006/main" xmlns:r="http://schemas.openxmlformats.org/officeDocument/2006/relationships" xmlns:p="http://schemas.openxmlformats.org/presentationml/2006/main">
-  <p:cSld>
-    <p:spTree>
-      <p:nvGrpSpPr>
-        <p:cNvPr id="1" name=""/>
-        <p:cNvGrpSpPr/>
-        <p:nvPr/>
-      </p:nvGrpSpPr>
-      <p:grpSpPr>
-        <a:xfrm>
-          <a:off x="0" y="0"/>
-          <a:ext cx="0" cy="0"/>
-          <a:chOff x="0" y="0"/>
-          <a:chExt cx="0" cy="0"/>
-        </a:xfrm>
-      </p:grpSpPr>
-      <p:sp>
-        <p:nvSpPr>
-          <p:cNvPr id="4" name="正方形/長方形 3">
-            <a:extLst>
-              <a:ext uri="{FF2B5EF4-FFF2-40B4-BE49-F238E27FC236}">
-                <a16:creationId xmlns:a16="http://schemas.microsoft.com/office/drawing/2014/main" id="{D1E12261-89B1-F2A3-34A0-BBE7B31A48CA}"/>
-              </a:ext>
-            </a:extLst>
-          </p:cNvPr>
-          <p:cNvSpPr/>
-          <p:nvPr/>
-        </p:nvSpPr>
-        <p:spPr>
-          <a:xfrm>
-            <a:off x="6934200" y="2990850"/>
-            <a:ext cx="2476500" cy="876300"/>
-          </a:xfrm>
-          <a:prstGeom prst="rect">
-            <a:avLst/>
-          </a:prstGeom>
-        </p:spPr>
-        <p:style>
-          <a:lnRef idx="2">
-            <a:schemeClr val="accent3">
-              <a:shade val="15000"/>
-            </a:schemeClr>
-          </a:lnRef>
-          <a:fillRef idx="1">
-            <a:schemeClr val="accent3"/>
-          </a:fillRef>
-          <a:effectRef idx="0">
-            <a:schemeClr val="accent3"/>
-          </a:effectRef>
-          <a:fontRef idx="minor">
-            <a:schemeClr val="lt1"/>
-          </a:fontRef>
-        </p:style>
-        <p:txBody>
-          <a:bodyPr rtlCol="0" anchor="ctr"/>
-          <a:lstStyle/>
-          <a:p>
-            <a:pPr algn="ctr"/>
-            <a:r>
-              <a:rPr kumimoji="1" lang="ja-JP" altLang="en-US" dirty="0"/>
-              <a:t>目的変数：</a:t>
-            </a:r>
-            <a:endParaRPr kumimoji="1" lang="en-US" altLang="ja-JP" dirty="0"/>
-          </a:p>
-          <a:p>
-            <a:pPr algn="ctr"/>
-            <a:r>
-              <a:rPr kumimoji="1" lang="ja-JP" altLang="en-US" dirty="0"/>
-              <a:t>厚揚げ購入頻度</a:t>
-            </a:r>
-          </a:p>
-        </p:txBody>
-      </p:sp>
-      <p:sp>
-        <p:nvSpPr>
-          <p:cNvPr id="5" name="正方形/長方形 4">
-            <a:extLst>
-              <a:ext uri="{FF2B5EF4-FFF2-40B4-BE49-F238E27FC236}">
-                <a16:creationId xmlns:a16="http://schemas.microsoft.com/office/drawing/2014/main" id="{AC2650BC-2D2B-5AF3-86DA-8F1504AF3245}"/>
-              </a:ext>
-            </a:extLst>
-          </p:cNvPr>
-          <p:cNvSpPr/>
-          <p:nvPr/>
-        </p:nvSpPr>
-        <p:spPr>
-          <a:xfrm>
-            <a:off x="2514600" y="1695449"/>
-            <a:ext cx="2371725" cy="1485900"/>
-          </a:xfrm>
-          <a:prstGeom prst="rect">
-            <a:avLst/>
-          </a:prstGeom>
-        </p:spPr>
-        <p:style>
-          <a:lnRef idx="2">
-            <a:schemeClr val="accent3">
-              <a:shade val="15000"/>
-            </a:schemeClr>
-          </a:lnRef>
-          <a:fillRef idx="1">
-            <a:schemeClr val="accent3"/>
-          </a:fillRef>
-          <a:effectRef idx="0">
-            <a:schemeClr val="accent3"/>
-          </a:effectRef>
-          <a:fontRef idx="minor">
-            <a:schemeClr val="lt1"/>
-          </a:fontRef>
-        </p:style>
-        <p:txBody>
-          <a:bodyPr rtlCol="0" anchor="ctr"/>
-          <a:lstStyle/>
-          <a:p>
-            <a:pPr algn="ctr"/>
-            <a:r>
-              <a:rPr kumimoji="1" lang="ja-JP" altLang="en-US" dirty="0"/>
-              <a:t>説明変数</a:t>
-            </a:r>
-            <a:r>
-              <a:rPr kumimoji="1" lang="en-US" altLang="ja-JP" dirty="0"/>
-              <a:t>1</a:t>
-            </a:r>
-            <a:r>
-              <a:rPr kumimoji="1" lang="ja-JP" altLang="en-US" dirty="0"/>
-              <a:t>：</a:t>
-            </a:r>
-            <a:br>
-              <a:rPr kumimoji="1" lang="en-US" altLang="ja-JP" dirty="0"/>
-            </a:br>
-            <a:r>
-              <a:rPr kumimoji="1" lang="ja-JP" altLang="en-US" dirty="0"/>
-              <a:t>パンの種類</a:t>
-            </a:r>
-            <a:endParaRPr kumimoji="1" lang="en-US" altLang="ja-JP" dirty="0"/>
-          </a:p>
-          <a:p>
-            <a:pPr algn="ctr"/>
-            <a:endParaRPr kumimoji="1" lang="en-US" altLang="ja-JP" dirty="0"/>
-          </a:p>
-          <a:p>
-            <a:pPr algn="ctr"/>
-            <a:r>
-              <a:rPr kumimoji="1" lang="ja-JP" altLang="en-US" dirty="0"/>
-              <a:t>水準：</a:t>
-            </a:r>
-            <a:r>
-              <a:rPr kumimoji="1" lang="en-US" altLang="ja-JP" dirty="0"/>
-              <a:t>A</a:t>
-            </a:r>
-            <a:r>
-              <a:rPr lang="en-US" altLang="ja-JP" dirty="0"/>
-              <a:t>,B,C</a:t>
-            </a:r>
-          </a:p>
-        </p:txBody>
-      </p:sp>
-      <p:cxnSp>
-        <p:nvCxnSpPr>
-          <p:cNvPr id="6" name="直線矢印コネクタ 5">
-            <a:extLst>
-              <a:ext uri="{FF2B5EF4-FFF2-40B4-BE49-F238E27FC236}">
-                <a16:creationId xmlns:a16="http://schemas.microsoft.com/office/drawing/2014/main" id="{78716ED2-DF3B-D92E-7BD8-3AA09D91A477}"/>
-              </a:ext>
-            </a:extLst>
-          </p:cNvPr>
-          <p:cNvCxnSpPr>
-            <a:cxnSpLocks/>
-            <a:stCxn id="5" idx="3"/>
-            <a:endCxn id="4" idx="1"/>
-          </p:cNvCxnSpPr>
-          <p:nvPr/>
-        </p:nvCxnSpPr>
-        <p:spPr>
-          <a:xfrm>
-            <a:off x="4886325" y="2438399"/>
-            <a:ext cx="2047875" cy="990601"/>
-          </a:xfrm>
-          <a:prstGeom prst="straightConnector1">
-            <a:avLst/>
-          </a:prstGeom>
-          <a:ln>
-            <a:tailEnd type="triangle"/>
-          </a:ln>
-        </p:spPr>
-        <p:style>
-          <a:lnRef idx="2">
-            <a:schemeClr val="accent3">
-              <a:shade val="15000"/>
-            </a:schemeClr>
-          </a:lnRef>
-          <a:fillRef idx="1">
-            <a:schemeClr val="accent3"/>
-          </a:fillRef>
-          <a:effectRef idx="0">
-            <a:schemeClr val="accent3"/>
-          </a:effectRef>
-          <a:fontRef idx="minor">
-            <a:schemeClr val="lt1"/>
-          </a:fontRef>
-        </p:style>
-      </p:cxnSp>
-      <p:sp>
-        <p:nvSpPr>
-          <p:cNvPr id="9" name="正方形/長方形 8">
-            <a:extLst>
-              <a:ext uri="{FF2B5EF4-FFF2-40B4-BE49-F238E27FC236}">
-                <a16:creationId xmlns:a16="http://schemas.microsoft.com/office/drawing/2014/main" id="{CBC8A939-E168-8640-4151-6E3418F38040}"/>
-              </a:ext>
-            </a:extLst>
-          </p:cNvPr>
-          <p:cNvSpPr/>
-          <p:nvPr/>
-        </p:nvSpPr>
-        <p:spPr>
-          <a:xfrm>
-            <a:off x="2514600" y="3724276"/>
-            <a:ext cx="2371725" cy="1485900"/>
-          </a:xfrm>
-          <a:prstGeom prst="rect">
-            <a:avLst/>
-          </a:prstGeom>
-        </p:spPr>
-        <p:style>
-          <a:lnRef idx="2">
-            <a:schemeClr val="accent4">
-              <a:shade val="15000"/>
-            </a:schemeClr>
-          </a:lnRef>
-          <a:fillRef idx="1">
-            <a:schemeClr val="accent4"/>
-          </a:fillRef>
-          <a:effectRef idx="0">
-            <a:schemeClr val="accent4"/>
-          </a:effectRef>
-          <a:fontRef idx="minor">
-            <a:schemeClr val="lt1"/>
-          </a:fontRef>
-        </p:style>
-        <p:txBody>
-          <a:bodyPr rtlCol="0" anchor="ctr"/>
-          <a:lstStyle/>
-          <a:p>
-            <a:pPr algn="ctr"/>
-            <a:r>
-              <a:rPr kumimoji="1" lang="ja-JP" altLang="en-US" dirty="0"/>
-              <a:t>説明変数</a:t>
-            </a:r>
-            <a:r>
-              <a:rPr kumimoji="1" lang="en-US" altLang="ja-JP" dirty="0"/>
-              <a:t>2</a:t>
-            </a:r>
-            <a:r>
-              <a:rPr kumimoji="1" lang="ja-JP" altLang="en-US" dirty="0"/>
-              <a:t>：</a:t>
-            </a:r>
-            <a:br>
-              <a:rPr kumimoji="1" lang="en-US" altLang="ja-JP" dirty="0"/>
-            </a:br>
-            <a:r>
-              <a:rPr kumimoji="1" lang="ja-JP" altLang="en-US" dirty="0"/>
-              <a:t>被験者</a:t>
-            </a:r>
-            <a:r>
-              <a:rPr kumimoji="1" lang="en-US" altLang="ja-JP" dirty="0"/>
-              <a:t>No.</a:t>
-            </a:r>
-          </a:p>
-          <a:p>
-            <a:pPr algn="ctr"/>
-            <a:endParaRPr kumimoji="1" lang="en-US" altLang="ja-JP" dirty="0"/>
-          </a:p>
-          <a:p>
-            <a:pPr algn="ctr"/>
-            <a:r>
-              <a:rPr kumimoji="1" lang="ja-JP" altLang="en-US" dirty="0"/>
-              <a:t>水準：</a:t>
-            </a:r>
-            <a:r>
-              <a:rPr kumimoji="1" lang="en-US" altLang="ja-JP" dirty="0"/>
-              <a:t>1,2,</a:t>
-            </a:r>
-            <a:r>
-              <a:rPr kumimoji="1" lang="ja-JP" altLang="en-US" dirty="0"/>
-              <a:t>・・・</a:t>
-            </a:r>
-            <a:r>
-              <a:rPr kumimoji="1" lang="en-US" altLang="ja-JP" dirty="0"/>
-              <a:t>20</a:t>
-            </a:r>
-            <a:endParaRPr lang="en-US" altLang="ja-JP" dirty="0"/>
-          </a:p>
-        </p:txBody>
-      </p:sp>
-      <p:cxnSp>
-        <p:nvCxnSpPr>
-          <p:cNvPr id="10" name="直線矢印コネクタ 9">
-            <a:extLst>
-              <a:ext uri="{FF2B5EF4-FFF2-40B4-BE49-F238E27FC236}">
-                <a16:creationId xmlns:a16="http://schemas.microsoft.com/office/drawing/2014/main" id="{3692A9EC-9D53-BBF8-6010-1B3560DD9FC6}"/>
-              </a:ext>
-            </a:extLst>
-          </p:cNvPr>
-          <p:cNvCxnSpPr>
-            <a:cxnSpLocks/>
-            <a:stCxn id="9" idx="3"/>
-            <a:endCxn id="4" idx="1"/>
-          </p:cNvCxnSpPr>
-          <p:nvPr/>
-        </p:nvCxnSpPr>
-        <p:spPr>
-          <a:xfrm flipV="1">
-            <a:off x="4886325" y="3429000"/>
-            <a:ext cx="2047875" cy="1038226"/>
-          </a:xfrm>
-          <a:prstGeom prst="straightConnector1">
-            <a:avLst/>
-          </a:prstGeom>
-          <a:ln>
-            <a:tailEnd type="triangle"/>
-          </a:ln>
-        </p:spPr>
-        <p:style>
-          <a:lnRef idx="2">
-            <a:schemeClr val="accent3">
-              <a:shade val="15000"/>
-            </a:schemeClr>
-          </a:lnRef>
-          <a:fillRef idx="1">
-            <a:schemeClr val="accent3"/>
-          </a:fillRef>
-          <a:effectRef idx="0">
-            <a:schemeClr val="accent3"/>
-          </a:effectRef>
-          <a:fontRef idx="minor">
-            <a:schemeClr val="lt1"/>
-          </a:fontRef>
-        </p:style>
-      </p:cxnSp>
-    </p:spTree>
-    <p:extLst>
-      <p:ext uri="{BB962C8B-B14F-4D97-AF65-F5344CB8AC3E}">
-        <p14:creationId xmlns:p14="http://schemas.microsoft.com/office/powerpoint/2010/main" val="1241106311"/>
       </p:ext>
     </p:extLst>
   </p:cSld>

--- a/Img/AnovaModeling.pptx
+++ b/Img/AnovaModeling.pptx
@@ -441,7 +441,7 @@
           <a:p>
             <a:fld id="{74503653-7382-4EF5-850F-AEDF0B3BD356}" type="datetimeFigureOut">
               <a:rPr kumimoji="1" lang="ja-JP" altLang="en-US" smtClean="0"/>
-              <a:t>2025/1/7</a:t>
+              <a:t>2025/1/14</a:t>
             </a:fld>
             <a:endParaRPr kumimoji="1" lang="ja-JP" altLang="en-US"/>
           </a:p>
@@ -966,7 +966,7 @@
           <a:p>
             <a:fld id="{E3020441-CB21-445C-817D-199401EC5197}" type="datetimeFigureOut">
               <a:rPr kumimoji="1" lang="ja-JP" altLang="en-US" smtClean="0"/>
-              <a:t>2025/1/7</a:t>
+              <a:t>2025/1/14</a:t>
             </a:fld>
             <a:endParaRPr kumimoji="1" lang="ja-JP" altLang="en-US"/>
           </a:p>
@@ -1168,7 +1168,7 @@
           <a:p>
             <a:fld id="{E3020441-CB21-445C-817D-199401EC5197}" type="datetimeFigureOut">
               <a:rPr kumimoji="1" lang="ja-JP" altLang="en-US" smtClean="0"/>
-              <a:t>2025/1/7</a:t>
+              <a:t>2025/1/14</a:t>
             </a:fld>
             <a:endParaRPr kumimoji="1" lang="ja-JP" altLang="en-US"/>
           </a:p>
@@ -1380,7 +1380,7 @@
           <a:p>
             <a:fld id="{E3020441-CB21-445C-817D-199401EC5197}" type="datetimeFigureOut">
               <a:rPr kumimoji="1" lang="ja-JP" altLang="en-US" smtClean="0"/>
-              <a:t>2025/1/7</a:t>
+              <a:t>2025/1/14</a:t>
             </a:fld>
             <a:endParaRPr kumimoji="1" lang="ja-JP" altLang="en-US"/>
           </a:p>
@@ -1582,7 +1582,7 @@
           <a:p>
             <a:fld id="{E3020441-CB21-445C-817D-199401EC5197}" type="datetimeFigureOut">
               <a:rPr kumimoji="1" lang="ja-JP" altLang="en-US" smtClean="0"/>
-              <a:t>2025/1/7</a:t>
+              <a:t>2025/1/14</a:t>
             </a:fld>
             <a:endParaRPr kumimoji="1" lang="ja-JP" altLang="en-US"/>
           </a:p>
@@ -1833,7 +1833,7 @@
           <a:p>
             <a:fld id="{E3020441-CB21-445C-817D-199401EC5197}" type="datetimeFigureOut">
               <a:rPr kumimoji="1" lang="ja-JP" altLang="en-US" smtClean="0"/>
-              <a:t>2025/1/7</a:t>
+              <a:t>2025/1/14</a:t>
             </a:fld>
             <a:endParaRPr kumimoji="1" lang="ja-JP" altLang="en-US"/>
           </a:p>
@@ -2129,7 +2129,7 @@
           <a:p>
             <a:fld id="{E3020441-CB21-445C-817D-199401EC5197}" type="datetimeFigureOut">
               <a:rPr kumimoji="1" lang="ja-JP" altLang="en-US" smtClean="0"/>
-              <a:t>2025/1/7</a:t>
+              <a:t>2025/1/14</a:t>
             </a:fld>
             <a:endParaRPr kumimoji="1" lang="ja-JP" altLang="en-US"/>
           </a:p>
@@ -2540,7 +2540,7 @@
           <a:p>
             <a:fld id="{E3020441-CB21-445C-817D-199401EC5197}" type="datetimeFigureOut">
               <a:rPr kumimoji="1" lang="ja-JP" altLang="en-US" smtClean="0"/>
-              <a:t>2025/1/7</a:t>
+              <a:t>2025/1/14</a:t>
             </a:fld>
             <a:endParaRPr kumimoji="1" lang="ja-JP" altLang="en-US"/>
           </a:p>
@@ -2658,7 +2658,7 @@
           <a:p>
             <a:fld id="{E3020441-CB21-445C-817D-199401EC5197}" type="datetimeFigureOut">
               <a:rPr kumimoji="1" lang="ja-JP" altLang="en-US" smtClean="0"/>
-              <a:t>2025/1/7</a:t>
+              <a:t>2025/1/14</a:t>
             </a:fld>
             <a:endParaRPr kumimoji="1" lang="ja-JP" altLang="en-US"/>
           </a:p>
@@ -2776,7 +2776,7 @@
           <a:p>
             <a:fld id="{E3020441-CB21-445C-817D-199401EC5197}" type="datetimeFigureOut">
               <a:rPr kumimoji="1" lang="ja-JP" altLang="en-US" smtClean="0"/>
-              <a:t>2025/1/7</a:t>
+              <a:t>2025/1/14</a:t>
             </a:fld>
             <a:endParaRPr kumimoji="1" lang="ja-JP" altLang="en-US"/>
           </a:p>
@@ -3092,7 +3092,7 @@
           <a:p>
             <a:fld id="{E3020441-CB21-445C-817D-199401EC5197}" type="datetimeFigureOut">
               <a:rPr kumimoji="1" lang="ja-JP" altLang="en-US" smtClean="0"/>
-              <a:t>2025/1/7</a:t>
+              <a:t>2025/1/14</a:t>
             </a:fld>
             <a:endParaRPr kumimoji="1" lang="ja-JP" altLang="en-US"/>
           </a:p>
@@ -3356,7 +3356,7 @@
           <a:p>
             <a:fld id="{E3020441-CB21-445C-817D-199401EC5197}" type="datetimeFigureOut">
               <a:rPr kumimoji="1" lang="ja-JP" altLang="en-US" smtClean="0"/>
-              <a:t>2025/1/7</a:t>
+              <a:t>2025/1/14</a:t>
             </a:fld>
             <a:endParaRPr kumimoji="1" lang="ja-JP" altLang="en-US"/>
           </a:p>
@@ -3602,7 +3602,7 @@
           <a:p>
             <a:fld id="{E3020441-CB21-445C-817D-199401EC5197}" type="datetimeFigureOut">
               <a:rPr kumimoji="1" lang="ja-JP" altLang="en-US" smtClean="0"/>
-              <a:t>2025/1/7</a:t>
+              <a:t>2025/1/14</a:t>
             </a:fld>
             <a:endParaRPr kumimoji="1" lang="ja-JP" altLang="en-US"/>
           </a:p>
@@ -5407,9 +5407,10 @@
           <a:p>
             <a:pPr algn="ctr"/>
             <a:r>
-              <a:rPr kumimoji="1" lang="ja-JP" altLang="en-US" dirty="0"/>
-              <a:t>厚揚げ購入頻度</a:t>
-            </a:r>
+              <a:rPr kumimoji="1" lang="ja-JP" altLang="en-US" dirty="0" smtClean="0"/>
+              <a:t>おいしさ</a:t>
+            </a:r>
+            <a:endParaRPr kumimoji="1" lang="ja-JP" altLang="en-US" dirty="0"/>
           </a:p>
         </p:txBody>
       </p:sp>
@@ -5466,6 +5467,10 @@
             <a:r>
               <a:rPr kumimoji="1" lang="ja-JP" altLang="en-US" dirty="0"/>
               <a:t>：</a:t>
+            </a:r>
+            <a:r>
+              <a:rPr kumimoji="1" lang="en-US" altLang="ja-JP" dirty="0"/>
+              <a:t/>
             </a:r>
             <a:br>
               <a:rPr kumimoji="1" lang="en-US" altLang="ja-JP" dirty="0"/>
@@ -5595,6 +5600,10 @@
             <a:r>
               <a:rPr kumimoji="1" lang="ja-JP" altLang="en-US" dirty="0"/>
               <a:t>：</a:t>
+            </a:r>
+            <a:r>
+              <a:rPr kumimoji="1" lang="en-US" altLang="ja-JP" dirty="0"/>
+              <a:t/>
             </a:r>
             <a:br>
               <a:rPr kumimoji="1" lang="en-US" altLang="ja-JP" dirty="0"/>
@@ -5829,6 +5838,10 @@
               <a:rPr kumimoji="1" lang="ja-JP" altLang="en-US" dirty="0"/>
               <a:t>：</a:t>
             </a:r>
+            <a:r>
+              <a:rPr kumimoji="1" lang="en-US" altLang="ja-JP" dirty="0"/>
+              <a:t/>
+            </a:r>
             <a:br>
               <a:rPr kumimoji="1" lang="en-US" altLang="ja-JP" dirty="0"/>
             </a:br>
@@ -5957,6 +5970,10 @@
             <a:r>
               <a:rPr kumimoji="1" lang="ja-JP" altLang="en-US" dirty="0"/>
               <a:t>：</a:t>
+            </a:r>
+            <a:r>
+              <a:rPr kumimoji="1" lang="en-US" altLang="ja-JP" dirty="0"/>
+              <a:t/>
             </a:r>
             <a:br>
               <a:rPr kumimoji="1" lang="en-US" altLang="ja-JP" dirty="0"/>
@@ -6188,6 +6205,10 @@
               <a:rPr kumimoji="1" lang="ja-JP" altLang="en-US" dirty="0"/>
               <a:t>：</a:t>
             </a:r>
+            <a:r>
+              <a:rPr kumimoji="1" lang="en-US" altLang="ja-JP" dirty="0"/>
+              <a:t/>
+            </a:r>
             <a:br>
               <a:rPr kumimoji="1" lang="en-US" altLang="ja-JP" dirty="0"/>
             </a:br>
@@ -6316,6 +6337,10 @@
             <a:r>
               <a:rPr kumimoji="1" lang="ja-JP" altLang="en-US" dirty="0"/>
               <a:t>：</a:t>
+            </a:r>
+            <a:r>
+              <a:rPr kumimoji="1" lang="en-US" altLang="ja-JP" dirty="0"/>
+              <a:t/>
             </a:r>
             <a:br>
               <a:rPr kumimoji="1" lang="en-US" altLang="ja-JP" dirty="0"/>
@@ -6786,6 +6811,10 @@
               <a:rPr kumimoji="1" lang="ja-JP" altLang="en-US" dirty="0"/>
               <a:t>：</a:t>
             </a:r>
+            <a:r>
+              <a:rPr kumimoji="1" lang="en-US" altLang="ja-JP" dirty="0"/>
+              <a:t/>
+            </a:r>
             <a:br>
               <a:rPr kumimoji="1" lang="en-US" altLang="ja-JP" dirty="0"/>
             </a:br>
@@ -6940,6 +6969,10 @@
             <a:r>
               <a:rPr kumimoji="1" lang="ja-JP" altLang="en-US" dirty="0"/>
               <a:t>：</a:t>
+            </a:r>
+            <a:r>
+              <a:rPr kumimoji="1" lang="en-US" altLang="ja-JP" dirty="0"/>
+              <a:t/>
             </a:r>
             <a:br>
               <a:rPr kumimoji="1" lang="en-US" altLang="ja-JP" dirty="0"/>
@@ -7284,6 +7317,10 @@
               <a:rPr lang="ja-JP" altLang="en-US" dirty="0"/>
               <a:t>：</a:t>
             </a:r>
+            <a:r>
+              <a:rPr lang="en-US" altLang="ja-JP" dirty="0"/>
+              <a:t/>
+            </a:r>
             <a:br>
               <a:rPr lang="en-US" altLang="ja-JP" dirty="0"/>
             </a:br>
@@ -7429,6 +7466,10 @@
             <a:r>
               <a:rPr lang="ja-JP" altLang="en-US" dirty="0"/>
               <a:t>：</a:t>
+            </a:r>
+            <a:r>
+              <a:rPr lang="en-US" altLang="ja-JP" dirty="0"/>
+              <a:t/>
             </a:r>
             <a:br>
               <a:rPr lang="en-US" altLang="ja-JP" dirty="0"/>
@@ -7646,6 +7687,203 @@
       </p:grpSpPr>
       <p:sp>
         <p:nvSpPr>
+          <p:cNvPr id="9" name="正方形/長方形 8">
+            <a:extLst>
+              <a:ext uri="{FF2B5EF4-FFF2-40B4-BE49-F238E27FC236}">
+                <a16:creationId xmlns:a16="http://schemas.microsoft.com/office/drawing/2014/main" id="{CBC8A939-E168-8640-4151-6E3418F38040}"/>
+              </a:ext>
+            </a:extLst>
+          </p:cNvPr>
+          <p:cNvSpPr/>
+          <p:nvPr/>
+        </p:nvSpPr>
+        <p:spPr>
+          <a:xfrm>
+            <a:off x="768485" y="1264596"/>
+            <a:ext cx="4319081" cy="2127891"/>
+          </a:xfrm>
+          <a:prstGeom prst="rect">
+            <a:avLst/>
+          </a:prstGeom>
+          <a:ln>
+            <a:solidFill>
+              <a:srgbClr val="FF0000"/>
+            </a:solidFill>
+          </a:ln>
+        </p:spPr>
+        <p:style>
+          <a:lnRef idx="2">
+            <a:schemeClr val="accent4">
+              <a:shade val="15000"/>
+            </a:schemeClr>
+          </a:lnRef>
+          <a:fillRef idx="1">
+            <a:schemeClr val="accent4"/>
+          </a:fillRef>
+          <a:effectRef idx="0">
+            <a:schemeClr val="accent4"/>
+          </a:effectRef>
+          <a:fontRef idx="minor">
+            <a:schemeClr val="lt1"/>
+          </a:fontRef>
+        </p:style>
+        <p:txBody>
+          <a:bodyPr rtlCol="0" anchor="t"/>
+          <a:lstStyle/>
+          <a:p>
+            <a:r>
+              <a:rPr lang="ja-JP" altLang="en-US" dirty="0"/>
+              <a:t>説明変数</a:t>
+            </a:r>
+            <a:r>
+              <a:rPr lang="en-US" altLang="ja-JP" dirty="0"/>
+              <a:t>3</a:t>
+            </a:r>
+            <a:r>
+              <a:rPr kumimoji="1" lang="ja-JP" altLang="en-US" dirty="0"/>
+              <a:t>：</a:t>
+            </a:r>
+            <a:r>
+              <a:rPr kumimoji="1" lang="en-US" altLang="ja-JP" dirty="0"/>
+              <a:t/>
+            </a:r>
+            <a:br>
+              <a:rPr kumimoji="1" lang="en-US" altLang="ja-JP" dirty="0"/>
+            </a:br>
+            <a:r>
+              <a:rPr kumimoji="1" lang="ja-JP" altLang="en-US" dirty="0"/>
+              <a:t>被験者</a:t>
+            </a:r>
+            <a:r>
+              <a:rPr kumimoji="1" lang="en-US" altLang="ja-JP" dirty="0"/>
+              <a:t>No.</a:t>
+            </a:r>
+          </a:p>
+          <a:p>
+            <a:pPr algn="ctr"/>
+            <a:endParaRPr kumimoji="1" lang="en-US" altLang="ja-JP" dirty="0"/>
+          </a:p>
+          <a:p>
+            <a:r>
+              <a:rPr kumimoji="1" lang="ja-JP" altLang="en-US" dirty="0"/>
+              <a:t>水準：</a:t>
+            </a:r>
+            <a:r>
+              <a:rPr kumimoji="1" lang="en-US" altLang="ja-JP" dirty="0"/>
+              <a:t>1,2,</a:t>
+            </a:r>
+            <a:r>
+              <a:rPr kumimoji="1" lang="ja-JP" altLang="en-US" dirty="0"/>
+              <a:t>・・・</a:t>
+            </a:r>
+            <a:r>
+              <a:rPr kumimoji="1" lang="en-US" altLang="ja-JP" dirty="0"/>
+              <a:t>20</a:t>
+            </a:r>
+            <a:endParaRPr lang="en-US" altLang="ja-JP" dirty="0"/>
+          </a:p>
+        </p:txBody>
+      </p:sp>
+      <p:sp>
+        <p:nvSpPr>
+          <p:cNvPr id="20" name="正方形/長方形 19">
+            <a:extLst>
+              <a:ext uri="{FF2B5EF4-FFF2-40B4-BE49-F238E27FC236}">
+                <a16:creationId xmlns:a16="http://schemas.microsoft.com/office/drawing/2014/main" id="{CBC8A939-E168-8640-4151-6E3418F38040}"/>
+              </a:ext>
+            </a:extLst>
+          </p:cNvPr>
+          <p:cNvSpPr/>
+          <p:nvPr/>
+        </p:nvSpPr>
+        <p:spPr>
+          <a:xfrm>
+            <a:off x="768485" y="3576638"/>
+            <a:ext cx="4319081" cy="2026494"/>
+          </a:xfrm>
+          <a:prstGeom prst="rect">
+            <a:avLst/>
+          </a:prstGeom>
+          <a:ln>
+            <a:solidFill>
+              <a:srgbClr val="FF0000"/>
+            </a:solidFill>
+          </a:ln>
+        </p:spPr>
+        <p:style>
+          <a:lnRef idx="2">
+            <a:schemeClr val="accent4">
+              <a:shade val="15000"/>
+            </a:schemeClr>
+          </a:lnRef>
+          <a:fillRef idx="1">
+            <a:schemeClr val="accent4"/>
+          </a:fillRef>
+          <a:effectRef idx="0">
+            <a:schemeClr val="accent4"/>
+          </a:effectRef>
+          <a:fontRef idx="minor">
+            <a:schemeClr val="lt1"/>
+          </a:fontRef>
+        </p:style>
+        <p:txBody>
+          <a:bodyPr rtlCol="0" anchor="t"/>
+          <a:lstStyle/>
+          <a:p>
+            <a:r>
+              <a:rPr lang="ja-JP" altLang="en-US" dirty="0"/>
+              <a:t>説明変数</a:t>
+            </a:r>
+            <a:r>
+              <a:rPr lang="en-US" altLang="ja-JP" dirty="0"/>
+              <a:t>3</a:t>
+            </a:r>
+            <a:r>
+              <a:rPr kumimoji="1" lang="ja-JP" altLang="en-US" dirty="0"/>
+              <a:t>：</a:t>
+            </a:r>
+            <a:r>
+              <a:rPr kumimoji="1" lang="en-US" altLang="ja-JP" dirty="0"/>
+              <a:t/>
+            </a:r>
+            <a:br>
+              <a:rPr kumimoji="1" lang="en-US" altLang="ja-JP" dirty="0"/>
+            </a:br>
+            <a:r>
+              <a:rPr kumimoji="1" lang="ja-JP" altLang="en-US" dirty="0"/>
+              <a:t>被験者</a:t>
+            </a:r>
+            <a:r>
+              <a:rPr kumimoji="1" lang="en-US" altLang="ja-JP" dirty="0"/>
+              <a:t>No.</a:t>
+            </a:r>
+          </a:p>
+          <a:p>
+            <a:endParaRPr kumimoji="1" lang="en-US" altLang="ja-JP" dirty="0"/>
+          </a:p>
+          <a:p>
+            <a:r>
+              <a:rPr kumimoji="1" lang="ja-JP" altLang="en-US" dirty="0"/>
+              <a:t>水準：</a:t>
+            </a:r>
+            <a:r>
+              <a:rPr kumimoji="1" lang="en-US" altLang="ja-JP" dirty="0"/>
+              <a:t>1,2,</a:t>
+            </a:r>
+            <a:r>
+              <a:rPr kumimoji="1" lang="ja-JP" altLang="en-US" dirty="0"/>
+              <a:t>・・・</a:t>
+            </a:r>
+            <a:r>
+              <a:rPr kumimoji="1" lang="en-US" altLang="ja-JP" dirty="0"/>
+              <a:t>20</a:t>
+            </a:r>
+            <a:endParaRPr lang="en-US" altLang="ja-JP" dirty="0"/>
+          </a:p>
+        </p:txBody>
+      </p:sp>
+      <p:sp>
+        <p:nvSpPr>
           <p:cNvPr id="19" name="楕円 18"/>
           <p:cNvSpPr/>
           <p:nvPr/>
@@ -7734,9 +7972,10 @@
           <a:p>
             <a:pPr algn="ctr"/>
             <a:r>
-              <a:rPr kumimoji="1" lang="ja-JP" altLang="en-US" dirty="0"/>
-              <a:t>厚揚げ購入頻度</a:t>
-            </a:r>
+              <a:rPr kumimoji="1" lang="ja-JP" altLang="en-US" dirty="0" smtClean="0"/>
+              <a:t>おいしさ</a:t>
+            </a:r>
+            <a:endParaRPr kumimoji="1" lang="ja-JP" altLang="en-US" dirty="0"/>
           </a:p>
         </p:txBody>
       </p:sp>
@@ -7794,6 +8033,10 @@
               <a:rPr kumimoji="1" lang="ja-JP" altLang="en-US" dirty="0"/>
               <a:t>：</a:t>
             </a:r>
+            <a:r>
+              <a:rPr kumimoji="1" lang="en-US" altLang="ja-JP" dirty="0"/>
+              <a:t/>
+            </a:r>
             <a:br>
               <a:rPr kumimoji="1" lang="en-US" altLang="ja-JP" dirty="0"/>
             </a:br>
@@ -7921,6 +8164,10 @@
               <a:rPr kumimoji="1" lang="ja-JP" altLang="en-US" dirty="0"/>
               <a:t>：</a:t>
             </a:r>
+            <a:r>
+              <a:rPr kumimoji="1" lang="en-US" altLang="ja-JP" dirty="0"/>
+              <a:t/>
+            </a:r>
             <a:br>
               <a:rPr kumimoji="1" lang="en-US" altLang="ja-JP" dirty="0"/>
             </a:br>
@@ -7988,151 +8235,6 @@
           </a:effectRef>
           <a:fontRef idx="minor">
             <a:schemeClr val="dk1"/>
-          </a:fontRef>
-        </p:style>
-      </p:cxnSp>
-      <p:sp>
-        <p:nvSpPr>
-          <p:cNvPr id="9" name="正方形/長方形 8">
-            <a:extLst>
-              <a:ext uri="{FF2B5EF4-FFF2-40B4-BE49-F238E27FC236}">
-                <a16:creationId xmlns:a16="http://schemas.microsoft.com/office/drawing/2014/main" id="{CBC8A939-E168-8640-4151-6E3418F38040}"/>
-              </a:ext>
-            </a:extLst>
-          </p:cNvPr>
-          <p:cNvSpPr/>
-          <p:nvPr/>
-        </p:nvSpPr>
-        <p:spPr>
-          <a:xfrm>
-            <a:off x="6986587" y="4937380"/>
-            <a:ext cx="2371725" cy="1485900"/>
-          </a:xfrm>
-          <a:prstGeom prst="rect">
-            <a:avLst/>
-          </a:prstGeom>
-          <a:ln>
-            <a:solidFill>
-              <a:srgbClr val="FF0000"/>
-            </a:solidFill>
-          </a:ln>
-        </p:spPr>
-        <p:style>
-          <a:lnRef idx="2">
-            <a:schemeClr val="accent4">
-              <a:shade val="15000"/>
-            </a:schemeClr>
-          </a:lnRef>
-          <a:fillRef idx="1">
-            <a:schemeClr val="accent4"/>
-          </a:fillRef>
-          <a:effectRef idx="0">
-            <a:schemeClr val="accent4"/>
-          </a:effectRef>
-          <a:fontRef idx="minor">
-            <a:schemeClr val="lt1"/>
-          </a:fontRef>
-        </p:style>
-        <p:txBody>
-          <a:bodyPr rtlCol="0" anchor="ctr"/>
-          <a:lstStyle/>
-          <a:p>
-            <a:pPr algn="ctr"/>
-            <a:r>
-              <a:rPr lang="ja-JP" altLang="en-US" dirty="0"/>
-              <a:t>説明変数</a:t>
-            </a:r>
-            <a:r>
-              <a:rPr lang="en-US" altLang="ja-JP" dirty="0"/>
-              <a:t>3</a:t>
-            </a:r>
-            <a:r>
-              <a:rPr kumimoji="1" lang="ja-JP" altLang="en-US" dirty="0"/>
-              <a:t>：</a:t>
-            </a:r>
-            <a:br>
-              <a:rPr kumimoji="1" lang="en-US" altLang="ja-JP" dirty="0"/>
-            </a:br>
-            <a:r>
-              <a:rPr kumimoji="1" lang="ja-JP" altLang="en-US" dirty="0"/>
-              <a:t>被験者</a:t>
-            </a:r>
-            <a:r>
-              <a:rPr kumimoji="1" lang="en-US" altLang="ja-JP" dirty="0"/>
-              <a:t>No.</a:t>
-            </a:r>
-          </a:p>
-          <a:p>
-            <a:pPr algn="ctr"/>
-            <a:endParaRPr kumimoji="1" lang="en-US" altLang="ja-JP" dirty="0"/>
-          </a:p>
-          <a:p>
-            <a:pPr algn="ctr"/>
-            <a:r>
-              <a:rPr kumimoji="1" lang="ja-JP" altLang="en-US" dirty="0"/>
-              <a:t>水準：</a:t>
-            </a:r>
-            <a:r>
-              <a:rPr kumimoji="1" lang="en-US" altLang="ja-JP" dirty="0"/>
-              <a:t>1,2,</a:t>
-            </a:r>
-            <a:r>
-              <a:rPr kumimoji="1" lang="ja-JP" altLang="en-US" dirty="0"/>
-              <a:t>・・・</a:t>
-            </a:r>
-            <a:r>
-              <a:rPr kumimoji="1" lang="en-US" altLang="ja-JP" dirty="0"/>
-              <a:t>20</a:t>
-            </a:r>
-            <a:endParaRPr lang="en-US" altLang="ja-JP" dirty="0"/>
-          </a:p>
-        </p:txBody>
-      </p:sp>
-      <p:cxnSp>
-        <p:nvCxnSpPr>
-          <p:cNvPr id="10" name="直線矢印コネクタ 9">
-            <a:extLst>
-              <a:ext uri="{FF2B5EF4-FFF2-40B4-BE49-F238E27FC236}">
-                <a16:creationId xmlns:a16="http://schemas.microsoft.com/office/drawing/2014/main" id="{3692A9EC-9D53-BBF8-6010-1B3560DD9FC6}"/>
-              </a:ext>
-            </a:extLst>
-          </p:cNvPr>
-          <p:cNvCxnSpPr>
-            <a:cxnSpLocks/>
-            <a:stCxn id="9" idx="0"/>
-            <a:endCxn id="4" idx="2"/>
-          </p:cNvCxnSpPr>
-          <p:nvPr/>
-        </p:nvCxnSpPr>
-        <p:spPr>
-          <a:xfrm flipV="1">
-            <a:off x="8172450" y="3867150"/>
-            <a:ext cx="0" cy="1070230"/>
-          </a:xfrm>
-          <a:prstGeom prst="straightConnector1">
-            <a:avLst/>
-          </a:prstGeom>
-          <a:ln>
-            <a:solidFill>
-              <a:srgbClr val="FF0000"/>
-            </a:solidFill>
-            <a:tailEnd type="triangle"/>
-          </a:ln>
-        </p:spPr>
-        <p:style>
-          <a:lnRef idx="2">
-            <a:schemeClr val="accent3">
-              <a:shade val="15000"/>
-            </a:schemeClr>
-          </a:lnRef>
-          <a:fillRef idx="1">
-            <a:schemeClr val="accent3"/>
-          </a:fillRef>
-          <a:effectRef idx="0">
-            <a:schemeClr val="accent3"/>
-          </a:effectRef>
-          <a:fontRef idx="minor">
-            <a:schemeClr val="lt1"/>
           </a:fontRef>
         </p:style>
       </p:cxnSp>
@@ -8290,6 +8392,83 @@
           </a:effectRef>
           <a:fontRef idx="minor">
             <a:schemeClr val="dk1"/>
+          </a:fontRef>
+        </p:style>
+      </p:cxnSp>
+      <p:cxnSp>
+        <p:nvCxnSpPr>
+          <p:cNvPr id="13" name="直線矢印コネクタ 12"/>
+          <p:cNvCxnSpPr>
+            <a:endCxn id="4" idx="1"/>
+          </p:cNvCxnSpPr>
+          <p:nvPr/>
+        </p:nvCxnSpPr>
+        <p:spPr>
+          <a:xfrm>
+            <a:off x="5087566" y="2438399"/>
+            <a:ext cx="1846634" cy="990601"/>
+          </a:xfrm>
+          <a:prstGeom prst="straightConnector1">
+            <a:avLst/>
+          </a:prstGeom>
+          <a:ln>
+            <a:solidFill>
+              <a:srgbClr val="FF0000"/>
+            </a:solidFill>
+            <a:tailEnd type="triangle"/>
+          </a:ln>
+        </p:spPr>
+        <p:style>
+          <a:lnRef idx="1">
+            <a:schemeClr val="accent1"/>
+          </a:lnRef>
+          <a:fillRef idx="0">
+            <a:schemeClr val="accent1"/>
+          </a:fillRef>
+          <a:effectRef idx="0">
+            <a:schemeClr val="accent1"/>
+          </a:effectRef>
+          <a:fontRef idx="minor">
+            <a:schemeClr val="tx1"/>
+          </a:fontRef>
+        </p:style>
+      </p:cxnSp>
+      <p:cxnSp>
+        <p:nvCxnSpPr>
+          <p:cNvPr id="22" name="直線矢印コネクタ 21"/>
+          <p:cNvCxnSpPr>
+            <a:stCxn id="20" idx="3"/>
+            <a:endCxn id="4" idx="1"/>
+          </p:cNvCxnSpPr>
+          <p:nvPr/>
+        </p:nvCxnSpPr>
+        <p:spPr>
+          <a:xfrm flipV="1">
+            <a:off x="5087566" y="3429000"/>
+            <a:ext cx="1846634" cy="1160885"/>
+          </a:xfrm>
+          <a:prstGeom prst="straightConnector1">
+            <a:avLst/>
+          </a:prstGeom>
+          <a:ln>
+            <a:solidFill>
+              <a:srgbClr val="FF0000"/>
+            </a:solidFill>
+            <a:tailEnd type="triangle"/>
+          </a:ln>
+        </p:spPr>
+        <p:style>
+          <a:lnRef idx="1">
+            <a:schemeClr val="accent1"/>
+          </a:lnRef>
+          <a:fillRef idx="0">
+            <a:schemeClr val="accent1"/>
+          </a:fillRef>
+          <a:effectRef idx="0">
+            <a:schemeClr val="accent1"/>
+          </a:effectRef>
+          <a:fontRef idx="minor">
+            <a:schemeClr val="tx1"/>
           </a:fontRef>
         </p:style>
       </p:cxnSp>
@@ -9512,6 +9691,10 @@
               <a:rPr kumimoji="1" lang="ja-JP" altLang="en-US" dirty="0"/>
               <a:t>これらの正規分布は</a:t>
             </a:r>
+            <a:r>
+              <a:rPr kumimoji="1" lang="en-US" altLang="ja-JP" dirty="0"/>
+              <a:t/>
+            </a:r>
             <a:br>
               <a:rPr kumimoji="1" lang="en-US" altLang="ja-JP" dirty="0"/>
             </a:br>
@@ -9526,6 +9709,10 @@
             <a:r>
               <a:rPr kumimoji="1" lang="ja-JP" altLang="en-US" dirty="0"/>
               <a:t>予測値，</a:t>
+            </a:r>
+            <a:r>
+              <a:rPr kumimoji="1" lang="en-US" altLang="ja-JP" dirty="0"/>
+              <a:t/>
             </a:r>
             <a:br>
               <a:rPr kumimoji="1" lang="en-US" altLang="ja-JP" dirty="0"/>
@@ -9806,6 +9993,10 @@
               <a:rPr kumimoji="1" lang="ja-JP" altLang="en-US" sz="1400" dirty="0"/>
               <a:t>一要因分散分析</a:t>
             </a:r>
+            <a:r>
+              <a:rPr kumimoji="1" lang="en-US" altLang="ja-JP" sz="1400" dirty="0"/>
+              <a:t/>
+            </a:r>
             <a:br>
               <a:rPr kumimoji="1" lang="en-US" altLang="ja-JP" sz="1400" dirty="0"/>
             </a:br>
@@ -9824,6 +10015,10 @@
             <a:r>
               <a:rPr kumimoji="1" lang="ja-JP" altLang="en-US" sz="1400" dirty="0"/>
               <a:t>二元配置分散分析</a:t>
+            </a:r>
+            <a:r>
+              <a:rPr kumimoji="1" lang="en-US" altLang="ja-JP" sz="1400" dirty="0"/>
+              <a:t/>
             </a:r>
             <a:br>
               <a:rPr kumimoji="1" lang="en-US" altLang="ja-JP" sz="1400" dirty="0"/>
@@ -9868,6 +10063,10 @@
               <a:rPr kumimoji="1" lang="ja-JP" altLang="en-US" sz="1400" dirty="0"/>
               <a:t>二要因分散分析</a:t>
             </a:r>
+            <a:r>
+              <a:rPr kumimoji="1" lang="en-US" altLang="ja-JP" sz="1400" dirty="0"/>
+              <a:t/>
+            </a:r>
             <a:br>
               <a:rPr kumimoji="1" lang="en-US" altLang="ja-JP" sz="1400" dirty="0"/>
             </a:br>
@@ -9886,6 +10085,10 @@
             <a:r>
               <a:rPr kumimoji="1" lang="ja-JP" altLang="en-US" sz="1400" dirty="0"/>
               <a:t>二元配置分散分析</a:t>
+            </a:r>
+            <a:r>
+              <a:rPr kumimoji="1" lang="en-US" altLang="ja-JP" sz="1400" dirty="0"/>
+              <a:t/>
             </a:r>
             <a:br>
               <a:rPr kumimoji="1" lang="en-US" altLang="ja-JP" sz="1400" dirty="0"/>
@@ -10064,6 +10267,10 @@
               <a:rPr kumimoji="1" lang="ja-JP" altLang="en-US" sz="1400" dirty="0"/>
               <a:t>二要因分散分析</a:t>
             </a:r>
+            <a:r>
+              <a:rPr kumimoji="1" lang="en-US" altLang="ja-JP" sz="1400" dirty="0"/>
+              <a:t/>
+            </a:r>
             <a:br>
               <a:rPr kumimoji="1" lang="en-US" altLang="ja-JP" sz="1400" dirty="0"/>
             </a:br>
@@ -10082,6 +10289,10 @@
             <a:r>
               <a:rPr kumimoji="1" lang="ja-JP" altLang="en-US" sz="1400" dirty="0"/>
               <a:t>二元配置分散分析</a:t>
+            </a:r>
+            <a:r>
+              <a:rPr kumimoji="1" lang="en-US" altLang="ja-JP" sz="1400" dirty="0"/>
+              <a:t/>
             </a:r>
             <a:br>
               <a:rPr kumimoji="1" lang="en-US" altLang="ja-JP" sz="1400" dirty="0"/>
@@ -10308,6 +10519,10 @@
               <a:rPr kumimoji="1" lang="ja-JP" altLang="en-US" sz="1400" dirty="0"/>
               <a:t>一要因分散分析</a:t>
             </a:r>
+            <a:r>
+              <a:rPr kumimoji="1" lang="en-US" altLang="ja-JP" sz="1400" dirty="0"/>
+              <a:t/>
+            </a:r>
             <a:br>
               <a:rPr kumimoji="1" lang="en-US" altLang="ja-JP" sz="1400" dirty="0"/>
             </a:br>
@@ -10326,6 +10541,10 @@
             <a:r>
               <a:rPr kumimoji="1" lang="ja-JP" altLang="en-US" sz="1400" dirty="0"/>
               <a:t>二元配置分散分析</a:t>
+            </a:r>
+            <a:r>
+              <a:rPr kumimoji="1" lang="en-US" altLang="ja-JP" sz="1400" dirty="0"/>
+              <a:t/>
             </a:r>
             <a:br>
               <a:rPr kumimoji="1" lang="en-US" altLang="ja-JP" sz="1400" dirty="0"/>
@@ -10370,6 +10589,10 @@
               <a:rPr kumimoji="1" lang="ja-JP" altLang="en-US" sz="1400" dirty="0"/>
               <a:t>二要因分散分析</a:t>
             </a:r>
+            <a:r>
+              <a:rPr kumimoji="1" lang="en-US" altLang="ja-JP" sz="1400" dirty="0"/>
+              <a:t/>
+            </a:r>
             <a:br>
               <a:rPr kumimoji="1" lang="en-US" altLang="ja-JP" sz="1400" dirty="0"/>
             </a:br>
@@ -10388,6 +10611,10 @@
             <a:r>
               <a:rPr kumimoji="1" lang="ja-JP" altLang="en-US" sz="1400" dirty="0"/>
               <a:t>二元配置分散分析</a:t>
+            </a:r>
+            <a:r>
+              <a:rPr kumimoji="1" lang="en-US" altLang="ja-JP" sz="1400" dirty="0"/>
+              <a:t/>
             </a:r>
             <a:br>
               <a:rPr kumimoji="1" lang="en-US" altLang="ja-JP" sz="1400" dirty="0"/>
@@ -10432,6 +10659,10 @@
               <a:rPr kumimoji="1" lang="ja-JP" altLang="en-US" sz="1400" dirty="0"/>
               <a:t>二要因分散分析</a:t>
             </a:r>
+            <a:r>
+              <a:rPr kumimoji="1" lang="en-US" altLang="ja-JP" sz="1400" dirty="0"/>
+              <a:t/>
+            </a:r>
             <a:br>
               <a:rPr kumimoji="1" lang="en-US" altLang="ja-JP" sz="1400" dirty="0"/>
             </a:br>
@@ -10450,6 +10681,10 @@
             <a:r>
               <a:rPr kumimoji="1" lang="ja-JP" altLang="en-US" sz="1400" dirty="0"/>
               <a:t>二元配置分散分析</a:t>
+            </a:r>
+            <a:r>
+              <a:rPr kumimoji="1" lang="en-US" altLang="ja-JP" sz="1400" dirty="0"/>
+              <a:t/>
             </a:r>
             <a:br>
               <a:rPr kumimoji="1" lang="en-US" altLang="ja-JP" sz="1400" dirty="0"/>
@@ -12480,6 +12715,10 @@
               <a:rPr kumimoji="1" lang="ja-JP" altLang="en-US" dirty="0"/>
               <a:t>水準：</a:t>
             </a:r>
+            <a:r>
+              <a:rPr kumimoji="1" lang="en-US" altLang="ja-JP" dirty="0"/>
+              <a:t/>
+            </a:r>
             <a:br>
               <a:rPr kumimoji="1" lang="en-US" altLang="ja-JP" dirty="0"/>
             </a:br>
@@ -12494,6 +12733,10 @@
             <a:r>
               <a:rPr kumimoji="1" lang="ja-JP" altLang="en-US" dirty="0"/>
               <a:t>石川</a:t>
+            </a:r>
+            <a:r>
+              <a:rPr kumimoji="1" lang="en-US" altLang="ja-JP" dirty="0"/>
+              <a:t/>
             </a:r>
             <a:br>
               <a:rPr kumimoji="1" lang="en-US" altLang="ja-JP" dirty="0"/>

--- a/Img/AnovaModeling.pptx
+++ b/Img/AnovaModeling.pptx
@@ -5,7 +5,7 @@
     <p:sldMasterId id="2147483660" r:id="rId1"/>
   </p:sldMasterIdLst>
   <p:notesMasterIdLst>
-    <p:notesMasterId r:id="rId25"/>
+    <p:notesMasterId r:id="rId26"/>
   </p:notesMasterIdLst>
   <p:sldIdLst>
     <p:sldId id="274" r:id="rId2"/>
@@ -23,14 +23,15 @@
     <p:sldId id="261" r:id="rId14"/>
     <p:sldId id="262" r:id="rId15"/>
     <p:sldId id="263" r:id="rId16"/>
-    <p:sldId id="266" r:id="rId17"/>
-    <p:sldId id="267" r:id="rId18"/>
-    <p:sldId id="268" r:id="rId19"/>
-    <p:sldId id="269" r:id="rId20"/>
-    <p:sldId id="270" r:id="rId21"/>
-    <p:sldId id="271" r:id="rId22"/>
-    <p:sldId id="272" r:id="rId23"/>
-    <p:sldId id="273" r:id="rId24"/>
+    <p:sldId id="279" r:id="rId17"/>
+    <p:sldId id="266" r:id="rId18"/>
+    <p:sldId id="267" r:id="rId19"/>
+    <p:sldId id="268" r:id="rId20"/>
+    <p:sldId id="269" r:id="rId21"/>
+    <p:sldId id="270" r:id="rId22"/>
+    <p:sldId id="271" r:id="rId23"/>
+    <p:sldId id="272" r:id="rId24"/>
+    <p:sldId id="273" r:id="rId25"/>
   </p:sldIdLst>
   <p:sldSz cx="12192000" cy="6858000"/>
   <p:notesSz cx="6858000" cy="9144000"/>
@@ -5407,10 +5408,9 @@
           <a:p>
             <a:pPr algn="ctr"/>
             <a:r>
-              <a:rPr kumimoji="1" lang="ja-JP" altLang="en-US" dirty="0" smtClean="0"/>
+              <a:rPr kumimoji="1" lang="ja-JP" altLang="en-US" dirty="0"/>
               <a:t>おいしさ</a:t>
             </a:r>
-            <a:endParaRPr kumimoji="1" lang="ja-JP" altLang="en-US" dirty="0"/>
           </a:p>
         </p:txBody>
       </p:sp>
@@ -5467,10 +5467,6 @@
             <a:r>
               <a:rPr kumimoji="1" lang="ja-JP" altLang="en-US" dirty="0"/>
               <a:t>：</a:t>
-            </a:r>
-            <a:r>
-              <a:rPr kumimoji="1" lang="en-US" altLang="ja-JP" dirty="0"/>
-              <a:t/>
             </a:r>
             <a:br>
               <a:rPr kumimoji="1" lang="en-US" altLang="ja-JP" dirty="0"/>
@@ -5600,10 +5596,6 @@
             <a:r>
               <a:rPr kumimoji="1" lang="ja-JP" altLang="en-US" dirty="0"/>
               <a:t>：</a:t>
-            </a:r>
-            <a:r>
-              <a:rPr kumimoji="1" lang="en-US" altLang="ja-JP" dirty="0"/>
-              <a:t/>
             </a:r>
             <a:br>
               <a:rPr kumimoji="1" lang="en-US" altLang="ja-JP" dirty="0"/>
@@ -5838,10 +5830,6 @@
               <a:rPr kumimoji="1" lang="ja-JP" altLang="en-US" dirty="0"/>
               <a:t>：</a:t>
             </a:r>
-            <a:r>
-              <a:rPr kumimoji="1" lang="en-US" altLang="ja-JP" dirty="0"/>
-              <a:t/>
-            </a:r>
             <a:br>
               <a:rPr kumimoji="1" lang="en-US" altLang="ja-JP" dirty="0"/>
             </a:br>
@@ -5970,10 +5958,6 @@
             <a:r>
               <a:rPr kumimoji="1" lang="ja-JP" altLang="en-US" dirty="0"/>
               <a:t>：</a:t>
-            </a:r>
-            <a:r>
-              <a:rPr kumimoji="1" lang="en-US" altLang="ja-JP" dirty="0"/>
-              <a:t/>
             </a:r>
             <a:br>
               <a:rPr kumimoji="1" lang="en-US" altLang="ja-JP" dirty="0"/>
@@ -6205,10 +6189,6 @@
               <a:rPr kumimoji="1" lang="ja-JP" altLang="en-US" dirty="0"/>
               <a:t>：</a:t>
             </a:r>
-            <a:r>
-              <a:rPr kumimoji="1" lang="en-US" altLang="ja-JP" dirty="0"/>
-              <a:t/>
-            </a:r>
             <a:br>
               <a:rPr kumimoji="1" lang="en-US" altLang="ja-JP" dirty="0"/>
             </a:br>
@@ -6337,10 +6317,6 @@
             <a:r>
               <a:rPr kumimoji="1" lang="ja-JP" altLang="en-US" dirty="0"/>
               <a:t>：</a:t>
-            </a:r>
-            <a:r>
-              <a:rPr kumimoji="1" lang="en-US" altLang="ja-JP" dirty="0"/>
-              <a:t/>
             </a:r>
             <a:br>
               <a:rPr kumimoji="1" lang="en-US" altLang="ja-JP" dirty="0"/>
@@ -6811,10 +6787,6 @@
               <a:rPr kumimoji="1" lang="ja-JP" altLang="en-US" dirty="0"/>
               <a:t>：</a:t>
             </a:r>
-            <a:r>
-              <a:rPr kumimoji="1" lang="en-US" altLang="ja-JP" dirty="0"/>
-              <a:t/>
-            </a:r>
             <a:br>
               <a:rPr kumimoji="1" lang="en-US" altLang="ja-JP" dirty="0"/>
             </a:br>
@@ -6969,10 +6941,6 @@
             <a:r>
               <a:rPr kumimoji="1" lang="ja-JP" altLang="en-US" dirty="0"/>
               <a:t>：</a:t>
-            </a:r>
-            <a:r>
-              <a:rPr kumimoji="1" lang="en-US" altLang="ja-JP" dirty="0"/>
-              <a:t/>
             </a:r>
             <a:br>
               <a:rPr kumimoji="1" lang="en-US" altLang="ja-JP" dirty="0"/>
@@ -7317,10 +7285,6 @@
               <a:rPr lang="ja-JP" altLang="en-US" dirty="0"/>
               <a:t>：</a:t>
             </a:r>
-            <a:r>
-              <a:rPr lang="en-US" altLang="ja-JP" dirty="0"/>
-              <a:t/>
-            </a:r>
             <a:br>
               <a:rPr lang="en-US" altLang="ja-JP" dirty="0"/>
             </a:br>
@@ -7466,10 +7430,6 @@
             <a:r>
               <a:rPr lang="ja-JP" altLang="en-US" dirty="0"/>
               <a:t>：</a:t>
-            </a:r>
-            <a:r>
-              <a:rPr lang="en-US" altLang="ja-JP" dirty="0"/>
-              <a:t/>
             </a:r>
             <a:br>
               <a:rPr lang="en-US" altLang="ja-JP" dirty="0"/>
@@ -7743,10 +7703,6 @@
               <a:rPr kumimoji="1" lang="ja-JP" altLang="en-US" dirty="0"/>
               <a:t>：</a:t>
             </a:r>
-            <a:r>
-              <a:rPr kumimoji="1" lang="en-US" altLang="ja-JP" dirty="0"/>
-              <a:t/>
-            </a:r>
             <a:br>
               <a:rPr kumimoji="1" lang="en-US" altLang="ja-JP" dirty="0"/>
             </a:br>
@@ -7842,10 +7798,6 @@
               <a:rPr kumimoji="1" lang="ja-JP" altLang="en-US" dirty="0"/>
               <a:t>：</a:t>
             </a:r>
-            <a:r>
-              <a:rPr kumimoji="1" lang="en-US" altLang="ja-JP" dirty="0"/>
-              <a:t/>
-            </a:r>
             <a:br>
               <a:rPr kumimoji="1" lang="en-US" altLang="ja-JP" dirty="0"/>
             </a:br>
@@ -7972,10 +7924,9 @@
           <a:p>
             <a:pPr algn="ctr"/>
             <a:r>
-              <a:rPr kumimoji="1" lang="ja-JP" altLang="en-US" dirty="0" smtClean="0"/>
+              <a:rPr kumimoji="1" lang="ja-JP" altLang="en-US" dirty="0"/>
               <a:t>おいしさ</a:t>
             </a:r>
-            <a:endParaRPr kumimoji="1" lang="ja-JP" altLang="en-US" dirty="0"/>
           </a:p>
         </p:txBody>
       </p:sp>
@@ -8033,10 +7984,6 @@
               <a:rPr kumimoji="1" lang="ja-JP" altLang="en-US" dirty="0"/>
               <a:t>：</a:t>
             </a:r>
-            <a:r>
-              <a:rPr kumimoji="1" lang="en-US" altLang="ja-JP" dirty="0"/>
-              <a:t/>
-            </a:r>
             <a:br>
               <a:rPr kumimoji="1" lang="en-US" altLang="ja-JP" dirty="0"/>
             </a:br>
@@ -8163,10 +8110,6 @@
             <a:r>
               <a:rPr kumimoji="1" lang="ja-JP" altLang="en-US" dirty="0"/>
               <a:t>：</a:t>
-            </a:r>
-            <a:r>
-              <a:rPr kumimoji="1" lang="en-US" altLang="ja-JP" dirty="0"/>
-              <a:t/>
             </a:r>
             <a:br>
               <a:rPr kumimoji="1" lang="en-US" altLang="ja-JP" dirty="0"/>
@@ -8490,7 +8433,13 @@
   <p:cSld>
     <p:spTree>
       <p:nvGrpSpPr>
-        <p:cNvPr id="1" name=""/>
+        <p:cNvPr id="1" name="">
+          <a:extLst>
+            <a:ext uri="{FF2B5EF4-FFF2-40B4-BE49-F238E27FC236}">
+              <a16:creationId xmlns:a16="http://schemas.microsoft.com/office/drawing/2014/main" id="{061CE905-B63A-BAB8-0545-13937C5F9555}"/>
+            </a:ext>
+          </a:extLst>
+        </p:cNvPr>
         <p:cNvGrpSpPr/>
         <p:nvPr/>
       </p:nvGrpSpPr>
@@ -8504,67 +8453,692 @@
       </p:grpSpPr>
       <p:sp>
         <p:nvSpPr>
-          <p:cNvPr id="2" name="タイトル 1"/>
-          <p:cNvSpPr>
-            <a:spLocks noGrp="1"/>
-          </p:cNvSpPr>
-          <p:nvPr>
-            <p:ph type="title"/>
-          </p:nvPr>
-        </p:nvSpPr>
-        <p:spPr/>
-        <p:txBody>
-          <a:bodyPr/>
-          <a:lstStyle/>
-          <a:p>
-            <a:r>
-              <a:rPr kumimoji="1" lang="ja-JP" altLang="en-US" dirty="0"/>
-              <a:t>相関</a:t>
-            </a:r>
-            <a:r>
-              <a:rPr kumimoji="1" lang="en-US" altLang="ja-JP" dirty="0"/>
-              <a:t>0.0513</a:t>
-            </a:r>
-            <a:endParaRPr kumimoji="1" lang="ja-JP" altLang="en-US" dirty="0"/>
-          </a:p>
-        </p:txBody>
-      </p:sp>
-      <p:pic>
-        <p:nvPicPr>
-          <p:cNvPr id="6" name="コンテンツ プレースホルダー 5">
+          <p:cNvPr id="9" name="正方形/長方形 8">
             <a:extLst>
               <a:ext uri="{FF2B5EF4-FFF2-40B4-BE49-F238E27FC236}">
-                <a16:creationId xmlns:a16="http://schemas.microsoft.com/office/drawing/2014/main" id="{3B878235-70F5-F862-88EC-863175E059CD}"/>
+                <a16:creationId xmlns:a16="http://schemas.microsoft.com/office/drawing/2014/main" id="{A0F5F7C1-1EC9-7CDE-94DA-2B94B8A4C02A}"/>
               </a:ext>
             </a:extLst>
           </p:cNvPr>
-          <p:cNvPicPr>
-            <a:picLocks noGrp="1" noChangeAspect="1"/>
-          </p:cNvPicPr>
-          <p:nvPr>
-            <p:ph idx="1"/>
-          </p:nvPr>
-        </p:nvPicPr>
-        <p:blipFill>
-          <a:blip r:embed="rId2"/>
-          <a:stretch>
-            <a:fillRect/>
-          </a:stretch>
-        </p:blipFill>
-        <p:spPr>
-          <a:xfrm>
-            <a:off x="3657642" y="2132835"/>
-            <a:ext cx="4889416" cy="3743268"/>
+          <p:cNvSpPr/>
+          <p:nvPr/>
+        </p:nvSpPr>
+        <p:spPr>
+          <a:xfrm>
+            <a:off x="768485" y="1264596"/>
+            <a:ext cx="4319081" cy="2127891"/>
           </a:xfrm>
           <a:prstGeom prst="rect">
             <a:avLst/>
           </a:prstGeom>
-        </p:spPr>
-      </p:pic>
+          <a:ln>
+            <a:solidFill>
+              <a:srgbClr val="FF0000"/>
+            </a:solidFill>
+          </a:ln>
+        </p:spPr>
+        <p:style>
+          <a:lnRef idx="2">
+            <a:schemeClr val="accent4">
+              <a:shade val="15000"/>
+            </a:schemeClr>
+          </a:lnRef>
+          <a:fillRef idx="1">
+            <a:schemeClr val="accent4"/>
+          </a:fillRef>
+          <a:effectRef idx="0">
+            <a:schemeClr val="accent4"/>
+          </a:effectRef>
+          <a:fontRef idx="minor">
+            <a:schemeClr val="lt1"/>
+          </a:fontRef>
+        </p:style>
+        <p:txBody>
+          <a:bodyPr rtlCol="0" anchor="t"/>
+          <a:lstStyle/>
+          <a:p>
+            <a:r>
+              <a:rPr lang="ja-JP" altLang="en-US" dirty="0"/>
+              <a:t>説明変数</a:t>
+            </a:r>
+            <a:r>
+              <a:rPr lang="en-US" altLang="ja-JP" dirty="0"/>
+              <a:t>3</a:t>
+            </a:r>
+            <a:r>
+              <a:rPr kumimoji="1" lang="ja-JP" altLang="en-US" dirty="0"/>
+              <a:t>：</a:t>
+            </a:r>
+            <a:br>
+              <a:rPr kumimoji="1" lang="en-US" altLang="ja-JP" dirty="0"/>
+            </a:br>
+            <a:r>
+              <a:rPr kumimoji="1" lang="ja-JP" altLang="en-US" dirty="0"/>
+              <a:t>被験者</a:t>
+            </a:r>
+            <a:r>
+              <a:rPr kumimoji="1" lang="en-US" altLang="ja-JP" dirty="0"/>
+              <a:t>No.</a:t>
+            </a:r>
+          </a:p>
+          <a:p>
+            <a:pPr algn="ctr"/>
+            <a:endParaRPr kumimoji="1" lang="en-US" altLang="ja-JP" dirty="0"/>
+          </a:p>
+          <a:p>
+            <a:r>
+              <a:rPr kumimoji="1" lang="ja-JP" altLang="en-US" dirty="0"/>
+              <a:t>水準：</a:t>
+            </a:r>
+            <a:r>
+              <a:rPr kumimoji="1" lang="en-US" altLang="ja-JP" dirty="0"/>
+              <a:t>1,2,</a:t>
+            </a:r>
+            <a:r>
+              <a:rPr kumimoji="1" lang="ja-JP" altLang="en-US" dirty="0"/>
+              <a:t>・・・</a:t>
+            </a:r>
+            <a:r>
+              <a:rPr kumimoji="1" lang="en-US" altLang="ja-JP" dirty="0"/>
+              <a:t>100</a:t>
+            </a:r>
+            <a:endParaRPr lang="en-US" altLang="ja-JP" dirty="0"/>
+          </a:p>
+        </p:txBody>
+      </p:sp>
+      <p:sp>
+        <p:nvSpPr>
+          <p:cNvPr id="19" name="楕円 18">
+            <a:extLst>
+              <a:ext uri="{FF2B5EF4-FFF2-40B4-BE49-F238E27FC236}">
+                <a16:creationId xmlns:a16="http://schemas.microsoft.com/office/drawing/2014/main" id="{9AFC5054-E6AE-F222-3531-12A58696E87E}"/>
+              </a:ext>
+            </a:extLst>
+          </p:cNvPr>
+          <p:cNvSpPr/>
+          <p:nvPr/>
+        </p:nvSpPr>
+        <p:spPr>
+          <a:xfrm flipH="1" flipV="1">
+            <a:off x="5475544" y="3303844"/>
+            <a:ext cx="272794" cy="272794"/>
+          </a:xfrm>
+          <a:prstGeom prst="ellipse">
+            <a:avLst/>
+          </a:prstGeom>
+          <a:ln/>
+        </p:spPr>
+        <p:style>
+          <a:lnRef idx="2">
+            <a:schemeClr val="dk1"/>
+          </a:lnRef>
+          <a:fillRef idx="1">
+            <a:schemeClr val="lt1"/>
+          </a:fillRef>
+          <a:effectRef idx="0">
+            <a:schemeClr val="dk1"/>
+          </a:effectRef>
+          <a:fontRef idx="minor">
+            <a:schemeClr val="dk1"/>
+          </a:fontRef>
+        </p:style>
+        <p:txBody>
+          <a:bodyPr rtlCol="0" anchor="ctr"/>
+          <a:lstStyle/>
+          <a:p>
+            <a:pPr algn="ctr"/>
+            <a:endParaRPr kumimoji="1" lang="ja-JP" altLang="en-US"/>
+          </a:p>
+        </p:txBody>
+      </p:sp>
+      <p:sp>
+        <p:nvSpPr>
+          <p:cNvPr id="4" name="正方形/長方形 3">
+            <a:extLst>
+              <a:ext uri="{FF2B5EF4-FFF2-40B4-BE49-F238E27FC236}">
+                <a16:creationId xmlns:a16="http://schemas.microsoft.com/office/drawing/2014/main" id="{4FFC34C6-09DD-504E-ADF3-1C3C347A46B3}"/>
+              </a:ext>
+            </a:extLst>
+          </p:cNvPr>
+          <p:cNvSpPr/>
+          <p:nvPr/>
+        </p:nvSpPr>
+        <p:spPr>
+          <a:xfrm>
+            <a:off x="6934200" y="2990850"/>
+            <a:ext cx="2476500" cy="876300"/>
+          </a:xfrm>
+          <a:prstGeom prst="rect">
+            <a:avLst/>
+          </a:prstGeom>
+        </p:spPr>
+        <p:style>
+          <a:lnRef idx="2">
+            <a:schemeClr val="accent3">
+              <a:shade val="15000"/>
+            </a:schemeClr>
+          </a:lnRef>
+          <a:fillRef idx="1">
+            <a:schemeClr val="accent3"/>
+          </a:fillRef>
+          <a:effectRef idx="0">
+            <a:schemeClr val="accent3"/>
+          </a:effectRef>
+          <a:fontRef idx="minor">
+            <a:schemeClr val="lt1"/>
+          </a:fontRef>
+        </p:style>
+        <p:txBody>
+          <a:bodyPr rtlCol="0" anchor="ctr"/>
+          <a:lstStyle/>
+          <a:p>
+            <a:pPr algn="ctr"/>
+            <a:r>
+              <a:rPr kumimoji="1" lang="ja-JP" altLang="en-US" dirty="0"/>
+              <a:t>目的変数：</a:t>
+            </a:r>
+            <a:endParaRPr kumimoji="1" lang="en-US" altLang="ja-JP" dirty="0"/>
+          </a:p>
+          <a:p>
+            <a:pPr algn="ctr"/>
+            <a:r>
+              <a:rPr kumimoji="1" lang="ja-JP" altLang="en-US" dirty="0"/>
+              <a:t>理解度</a:t>
+            </a:r>
+          </a:p>
+        </p:txBody>
+      </p:sp>
+      <p:sp>
+        <p:nvSpPr>
+          <p:cNvPr id="5" name="正方形/長方形 4">
+            <a:extLst>
+              <a:ext uri="{FF2B5EF4-FFF2-40B4-BE49-F238E27FC236}">
+                <a16:creationId xmlns:a16="http://schemas.microsoft.com/office/drawing/2014/main" id="{27D375A0-8656-F6C2-483D-DD43E0317E8F}"/>
+              </a:ext>
+            </a:extLst>
+          </p:cNvPr>
+          <p:cNvSpPr/>
+          <p:nvPr/>
+        </p:nvSpPr>
+        <p:spPr>
+          <a:xfrm>
+            <a:off x="2514600" y="1695449"/>
+            <a:ext cx="2371725" cy="1485900"/>
+          </a:xfrm>
+          <a:prstGeom prst="rect">
+            <a:avLst/>
+          </a:prstGeom>
+        </p:spPr>
+        <p:style>
+          <a:lnRef idx="2">
+            <a:schemeClr val="accent3">
+              <a:shade val="15000"/>
+            </a:schemeClr>
+          </a:lnRef>
+          <a:fillRef idx="1">
+            <a:schemeClr val="accent3"/>
+          </a:fillRef>
+          <a:effectRef idx="0">
+            <a:schemeClr val="accent3"/>
+          </a:effectRef>
+          <a:fontRef idx="minor">
+            <a:schemeClr val="lt1"/>
+          </a:fontRef>
+        </p:style>
+        <p:txBody>
+          <a:bodyPr rtlCol="0" anchor="ctr"/>
+          <a:lstStyle/>
+          <a:p>
+            <a:pPr algn="ctr"/>
+            <a:r>
+              <a:rPr kumimoji="1" lang="ja-JP" altLang="en-US" dirty="0"/>
+              <a:t>説明変数</a:t>
+            </a:r>
+            <a:r>
+              <a:rPr kumimoji="1" lang="en-US" altLang="ja-JP" dirty="0"/>
+              <a:t>1</a:t>
+            </a:r>
+            <a:r>
+              <a:rPr kumimoji="1" lang="ja-JP" altLang="en-US" dirty="0"/>
+              <a:t>：</a:t>
+            </a:r>
+            <a:br>
+              <a:rPr kumimoji="1" lang="en-US" altLang="ja-JP" dirty="0"/>
+            </a:br>
+            <a:r>
+              <a:rPr kumimoji="1" lang="ja-JP" altLang="en-US" dirty="0"/>
+              <a:t>テスト時期</a:t>
+            </a:r>
+            <a:endParaRPr kumimoji="1" lang="en-US" altLang="ja-JP" dirty="0"/>
+          </a:p>
+          <a:p>
+            <a:pPr algn="ctr"/>
+            <a:endParaRPr kumimoji="1" lang="en-US" altLang="ja-JP" dirty="0"/>
+          </a:p>
+          <a:p>
+            <a:pPr algn="ctr"/>
+            <a:r>
+              <a:rPr kumimoji="1" lang="ja-JP" altLang="en-US" dirty="0"/>
+              <a:t>水準：受講前</a:t>
+            </a:r>
+            <a:r>
+              <a:rPr kumimoji="1" lang="en-US" altLang="ja-JP" dirty="0"/>
+              <a:t>, </a:t>
+            </a:r>
+            <a:r>
+              <a:rPr kumimoji="1" lang="ja-JP" altLang="en-US" dirty="0"/>
+              <a:t>受講後</a:t>
+            </a:r>
+            <a:endParaRPr lang="en-US" altLang="ja-JP" dirty="0"/>
+          </a:p>
+        </p:txBody>
+      </p:sp>
+      <p:cxnSp>
+        <p:nvCxnSpPr>
+          <p:cNvPr id="6" name="直線矢印コネクタ 5">
+            <a:extLst>
+              <a:ext uri="{FF2B5EF4-FFF2-40B4-BE49-F238E27FC236}">
+                <a16:creationId xmlns:a16="http://schemas.microsoft.com/office/drawing/2014/main" id="{21C8C6E8-46D8-1E06-55A7-45A251A03605}"/>
+              </a:ext>
+            </a:extLst>
+          </p:cNvPr>
+          <p:cNvCxnSpPr>
+            <a:cxnSpLocks/>
+            <a:stCxn id="5" idx="3"/>
+            <a:endCxn id="4" idx="1"/>
+          </p:cNvCxnSpPr>
+          <p:nvPr/>
+        </p:nvCxnSpPr>
+        <p:spPr>
+          <a:xfrm>
+            <a:off x="4886325" y="2438399"/>
+            <a:ext cx="2047875" cy="990601"/>
+          </a:xfrm>
+          <a:prstGeom prst="straightConnector1">
+            <a:avLst/>
+          </a:prstGeom>
+          <a:ln>
+            <a:tailEnd type="triangle"/>
+          </a:ln>
+        </p:spPr>
+        <p:style>
+          <a:lnRef idx="2">
+            <a:schemeClr val="dk1"/>
+          </a:lnRef>
+          <a:fillRef idx="1">
+            <a:schemeClr val="lt1"/>
+          </a:fillRef>
+          <a:effectRef idx="0">
+            <a:schemeClr val="dk1"/>
+          </a:effectRef>
+          <a:fontRef idx="minor">
+            <a:schemeClr val="dk1"/>
+          </a:fontRef>
+        </p:style>
+      </p:cxnSp>
+      <p:sp>
+        <p:nvSpPr>
+          <p:cNvPr id="7" name="正方形/長方形 6">
+            <a:extLst>
+              <a:ext uri="{FF2B5EF4-FFF2-40B4-BE49-F238E27FC236}">
+                <a16:creationId xmlns:a16="http://schemas.microsoft.com/office/drawing/2014/main" id="{4684BE13-CBA2-7FC2-0169-9257A584F793}"/>
+              </a:ext>
+            </a:extLst>
+          </p:cNvPr>
+          <p:cNvSpPr/>
+          <p:nvPr/>
+        </p:nvSpPr>
+        <p:spPr>
+          <a:xfrm>
+            <a:off x="2514600" y="3724276"/>
+            <a:ext cx="2371725" cy="1485900"/>
+          </a:xfrm>
+          <a:prstGeom prst="rect">
+            <a:avLst/>
+          </a:prstGeom>
+        </p:spPr>
+        <p:style>
+          <a:lnRef idx="2">
+            <a:schemeClr val="accent3">
+              <a:shade val="50000"/>
+            </a:schemeClr>
+          </a:lnRef>
+          <a:fillRef idx="1">
+            <a:schemeClr val="accent3"/>
+          </a:fillRef>
+          <a:effectRef idx="0">
+            <a:schemeClr val="accent3"/>
+          </a:effectRef>
+          <a:fontRef idx="minor">
+            <a:schemeClr val="lt1"/>
+          </a:fontRef>
+        </p:style>
+        <p:txBody>
+          <a:bodyPr rtlCol="0" anchor="ctr"/>
+          <a:lstStyle/>
+          <a:p>
+            <a:pPr algn="ctr"/>
+            <a:r>
+              <a:rPr kumimoji="1" lang="ja-JP" altLang="en-US" dirty="0"/>
+              <a:t>説明変数</a:t>
+            </a:r>
+            <a:r>
+              <a:rPr kumimoji="1" lang="en-US" altLang="ja-JP" dirty="0"/>
+              <a:t>2</a:t>
+            </a:r>
+            <a:r>
+              <a:rPr kumimoji="1" lang="ja-JP" altLang="en-US" dirty="0"/>
+              <a:t>：</a:t>
+            </a:r>
+            <a:br>
+              <a:rPr kumimoji="1" lang="en-US" altLang="ja-JP" dirty="0"/>
+            </a:br>
+            <a:r>
+              <a:rPr kumimoji="1" lang="ja-JP" altLang="en-US" dirty="0"/>
+              <a:t>講義方式</a:t>
+            </a:r>
+            <a:endParaRPr kumimoji="1" lang="en-US" altLang="ja-JP" dirty="0"/>
+          </a:p>
+          <a:p>
+            <a:pPr algn="ctr"/>
+            <a:endParaRPr kumimoji="1" lang="en-US" altLang="ja-JP" dirty="0"/>
+          </a:p>
+          <a:p>
+            <a:pPr algn="ctr"/>
+            <a:r>
+              <a:rPr kumimoji="1" lang="ja-JP" altLang="en-US" dirty="0"/>
+              <a:t>水準：従来型</a:t>
+            </a:r>
+            <a:r>
+              <a:rPr kumimoji="1" lang="en-US" altLang="ja-JP" dirty="0"/>
+              <a:t>, </a:t>
+            </a:r>
+            <a:r>
+              <a:rPr kumimoji="1" lang="ja-JP" altLang="en-US" dirty="0"/>
+              <a:t>新型</a:t>
+            </a:r>
+            <a:endParaRPr lang="en-US" altLang="ja-JP" dirty="0"/>
+          </a:p>
+        </p:txBody>
+      </p:sp>
+      <p:cxnSp>
+        <p:nvCxnSpPr>
+          <p:cNvPr id="8" name="直線矢印コネクタ 7">
+            <a:extLst>
+              <a:ext uri="{FF2B5EF4-FFF2-40B4-BE49-F238E27FC236}">
+                <a16:creationId xmlns:a16="http://schemas.microsoft.com/office/drawing/2014/main" id="{F5D9C6E6-BBED-7356-E247-7F3BE0F14DE6}"/>
+              </a:ext>
+            </a:extLst>
+          </p:cNvPr>
+          <p:cNvCxnSpPr>
+            <a:cxnSpLocks/>
+            <a:stCxn id="7" idx="3"/>
+            <a:endCxn id="4" idx="1"/>
+          </p:cNvCxnSpPr>
+          <p:nvPr/>
+        </p:nvCxnSpPr>
+        <p:spPr>
+          <a:xfrm flipV="1">
+            <a:off x="4886325" y="3429000"/>
+            <a:ext cx="2047875" cy="1038226"/>
+          </a:xfrm>
+          <a:prstGeom prst="straightConnector1">
+            <a:avLst/>
+          </a:prstGeom>
+          <a:ln>
+            <a:tailEnd type="triangle"/>
+          </a:ln>
+        </p:spPr>
+        <p:style>
+          <a:lnRef idx="2">
+            <a:schemeClr val="dk1"/>
+          </a:lnRef>
+          <a:fillRef idx="1">
+            <a:schemeClr val="lt1"/>
+          </a:fillRef>
+          <a:effectRef idx="0">
+            <a:schemeClr val="dk1"/>
+          </a:effectRef>
+          <a:fontRef idx="minor">
+            <a:schemeClr val="dk1"/>
+          </a:fontRef>
+        </p:style>
+      </p:cxnSp>
+      <p:cxnSp>
+        <p:nvCxnSpPr>
+          <p:cNvPr id="14" name="直線コネクタ 13">
+            <a:extLst>
+              <a:ext uri="{FF2B5EF4-FFF2-40B4-BE49-F238E27FC236}">
+                <a16:creationId xmlns:a16="http://schemas.microsoft.com/office/drawing/2014/main" id="{EBA97CE1-7A0B-115A-FE6F-DD1641950082}"/>
+              </a:ext>
+            </a:extLst>
+          </p:cNvPr>
+          <p:cNvCxnSpPr/>
+          <p:nvPr/>
+        </p:nvCxnSpPr>
+        <p:spPr>
+          <a:xfrm>
+            <a:off x="4886325" y="2438399"/>
+            <a:ext cx="629169" cy="905395"/>
+          </a:xfrm>
+          <a:prstGeom prst="line">
+            <a:avLst/>
+          </a:prstGeom>
+          <a:ln/>
+        </p:spPr>
+        <p:style>
+          <a:lnRef idx="2">
+            <a:schemeClr val="dk1"/>
+          </a:lnRef>
+          <a:fillRef idx="1">
+            <a:schemeClr val="lt1"/>
+          </a:fillRef>
+          <a:effectRef idx="0">
+            <a:schemeClr val="dk1"/>
+          </a:effectRef>
+          <a:fontRef idx="minor">
+            <a:schemeClr val="dk1"/>
+          </a:fontRef>
+        </p:style>
+      </p:cxnSp>
+      <p:cxnSp>
+        <p:nvCxnSpPr>
+          <p:cNvPr id="15" name="直線コネクタ 14">
+            <a:extLst>
+              <a:ext uri="{FF2B5EF4-FFF2-40B4-BE49-F238E27FC236}">
+                <a16:creationId xmlns:a16="http://schemas.microsoft.com/office/drawing/2014/main" id="{583B7C2B-771F-D91F-07CC-E4C3F468262E}"/>
+              </a:ext>
+            </a:extLst>
+          </p:cNvPr>
+          <p:cNvCxnSpPr/>
+          <p:nvPr/>
+        </p:nvCxnSpPr>
+        <p:spPr>
+          <a:xfrm flipV="1">
+            <a:off x="4886325" y="3536688"/>
+            <a:ext cx="629169" cy="930538"/>
+          </a:xfrm>
+          <a:prstGeom prst="line">
+            <a:avLst/>
+          </a:prstGeom>
+          <a:ln/>
+        </p:spPr>
+        <p:style>
+          <a:lnRef idx="2">
+            <a:schemeClr val="dk1"/>
+          </a:lnRef>
+          <a:fillRef idx="1">
+            <a:schemeClr val="lt1"/>
+          </a:fillRef>
+          <a:effectRef idx="0">
+            <a:schemeClr val="dk1"/>
+          </a:effectRef>
+          <a:fontRef idx="minor">
+            <a:schemeClr val="dk1"/>
+          </a:fontRef>
+        </p:style>
+      </p:cxnSp>
+      <p:cxnSp>
+        <p:nvCxnSpPr>
+          <p:cNvPr id="16" name="直線コネクタ 15">
+            <a:extLst>
+              <a:ext uri="{FF2B5EF4-FFF2-40B4-BE49-F238E27FC236}">
+                <a16:creationId xmlns:a16="http://schemas.microsoft.com/office/drawing/2014/main" id="{411C7119-617B-A3F0-88E7-A8DF54B0A298}"/>
+              </a:ext>
+            </a:extLst>
+          </p:cNvPr>
+          <p:cNvCxnSpPr/>
+          <p:nvPr/>
+        </p:nvCxnSpPr>
+        <p:spPr>
+          <a:xfrm flipV="1">
+            <a:off x="5748338" y="3429000"/>
+            <a:ext cx="1185862" cy="11241"/>
+          </a:xfrm>
+          <a:prstGeom prst="line">
+            <a:avLst/>
+          </a:prstGeom>
+          <a:ln>
+            <a:tailEnd type="triangle"/>
+          </a:ln>
+        </p:spPr>
+        <p:style>
+          <a:lnRef idx="2">
+            <a:schemeClr val="dk1"/>
+          </a:lnRef>
+          <a:fillRef idx="1">
+            <a:schemeClr val="lt1"/>
+          </a:fillRef>
+          <a:effectRef idx="0">
+            <a:schemeClr val="dk1"/>
+          </a:effectRef>
+          <a:fontRef idx="minor">
+            <a:schemeClr val="dk1"/>
+          </a:fontRef>
+        </p:style>
+      </p:cxnSp>
+      <p:cxnSp>
+        <p:nvCxnSpPr>
+          <p:cNvPr id="17" name="直線コネクタ 16">
+            <a:extLst>
+              <a:ext uri="{FF2B5EF4-FFF2-40B4-BE49-F238E27FC236}">
+                <a16:creationId xmlns:a16="http://schemas.microsoft.com/office/drawing/2014/main" id="{4D5F4CB2-6B93-A8BD-DBFF-254D842C17F8}"/>
+              </a:ext>
+            </a:extLst>
+          </p:cNvPr>
+          <p:cNvCxnSpPr/>
+          <p:nvPr/>
+        </p:nvCxnSpPr>
+        <p:spPr>
+          <a:xfrm>
+            <a:off x="5515494" y="3343794"/>
+            <a:ext cx="192894" cy="192894"/>
+          </a:xfrm>
+          <a:prstGeom prst="line">
+            <a:avLst/>
+          </a:prstGeom>
+          <a:ln/>
+        </p:spPr>
+        <p:style>
+          <a:lnRef idx="2">
+            <a:schemeClr val="dk1"/>
+          </a:lnRef>
+          <a:fillRef idx="1">
+            <a:schemeClr val="lt1"/>
+          </a:fillRef>
+          <a:effectRef idx="0">
+            <a:schemeClr val="dk1"/>
+          </a:effectRef>
+          <a:fontRef idx="minor">
+            <a:schemeClr val="dk1"/>
+          </a:fontRef>
+        </p:style>
+      </p:cxnSp>
+      <p:cxnSp>
+        <p:nvCxnSpPr>
+          <p:cNvPr id="18" name="直線コネクタ 17">
+            <a:extLst>
+              <a:ext uri="{FF2B5EF4-FFF2-40B4-BE49-F238E27FC236}">
+                <a16:creationId xmlns:a16="http://schemas.microsoft.com/office/drawing/2014/main" id="{A2661858-9EC5-FBC4-4985-E14AF316CD3B}"/>
+              </a:ext>
+            </a:extLst>
+          </p:cNvPr>
+          <p:cNvCxnSpPr/>
+          <p:nvPr/>
+        </p:nvCxnSpPr>
+        <p:spPr>
+          <a:xfrm flipH="1">
+            <a:off x="5515494" y="3343794"/>
+            <a:ext cx="192894" cy="192894"/>
+          </a:xfrm>
+          <a:prstGeom prst="line">
+            <a:avLst/>
+          </a:prstGeom>
+          <a:ln/>
+        </p:spPr>
+        <p:style>
+          <a:lnRef idx="2">
+            <a:schemeClr val="dk1"/>
+          </a:lnRef>
+          <a:fillRef idx="1">
+            <a:schemeClr val="lt1"/>
+          </a:fillRef>
+          <a:effectRef idx="0">
+            <a:schemeClr val="dk1"/>
+          </a:effectRef>
+          <a:fontRef idx="minor">
+            <a:schemeClr val="dk1"/>
+          </a:fontRef>
+        </p:style>
+      </p:cxnSp>
+      <p:cxnSp>
+        <p:nvCxnSpPr>
+          <p:cNvPr id="13" name="直線矢印コネクタ 12">
+            <a:extLst>
+              <a:ext uri="{FF2B5EF4-FFF2-40B4-BE49-F238E27FC236}">
+                <a16:creationId xmlns:a16="http://schemas.microsoft.com/office/drawing/2014/main" id="{616B3355-1F13-A7EE-9B85-AEE4C5430936}"/>
+              </a:ext>
+            </a:extLst>
+          </p:cNvPr>
+          <p:cNvCxnSpPr>
+            <a:endCxn id="4" idx="1"/>
+          </p:cNvCxnSpPr>
+          <p:nvPr/>
+        </p:nvCxnSpPr>
+        <p:spPr>
+          <a:xfrm>
+            <a:off x="5087566" y="2438399"/>
+            <a:ext cx="1846634" cy="990601"/>
+          </a:xfrm>
+          <a:prstGeom prst="straightConnector1">
+            <a:avLst/>
+          </a:prstGeom>
+          <a:ln>
+            <a:solidFill>
+              <a:srgbClr val="FF0000"/>
+            </a:solidFill>
+            <a:tailEnd type="triangle"/>
+          </a:ln>
+        </p:spPr>
+        <p:style>
+          <a:lnRef idx="1">
+            <a:schemeClr val="accent1"/>
+          </a:lnRef>
+          <a:fillRef idx="0">
+            <a:schemeClr val="accent1"/>
+          </a:fillRef>
+          <a:effectRef idx="0">
+            <a:schemeClr val="accent1"/>
+          </a:effectRef>
+          <a:fontRef idx="minor">
+            <a:schemeClr val="tx1"/>
+          </a:fontRef>
+        </p:style>
+      </p:cxnSp>
     </p:spTree>
     <p:extLst>
       <p:ext uri="{BB962C8B-B14F-4D97-AF65-F5344CB8AC3E}">
-        <p14:creationId xmlns:p14="http://schemas.microsoft.com/office/powerpoint/2010/main" val="3106651656"/>
+        <p14:creationId xmlns:p14="http://schemas.microsoft.com/office/powerpoint/2010/main" val="997734494"/>
       </p:ext>
     </p:extLst>
   </p:cSld>
@@ -8593,13 +9167,7 @@
       </p:grpSpPr>
       <p:sp>
         <p:nvSpPr>
-          <p:cNvPr id="2" name="タイトル 1">
-            <a:extLst>
-              <a:ext uri="{FF2B5EF4-FFF2-40B4-BE49-F238E27FC236}">
-                <a16:creationId xmlns:a16="http://schemas.microsoft.com/office/drawing/2014/main" id="{E90A3F46-1EED-5E3A-163E-0B3B7CB9F129}"/>
-              </a:ext>
-            </a:extLst>
-          </p:cNvPr>
+          <p:cNvPr id="2" name="タイトル 1"/>
           <p:cNvSpPr>
             <a:spLocks noGrp="1"/>
           </p:cNvSpPr>
@@ -8618,21 +9186,18 @@
             </a:r>
             <a:r>
               <a:rPr kumimoji="1" lang="en-US" altLang="ja-JP" dirty="0"/>
-              <a:t>0.200</a:t>
-            </a:r>
-            <a:br>
-              <a:rPr kumimoji="1" lang="en-US" altLang="ja-JP" dirty="0"/>
-            </a:br>
+              <a:t>0.0513</a:t>
+            </a:r>
             <a:endParaRPr kumimoji="1" lang="ja-JP" altLang="en-US" dirty="0"/>
           </a:p>
         </p:txBody>
       </p:sp>
       <p:pic>
         <p:nvPicPr>
-          <p:cNvPr id="4" name="コンテンツ プレースホルダー 3">
+          <p:cNvPr id="6" name="コンテンツ プレースホルダー 5">
             <a:extLst>
               <a:ext uri="{FF2B5EF4-FFF2-40B4-BE49-F238E27FC236}">
-                <a16:creationId xmlns:a16="http://schemas.microsoft.com/office/drawing/2014/main" id="{3904CA60-7C01-0FD0-E53C-5A529A43F63D}"/>
+                <a16:creationId xmlns:a16="http://schemas.microsoft.com/office/drawing/2014/main" id="{3B878235-70F5-F862-88EC-863175E059CD}"/>
               </a:ext>
             </a:extLst>
           </p:cNvPr>
@@ -8662,7 +9227,7 @@
     </p:spTree>
     <p:extLst>
       <p:ext uri="{BB962C8B-B14F-4D97-AF65-F5344CB8AC3E}">
-        <p14:creationId xmlns:p14="http://schemas.microsoft.com/office/powerpoint/2010/main" val="1624990458"/>
+        <p14:creationId xmlns:p14="http://schemas.microsoft.com/office/powerpoint/2010/main" val="3106651656"/>
       </p:ext>
     </p:extLst>
   </p:cSld>
@@ -8694,7 +9259,7 @@
           <p:cNvPr id="2" name="タイトル 1">
             <a:extLst>
               <a:ext uri="{FF2B5EF4-FFF2-40B4-BE49-F238E27FC236}">
-                <a16:creationId xmlns:a16="http://schemas.microsoft.com/office/drawing/2014/main" id="{424D4A5E-223E-8982-C14E-80509BE1BD07}"/>
+                <a16:creationId xmlns:a16="http://schemas.microsoft.com/office/drawing/2014/main" id="{E90A3F46-1EED-5E3A-163E-0B3B7CB9F129}"/>
               </a:ext>
             </a:extLst>
           </p:cNvPr>
@@ -8716,18 +9281,21 @@
             </a:r>
             <a:r>
               <a:rPr kumimoji="1" lang="en-US" altLang="ja-JP" dirty="0"/>
-              <a:t>0.441</a:t>
-            </a:r>
+              <a:t>0.200</a:t>
+            </a:r>
+            <a:br>
+              <a:rPr kumimoji="1" lang="en-US" altLang="ja-JP" dirty="0"/>
+            </a:br>
             <a:endParaRPr kumimoji="1" lang="ja-JP" altLang="en-US" dirty="0"/>
           </a:p>
         </p:txBody>
       </p:sp>
       <p:pic>
         <p:nvPicPr>
-          <p:cNvPr id="5" name="コンテンツ プレースホルダー 4">
+          <p:cNvPr id="4" name="コンテンツ プレースホルダー 3">
             <a:extLst>
               <a:ext uri="{FF2B5EF4-FFF2-40B4-BE49-F238E27FC236}">
-                <a16:creationId xmlns:a16="http://schemas.microsoft.com/office/drawing/2014/main" id="{F75D3519-7909-7EAE-2E9B-73460C4447BC}"/>
+                <a16:creationId xmlns:a16="http://schemas.microsoft.com/office/drawing/2014/main" id="{3904CA60-7C01-0FD0-E53C-5A529A43F63D}"/>
               </a:ext>
             </a:extLst>
           </p:cNvPr>
@@ -8757,7 +9325,7 @@
     </p:spTree>
     <p:extLst>
       <p:ext uri="{BB962C8B-B14F-4D97-AF65-F5344CB8AC3E}">
-        <p14:creationId xmlns:p14="http://schemas.microsoft.com/office/powerpoint/2010/main" val="678897031"/>
+        <p14:creationId xmlns:p14="http://schemas.microsoft.com/office/powerpoint/2010/main" val="1624990458"/>
       </p:ext>
     </p:extLst>
   </p:cSld>
@@ -8789,7 +9357,7 @@
           <p:cNvPr id="2" name="タイトル 1">
             <a:extLst>
               <a:ext uri="{FF2B5EF4-FFF2-40B4-BE49-F238E27FC236}">
-                <a16:creationId xmlns:a16="http://schemas.microsoft.com/office/drawing/2014/main" id="{078590EC-3551-7798-D26C-ACB846F74B4F}"/>
+                <a16:creationId xmlns:a16="http://schemas.microsoft.com/office/drawing/2014/main" id="{424D4A5E-223E-8982-C14E-80509BE1BD07}"/>
               </a:ext>
             </a:extLst>
           </p:cNvPr>
@@ -8811,7 +9379,7 @@
             </a:r>
             <a:r>
               <a:rPr kumimoji="1" lang="en-US" altLang="ja-JP" dirty="0"/>
-              <a:t>0.542</a:t>
+              <a:t>0.441</a:t>
             </a:r>
             <a:endParaRPr kumimoji="1" lang="ja-JP" altLang="en-US" dirty="0"/>
           </a:p>
@@ -8819,10 +9387,10 @@
       </p:sp>
       <p:pic>
         <p:nvPicPr>
-          <p:cNvPr id="4" name="コンテンツ プレースホルダー 3">
+          <p:cNvPr id="5" name="コンテンツ プレースホルダー 4">
             <a:extLst>
               <a:ext uri="{FF2B5EF4-FFF2-40B4-BE49-F238E27FC236}">
-                <a16:creationId xmlns:a16="http://schemas.microsoft.com/office/drawing/2014/main" id="{8F9D458B-836E-CC07-37D7-241DBA03244B}"/>
+                <a16:creationId xmlns:a16="http://schemas.microsoft.com/office/drawing/2014/main" id="{F75D3519-7909-7EAE-2E9B-73460C4447BC}"/>
               </a:ext>
             </a:extLst>
           </p:cNvPr>
@@ -8852,7 +9420,7 @@
     </p:spTree>
     <p:extLst>
       <p:ext uri="{BB962C8B-B14F-4D97-AF65-F5344CB8AC3E}">
-        <p14:creationId xmlns:p14="http://schemas.microsoft.com/office/powerpoint/2010/main" val="3981072813"/>
+        <p14:creationId xmlns:p14="http://schemas.microsoft.com/office/powerpoint/2010/main" val="678897031"/>
       </p:ext>
     </p:extLst>
   </p:cSld>
@@ -8984,7 +9552,7 @@
           <p:cNvPr id="2" name="タイトル 1">
             <a:extLst>
               <a:ext uri="{FF2B5EF4-FFF2-40B4-BE49-F238E27FC236}">
-                <a16:creationId xmlns:a16="http://schemas.microsoft.com/office/drawing/2014/main" id="{408B8A56-D7B0-32F3-915D-088686A1CFE1}"/>
+                <a16:creationId xmlns:a16="http://schemas.microsoft.com/office/drawing/2014/main" id="{078590EC-3551-7798-D26C-ACB846F74B4F}"/>
               </a:ext>
             </a:extLst>
           </p:cNvPr>
@@ -9006,21 +9574,18 @@
             </a:r>
             <a:r>
               <a:rPr kumimoji="1" lang="en-US" altLang="ja-JP" dirty="0"/>
-              <a:t>0.712</a:t>
-            </a:r>
-            <a:br>
-              <a:rPr kumimoji="1" lang="en-US" altLang="ja-JP" dirty="0"/>
-            </a:br>
+              <a:t>0.542</a:t>
+            </a:r>
             <a:endParaRPr kumimoji="1" lang="ja-JP" altLang="en-US" dirty="0"/>
           </a:p>
         </p:txBody>
       </p:sp>
       <p:pic>
         <p:nvPicPr>
-          <p:cNvPr id="5" name="コンテンツ プレースホルダー 4">
+          <p:cNvPr id="4" name="コンテンツ プレースホルダー 3">
             <a:extLst>
               <a:ext uri="{FF2B5EF4-FFF2-40B4-BE49-F238E27FC236}">
-                <a16:creationId xmlns:a16="http://schemas.microsoft.com/office/drawing/2014/main" id="{424F2261-F694-769C-97BE-344F1E103D80}"/>
+                <a16:creationId xmlns:a16="http://schemas.microsoft.com/office/drawing/2014/main" id="{8F9D458B-836E-CC07-37D7-241DBA03244B}"/>
               </a:ext>
             </a:extLst>
           </p:cNvPr>
@@ -9050,7 +9615,7 @@
     </p:spTree>
     <p:extLst>
       <p:ext uri="{BB962C8B-B14F-4D97-AF65-F5344CB8AC3E}">
-        <p14:creationId xmlns:p14="http://schemas.microsoft.com/office/powerpoint/2010/main" val="1599585600"/>
+        <p14:creationId xmlns:p14="http://schemas.microsoft.com/office/powerpoint/2010/main" val="3981072813"/>
       </p:ext>
     </p:extLst>
   </p:cSld>
@@ -9082,7 +9647,7 @@
           <p:cNvPr id="2" name="タイトル 1">
             <a:extLst>
               <a:ext uri="{FF2B5EF4-FFF2-40B4-BE49-F238E27FC236}">
-                <a16:creationId xmlns:a16="http://schemas.microsoft.com/office/drawing/2014/main" id="{B5825973-7C3A-7DEF-97B0-8EB6A8D4B61D}"/>
+                <a16:creationId xmlns:a16="http://schemas.microsoft.com/office/drawing/2014/main" id="{408B8A56-D7B0-32F3-915D-088686A1CFE1}"/>
               </a:ext>
             </a:extLst>
           </p:cNvPr>
@@ -9099,37 +9664,26 @@
           <a:lstStyle/>
           <a:p>
             <a:r>
-              <a:rPr lang="ja-JP" altLang="en-US" sz="1800" b="0" i="0" u="none" strike="noStrike" dirty="0">
-                <a:solidFill>
-                  <a:srgbClr val="000000"/>
-                </a:solidFill>
-                <a:effectLst/>
-                <a:latin typeface="游ゴシック" panose="020B0400000000000000" pitchFamily="50" charset="-128"/>
-                <a:ea typeface="游ゴシック" panose="020B0400000000000000" pitchFamily="50" charset="-128"/>
-              </a:rPr>
+              <a:rPr kumimoji="1" lang="ja-JP" altLang="en-US" dirty="0"/>
               <a:t>相関</a:t>
             </a:r>
             <a:r>
-              <a:rPr lang="en-US" altLang="ja-JP" sz="1800" b="0" i="0" u="none" strike="noStrike" dirty="0">
-                <a:solidFill>
-                  <a:srgbClr val="000000"/>
-                </a:solidFill>
-                <a:effectLst/>
-                <a:latin typeface="游ゴシック" panose="020B0400000000000000" pitchFamily="50" charset="-128"/>
-                <a:ea typeface="游ゴシック" panose="020B0400000000000000" pitchFamily="50" charset="-128"/>
-              </a:rPr>
-              <a:t>0.905</a:t>
-            </a:r>
+              <a:rPr kumimoji="1" lang="en-US" altLang="ja-JP" dirty="0"/>
+              <a:t>0.712</a:t>
+            </a:r>
+            <a:br>
+              <a:rPr kumimoji="1" lang="en-US" altLang="ja-JP" dirty="0"/>
+            </a:br>
             <a:endParaRPr kumimoji="1" lang="ja-JP" altLang="en-US" dirty="0"/>
           </a:p>
         </p:txBody>
       </p:sp>
       <p:pic>
         <p:nvPicPr>
-          <p:cNvPr id="4" name="コンテンツ プレースホルダー 3">
+          <p:cNvPr id="5" name="コンテンツ プレースホルダー 4">
             <a:extLst>
               <a:ext uri="{FF2B5EF4-FFF2-40B4-BE49-F238E27FC236}">
-                <a16:creationId xmlns:a16="http://schemas.microsoft.com/office/drawing/2014/main" id="{341D7BD3-E56B-8269-F527-303B94AF8C6B}"/>
+                <a16:creationId xmlns:a16="http://schemas.microsoft.com/office/drawing/2014/main" id="{424F2261-F694-769C-97BE-344F1E103D80}"/>
               </a:ext>
             </a:extLst>
           </p:cNvPr>
@@ -9159,7 +9713,7 @@
     </p:spTree>
     <p:extLst>
       <p:ext uri="{BB962C8B-B14F-4D97-AF65-F5344CB8AC3E}">
-        <p14:creationId xmlns:p14="http://schemas.microsoft.com/office/powerpoint/2010/main" val="3867585930"/>
+        <p14:creationId xmlns:p14="http://schemas.microsoft.com/office/powerpoint/2010/main" val="1599585600"/>
       </p:ext>
     </p:extLst>
   </p:cSld>
@@ -9188,6 +9742,115 @@
       </p:grpSpPr>
       <p:sp>
         <p:nvSpPr>
+          <p:cNvPr id="2" name="タイトル 1">
+            <a:extLst>
+              <a:ext uri="{FF2B5EF4-FFF2-40B4-BE49-F238E27FC236}">
+                <a16:creationId xmlns:a16="http://schemas.microsoft.com/office/drawing/2014/main" id="{B5825973-7C3A-7DEF-97B0-8EB6A8D4B61D}"/>
+              </a:ext>
+            </a:extLst>
+          </p:cNvPr>
+          <p:cNvSpPr>
+            <a:spLocks noGrp="1"/>
+          </p:cNvSpPr>
+          <p:nvPr>
+            <p:ph type="title"/>
+          </p:nvPr>
+        </p:nvSpPr>
+        <p:spPr/>
+        <p:txBody>
+          <a:bodyPr/>
+          <a:lstStyle/>
+          <a:p>
+            <a:r>
+              <a:rPr lang="ja-JP" altLang="en-US" sz="1800" b="0" i="0" u="none" strike="noStrike" dirty="0">
+                <a:solidFill>
+                  <a:srgbClr val="000000"/>
+                </a:solidFill>
+                <a:effectLst/>
+                <a:latin typeface="游ゴシック" panose="020B0400000000000000" pitchFamily="50" charset="-128"/>
+                <a:ea typeface="游ゴシック" panose="020B0400000000000000" pitchFamily="50" charset="-128"/>
+              </a:rPr>
+              <a:t>相関</a:t>
+            </a:r>
+            <a:r>
+              <a:rPr lang="en-US" altLang="ja-JP" sz="1800" b="0" i="0" u="none" strike="noStrike" dirty="0">
+                <a:solidFill>
+                  <a:srgbClr val="000000"/>
+                </a:solidFill>
+                <a:effectLst/>
+                <a:latin typeface="游ゴシック" panose="020B0400000000000000" pitchFamily="50" charset="-128"/>
+                <a:ea typeface="游ゴシック" panose="020B0400000000000000" pitchFamily="50" charset="-128"/>
+              </a:rPr>
+              <a:t>0.905</a:t>
+            </a:r>
+            <a:endParaRPr kumimoji="1" lang="ja-JP" altLang="en-US" dirty="0"/>
+          </a:p>
+        </p:txBody>
+      </p:sp>
+      <p:pic>
+        <p:nvPicPr>
+          <p:cNvPr id="4" name="コンテンツ プレースホルダー 3">
+            <a:extLst>
+              <a:ext uri="{FF2B5EF4-FFF2-40B4-BE49-F238E27FC236}">
+                <a16:creationId xmlns:a16="http://schemas.microsoft.com/office/drawing/2014/main" id="{341D7BD3-E56B-8269-F527-303B94AF8C6B}"/>
+              </a:ext>
+            </a:extLst>
+          </p:cNvPr>
+          <p:cNvPicPr>
+            <a:picLocks noGrp="1" noChangeAspect="1"/>
+          </p:cNvPicPr>
+          <p:nvPr>
+            <p:ph idx="1"/>
+          </p:nvPr>
+        </p:nvPicPr>
+        <p:blipFill>
+          <a:blip r:embed="rId2"/>
+          <a:stretch>
+            <a:fillRect/>
+          </a:stretch>
+        </p:blipFill>
+        <p:spPr>
+          <a:xfrm>
+            <a:off x="3657642" y="2132835"/>
+            <a:ext cx="4889416" cy="3743268"/>
+          </a:xfrm>
+          <a:prstGeom prst="rect">
+            <a:avLst/>
+          </a:prstGeom>
+        </p:spPr>
+      </p:pic>
+    </p:spTree>
+    <p:extLst>
+      <p:ext uri="{BB962C8B-B14F-4D97-AF65-F5344CB8AC3E}">
+        <p14:creationId xmlns:p14="http://schemas.microsoft.com/office/powerpoint/2010/main" val="3867585930"/>
+      </p:ext>
+    </p:extLst>
+  </p:cSld>
+  <p:clrMapOvr>
+    <a:masterClrMapping/>
+  </p:clrMapOvr>
+</p:sld>
+</file>
+
+<file path=ppt/slides/slide23.xml><?xml version="1.0" encoding="utf-8"?>
+<p:sld xmlns:a="http://schemas.openxmlformats.org/drawingml/2006/main" xmlns:r="http://schemas.openxmlformats.org/officeDocument/2006/relationships" xmlns:p="http://schemas.openxmlformats.org/presentationml/2006/main">
+  <p:cSld>
+    <p:spTree>
+      <p:nvGrpSpPr>
+        <p:cNvPr id="1" name=""/>
+        <p:cNvGrpSpPr/>
+        <p:nvPr/>
+      </p:nvGrpSpPr>
+      <p:grpSpPr>
+        <a:xfrm>
+          <a:off x="0" y="0"/>
+          <a:ext cx="0" cy="0"/>
+          <a:chOff x="0" y="0"/>
+          <a:chExt cx="0" cy="0"/>
+        </a:xfrm>
+      </p:grpSpPr>
+      <p:sp>
+        <p:nvSpPr>
           <p:cNvPr id="2" name="タイトル 1"/>
           <p:cNvSpPr>
             <a:spLocks noGrp="1"/>
@@ -9523,7 +10186,7 @@
 </p:sld>
 </file>
 
-<file path=ppt/slides/slide23.xml><?xml version="1.0" encoding="utf-8"?>
+<file path=ppt/slides/slide24.xml><?xml version="1.0" encoding="utf-8"?>
 <p:sld xmlns:a="http://schemas.openxmlformats.org/drawingml/2006/main" xmlns:r="http://schemas.openxmlformats.org/officeDocument/2006/relationships" xmlns:p="http://schemas.openxmlformats.org/presentationml/2006/main">
   <p:cSld>
     <p:spTree>
@@ -9691,10 +10354,6 @@
               <a:rPr kumimoji="1" lang="ja-JP" altLang="en-US" dirty="0"/>
               <a:t>これらの正規分布は</a:t>
             </a:r>
-            <a:r>
-              <a:rPr kumimoji="1" lang="en-US" altLang="ja-JP" dirty="0"/>
-              <a:t/>
-            </a:r>
             <a:br>
               <a:rPr kumimoji="1" lang="en-US" altLang="ja-JP" dirty="0"/>
             </a:br>
@@ -9709,10 +10368,6 @@
             <a:r>
               <a:rPr kumimoji="1" lang="ja-JP" altLang="en-US" dirty="0"/>
               <a:t>予測値，</a:t>
-            </a:r>
-            <a:r>
-              <a:rPr kumimoji="1" lang="en-US" altLang="ja-JP" dirty="0"/>
-              <a:t/>
             </a:r>
             <a:br>
               <a:rPr kumimoji="1" lang="en-US" altLang="ja-JP" dirty="0"/>
@@ -9993,10 +10648,6 @@
               <a:rPr kumimoji="1" lang="ja-JP" altLang="en-US" sz="1400" dirty="0"/>
               <a:t>一要因分散分析</a:t>
             </a:r>
-            <a:r>
-              <a:rPr kumimoji="1" lang="en-US" altLang="ja-JP" sz="1400" dirty="0"/>
-              <a:t/>
-            </a:r>
             <a:br>
               <a:rPr kumimoji="1" lang="en-US" altLang="ja-JP" sz="1400" dirty="0"/>
             </a:br>
@@ -10015,10 +10666,6 @@
             <a:r>
               <a:rPr kumimoji="1" lang="ja-JP" altLang="en-US" sz="1400" dirty="0"/>
               <a:t>二元配置分散分析</a:t>
-            </a:r>
-            <a:r>
-              <a:rPr kumimoji="1" lang="en-US" altLang="ja-JP" sz="1400" dirty="0"/>
-              <a:t/>
             </a:r>
             <a:br>
               <a:rPr kumimoji="1" lang="en-US" altLang="ja-JP" sz="1400" dirty="0"/>
@@ -10063,10 +10710,6 @@
               <a:rPr kumimoji="1" lang="ja-JP" altLang="en-US" sz="1400" dirty="0"/>
               <a:t>二要因分散分析</a:t>
             </a:r>
-            <a:r>
-              <a:rPr kumimoji="1" lang="en-US" altLang="ja-JP" sz="1400" dirty="0"/>
-              <a:t/>
-            </a:r>
             <a:br>
               <a:rPr kumimoji="1" lang="en-US" altLang="ja-JP" sz="1400" dirty="0"/>
             </a:br>
@@ -10085,10 +10728,6 @@
             <a:r>
               <a:rPr kumimoji="1" lang="ja-JP" altLang="en-US" sz="1400" dirty="0"/>
               <a:t>二元配置分散分析</a:t>
-            </a:r>
-            <a:r>
-              <a:rPr kumimoji="1" lang="en-US" altLang="ja-JP" sz="1400" dirty="0"/>
-              <a:t/>
             </a:r>
             <a:br>
               <a:rPr kumimoji="1" lang="en-US" altLang="ja-JP" sz="1400" dirty="0"/>
@@ -10267,10 +10906,6 @@
               <a:rPr kumimoji="1" lang="ja-JP" altLang="en-US" sz="1400" dirty="0"/>
               <a:t>二要因分散分析</a:t>
             </a:r>
-            <a:r>
-              <a:rPr kumimoji="1" lang="en-US" altLang="ja-JP" sz="1400" dirty="0"/>
-              <a:t/>
-            </a:r>
             <a:br>
               <a:rPr kumimoji="1" lang="en-US" altLang="ja-JP" sz="1400" dirty="0"/>
             </a:br>
@@ -10289,10 +10924,6 @@
             <a:r>
               <a:rPr kumimoji="1" lang="ja-JP" altLang="en-US" sz="1400" dirty="0"/>
               <a:t>二元配置分散分析</a:t>
-            </a:r>
-            <a:r>
-              <a:rPr kumimoji="1" lang="en-US" altLang="ja-JP" sz="1400" dirty="0"/>
-              <a:t/>
             </a:r>
             <a:br>
               <a:rPr kumimoji="1" lang="en-US" altLang="ja-JP" sz="1400" dirty="0"/>
@@ -10519,10 +11150,6 @@
               <a:rPr kumimoji="1" lang="ja-JP" altLang="en-US" sz="1400" dirty="0"/>
               <a:t>一要因分散分析</a:t>
             </a:r>
-            <a:r>
-              <a:rPr kumimoji="1" lang="en-US" altLang="ja-JP" sz="1400" dirty="0"/>
-              <a:t/>
-            </a:r>
             <a:br>
               <a:rPr kumimoji="1" lang="en-US" altLang="ja-JP" sz="1400" dirty="0"/>
             </a:br>
@@ -10541,10 +11168,6 @@
             <a:r>
               <a:rPr kumimoji="1" lang="ja-JP" altLang="en-US" sz="1400" dirty="0"/>
               <a:t>二元配置分散分析</a:t>
-            </a:r>
-            <a:r>
-              <a:rPr kumimoji="1" lang="en-US" altLang="ja-JP" sz="1400" dirty="0"/>
-              <a:t/>
             </a:r>
             <a:br>
               <a:rPr kumimoji="1" lang="en-US" altLang="ja-JP" sz="1400" dirty="0"/>
@@ -10589,10 +11212,6 @@
               <a:rPr kumimoji="1" lang="ja-JP" altLang="en-US" sz="1400" dirty="0"/>
               <a:t>二要因分散分析</a:t>
             </a:r>
-            <a:r>
-              <a:rPr kumimoji="1" lang="en-US" altLang="ja-JP" sz="1400" dirty="0"/>
-              <a:t/>
-            </a:r>
             <a:br>
               <a:rPr kumimoji="1" lang="en-US" altLang="ja-JP" sz="1400" dirty="0"/>
             </a:br>
@@ -10611,10 +11230,6 @@
             <a:r>
               <a:rPr kumimoji="1" lang="ja-JP" altLang="en-US" sz="1400" dirty="0"/>
               <a:t>二元配置分散分析</a:t>
-            </a:r>
-            <a:r>
-              <a:rPr kumimoji="1" lang="en-US" altLang="ja-JP" sz="1400" dirty="0"/>
-              <a:t/>
             </a:r>
             <a:br>
               <a:rPr kumimoji="1" lang="en-US" altLang="ja-JP" sz="1400" dirty="0"/>
@@ -10659,10 +11274,6 @@
               <a:rPr kumimoji="1" lang="ja-JP" altLang="en-US" sz="1400" dirty="0"/>
               <a:t>二要因分散分析</a:t>
             </a:r>
-            <a:r>
-              <a:rPr kumimoji="1" lang="en-US" altLang="ja-JP" sz="1400" dirty="0"/>
-              <a:t/>
-            </a:r>
             <a:br>
               <a:rPr kumimoji="1" lang="en-US" altLang="ja-JP" sz="1400" dirty="0"/>
             </a:br>
@@ -10681,10 +11292,6 @@
             <a:r>
               <a:rPr kumimoji="1" lang="ja-JP" altLang="en-US" sz="1400" dirty="0"/>
               <a:t>二元配置分散分析</a:t>
-            </a:r>
-            <a:r>
-              <a:rPr kumimoji="1" lang="en-US" altLang="ja-JP" sz="1400" dirty="0"/>
-              <a:t/>
             </a:r>
             <a:br>
               <a:rPr kumimoji="1" lang="en-US" altLang="ja-JP" sz="1400" dirty="0"/>
@@ -12715,10 +13322,6 @@
               <a:rPr kumimoji="1" lang="ja-JP" altLang="en-US" dirty="0"/>
               <a:t>水準：</a:t>
             </a:r>
-            <a:r>
-              <a:rPr kumimoji="1" lang="en-US" altLang="ja-JP" dirty="0"/>
-              <a:t/>
-            </a:r>
             <a:br>
               <a:rPr kumimoji="1" lang="en-US" altLang="ja-JP" dirty="0"/>
             </a:br>
@@ -12733,10 +13336,6 @@
             <a:r>
               <a:rPr kumimoji="1" lang="ja-JP" altLang="en-US" dirty="0"/>
               <a:t>石川</a:t>
-            </a:r>
-            <a:r>
-              <a:rPr kumimoji="1" lang="en-US" altLang="ja-JP" dirty="0"/>
-              <a:t/>
             </a:r>
             <a:br>
               <a:rPr kumimoji="1" lang="en-US" altLang="ja-JP" dirty="0"/>

--- a/Img/AnovaModeling.pptx
+++ b/Img/AnovaModeling.pptx
@@ -5,7 +5,7 @@
     <p:sldMasterId id="2147483660" r:id="rId1"/>
   </p:sldMasterIdLst>
   <p:notesMasterIdLst>
-    <p:notesMasterId r:id="rId26"/>
+    <p:notesMasterId r:id="rId27"/>
   </p:notesMasterIdLst>
   <p:sldIdLst>
     <p:sldId id="274" r:id="rId2"/>
@@ -32,6 +32,7 @@
     <p:sldId id="271" r:id="rId23"/>
     <p:sldId id="272" r:id="rId24"/>
     <p:sldId id="273" r:id="rId25"/>
+    <p:sldId id="280" r:id="rId26"/>
   </p:sldIdLst>
   <p:sldSz cx="12192000" cy="6858000"/>
   <p:notesSz cx="6858000" cy="9144000"/>
@@ -138,7 +139,7 @@
             <a:srgbClr val="A4A3A4"/>
           </p15:clr>
         </p15:guide>
-        <p15:guide id="2" pos="3863" userDrawn="1">
+        <p15:guide id="2" pos="529" userDrawn="1">
           <p15:clr>
             <a:srgbClr val="A4A3A4"/>
           </p15:clr>
@@ -442,7 +443,7 @@
           <a:p>
             <a:fld id="{74503653-7382-4EF5-850F-AEDF0B3BD356}" type="datetimeFigureOut">
               <a:rPr kumimoji="1" lang="ja-JP" altLang="en-US" smtClean="0"/>
-              <a:t>2025/1/14</a:t>
+              <a:t>2025/1/18</a:t>
             </a:fld>
             <a:endParaRPr kumimoji="1" lang="ja-JP" altLang="en-US"/>
           </a:p>
@@ -967,7 +968,7 @@
           <a:p>
             <a:fld id="{E3020441-CB21-445C-817D-199401EC5197}" type="datetimeFigureOut">
               <a:rPr kumimoji="1" lang="ja-JP" altLang="en-US" smtClean="0"/>
-              <a:t>2025/1/14</a:t>
+              <a:t>2025/1/18</a:t>
             </a:fld>
             <a:endParaRPr kumimoji="1" lang="ja-JP" altLang="en-US"/>
           </a:p>
@@ -1169,7 +1170,7 @@
           <a:p>
             <a:fld id="{E3020441-CB21-445C-817D-199401EC5197}" type="datetimeFigureOut">
               <a:rPr kumimoji="1" lang="ja-JP" altLang="en-US" smtClean="0"/>
-              <a:t>2025/1/14</a:t>
+              <a:t>2025/1/18</a:t>
             </a:fld>
             <a:endParaRPr kumimoji="1" lang="ja-JP" altLang="en-US"/>
           </a:p>
@@ -1381,7 +1382,7 @@
           <a:p>
             <a:fld id="{E3020441-CB21-445C-817D-199401EC5197}" type="datetimeFigureOut">
               <a:rPr kumimoji="1" lang="ja-JP" altLang="en-US" smtClean="0"/>
-              <a:t>2025/1/14</a:t>
+              <a:t>2025/1/18</a:t>
             </a:fld>
             <a:endParaRPr kumimoji="1" lang="ja-JP" altLang="en-US"/>
           </a:p>
@@ -1583,7 +1584,7 @@
           <a:p>
             <a:fld id="{E3020441-CB21-445C-817D-199401EC5197}" type="datetimeFigureOut">
               <a:rPr kumimoji="1" lang="ja-JP" altLang="en-US" smtClean="0"/>
-              <a:t>2025/1/14</a:t>
+              <a:t>2025/1/18</a:t>
             </a:fld>
             <a:endParaRPr kumimoji="1" lang="ja-JP" altLang="en-US"/>
           </a:p>
@@ -1834,7 +1835,7 @@
           <a:p>
             <a:fld id="{E3020441-CB21-445C-817D-199401EC5197}" type="datetimeFigureOut">
               <a:rPr kumimoji="1" lang="ja-JP" altLang="en-US" smtClean="0"/>
-              <a:t>2025/1/14</a:t>
+              <a:t>2025/1/18</a:t>
             </a:fld>
             <a:endParaRPr kumimoji="1" lang="ja-JP" altLang="en-US"/>
           </a:p>
@@ -2130,7 +2131,7 @@
           <a:p>
             <a:fld id="{E3020441-CB21-445C-817D-199401EC5197}" type="datetimeFigureOut">
               <a:rPr kumimoji="1" lang="ja-JP" altLang="en-US" smtClean="0"/>
-              <a:t>2025/1/14</a:t>
+              <a:t>2025/1/18</a:t>
             </a:fld>
             <a:endParaRPr kumimoji="1" lang="ja-JP" altLang="en-US"/>
           </a:p>
@@ -2541,7 +2542,7 @@
           <a:p>
             <a:fld id="{E3020441-CB21-445C-817D-199401EC5197}" type="datetimeFigureOut">
               <a:rPr kumimoji="1" lang="ja-JP" altLang="en-US" smtClean="0"/>
-              <a:t>2025/1/14</a:t>
+              <a:t>2025/1/18</a:t>
             </a:fld>
             <a:endParaRPr kumimoji="1" lang="ja-JP" altLang="en-US"/>
           </a:p>
@@ -2659,7 +2660,7 @@
           <a:p>
             <a:fld id="{E3020441-CB21-445C-817D-199401EC5197}" type="datetimeFigureOut">
               <a:rPr kumimoji="1" lang="ja-JP" altLang="en-US" smtClean="0"/>
-              <a:t>2025/1/14</a:t>
+              <a:t>2025/1/18</a:t>
             </a:fld>
             <a:endParaRPr kumimoji="1" lang="ja-JP" altLang="en-US"/>
           </a:p>
@@ -2777,7 +2778,7 @@
           <a:p>
             <a:fld id="{E3020441-CB21-445C-817D-199401EC5197}" type="datetimeFigureOut">
               <a:rPr kumimoji="1" lang="ja-JP" altLang="en-US" smtClean="0"/>
-              <a:t>2025/1/14</a:t>
+              <a:t>2025/1/18</a:t>
             </a:fld>
             <a:endParaRPr kumimoji="1" lang="ja-JP" altLang="en-US"/>
           </a:p>
@@ -3093,7 +3094,7 @@
           <a:p>
             <a:fld id="{E3020441-CB21-445C-817D-199401EC5197}" type="datetimeFigureOut">
               <a:rPr kumimoji="1" lang="ja-JP" altLang="en-US" smtClean="0"/>
-              <a:t>2025/1/14</a:t>
+              <a:t>2025/1/18</a:t>
             </a:fld>
             <a:endParaRPr kumimoji="1" lang="ja-JP" altLang="en-US"/>
           </a:p>
@@ -3357,7 +3358,7 @@
           <a:p>
             <a:fld id="{E3020441-CB21-445C-817D-199401EC5197}" type="datetimeFigureOut">
               <a:rPr kumimoji="1" lang="ja-JP" altLang="en-US" smtClean="0"/>
-              <a:t>2025/1/14</a:t>
+              <a:t>2025/1/18</a:t>
             </a:fld>
             <a:endParaRPr kumimoji="1" lang="ja-JP" altLang="en-US"/>
           </a:p>
@@ -3603,7 +3604,7 @@
           <a:p>
             <a:fld id="{E3020441-CB21-445C-817D-199401EC5197}" type="datetimeFigureOut">
               <a:rPr kumimoji="1" lang="ja-JP" altLang="en-US" smtClean="0"/>
-              <a:t>2025/1/14</a:t>
+              <a:t>2025/1/18</a:t>
             </a:fld>
             <a:endParaRPr kumimoji="1" lang="ja-JP" altLang="en-US"/>
           </a:p>
@@ -5468,6 +5469,10 @@
               <a:rPr kumimoji="1" lang="ja-JP" altLang="en-US" dirty="0"/>
               <a:t>：</a:t>
             </a:r>
+            <a:r>
+              <a:rPr kumimoji="1" lang="en-US" altLang="ja-JP" dirty="0"/>
+              <a:t/>
+            </a:r>
             <a:br>
               <a:rPr kumimoji="1" lang="en-US" altLang="ja-JP" dirty="0"/>
             </a:br>
@@ -5596,6 +5601,10 @@
             <a:r>
               <a:rPr kumimoji="1" lang="ja-JP" altLang="en-US" dirty="0"/>
               <a:t>：</a:t>
+            </a:r>
+            <a:r>
+              <a:rPr kumimoji="1" lang="en-US" altLang="ja-JP" dirty="0"/>
+              <a:t/>
             </a:r>
             <a:br>
               <a:rPr kumimoji="1" lang="en-US" altLang="ja-JP" dirty="0"/>
@@ -5830,6 +5839,10 @@
               <a:rPr kumimoji="1" lang="ja-JP" altLang="en-US" dirty="0"/>
               <a:t>：</a:t>
             </a:r>
+            <a:r>
+              <a:rPr kumimoji="1" lang="en-US" altLang="ja-JP" dirty="0"/>
+              <a:t/>
+            </a:r>
             <a:br>
               <a:rPr kumimoji="1" lang="en-US" altLang="ja-JP" dirty="0"/>
             </a:br>
@@ -5958,6 +5971,10 @@
             <a:r>
               <a:rPr kumimoji="1" lang="ja-JP" altLang="en-US" dirty="0"/>
               <a:t>：</a:t>
+            </a:r>
+            <a:r>
+              <a:rPr kumimoji="1" lang="en-US" altLang="ja-JP" dirty="0"/>
+              <a:t/>
             </a:r>
             <a:br>
               <a:rPr kumimoji="1" lang="en-US" altLang="ja-JP" dirty="0"/>
@@ -6189,6 +6206,10 @@
               <a:rPr kumimoji="1" lang="ja-JP" altLang="en-US" dirty="0"/>
               <a:t>：</a:t>
             </a:r>
+            <a:r>
+              <a:rPr kumimoji="1" lang="en-US" altLang="ja-JP" dirty="0"/>
+              <a:t/>
+            </a:r>
             <a:br>
               <a:rPr kumimoji="1" lang="en-US" altLang="ja-JP" dirty="0"/>
             </a:br>
@@ -6317,6 +6338,10 @@
             <a:r>
               <a:rPr kumimoji="1" lang="ja-JP" altLang="en-US" dirty="0"/>
               <a:t>：</a:t>
+            </a:r>
+            <a:r>
+              <a:rPr kumimoji="1" lang="en-US" altLang="ja-JP" dirty="0"/>
+              <a:t/>
             </a:r>
             <a:br>
               <a:rPr kumimoji="1" lang="en-US" altLang="ja-JP" dirty="0"/>
@@ -6787,6 +6812,10 @@
               <a:rPr kumimoji="1" lang="ja-JP" altLang="en-US" dirty="0"/>
               <a:t>：</a:t>
             </a:r>
+            <a:r>
+              <a:rPr kumimoji="1" lang="en-US" altLang="ja-JP" dirty="0"/>
+              <a:t/>
+            </a:r>
             <a:br>
               <a:rPr kumimoji="1" lang="en-US" altLang="ja-JP" dirty="0"/>
             </a:br>
@@ -6941,6 +6970,10 @@
             <a:r>
               <a:rPr kumimoji="1" lang="ja-JP" altLang="en-US" dirty="0"/>
               <a:t>：</a:t>
+            </a:r>
+            <a:r>
+              <a:rPr kumimoji="1" lang="en-US" altLang="ja-JP" dirty="0"/>
+              <a:t/>
             </a:r>
             <a:br>
               <a:rPr kumimoji="1" lang="en-US" altLang="ja-JP" dirty="0"/>
@@ -7285,6 +7318,10 @@
               <a:rPr lang="ja-JP" altLang="en-US" dirty="0"/>
               <a:t>：</a:t>
             </a:r>
+            <a:r>
+              <a:rPr lang="en-US" altLang="ja-JP" dirty="0"/>
+              <a:t/>
+            </a:r>
             <a:br>
               <a:rPr lang="en-US" altLang="ja-JP" dirty="0"/>
             </a:br>
@@ -7430,6 +7467,10 @@
             <a:r>
               <a:rPr lang="ja-JP" altLang="en-US" dirty="0"/>
               <a:t>：</a:t>
+            </a:r>
+            <a:r>
+              <a:rPr lang="en-US" altLang="ja-JP" dirty="0"/>
+              <a:t/>
             </a:r>
             <a:br>
               <a:rPr lang="en-US" altLang="ja-JP" dirty="0"/>
@@ -7703,6 +7744,10 @@
               <a:rPr kumimoji="1" lang="ja-JP" altLang="en-US" dirty="0"/>
               <a:t>：</a:t>
             </a:r>
+            <a:r>
+              <a:rPr kumimoji="1" lang="en-US" altLang="ja-JP" dirty="0"/>
+              <a:t/>
+            </a:r>
             <a:br>
               <a:rPr kumimoji="1" lang="en-US" altLang="ja-JP" dirty="0"/>
             </a:br>
@@ -7798,6 +7843,10 @@
               <a:rPr kumimoji="1" lang="ja-JP" altLang="en-US" dirty="0"/>
               <a:t>：</a:t>
             </a:r>
+            <a:r>
+              <a:rPr kumimoji="1" lang="en-US" altLang="ja-JP" dirty="0"/>
+              <a:t/>
+            </a:r>
             <a:br>
               <a:rPr kumimoji="1" lang="en-US" altLang="ja-JP" dirty="0"/>
             </a:br>
@@ -7983,6 +8032,10 @@
             <a:r>
               <a:rPr kumimoji="1" lang="ja-JP" altLang="en-US" dirty="0"/>
               <a:t>：</a:t>
+            </a:r>
+            <a:r>
+              <a:rPr kumimoji="1" lang="en-US" altLang="ja-JP" dirty="0"/>
+              <a:t/>
             </a:r>
             <a:br>
               <a:rPr kumimoji="1" lang="en-US" altLang="ja-JP" dirty="0"/>
@@ -8110,6 +8163,10 @@
             <a:r>
               <a:rPr kumimoji="1" lang="ja-JP" altLang="en-US" dirty="0"/>
               <a:t>：</a:t>
+            </a:r>
+            <a:r>
+              <a:rPr kumimoji="1" lang="en-US" altLang="ja-JP" dirty="0"/>
+              <a:t/>
             </a:r>
             <a:br>
               <a:rPr kumimoji="1" lang="en-US" altLang="ja-JP" dirty="0"/>
@@ -8509,6 +8566,10 @@
               <a:rPr kumimoji="1" lang="ja-JP" altLang="en-US" dirty="0"/>
               <a:t>：</a:t>
             </a:r>
+            <a:r>
+              <a:rPr kumimoji="1" lang="en-US" altLang="ja-JP" dirty="0"/>
+              <a:t/>
+            </a:r>
             <a:br>
               <a:rPr kumimoji="1" lang="en-US" altLang="ja-JP" dirty="0"/>
             </a:br>
@@ -8701,6 +8762,10 @@
             <a:r>
               <a:rPr kumimoji="1" lang="ja-JP" altLang="en-US" dirty="0"/>
               <a:t>：</a:t>
+            </a:r>
+            <a:r>
+              <a:rPr kumimoji="1" lang="en-US" altLang="ja-JP" dirty="0"/>
+              <a:t/>
             </a:r>
             <a:br>
               <a:rPr kumimoji="1" lang="en-US" altLang="ja-JP" dirty="0"/>
@@ -8829,6 +8894,10 @@
             <a:r>
               <a:rPr kumimoji="1" lang="ja-JP" altLang="en-US" dirty="0"/>
               <a:t>：</a:t>
+            </a:r>
+            <a:r>
+              <a:rPr kumimoji="1" lang="en-US" altLang="ja-JP" dirty="0"/>
+              <a:t/>
             </a:r>
             <a:br>
               <a:rPr kumimoji="1" lang="en-US" altLang="ja-JP" dirty="0"/>
@@ -10354,6 +10423,10 @@
               <a:rPr kumimoji="1" lang="ja-JP" altLang="en-US" dirty="0"/>
               <a:t>これらの正規分布は</a:t>
             </a:r>
+            <a:r>
+              <a:rPr kumimoji="1" lang="en-US" altLang="ja-JP" dirty="0"/>
+              <a:t/>
+            </a:r>
             <a:br>
               <a:rPr kumimoji="1" lang="en-US" altLang="ja-JP" dirty="0"/>
             </a:br>
@@ -10368,6 +10441,10 @@
             <a:r>
               <a:rPr kumimoji="1" lang="ja-JP" altLang="en-US" dirty="0"/>
               <a:t>予測値，</a:t>
+            </a:r>
+            <a:r>
+              <a:rPr kumimoji="1" lang="en-US" altLang="ja-JP" dirty="0"/>
+              <a:t/>
             </a:r>
             <a:br>
               <a:rPr kumimoji="1" lang="en-US" altLang="ja-JP" dirty="0"/>
@@ -10410,6 +10487,1969 @@
     <p:extLst>
       <p:ext uri="{BB962C8B-B14F-4D97-AF65-F5344CB8AC3E}">
         <p14:creationId xmlns:p14="http://schemas.microsoft.com/office/powerpoint/2010/main" val="4080195313"/>
+      </p:ext>
+    </p:extLst>
+  </p:cSld>
+  <p:clrMapOvr>
+    <a:masterClrMapping/>
+  </p:clrMapOvr>
+</p:sld>
+</file>
+
+<file path=ppt/slides/slide25.xml><?xml version="1.0" encoding="utf-8"?>
+<p:sld xmlns:a="http://schemas.openxmlformats.org/drawingml/2006/main" xmlns:r="http://schemas.openxmlformats.org/officeDocument/2006/relationships" xmlns:p="http://schemas.openxmlformats.org/presentationml/2006/main">
+  <p:cSld>
+    <p:spTree>
+      <p:nvGrpSpPr>
+        <p:cNvPr id="1" name=""/>
+        <p:cNvGrpSpPr/>
+        <p:nvPr/>
+      </p:nvGrpSpPr>
+      <p:grpSpPr>
+        <a:xfrm>
+          <a:off x="0" y="0"/>
+          <a:ext cx="0" cy="0"/>
+          <a:chOff x="0" y="0"/>
+          <a:chExt cx="0" cy="0"/>
+        </a:xfrm>
+      </p:grpSpPr>
+      <p:sp>
+        <p:nvSpPr>
+          <p:cNvPr id="4" name="楕円 3"/>
+          <p:cNvSpPr/>
+          <p:nvPr/>
+        </p:nvSpPr>
+        <p:spPr>
+          <a:xfrm>
+            <a:off x="1824156" y="1606990"/>
+            <a:ext cx="1304544" cy="579760"/>
+          </a:xfrm>
+          <a:prstGeom prst="ellipse">
+            <a:avLst/>
+          </a:prstGeom>
+          <a:ln>
+            <a:solidFill>
+              <a:schemeClr val="tx1"/>
+            </a:solidFill>
+          </a:ln>
+        </p:spPr>
+        <p:style>
+          <a:lnRef idx="2">
+            <a:schemeClr val="dk1"/>
+          </a:lnRef>
+          <a:fillRef idx="1">
+            <a:schemeClr val="lt1"/>
+          </a:fillRef>
+          <a:effectRef idx="0">
+            <a:schemeClr val="dk1"/>
+          </a:effectRef>
+          <a:fontRef idx="minor">
+            <a:schemeClr val="dk1"/>
+          </a:fontRef>
+        </p:style>
+        <p:txBody>
+          <a:bodyPr rtlCol="0" anchor="ctr"/>
+          <a:lstStyle/>
+          <a:p>
+            <a:pPr algn="ctr"/>
+            <a:r>
+              <a:rPr kumimoji="1" lang="ja-JP" altLang="en-US" dirty="0">
+                <a:solidFill>
+                  <a:schemeClr val="tx1"/>
+                </a:solidFill>
+                <a:latin typeface="游ゴシック Light" panose="020B0300000000000000" pitchFamily="50" charset="-128"/>
+                <a:ea typeface="游ゴシック Light" panose="020B0300000000000000" pitchFamily="50" charset="-128"/>
+              </a:rPr>
+              <a:t>好奇心</a:t>
+            </a:r>
+          </a:p>
+        </p:txBody>
+      </p:sp>
+      <p:sp>
+        <p:nvSpPr>
+          <p:cNvPr id="5" name="楕円 4"/>
+          <p:cNvSpPr/>
+          <p:nvPr/>
+        </p:nvSpPr>
+        <p:spPr>
+          <a:xfrm>
+            <a:off x="1824156" y="3218722"/>
+            <a:ext cx="1304544" cy="579760"/>
+          </a:xfrm>
+          <a:prstGeom prst="ellipse">
+            <a:avLst/>
+          </a:prstGeom>
+          <a:ln>
+            <a:solidFill>
+              <a:schemeClr val="tx1"/>
+            </a:solidFill>
+          </a:ln>
+        </p:spPr>
+        <p:style>
+          <a:lnRef idx="2">
+            <a:schemeClr val="dk1"/>
+          </a:lnRef>
+          <a:fillRef idx="1">
+            <a:schemeClr val="lt1"/>
+          </a:fillRef>
+          <a:effectRef idx="0">
+            <a:schemeClr val="dk1"/>
+          </a:effectRef>
+          <a:fontRef idx="minor">
+            <a:schemeClr val="dk1"/>
+          </a:fontRef>
+        </p:style>
+        <p:txBody>
+          <a:bodyPr rtlCol="0" anchor="ctr"/>
+          <a:lstStyle/>
+          <a:p>
+            <a:pPr algn="ctr"/>
+            <a:r>
+              <a:rPr kumimoji="1" lang="ja-JP" altLang="en-US" dirty="0" smtClean="0">
+                <a:solidFill>
+                  <a:schemeClr val="tx1"/>
+                </a:solidFill>
+                <a:latin typeface="游ゴシック Light" panose="020B0300000000000000" pitchFamily="50" charset="-128"/>
+                <a:ea typeface="游ゴシック Light" panose="020B0300000000000000" pitchFamily="50" charset="-128"/>
+              </a:rPr>
+              <a:t>社交性</a:t>
+            </a:r>
+            <a:endParaRPr kumimoji="1" lang="ja-JP" altLang="en-US" dirty="0">
+              <a:solidFill>
+                <a:schemeClr val="tx1"/>
+              </a:solidFill>
+              <a:latin typeface="游ゴシック Light" panose="020B0300000000000000" pitchFamily="50" charset="-128"/>
+              <a:ea typeface="游ゴシック Light" panose="020B0300000000000000" pitchFamily="50" charset="-128"/>
+            </a:endParaRPr>
+          </a:p>
+        </p:txBody>
+      </p:sp>
+      <p:sp>
+        <p:nvSpPr>
+          <p:cNvPr id="6" name="楕円 5"/>
+          <p:cNvSpPr/>
+          <p:nvPr/>
+        </p:nvSpPr>
+        <p:spPr>
+          <a:xfrm>
+            <a:off x="1824156" y="4830454"/>
+            <a:ext cx="1304544" cy="579760"/>
+          </a:xfrm>
+          <a:prstGeom prst="ellipse">
+            <a:avLst/>
+          </a:prstGeom>
+          <a:ln>
+            <a:solidFill>
+              <a:schemeClr val="tx1"/>
+            </a:solidFill>
+          </a:ln>
+        </p:spPr>
+        <p:style>
+          <a:lnRef idx="2">
+            <a:schemeClr val="dk1"/>
+          </a:lnRef>
+          <a:fillRef idx="1">
+            <a:schemeClr val="lt1"/>
+          </a:fillRef>
+          <a:effectRef idx="0">
+            <a:schemeClr val="dk1"/>
+          </a:effectRef>
+          <a:fontRef idx="minor">
+            <a:schemeClr val="dk1"/>
+          </a:fontRef>
+        </p:style>
+        <p:txBody>
+          <a:bodyPr rtlCol="0" anchor="ctr"/>
+          <a:lstStyle/>
+          <a:p>
+            <a:pPr algn="ctr"/>
+            <a:r>
+              <a:rPr kumimoji="1" lang="ja-JP" altLang="en-US" dirty="0" smtClean="0">
+                <a:solidFill>
+                  <a:schemeClr val="tx1"/>
+                </a:solidFill>
+                <a:latin typeface="游ゴシック Light" panose="020B0300000000000000" pitchFamily="50" charset="-128"/>
+                <a:ea typeface="游ゴシック Light" panose="020B0300000000000000" pitchFamily="50" charset="-128"/>
+              </a:rPr>
+              <a:t>計画性</a:t>
+            </a:r>
+            <a:endParaRPr kumimoji="1" lang="ja-JP" altLang="en-US" dirty="0">
+              <a:solidFill>
+                <a:schemeClr val="tx1"/>
+              </a:solidFill>
+              <a:latin typeface="游ゴシック Light" panose="020B0300000000000000" pitchFamily="50" charset="-128"/>
+              <a:ea typeface="游ゴシック Light" panose="020B0300000000000000" pitchFamily="50" charset="-128"/>
+            </a:endParaRPr>
+          </a:p>
+        </p:txBody>
+      </p:sp>
+      <p:sp>
+        <p:nvSpPr>
+          <p:cNvPr id="7" name="正方形/長方形 6"/>
+          <p:cNvSpPr/>
+          <p:nvPr/>
+        </p:nvSpPr>
+        <p:spPr>
+          <a:xfrm>
+            <a:off x="5005688" y="1193428"/>
+            <a:ext cx="963168" cy="332396"/>
+          </a:xfrm>
+          <a:prstGeom prst="rect">
+            <a:avLst/>
+          </a:prstGeom>
+          <a:ln>
+            <a:solidFill>
+              <a:schemeClr val="tx1"/>
+            </a:solidFill>
+          </a:ln>
+        </p:spPr>
+        <p:style>
+          <a:lnRef idx="2">
+            <a:schemeClr val="dk1"/>
+          </a:lnRef>
+          <a:fillRef idx="1">
+            <a:schemeClr val="lt1"/>
+          </a:fillRef>
+          <a:effectRef idx="0">
+            <a:schemeClr val="dk1"/>
+          </a:effectRef>
+          <a:fontRef idx="minor">
+            <a:schemeClr val="dk1"/>
+          </a:fontRef>
+        </p:style>
+        <p:txBody>
+          <a:bodyPr rtlCol="0" anchor="ctr"/>
+          <a:lstStyle/>
+          <a:p>
+            <a:pPr algn="ctr"/>
+            <a:r>
+              <a:rPr kumimoji="1" lang="en-US" altLang="ja-JP" dirty="0" smtClean="0">
+                <a:solidFill>
+                  <a:schemeClr val="tx1"/>
+                </a:solidFill>
+                <a:latin typeface="游ゴシック Light" panose="020B0300000000000000" pitchFamily="50" charset="-128"/>
+                <a:ea typeface="游ゴシック Light" panose="020B0300000000000000" pitchFamily="50" charset="-128"/>
+              </a:rPr>
+              <a:t>Q1</a:t>
+            </a:r>
+            <a:endParaRPr kumimoji="1" lang="ja-JP" altLang="en-US" dirty="0">
+              <a:solidFill>
+                <a:schemeClr val="tx1"/>
+              </a:solidFill>
+              <a:latin typeface="游ゴシック Light" panose="020B0300000000000000" pitchFamily="50" charset="-128"/>
+              <a:ea typeface="游ゴシック Light" panose="020B0300000000000000" pitchFamily="50" charset="-128"/>
+            </a:endParaRPr>
+          </a:p>
+        </p:txBody>
+      </p:sp>
+      <p:sp>
+        <p:nvSpPr>
+          <p:cNvPr id="8" name="正方形/長方形 7"/>
+          <p:cNvSpPr/>
+          <p:nvPr/>
+        </p:nvSpPr>
+        <p:spPr>
+          <a:xfrm>
+            <a:off x="5005688" y="1730672"/>
+            <a:ext cx="963168" cy="332396"/>
+          </a:xfrm>
+          <a:prstGeom prst="rect">
+            <a:avLst/>
+          </a:prstGeom>
+          <a:ln>
+            <a:solidFill>
+              <a:schemeClr val="tx1"/>
+            </a:solidFill>
+          </a:ln>
+        </p:spPr>
+        <p:style>
+          <a:lnRef idx="2">
+            <a:schemeClr val="dk1"/>
+          </a:lnRef>
+          <a:fillRef idx="1">
+            <a:schemeClr val="lt1"/>
+          </a:fillRef>
+          <a:effectRef idx="0">
+            <a:schemeClr val="dk1"/>
+          </a:effectRef>
+          <a:fontRef idx="minor">
+            <a:schemeClr val="dk1"/>
+          </a:fontRef>
+        </p:style>
+        <p:txBody>
+          <a:bodyPr rtlCol="0" anchor="ctr"/>
+          <a:lstStyle/>
+          <a:p>
+            <a:pPr algn="ctr"/>
+            <a:r>
+              <a:rPr kumimoji="1" lang="en-US" altLang="ja-JP" dirty="0" smtClean="0">
+                <a:solidFill>
+                  <a:schemeClr val="tx1"/>
+                </a:solidFill>
+                <a:latin typeface="游ゴシック Light" panose="020B0300000000000000" pitchFamily="50" charset="-128"/>
+                <a:ea typeface="游ゴシック Light" panose="020B0300000000000000" pitchFamily="50" charset="-128"/>
+              </a:rPr>
+              <a:t>Q2</a:t>
+            </a:r>
+            <a:endParaRPr kumimoji="1" lang="ja-JP" altLang="en-US" dirty="0">
+              <a:solidFill>
+                <a:schemeClr val="tx1"/>
+              </a:solidFill>
+              <a:latin typeface="游ゴシック Light" panose="020B0300000000000000" pitchFamily="50" charset="-128"/>
+              <a:ea typeface="游ゴシック Light" panose="020B0300000000000000" pitchFamily="50" charset="-128"/>
+            </a:endParaRPr>
+          </a:p>
+        </p:txBody>
+      </p:sp>
+      <p:sp>
+        <p:nvSpPr>
+          <p:cNvPr id="9" name="正方形/長方形 8"/>
+          <p:cNvSpPr/>
+          <p:nvPr/>
+        </p:nvSpPr>
+        <p:spPr>
+          <a:xfrm>
+            <a:off x="5005688" y="2267916"/>
+            <a:ext cx="963168" cy="332396"/>
+          </a:xfrm>
+          <a:prstGeom prst="rect">
+            <a:avLst/>
+          </a:prstGeom>
+          <a:ln>
+            <a:solidFill>
+              <a:schemeClr val="tx1"/>
+            </a:solidFill>
+          </a:ln>
+        </p:spPr>
+        <p:style>
+          <a:lnRef idx="2">
+            <a:schemeClr val="dk1"/>
+          </a:lnRef>
+          <a:fillRef idx="1">
+            <a:schemeClr val="lt1"/>
+          </a:fillRef>
+          <a:effectRef idx="0">
+            <a:schemeClr val="dk1"/>
+          </a:effectRef>
+          <a:fontRef idx="minor">
+            <a:schemeClr val="dk1"/>
+          </a:fontRef>
+        </p:style>
+        <p:txBody>
+          <a:bodyPr rtlCol="0" anchor="ctr"/>
+          <a:lstStyle/>
+          <a:p>
+            <a:pPr algn="ctr"/>
+            <a:r>
+              <a:rPr kumimoji="1" lang="en-US" altLang="ja-JP" dirty="0" smtClean="0">
+                <a:solidFill>
+                  <a:schemeClr val="tx1"/>
+                </a:solidFill>
+                <a:latin typeface="游ゴシック Light" panose="020B0300000000000000" pitchFamily="50" charset="-128"/>
+                <a:ea typeface="游ゴシック Light" panose="020B0300000000000000" pitchFamily="50" charset="-128"/>
+              </a:rPr>
+              <a:t>Q3</a:t>
+            </a:r>
+            <a:endParaRPr kumimoji="1" lang="ja-JP" altLang="en-US" dirty="0">
+              <a:solidFill>
+                <a:schemeClr val="tx1"/>
+              </a:solidFill>
+              <a:latin typeface="游ゴシック Light" panose="020B0300000000000000" pitchFamily="50" charset="-128"/>
+              <a:ea typeface="游ゴシック Light" panose="020B0300000000000000" pitchFamily="50" charset="-128"/>
+            </a:endParaRPr>
+          </a:p>
+        </p:txBody>
+      </p:sp>
+      <p:sp>
+        <p:nvSpPr>
+          <p:cNvPr id="10" name="正方形/長方形 9"/>
+          <p:cNvSpPr/>
+          <p:nvPr/>
+        </p:nvSpPr>
+        <p:spPr>
+          <a:xfrm>
+            <a:off x="5005688" y="2805160"/>
+            <a:ext cx="963168" cy="332396"/>
+          </a:xfrm>
+          <a:prstGeom prst="rect">
+            <a:avLst/>
+          </a:prstGeom>
+          <a:ln>
+            <a:solidFill>
+              <a:schemeClr val="tx1"/>
+            </a:solidFill>
+          </a:ln>
+        </p:spPr>
+        <p:style>
+          <a:lnRef idx="2">
+            <a:schemeClr val="dk1"/>
+          </a:lnRef>
+          <a:fillRef idx="1">
+            <a:schemeClr val="lt1"/>
+          </a:fillRef>
+          <a:effectRef idx="0">
+            <a:schemeClr val="dk1"/>
+          </a:effectRef>
+          <a:fontRef idx="minor">
+            <a:schemeClr val="dk1"/>
+          </a:fontRef>
+        </p:style>
+        <p:txBody>
+          <a:bodyPr rtlCol="0" anchor="ctr"/>
+          <a:lstStyle/>
+          <a:p>
+            <a:pPr algn="ctr"/>
+            <a:r>
+              <a:rPr kumimoji="1" lang="en-US" altLang="ja-JP" dirty="0" smtClean="0">
+                <a:solidFill>
+                  <a:schemeClr val="tx1"/>
+                </a:solidFill>
+                <a:latin typeface="游ゴシック Light" panose="020B0300000000000000" pitchFamily="50" charset="-128"/>
+                <a:ea typeface="游ゴシック Light" panose="020B0300000000000000" pitchFamily="50" charset="-128"/>
+              </a:rPr>
+              <a:t>Q4</a:t>
+            </a:r>
+            <a:endParaRPr kumimoji="1" lang="ja-JP" altLang="en-US" dirty="0">
+              <a:solidFill>
+                <a:schemeClr val="tx1"/>
+              </a:solidFill>
+              <a:latin typeface="游ゴシック Light" panose="020B0300000000000000" pitchFamily="50" charset="-128"/>
+              <a:ea typeface="游ゴシック Light" panose="020B0300000000000000" pitchFamily="50" charset="-128"/>
+            </a:endParaRPr>
+          </a:p>
+        </p:txBody>
+      </p:sp>
+      <p:sp>
+        <p:nvSpPr>
+          <p:cNvPr id="11" name="正方形/長方形 10"/>
+          <p:cNvSpPr/>
+          <p:nvPr/>
+        </p:nvSpPr>
+        <p:spPr>
+          <a:xfrm>
+            <a:off x="5005688" y="3342404"/>
+            <a:ext cx="963168" cy="332396"/>
+          </a:xfrm>
+          <a:prstGeom prst="rect">
+            <a:avLst/>
+          </a:prstGeom>
+          <a:ln>
+            <a:solidFill>
+              <a:schemeClr val="tx1"/>
+            </a:solidFill>
+          </a:ln>
+        </p:spPr>
+        <p:style>
+          <a:lnRef idx="2">
+            <a:schemeClr val="dk1"/>
+          </a:lnRef>
+          <a:fillRef idx="1">
+            <a:schemeClr val="lt1"/>
+          </a:fillRef>
+          <a:effectRef idx="0">
+            <a:schemeClr val="dk1"/>
+          </a:effectRef>
+          <a:fontRef idx="minor">
+            <a:schemeClr val="dk1"/>
+          </a:fontRef>
+        </p:style>
+        <p:txBody>
+          <a:bodyPr rtlCol="0" anchor="ctr"/>
+          <a:lstStyle/>
+          <a:p>
+            <a:pPr algn="ctr"/>
+            <a:r>
+              <a:rPr kumimoji="1" lang="en-US" altLang="ja-JP" dirty="0" smtClean="0">
+                <a:solidFill>
+                  <a:schemeClr val="tx1"/>
+                </a:solidFill>
+                <a:latin typeface="游ゴシック Light" panose="020B0300000000000000" pitchFamily="50" charset="-128"/>
+                <a:ea typeface="游ゴシック Light" panose="020B0300000000000000" pitchFamily="50" charset="-128"/>
+              </a:rPr>
+              <a:t>Q5</a:t>
+            </a:r>
+            <a:endParaRPr kumimoji="1" lang="ja-JP" altLang="en-US" dirty="0">
+              <a:solidFill>
+                <a:schemeClr val="tx1"/>
+              </a:solidFill>
+              <a:latin typeface="游ゴシック Light" panose="020B0300000000000000" pitchFamily="50" charset="-128"/>
+              <a:ea typeface="游ゴシック Light" panose="020B0300000000000000" pitchFamily="50" charset="-128"/>
+            </a:endParaRPr>
+          </a:p>
+        </p:txBody>
+      </p:sp>
+      <p:sp>
+        <p:nvSpPr>
+          <p:cNvPr id="12" name="正方形/長方形 11"/>
+          <p:cNvSpPr/>
+          <p:nvPr/>
+        </p:nvSpPr>
+        <p:spPr>
+          <a:xfrm>
+            <a:off x="5005688" y="3879648"/>
+            <a:ext cx="963168" cy="332396"/>
+          </a:xfrm>
+          <a:prstGeom prst="rect">
+            <a:avLst/>
+          </a:prstGeom>
+          <a:ln>
+            <a:solidFill>
+              <a:schemeClr val="tx1"/>
+            </a:solidFill>
+          </a:ln>
+        </p:spPr>
+        <p:style>
+          <a:lnRef idx="2">
+            <a:schemeClr val="dk1"/>
+          </a:lnRef>
+          <a:fillRef idx="1">
+            <a:schemeClr val="lt1"/>
+          </a:fillRef>
+          <a:effectRef idx="0">
+            <a:schemeClr val="dk1"/>
+          </a:effectRef>
+          <a:fontRef idx="minor">
+            <a:schemeClr val="dk1"/>
+          </a:fontRef>
+        </p:style>
+        <p:txBody>
+          <a:bodyPr rtlCol="0" anchor="ctr"/>
+          <a:lstStyle/>
+          <a:p>
+            <a:pPr algn="ctr"/>
+            <a:r>
+              <a:rPr kumimoji="1" lang="en-US" altLang="ja-JP" dirty="0" smtClean="0">
+                <a:solidFill>
+                  <a:schemeClr val="tx1"/>
+                </a:solidFill>
+                <a:latin typeface="游ゴシック Light" panose="020B0300000000000000" pitchFamily="50" charset="-128"/>
+                <a:ea typeface="游ゴシック Light" panose="020B0300000000000000" pitchFamily="50" charset="-128"/>
+              </a:rPr>
+              <a:t>Q6</a:t>
+            </a:r>
+            <a:endParaRPr kumimoji="1" lang="ja-JP" altLang="en-US" dirty="0">
+              <a:solidFill>
+                <a:schemeClr val="tx1"/>
+              </a:solidFill>
+              <a:latin typeface="游ゴシック Light" panose="020B0300000000000000" pitchFamily="50" charset="-128"/>
+              <a:ea typeface="游ゴシック Light" panose="020B0300000000000000" pitchFamily="50" charset="-128"/>
+            </a:endParaRPr>
+          </a:p>
+        </p:txBody>
+      </p:sp>
+      <p:sp>
+        <p:nvSpPr>
+          <p:cNvPr id="13" name="正方形/長方形 12"/>
+          <p:cNvSpPr/>
+          <p:nvPr/>
+        </p:nvSpPr>
+        <p:spPr>
+          <a:xfrm>
+            <a:off x="5005688" y="4416892"/>
+            <a:ext cx="963168" cy="332396"/>
+          </a:xfrm>
+          <a:prstGeom prst="rect">
+            <a:avLst/>
+          </a:prstGeom>
+          <a:ln>
+            <a:solidFill>
+              <a:schemeClr val="tx1"/>
+            </a:solidFill>
+          </a:ln>
+        </p:spPr>
+        <p:style>
+          <a:lnRef idx="2">
+            <a:schemeClr val="dk1"/>
+          </a:lnRef>
+          <a:fillRef idx="1">
+            <a:schemeClr val="lt1"/>
+          </a:fillRef>
+          <a:effectRef idx="0">
+            <a:schemeClr val="dk1"/>
+          </a:effectRef>
+          <a:fontRef idx="minor">
+            <a:schemeClr val="dk1"/>
+          </a:fontRef>
+        </p:style>
+        <p:txBody>
+          <a:bodyPr rtlCol="0" anchor="ctr"/>
+          <a:lstStyle/>
+          <a:p>
+            <a:pPr algn="ctr"/>
+            <a:r>
+              <a:rPr kumimoji="1" lang="en-US" altLang="ja-JP" dirty="0" smtClean="0">
+                <a:solidFill>
+                  <a:schemeClr val="tx1"/>
+                </a:solidFill>
+                <a:latin typeface="游ゴシック Light" panose="020B0300000000000000" pitchFamily="50" charset="-128"/>
+                <a:ea typeface="游ゴシック Light" panose="020B0300000000000000" pitchFamily="50" charset="-128"/>
+              </a:rPr>
+              <a:t>Q7</a:t>
+            </a:r>
+            <a:endParaRPr kumimoji="1" lang="ja-JP" altLang="en-US" dirty="0">
+              <a:solidFill>
+                <a:schemeClr val="tx1"/>
+              </a:solidFill>
+              <a:latin typeface="游ゴシック Light" panose="020B0300000000000000" pitchFamily="50" charset="-128"/>
+              <a:ea typeface="游ゴシック Light" panose="020B0300000000000000" pitchFamily="50" charset="-128"/>
+            </a:endParaRPr>
+          </a:p>
+        </p:txBody>
+      </p:sp>
+      <p:sp>
+        <p:nvSpPr>
+          <p:cNvPr id="14" name="正方形/長方形 13"/>
+          <p:cNvSpPr/>
+          <p:nvPr/>
+        </p:nvSpPr>
+        <p:spPr>
+          <a:xfrm>
+            <a:off x="5005688" y="4954136"/>
+            <a:ext cx="963168" cy="332396"/>
+          </a:xfrm>
+          <a:prstGeom prst="rect">
+            <a:avLst/>
+          </a:prstGeom>
+          <a:ln>
+            <a:solidFill>
+              <a:schemeClr val="tx1"/>
+            </a:solidFill>
+          </a:ln>
+        </p:spPr>
+        <p:style>
+          <a:lnRef idx="2">
+            <a:schemeClr val="dk1"/>
+          </a:lnRef>
+          <a:fillRef idx="1">
+            <a:schemeClr val="lt1"/>
+          </a:fillRef>
+          <a:effectRef idx="0">
+            <a:schemeClr val="dk1"/>
+          </a:effectRef>
+          <a:fontRef idx="minor">
+            <a:schemeClr val="dk1"/>
+          </a:fontRef>
+        </p:style>
+        <p:txBody>
+          <a:bodyPr rtlCol="0" anchor="ctr"/>
+          <a:lstStyle/>
+          <a:p>
+            <a:pPr algn="ctr"/>
+            <a:r>
+              <a:rPr kumimoji="1" lang="en-US" altLang="ja-JP" dirty="0" smtClean="0">
+                <a:solidFill>
+                  <a:schemeClr val="tx1"/>
+                </a:solidFill>
+                <a:latin typeface="游ゴシック Light" panose="020B0300000000000000" pitchFamily="50" charset="-128"/>
+                <a:ea typeface="游ゴシック Light" panose="020B0300000000000000" pitchFamily="50" charset="-128"/>
+              </a:rPr>
+              <a:t>Q8</a:t>
+            </a:r>
+            <a:endParaRPr kumimoji="1" lang="ja-JP" altLang="en-US" dirty="0">
+              <a:solidFill>
+                <a:schemeClr val="tx1"/>
+              </a:solidFill>
+              <a:latin typeface="游ゴシック Light" panose="020B0300000000000000" pitchFamily="50" charset="-128"/>
+              <a:ea typeface="游ゴシック Light" panose="020B0300000000000000" pitchFamily="50" charset="-128"/>
+            </a:endParaRPr>
+          </a:p>
+        </p:txBody>
+      </p:sp>
+      <p:sp>
+        <p:nvSpPr>
+          <p:cNvPr id="15" name="正方形/長方形 14"/>
+          <p:cNvSpPr/>
+          <p:nvPr/>
+        </p:nvSpPr>
+        <p:spPr>
+          <a:xfrm>
+            <a:off x="5005688" y="5491379"/>
+            <a:ext cx="963168" cy="332396"/>
+          </a:xfrm>
+          <a:prstGeom prst="rect">
+            <a:avLst/>
+          </a:prstGeom>
+          <a:ln>
+            <a:solidFill>
+              <a:schemeClr val="tx1"/>
+            </a:solidFill>
+          </a:ln>
+        </p:spPr>
+        <p:style>
+          <a:lnRef idx="2">
+            <a:schemeClr val="dk1"/>
+          </a:lnRef>
+          <a:fillRef idx="1">
+            <a:schemeClr val="lt1"/>
+          </a:fillRef>
+          <a:effectRef idx="0">
+            <a:schemeClr val="dk1"/>
+          </a:effectRef>
+          <a:fontRef idx="minor">
+            <a:schemeClr val="dk1"/>
+          </a:fontRef>
+        </p:style>
+        <p:txBody>
+          <a:bodyPr rtlCol="0" anchor="ctr"/>
+          <a:lstStyle/>
+          <a:p>
+            <a:pPr algn="ctr"/>
+            <a:r>
+              <a:rPr kumimoji="1" lang="en-US" altLang="ja-JP" dirty="0" smtClean="0">
+                <a:solidFill>
+                  <a:schemeClr val="tx1"/>
+                </a:solidFill>
+                <a:latin typeface="游ゴシック Light" panose="020B0300000000000000" pitchFamily="50" charset="-128"/>
+                <a:ea typeface="游ゴシック Light" panose="020B0300000000000000" pitchFamily="50" charset="-128"/>
+              </a:rPr>
+              <a:t>Q9</a:t>
+            </a:r>
+            <a:endParaRPr kumimoji="1" lang="ja-JP" altLang="en-US" dirty="0">
+              <a:solidFill>
+                <a:schemeClr val="tx1"/>
+              </a:solidFill>
+              <a:latin typeface="游ゴシック Light" panose="020B0300000000000000" pitchFamily="50" charset="-128"/>
+              <a:ea typeface="游ゴシック Light" panose="020B0300000000000000" pitchFamily="50" charset="-128"/>
+            </a:endParaRPr>
+          </a:p>
+        </p:txBody>
+      </p:sp>
+      <p:cxnSp>
+        <p:nvCxnSpPr>
+          <p:cNvPr id="18" name="直線矢印コネクタ 17"/>
+          <p:cNvCxnSpPr>
+            <a:stCxn id="4" idx="6"/>
+            <a:endCxn id="7" idx="1"/>
+          </p:cNvCxnSpPr>
+          <p:nvPr/>
+        </p:nvCxnSpPr>
+        <p:spPr>
+          <a:xfrm flipV="1">
+            <a:off x="3128700" y="1359626"/>
+            <a:ext cx="1876988" cy="537244"/>
+          </a:xfrm>
+          <a:prstGeom prst="straightConnector1">
+            <a:avLst/>
+          </a:prstGeom>
+          <a:ln>
+            <a:solidFill>
+              <a:schemeClr val="tx1"/>
+            </a:solidFill>
+            <a:tailEnd type="triangle"/>
+          </a:ln>
+        </p:spPr>
+        <p:style>
+          <a:lnRef idx="1">
+            <a:schemeClr val="accent1"/>
+          </a:lnRef>
+          <a:fillRef idx="0">
+            <a:schemeClr val="accent1"/>
+          </a:fillRef>
+          <a:effectRef idx="0">
+            <a:schemeClr val="accent1"/>
+          </a:effectRef>
+          <a:fontRef idx="minor">
+            <a:schemeClr val="tx1"/>
+          </a:fontRef>
+        </p:style>
+      </p:cxnSp>
+      <p:cxnSp>
+        <p:nvCxnSpPr>
+          <p:cNvPr id="20" name="直線矢印コネクタ 19"/>
+          <p:cNvCxnSpPr>
+            <a:stCxn id="4" idx="6"/>
+            <a:endCxn id="8" idx="1"/>
+          </p:cNvCxnSpPr>
+          <p:nvPr/>
+        </p:nvCxnSpPr>
+        <p:spPr>
+          <a:xfrm>
+            <a:off x="3128700" y="1896870"/>
+            <a:ext cx="1876988" cy="0"/>
+          </a:xfrm>
+          <a:prstGeom prst="straightConnector1">
+            <a:avLst/>
+          </a:prstGeom>
+          <a:ln>
+            <a:solidFill>
+              <a:schemeClr val="tx1"/>
+            </a:solidFill>
+            <a:tailEnd type="triangle"/>
+          </a:ln>
+        </p:spPr>
+        <p:style>
+          <a:lnRef idx="1">
+            <a:schemeClr val="accent1"/>
+          </a:lnRef>
+          <a:fillRef idx="0">
+            <a:schemeClr val="accent1"/>
+          </a:fillRef>
+          <a:effectRef idx="0">
+            <a:schemeClr val="accent1"/>
+          </a:effectRef>
+          <a:fontRef idx="minor">
+            <a:schemeClr val="tx1"/>
+          </a:fontRef>
+        </p:style>
+      </p:cxnSp>
+      <p:cxnSp>
+        <p:nvCxnSpPr>
+          <p:cNvPr id="22" name="直線矢印コネクタ 21"/>
+          <p:cNvCxnSpPr>
+            <a:stCxn id="4" idx="6"/>
+            <a:endCxn id="9" idx="1"/>
+          </p:cNvCxnSpPr>
+          <p:nvPr/>
+        </p:nvCxnSpPr>
+        <p:spPr>
+          <a:xfrm>
+            <a:off x="3128700" y="1896870"/>
+            <a:ext cx="1876988" cy="537244"/>
+          </a:xfrm>
+          <a:prstGeom prst="straightConnector1">
+            <a:avLst/>
+          </a:prstGeom>
+          <a:ln>
+            <a:solidFill>
+              <a:schemeClr val="tx1"/>
+            </a:solidFill>
+            <a:tailEnd type="triangle"/>
+          </a:ln>
+        </p:spPr>
+        <p:style>
+          <a:lnRef idx="1">
+            <a:schemeClr val="accent1"/>
+          </a:lnRef>
+          <a:fillRef idx="0">
+            <a:schemeClr val="accent1"/>
+          </a:fillRef>
+          <a:effectRef idx="0">
+            <a:schemeClr val="accent1"/>
+          </a:effectRef>
+          <a:fontRef idx="minor">
+            <a:schemeClr val="tx1"/>
+          </a:fontRef>
+        </p:style>
+      </p:cxnSp>
+      <p:cxnSp>
+        <p:nvCxnSpPr>
+          <p:cNvPr id="24" name="直線矢印コネクタ 23"/>
+          <p:cNvCxnSpPr>
+            <a:stCxn id="5" idx="6"/>
+            <a:endCxn id="10" idx="1"/>
+          </p:cNvCxnSpPr>
+          <p:nvPr/>
+        </p:nvCxnSpPr>
+        <p:spPr>
+          <a:xfrm flipV="1">
+            <a:off x="3128700" y="2971358"/>
+            <a:ext cx="1876988" cy="537244"/>
+          </a:xfrm>
+          <a:prstGeom prst="straightConnector1">
+            <a:avLst/>
+          </a:prstGeom>
+          <a:ln>
+            <a:solidFill>
+              <a:schemeClr val="tx1"/>
+            </a:solidFill>
+            <a:tailEnd type="triangle"/>
+          </a:ln>
+        </p:spPr>
+        <p:style>
+          <a:lnRef idx="1">
+            <a:schemeClr val="accent1"/>
+          </a:lnRef>
+          <a:fillRef idx="0">
+            <a:schemeClr val="accent1"/>
+          </a:fillRef>
+          <a:effectRef idx="0">
+            <a:schemeClr val="accent1"/>
+          </a:effectRef>
+          <a:fontRef idx="minor">
+            <a:schemeClr val="tx1"/>
+          </a:fontRef>
+        </p:style>
+      </p:cxnSp>
+      <p:cxnSp>
+        <p:nvCxnSpPr>
+          <p:cNvPr id="26" name="直線矢印コネクタ 25"/>
+          <p:cNvCxnSpPr>
+            <a:stCxn id="5" idx="6"/>
+            <a:endCxn id="11" idx="1"/>
+          </p:cNvCxnSpPr>
+          <p:nvPr/>
+        </p:nvCxnSpPr>
+        <p:spPr>
+          <a:xfrm>
+            <a:off x="3128700" y="3508602"/>
+            <a:ext cx="1876988" cy="0"/>
+          </a:xfrm>
+          <a:prstGeom prst="straightConnector1">
+            <a:avLst/>
+          </a:prstGeom>
+          <a:ln>
+            <a:solidFill>
+              <a:schemeClr val="tx1"/>
+            </a:solidFill>
+            <a:tailEnd type="triangle"/>
+          </a:ln>
+        </p:spPr>
+        <p:style>
+          <a:lnRef idx="1">
+            <a:schemeClr val="accent1"/>
+          </a:lnRef>
+          <a:fillRef idx="0">
+            <a:schemeClr val="accent1"/>
+          </a:fillRef>
+          <a:effectRef idx="0">
+            <a:schemeClr val="accent1"/>
+          </a:effectRef>
+          <a:fontRef idx="minor">
+            <a:schemeClr val="tx1"/>
+          </a:fontRef>
+        </p:style>
+      </p:cxnSp>
+      <p:cxnSp>
+        <p:nvCxnSpPr>
+          <p:cNvPr id="28" name="直線矢印コネクタ 27"/>
+          <p:cNvCxnSpPr>
+            <a:stCxn id="5" idx="6"/>
+            <a:endCxn id="12" idx="1"/>
+          </p:cNvCxnSpPr>
+          <p:nvPr/>
+        </p:nvCxnSpPr>
+        <p:spPr>
+          <a:xfrm>
+            <a:off x="3128700" y="3508602"/>
+            <a:ext cx="1876988" cy="537244"/>
+          </a:xfrm>
+          <a:prstGeom prst="straightConnector1">
+            <a:avLst/>
+          </a:prstGeom>
+          <a:ln>
+            <a:solidFill>
+              <a:schemeClr val="tx1"/>
+            </a:solidFill>
+            <a:tailEnd type="triangle"/>
+          </a:ln>
+        </p:spPr>
+        <p:style>
+          <a:lnRef idx="1">
+            <a:schemeClr val="accent1"/>
+          </a:lnRef>
+          <a:fillRef idx="0">
+            <a:schemeClr val="accent1"/>
+          </a:fillRef>
+          <a:effectRef idx="0">
+            <a:schemeClr val="accent1"/>
+          </a:effectRef>
+          <a:fontRef idx="minor">
+            <a:schemeClr val="tx1"/>
+          </a:fontRef>
+        </p:style>
+      </p:cxnSp>
+      <p:cxnSp>
+        <p:nvCxnSpPr>
+          <p:cNvPr id="30" name="直線矢印コネクタ 29"/>
+          <p:cNvCxnSpPr>
+            <a:stCxn id="6" idx="6"/>
+            <a:endCxn id="13" idx="1"/>
+          </p:cNvCxnSpPr>
+          <p:nvPr/>
+        </p:nvCxnSpPr>
+        <p:spPr>
+          <a:xfrm flipV="1">
+            <a:off x="3128700" y="4583090"/>
+            <a:ext cx="1876988" cy="537244"/>
+          </a:xfrm>
+          <a:prstGeom prst="straightConnector1">
+            <a:avLst/>
+          </a:prstGeom>
+          <a:ln>
+            <a:solidFill>
+              <a:schemeClr val="tx1"/>
+            </a:solidFill>
+            <a:tailEnd type="triangle"/>
+          </a:ln>
+        </p:spPr>
+        <p:style>
+          <a:lnRef idx="1">
+            <a:schemeClr val="accent1"/>
+          </a:lnRef>
+          <a:fillRef idx="0">
+            <a:schemeClr val="accent1"/>
+          </a:fillRef>
+          <a:effectRef idx="0">
+            <a:schemeClr val="accent1"/>
+          </a:effectRef>
+          <a:fontRef idx="minor">
+            <a:schemeClr val="tx1"/>
+          </a:fontRef>
+        </p:style>
+      </p:cxnSp>
+      <p:cxnSp>
+        <p:nvCxnSpPr>
+          <p:cNvPr id="32" name="直線矢印コネクタ 31"/>
+          <p:cNvCxnSpPr>
+            <a:endCxn id="14" idx="1"/>
+          </p:cNvCxnSpPr>
+          <p:nvPr/>
+        </p:nvCxnSpPr>
+        <p:spPr>
+          <a:xfrm>
+            <a:off x="2989943" y="5120334"/>
+            <a:ext cx="2015745" cy="0"/>
+          </a:xfrm>
+          <a:prstGeom prst="straightConnector1">
+            <a:avLst/>
+          </a:prstGeom>
+          <a:ln>
+            <a:solidFill>
+              <a:schemeClr val="tx1"/>
+            </a:solidFill>
+            <a:tailEnd type="triangle"/>
+          </a:ln>
+        </p:spPr>
+        <p:style>
+          <a:lnRef idx="1">
+            <a:schemeClr val="accent1"/>
+          </a:lnRef>
+          <a:fillRef idx="0">
+            <a:schemeClr val="accent1"/>
+          </a:fillRef>
+          <a:effectRef idx="0">
+            <a:schemeClr val="accent1"/>
+          </a:effectRef>
+          <a:fontRef idx="minor">
+            <a:schemeClr val="tx1"/>
+          </a:fontRef>
+        </p:style>
+      </p:cxnSp>
+      <p:cxnSp>
+        <p:nvCxnSpPr>
+          <p:cNvPr id="34" name="直線矢印コネクタ 33"/>
+          <p:cNvCxnSpPr>
+            <a:stCxn id="6" idx="6"/>
+            <a:endCxn id="15" idx="1"/>
+          </p:cNvCxnSpPr>
+          <p:nvPr/>
+        </p:nvCxnSpPr>
+        <p:spPr>
+          <a:xfrm>
+            <a:off x="3128700" y="5120334"/>
+            <a:ext cx="1876988" cy="537243"/>
+          </a:xfrm>
+          <a:prstGeom prst="straightConnector1">
+            <a:avLst/>
+          </a:prstGeom>
+          <a:ln>
+            <a:solidFill>
+              <a:schemeClr val="tx1"/>
+            </a:solidFill>
+            <a:tailEnd type="triangle"/>
+          </a:ln>
+        </p:spPr>
+        <p:style>
+          <a:lnRef idx="1">
+            <a:schemeClr val="accent1"/>
+          </a:lnRef>
+          <a:fillRef idx="0">
+            <a:schemeClr val="accent1"/>
+          </a:fillRef>
+          <a:effectRef idx="0">
+            <a:schemeClr val="accent1"/>
+          </a:effectRef>
+          <a:fontRef idx="minor">
+            <a:schemeClr val="tx1"/>
+          </a:fontRef>
+        </p:style>
+      </p:cxnSp>
+      <p:sp>
+        <p:nvSpPr>
+          <p:cNvPr id="38" name="楕円 37"/>
+          <p:cNvSpPr/>
+          <p:nvPr/>
+        </p:nvSpPr>
+        <p:spPr>
+          <a:xfrm>
+            <a:off x="6711988" y="1214686"/>
+            <a:ext cx="341376" cy="289880"/>
+          </a:xfrm>
+          <a:prstGeom prst="ellipse">
+            <a:avLst/>
+          </a:prstGeom>
+          <a:ln>
+            <a:solidFill>
+              <a:schemeClr val="tx1"/>
+            </a:solidFill>
+          </a:ln>
+        </p:spPr>
+        <p:style>
+          <a:lnRef idx="2">
+            <a:schemeClr val="dk1"/>
+          </a:lnRef>
+          <a:fillRef idx="1">
+            <a:schemeClr val="lt1"/>
+          </a:fillRef>
+          <a:effectRef idx="0">
+            <a:schemeClr val="dk1"/>
+          </a:effectRef>
+          <a:fontRef idx="minor">
+            <a:schemeClr val="dk1"/>
+          </a:fontRef>
+        </p:style>
+        <p:txBody>
+          <a:bodyPr rtlCol="0" anchor="ctr"/>
+          <a:lstStyle/>
+          <a:p>
+            <a:pPr algn="ctr"/>
+            <a:r>
+              <a:rPr kumimoji="1" lang="en-US" altLang="ja-JP" dirty="0" smtClean="0">
+                <a:solidFill>
+                  <a:schemeClr val="tx1"/>
+                </a:solidFill>
+                <a:latin typeface="游ゴシック Light" panose="020B0300000000000000" pitchFamily="50" charset="-128"/>
+                <a:ea typeface="游ゴシック Light" panose="020B0300000000000000" pitchFamily="50" charset="-128"/>
+              </a:rPr>
+              <a:t>e</a:t>
+            </a:r>
+            <a:endParaRPr kumimoji="1" lang="ja-JP" altLang="en-US" dirty="0">
+              <a:solidFill>
+                <a:schemeClr val="tx1"/>
+              </a:solidFill>
+              <a:latin typeface="游ゴシック Light" panose="020B0300000000000000" pitchFamily="50" charset="-128"/>
+              <a:ea typeface="游ゴシック Light" panose="020B0300000000000000" pitchFamily="50" charset="-128"/>
+            </a:endParaRPr>
+          </a:p>
+        </p:txBody>
+      </p:sp>
+      <p:sp>
+        <p:nvSpPr>
+          <p:cNvPr id="39" name="楕円 38"/>
+          <p:cNvSpPr/>
+          <p:nvPr/>
+        </p:nvSpPr>
+        <p:spPr>
+          <a:xfrm>
+            <a:off x="6711988" y="1751930"/>
+            <a:ext cx="341376" cy="289880"/>
+          </a:xfrm>
+          <a:prstGeom prst="ellipse">
+            <a:avLst/>
+          </a:prstGeom>
+          <a:ln>
+            <a:solidFill>
+              <a:schemeClr val="tx1"/>
+            </a:solidFill>
+          </a:ln>
+        </p:spPr>
+        <p:style>
+          <a:lnRef idx="2">
+            <a:schemeClr val="dk1"/>
+          </a:lnRef>
+          <a:fillRef idx="1">
+            <a:schemeClr val="lt1"/>
+          </a:fillRef>
+          <a:effectRef idx="0">
+            <a:schemeClr val="dk1"/>
+          </a:effectRef>
+          <a:fontRef idx="minor">
+            <a:schemeClr val="dk1"/>
+          </a:fontRef>
+        </p:style>
+        <p:txBody>
+          <a:bodyPr rtlCol="0" anchor="ctr"/>
+          <a:lstStyle/>
+          <a:p>
+            <a:pPr algn="ctr"/>
+            <a:r>
+              <a:rPr kumimoji="1" lang="en-US" altLang="ja-JP" dirty="0" smtClean="0">
+                <a:solidFill>
+                  <a:schemeClr val="tx1"/>
+                </a:solidFill>
+                <a:latin typeface="游ゴシック Light" panose="020B0300000000000000" pitchFamily="50" charset="-128"/>
+                <a:ea typeface="游ゴシック Light" panose="020B0300000000000000" pitchFamily="50" charset="-128"/>
+              </a:rPr>
+              <a:t>e</a:t>
+            </a:r>
+            <a:endParaRPr kumimoji="1" lang="ja-JP" altLang="en-US" dirty="0">
+              <a:solidFill>
+                <a:schemeClr val="tx1"/>
+              </a:solidFill>
+              <a:latin typeface="游ゴシック Light" panose="020B0300000000000000" pitchFamily="50" charset="-128"/>
+              <a:ea typeface="游ゴシック Light" panose="020B0300000000000000" pitchFamily="50" charset="-128"/>
+            </a:endParaRPr>
+          </a:p>
+        </p:txBody>
+      </p:sp>
+      <p:sp>
+        <p:nvSpPr>
+          <p:cNvPr id="40" name="楕円 39"/>
+          <p:cNvSpPr/>
+          <p:nvPr/>
+        </p:nvSpPr>
+        <p:spPr>
+          <a:xfrm>
+            <a:off x="6711988" y="2289174"/>
+            <a:ext cx="341376" cy="289880"/>
+          </a:xfrm>
+          <a:prstGeom prst="ellipse">
+            <a:avLst/>
+          </a:prstGeom>
+          <a:ln>
+            <a:solidFill>
+              <a:schemeClr val="tx1"/>
+            </a:solidFill>
+          </a:ln>
+        </p:spPr>
+        <p:style>
+          <a:lnRef idx="2">
+            <a:schemeClr val="dk1"/>
+          </a:lnRef>
+          <a:fillRef idx="1">
+            <a:schemeClr val="lt1"/>
+          </a:fillRef>
+          <a:effectRef idx="0">
+            <a:schemeClr val="dk1"/>
+          </a:effectRef>
+          <a:fontRef idx="minor">
+            <a:schemeClr val="dk1"/>
+          </a:fontRef>
+        </p:style>
+        <p:txBody>
+          <a:bodyPr rtlCol="0" anchor="ctr"/>
+          <a:lstStyle/>
+          <a:p>
+            <a:pPr algn="ctr"/>
+            <a:r>
+              <a:rPr kumimoji="1" lang="en-US" altLang="ja-JP" dirty="0" smtClean="0">
+                <a:solidFill>
+                  <a:schemeClr val="tx1"/>
+                </a:solidFill>
+                <a:latin typeface="游ゴシック Light" panose="020B0300000000000000" pitchFamily="50" charset="-128"/>
+                <a:ea typeface="游ゴシック Light" panose="020B0300000000000000" pitchFamily="50" charset="-128"/>
+              </a:rPr>
+              <a:t>e</a:t>
+            </a:r>
+            <a:endParaRPr kumimoji="1" lang="ja-JP" altLang="en-US" dirty="0">
+              <a:solidFill>
+                <a:schemeClr val="tx1"/>
+              </a:solidFill>
+              <a:latin typeface="游ゴシック Light" panose="020B0300000000000000" pitchFamily="50" charset="-128"/>
+              <a:ea typeface="游ゴシック Light" panose="020B0300000000000000" pitchFamily="50" charset="-128"/>
+            </a:endParaRPr>
+          </a:p>
+        </p:txBody>
+      </p:sp>
+      <p:sp>
+        <p:nvSpPr>
+          <p:cNvPr id="41" name="楕円 40"/>
+          <p:cNvSpPr/>
+          <p:nvPr/>
+        </p:nvSpPr>
+        <p:spPr>
+          <a:xfrm>
+            <a:off x="6711988" y="2826418"/>
+            <a:ext cx="341376" cy="289880"/>
+          </a:xfrm>
+          <a:prstGeom prst="ellipse">
+            <a:avLst/>
+          </a:prstGeom>
+          <a:ln>
+            <a:solidFill>
+              <a:schemeClr val="tx1"/>
+            </a:solidFill>
+          </a:ln>
+        </p:spPr>
+        <p:style>
+          <a:lnRef idx="2">
+            <a:schemeClr val="dk1"/>
+          </a:lnRef>
+          <a:fillRef idx="1">
+            <a:schemeClr val="lt1"/>
+          </a:fillRef>
+          <a:effectRef idx="0">
+            <a:schemeClr val="dk1"/>
+          </a:effectRef>
+          <a:fontRef idx="minor">
+            <a:schemeClr val="dk1"/>
+          </a:fontRef>
+        </p:style>
+        <p:txBody>
+          <a:bodyPr rtlCol="0" anchor="ctr"/>
+          <a:lstStyle/>
+          <a:p>
+            <a:pPr algn="ctr"/>
+            <a:r>
+              <a:rPr kumimoji="1" lang="en-US" altLang="ja-JP" dirty="0" smtClean="0">
+                <a:solidFill>
+                  <a:schemeClr val="tx1"/>
+                </a:solidFill>
+                <a:latin typeface="游ゴシック Light" panose="020B0300000000000000" pitchFamily="50" charset="-128"/>
+                <a:ea typeface="游ゴシック Light" panose="020B0300000000000000" pitchFamily="50" charset="-128"/>
+              </a:rPr>
+              <a:t>e</a:t>
+            </a:r>
+            <a:endParaRPr kumimoji="1" lang="ja-JP" altLang="en-US" dirty="0">
+              <a:solidFill>
+                <a:schemeClr val="tx1"/>
+              </a:solidFill>
+              <a:latin typeface="游ゴシック Light" panose="020B0300000000000000" pitchFamily="50" charset="-128"/>
+              <a:ea typeface="游ゴシック Light" panose="020B0300000000000000" pitchFamily="50" charset="-128"/>
+            </a:endParaRPr>
+          </a:p>
+        </p:txBody>
+      </p:sp>
+      <p:sp>
+        <p:nvSpPr>
+          <p:cNvPr id="42" name="楕円 41"/>
+          <p:cNvSpPr/>
+          <p:nvPr/>
+        </p:nvSpPr>
+        <p:spPr>
+          <a:xfrm>
+            <a:off x="6711988" y="3363662"/>
+            <a:ext cx="341376" cy="289880"/>
+          </a:xfrm>
+          <a:prstGeom prst="ellipse">
+            <a:avLst/>
+          </a:prstGeom>
+          <a:ln>
+            <a:solidFill>
+              <a:schemeClr val="tx1"/>
+            </a:solidFill>
+          </a:ln>
+        </p:spPr>
+        <p:style>
+          <a:lnRef idx="2">
+            <a:schemeClr val="dk1"/>
+          </a:lnRef>
+          <a:fillRef idx="1">
+            <a:schemeClr val="lt1"/>
+          </a:fillRef>
+          <a:effectRef idx="0">
+            <a:schemeClr val="dk1"/>
+          </a:effectRef>
+          <a:fontRef idx="minor">
+            <a:schemeClr val="dk1"/>
+          </a:fontRef>
+        </p:style>
+        <p:txBody>
+          <a:bodyPr rtlCol="0" anchor="ctr"/>
+          <a:lstStyle/>
+          <a:p>
+            <a:pPr algn="ctr"/>
+            <a:r>
+              <a:rPr kumimoji="1" lang="en-US" altLang="ja-JP" dirty="0" smtClean="0">
+                <a:solidFill>
+                  <a:schemeClr val="tx1"/>
+                </a:solidFill>
+                <a:latin typeface="游ゴシック Light" panose="020B0300000000000000" pitchFamily="50" charset="-128"/>
+                <a:ea typeface="游ゴシック Light" panose="020B0300000000000000" pitchFamily="50" charset="-128"/>
+              </a:rPr>
+              <a:t>e</a:t>
+            </a:r>
+            <a:endParaRPr kumimoji="1" lang="ja-JP" altLang="en-US" dirty="0">
+              <a:solidFill>
+                <a:schemeClr val="tx1"/>
+              </a:solidFill>
+              <a:latin typeface="游ゴシック Light" panose="020B0300000000000000" pitchFamily="50" charset="-128"/>
+              <a:ea typeface="游ゴシック Light" panose="020B0300000000000000" pitchFamily="50" charset="-128"/>
+            </a:endParaRPr>
+          </a:p>
+        </p:txBody>
+      </p:sp>
+      <p:sp>
+        <p:nvSpPr>
+          <p:cNvPr id="43" name="楕円 42"/>
+          <p:cNvSpPr/>
+          <p:nvPr/>
+        </p:nvSpPr>
+        <p:spPr>
+          <a:xfrm>
+            <a:off x="6711988" y="3900906"/>
+            <a:ext cx="341376" cy="289880"/>
+          </a:xfrm>
+          <a:prstGeom prst="ellipse">
+            <a:avLst/>
+          </a:prstGeom>
+          <a:ln>
+            <a:solidFill>
+              <a:schemeClr val="tx1"/>
+            </a:solidFill>
+          </a:ln>
+        </p:spPr>
+        <p:style>
+          <a:lnRef idx="2">
+            <a:schemeClr val="dk1"/>
+          </a:lnRef>
+          <a:fillRef idx="1">
+            <a:schemeClr val="lt1"/>
+          </a:fillRef>
+          <a:effectRef idx="0">
+            <a:schemeClr val="dk1"/>
+          </a:effectRef>
+          <a:fontRef idx="minor">
+            <a:schemeClr val="dk1"/>
+          </a:fontRef>
+        </p:style>
+        <p:txBody>
+          <a:bodyPr rtlCol="0" anchor="ctr"/>
+          <a:lstStyle/>
+          <a:p>
+            <a:pPr algn="ctr"/>
+            <a:r>
+              <a:rPr kumimoji="1" lang="en-US" altLang="ja-JP" dirty="0" smtClean="0">
+                <a:solidFill>
+                  <a:schemeClr val="tx1"/>
+                </a:solidFill>
+                <a:latin typeface="游ゴシック Light" panose="020B0300000000000000" pitchFamily="50" charset="-128"/>
+                <a:ea typeface="游ゴシック Light" panose="020B0300000000000000" pitchFamily="50" charset="-128"/>
+              </a:rPr>
+              <a:t>e</a:t>
+            </a:r>
+            <a:endParaRPr kumimoji="1" lang="ja-JP" altLang="en-US" dirty="0">
+              <a:solidFill>
+                <a:schemeClr val="tx1"/>
+              </a:solidFill>
+              <a:latin typeface="游ゴシック Light" panose="020B0300000000000000" pitchFamily="50" charset="-128"/>
+              <a:ea typeface="游ゴシック Light" panose="020B0300000000000000" pitchFamily="50" charset="-128"/>
+            </a:endParaRPr>
+          </a:p>
+        </p:txBody>
+      </p:sp>
+      <p:sp>
+        <p:nvSpPr>
+          <p:cNvPr id="44" name="楕円 43"/>
+          <p:cNvSpPr/>
+          <p:nvPr/>
+        </p:nvSpPr>
+        <p:spPr>
+          <a:xfrm>
+            <a:off x="6711988" y="4438150"/>
+            <a:ext cx="341376" cy="289880"/>
+          </a:xfrm>
+          <a:prstGeom prst="ellipse">
+            <a:avLst/>
+          </a:prstGeom>
+          <a:ln>
+            <a:solidFill>
+              <a:schemeClr val="tx1"/>
+            </a:solidFill>
+          </a:ln>
+        </p:spPr>
+        <p:style>
+          <a:lnRef idx="2">
+            <a:schemeClr val="dk1"/>
+          </a:lnRef>
+          <a:fillRef idx="1">
+            <a:schemeClr val="lt1"/>
+          </a:fillRef>
+          <a:effectRef idx="0">
+            <a:schemeClr val="dk1"/>
+          </a:effectRef>
+          <a:fontRef idx="minor">
+            <a:schemeClr val="dk1"/>
+          </a:fontRef>
+        </p:style>
+        <p:txBody>
+          <a:bodyPr rtlCol="0" anchor="ctr"/>
+          <a:lstStyle/>
+          <a:p>
+            <a:pPr algn="ctr"/>
+            <a:r>
+              <a:rPr kumimoji="1" lang="en-US" altLang="ja-JP" dirty="0" smtClean="0">
+                <a:solidFill>
+                  <a:schemeClr val="tx1"/>
+                </a:solidFill>
+                <a:latin typeface="游ゴシック Light" panose="020B0300000000000000" pitchFamily="50" charset="-128"/>
+                <a:ea typeface="游ゴシック Light" panose="020B0300000000000000" pitchFamily="50" charset="-128"/>
+              </a:rPr>
+              <a:t>e</a:t>
+            </a:r>
+            <a:endParaRPr kumimoji="1" lang="ja-JP" altLang="en-US" dirty="0">
+              <a:solidFill>
+                <a:schemeClr val="tx1"/>
+              </a:solidFill>
+              <a:latin typeface="游ゴシック Light" panose="020B0300000000000000" pitchFamily="50" charset="-128"/>
+              <a:ea typeface="游ゴシック Light" panose="020B0300000000000000" pitchFamily="50" charset="-128"/>
+            </a:endParaRPr>
+          </a:p>
+        </p:txBody>
+      </p:sp>
+      <p:sp>
+        <p:nvSpPr>
+          <p:cNvPr id="45" name="楕円 44"/>
+          <p:cNvSpPr/>
+          <p:nvPr/>
+        </p:nvSpPr>
+        <p:spPr>
+          <a:xfrm>
+            <a:off x="6711988" y="4975394"/>
+            <a:ext cx="341376" cy="289880"/>
+          </a:xfrm>
+          <a:prstGeom prst="ellipse">
+            <a:avLst/>
+          </a:prstGeom>
+          <a:ln>
+            <a:solidFill>
+              <a:schemeClr val="tx1"/>
+            </a:solidFill>
+          </a:ln>
+        </p:spPr>
+        <p:style>
+          <a:lnRef idx="2">
+            <a:schemeClr val="dk1"/>
+          </a:lnRef>
+          <a:fillRef idx="1">
+            <a:schemeClr val="lt1"/>
+          </a:fillRef>
+          <a:effectRef idx="0">
+            <a:schemeClr val="dk1"/>
+          </a:effectRef>
+          <a:fontRef idx="minor">
+            <a:schemeClr val="dk1"/>
+          </a:fontRef>
+        </p:style>
+        <p:txBody>
+          <a:bodyPr rtlCol="0" anchor="ctr"/>
+          <a:lstStyle/>
+          <a:p>
+            <a:pPr algn="ctr"/>
+            <a:r>
+              <a:rPr kumimoji="1" lang="en-US" altLang="ja-JP" dirty="0" smtClean="0">
+                <a:solidFill>
+                  <a:schemeClr val="tx1"/>
+                </a:solidFill>
+                <a:latin typeface="游ゴシック Light" panose="020B0300000000000000" pitchFamily="50" charset="-128"/>
+                <a:ea typeface="游ゴシック Light" panose="020B0300000000000000" pitchFamily="50" charset="-128"/>
+              </a:rPr>
+              <a:t>e</a:t>
+            </a:r>
+            <a:endParaRPr kumimoji="1" lang="ja-JP" altLang="en-US" dirty="0">
+              <a:solidFill>
+                <a:schemeClr val="tx1"/>
+              </a:solidFill>
+              <a:latin typeface="游ゴシック Light" panose="020B0300000000000000" pitchFamily="50" charset="-128"/>
+              <a:ea typeface="游ゴシック Light" panose="020B0300000000000000" pitchFamily="50" charset="-128"/>
+            </a:endParaRPr>
+          </a:p>
+        </p:txBody>
+      </p:sp>
+      <p:sp>
+        <p:nvSpPr>
+          <p:cNvPr id="46" name="楕円 45"/>
+          <p:cNvSpPr/>
+          <p:nvPr/>
+        </p:nvSpPr>
+        <p:spPr>
+          <a:xfrm>
+            <a:off x="6711988" y="5512637"/>
+            <a:ext cx="341376" cy="289880"/>
+          </a:xfrm>
+          <a:prstGeom prst="ellipse">
+            <a:avLst/>
+          </a:prstGeom>
+          <a:ln>
+            <a:solidFill>
+              <a:schemeClr val="tx1"/>
+            </a:solidFill>
+          </a:ln>
+        </p:spPr>
+        <p:style>
+          <a:lnRef idx="2">
+            <a:schemeClr val="dk1"/>
+          </a:lnRef>
+          <a:fillRef idx="1">
+            <a:schemeClr val="lt1"/>
+          </a:fillRef>
+          <a:effectRef idx="0">
+            <a:schemeClr val="dk1"/>
+          </a:effectRef>
+          <a:fontRef idx="minor">
+            <a:schemeClr val="dk1"/>
+          </a:fontRef>
+        </p:style>
+        <p:txBody>
+          <a:bodyPr rtlCol="0" anchor="ctr"/>
+          <a:lstStyle/>
+          <a:p>
+            <a:pPr algn="ctr"/>
+            <a:r>
+              <a:rPr kumimoji="1" lang="en-US" altLang="ja-JP" dirty="0" smtClean="0">
+                <a:solidFill>
+                  <a:schemeClr val="tx1"/>
+                </a:solidFill>
+                <a:latin typeface="游ゴシック Light" panose="020B0300000000000000" pitchFamily="50" charset="-128"/>
+                <a:ea typeface="游ゴシック Light" panose="020B0300000000000000" pitchFamily="50" charset="-128"/>
+              </a:rPr>
+              <a:t>e</a:t>
+            </a:r>
+            <a:endParaRPr kumimoji="1" lang="ja-JP" altLang="en-US" dirty="0">
+              <a:solidFill>
+                <a:schemeClr val="tx1"/>
+              </a:solidFill>
+              <a:latin typeface="游ゴシック Light" panose="020B0300000000000000" pitchFamily="50" charset="-128"/>
+              <a:ea typeface="游ゴシック Light" panose="020B0300000000000000" pitchFamily="50" charset="-128"/>
+            </a:endParaRPr>
+          </a:p>
+        </p:txBody>
+      </p:sp>
+      <p:cxnSp>
+        <p:nvCxnSpPr>
+          <p:cNvPr id="48" name="直線矢印コネクタ 47"/>
+          <p:cNvCxnSpPr>
+            <a:stCxn id="38" idx="2"/>
+            <a:endCxn id="7" idx="3"/>
+          </p:cNvCxnSpPr>
+          <p:nvPr/>
+        </p:nvCxnSpPr>
+        <p:spPr>
+          <a:xfrm flipH="1">
+            <a:off x="5968856" y="1359626"/>
+            <a:ext cx="743132" cy="0"/>
+          </a:xfrm>
+          <a:prstGeom prst="straightConnector1">
+            <a:avLst/>
+          </a:prstGeom>
+          <a:ln>
+            <a:solidFill>
+              <a:schemeClr val="tx1"/>
+            </a:solidFill>
+            <a:tailEnd type="triangle"/>
+          </a:ln>
+        </p:spPr>
+        <p:style>
+          <a:lnRef idx="1">
+            <a:schemeClr val="accent1"/>
+          </a:lnRef>
+          <a:fillRef idx="0">
+            <a:schemeClr val="accent1"/>
+          </a:fillRef>
+          <a:effectRef idx="0">
+            <a:schemeClr val="accent1"/>
+          </a:effectRef>
+          <a:fontRef idx="minor">
+            <a:schemeClr val="tx1"/>
+          </a:fontRef>
+        </p:style>
+      </p:cxnSp>
+      <p:cxnSp>
+        <p:nvCxnSpPr>
+          <p:cNvPr id="50" name="直線矢印コネクタ 49"/>
+          <p:cNvCxnSpPr>
+            <a:stCxn id="39" idx="2"/>
+            <a:endCxn id="8" idx="3"/>
+          </p:cNvCxnSpPr>
+          <p:nvPr/>
+        </p:nvCxnSpPr>
+        <p:spPr>
+          <a:xfrm flipH="1">
+            <a:off x="5968856" y="1896870"/>
+            <a:ext cx="743132" cy="0"/>
+          </a:xfrm>
+          <a:prstGeom prst="straightConnector1">
+            <a:avLst/>
+          </a:prstGeom>
+          <a:ln>
+            <a:solidFill>
+              <a:schemeClr val="tx1"/>
+            </a:solidFill>
+            <a:tailEnd type="triangle"/>
+          </a:ln>
+        </p:spPr>
+        <p:style>
+          <a:lnRef idx="1">
+            <a:schemeClr val="accent1"/>
+          </a:lnRef>
+          <a:fillRef idx="0">
+            <a:schemeClr val="accent1"/>
+          </a:fillRef>
+          <a:effectRef idx="0">
+            <a:schemeClr val="accent1"/>
+          </a:effectRef>
+          <a:fontRef idx="minor">
+            <a:schemeClr val="tx1"/>
+          </a:fontRef>
+        </p:style>
+      </p:cxnSp>
+      <p:cxnSp>
+        <p:nvCxnSpPr>
+          <p:cNvPr id="52" name="直線矢印コネクタ 51"/>
+          <p:cNvCxnSpPr>
+            <a:stCxn id="40" idx="2"/>
+            <a:endCxn id="9" idx="3"/>
+          </p:cNvCxnSpPr>
+          <p:nvPr/>
+        </p:nvCxnSpPr>
+        <p:spPr>
+          <a:xfrm flipH="1">
+            <a:off x="5968856" y="2434114"/>
+            <a:ext cx="743132" cy="0"/>
+          </a:xfrm>
+          <a:prstGeom prst="straightConnector1">
+            <a:avLst/>
+          </a:prstGeom>
+          <a:ln>
+            <a:solidFill>
+              <a:schemeClr val="tx1"/>
+            </a:solidFill>
+            <a:tailEnd type="triangle"/>
+          </a:ln>
+        </p:spPr>
+        <p:style>
+          <a:lnRef idx="1">
+            <a:schemeClr val="accent1"/>
+          </a:lnRef>
+          <a:fillRef idx="0">
+            <a:schemeClr val="accent1"/>
+          </a:fillRef>
+          <a:effectRef idx="0">
+            <a:schemeClr val="accent1"/>
+          </a:effectRef>
+          <a:fontRef idx="minor">
+            <a:schemeClr val="tx1"/>
+          </a:fontRef>
+        </p:style>
+      </p:cxnSp>
+      <p:cxnSp>
+        <p:nvCxnSpPr>
+          <p:cNvPr id="54" name="直線矢印コネクタ 53"/>
+          <p:cNvCxnSpPr>
+            <a:stCxn id="41" idx="2"/>
+            <a:endCxn id="10" idx="3"/>
+          </p:cNvCxnSpPr>
+          <p:nvPr/>
+        </p:nvCxnSpPr>
+        <p:spPr>
+          <a:xfrm flipH="1">
+            <a:off x="5968856" y="2971358"/>
+            <a:ext cx="743132" cy="0"/>
+          </a:xfrm>
+          <a:prstGeom prst="straightConnector1">
+            <a:avLst/>
+          </a:prstGeom>
+          <a:ln>
+            <a:solidFill>
+              <a:schemeClr val="tx1"/>
+            </a:solidFill>
+            <a:tailEnd type="triangle"/>
+          </a:ln>
+        </p:spPr>
+        <p:style>
+          <a:lnRef idx="1">
+            <a:schemeClr val="accent1"/>
+          </a:lnRef>
+          <a:fillRef idx="0">
+            <a:schemeClr val="accent1"/>
+          </a:fillRef>
+          <a:effectRef idx="0">
+            <a:schemeClr val="accent1"/>
+          </a:effectRef>
+          <a:fontRef idx="minor">
+            <a:schemeClr val="tx1"/>
+          </a:fontRef>
+        </p:style>
+      </p:cxnSp>
+      <p:cxnSp>
+        <p:nvCxnSpPr>
+          <p:cNvPr id="56" name="直線矢印コネクタ 55"/>
+          <p:cNvCxnSpPr>
+            <a:stCxn id="42" idx="2"/>
+            <a:endCxn id="11" idx="3"/>
+          </p:cNvCxnSpPr>
+          <p:nvPr/>
+        </p:nvCxnSpPr>
+        <p:spPr>
+          <a:xfrm flipH="1">
+            <a:off x="5968856" y="3508602"/>
+            <a:ext cx="743132" cy="0"/>
+          </a:xfrm>
+          <a:prstGeom prst="straightConnector1">
+            <a:avLst/>
+          </a:prstGeom>
+          <a:ln>
+            <a:solidFill>
+              <a:schemeClr val="tx1"/>
+            </a:solidFill>
+            <a:tailEnd type="triangle"/>
+          </a:ln>
+        </p:spPr>
+        <p:style>
+          <a:lnRef idx="1">
+            <a:schemeClr val="accent1"/>
+          </a:lnRef>
+          <a:fillRef idx="0">
+            <a:schemeClr val="accent1"/>
+          </a:fillRef>
+          <a:effectRef idx="0">
+            <a:schemeClr val="accent1"/>
+          </a:effectRef>
+          <a:fontRef idx="minor">
+            <a:schemeClr val="tx1"/>
+          </a:fontRef>
+        </p:style>
+      </p:cxnSp>
+      <p:cxnSp>
+        <p:nvCxnSpPr>
+          <p:cNvPr id="58" name="直線矢印コネクタ 57"/>
+          <p:cNvCxnSpPr>
+            <a:stCxn id="43" idx="2"/>
+            <a:endCxn id="12" idx="3"/>
+          </p:cNvCxnSpPr>
+          <p:nvPr/>
+        </p:nvCxnSpPr>
+        <p:spPr>
+          <a:xfrm flipH="1">
+            <a:off x="5968856" y="4045846"/>
+            <a:ext cx="743132" cy="0"/>
+          </a:xfrm>
+          <a:prstGeom prst="straightConnector1">
+            <a:avLst/>
+          </a:prstGeom>
+          <a:ln>
+            <a:solidFill>
+              <a:schemeClr val="tx1"/>
+            </a:solidFill>
+            <a:tailEnd type="triangle"/>
+          </a:ln>
+        </p:spPr>
+        <p:style>
+          <a:lnRef idx="1">
+            <a:schemeClr val="accent1"/>
+          </a:lnRef>
+          <a:fillRef idx="0">
+            <a:schemeClr val="accent1"/>
+          </a:fillRef>
+          <a:effectRef idx="0">
+            <a:schemeClr val="accent1"/>
+          </a:effectRef>
+          <a:fontRef idx="minor">
+            <a:schemeClr val="tx1"/>
+          </a:fontRef>
+        </p:style>
+      </p:cxnSp>
+      <p:cxnSp>
+        <p:nvCxnSpPr>
+          <p:cNvPr id="60" name="直線矢印コネクタ 59"/>
+          <p:cNvCxnSpPr>
+            <a:stCxn id="44" idx="2"/>
+            <a:endCxn id="13" idx="3"/>
+          </p:cNvCxnSpPr>
+          <p:nvPr/>
+        </p:nvCxnSpPr>
+        <p:spPr>
+          <a:xfrm flipH="1">
+            <a:off x="5968856" y="4583090"/>
+            <a:ext cx="743132" cy="0"/>
+          </a:xfrm>
+          <a:prstGeom prst="straightConnector1">
+            <a:avLst/>
+          </a:prstGeom>
+          <a:ln>
+            <a:solidFill>
+              <a:schemeClr val="tx1"/>
+            </a:solidFill>
+            <a:tailEnd type="triangle"/>
+          </a:ln>
+        </p:spPr>
+        <p:style>
+          <a:lnRef idx="1">
+            <a:schemeClr val="accent1"/>
+          </a:lnRef>
+          <a:fillRef idx="0">
+            <a:schemeClr val="accent1"/>
+          </a:fillRef>
+          <a:effectRef idx="0">
+            <a:schemeClr val="accent1"/>
+          </a:effectRef>
+          <a:fontRef idx="minor">
+            <a:schemeClr val="tx1"/>
+          </a:fontRef>
+        </p:style>
+      </p:cxnSp>
+      <p:cxnSp>
+        <p:nvCxnSpPr>
+          <p:cNvPr id="62" name="直線矢印コネクタ 61"/>
+          <p:cNvCxnSpPr>
+            <a:stCxn id="45" idx="2"/>
+            <a:endCxn id="14" idx="3"/>
+          </p:cNvCxnSpPr>
+          <p:nvPr/>
+        </p:nvCxnSpPr>
+        <p:spPr>
+          <a:xfrm flipH="1">
+            <a:off x="5968856" y="5120334"/>
+            <a:ext cx="743132" cy="0"/>
+          </a:xfrm>
+          <a:prstGeom prst="straightConnector1">
+            <a:avLst/>
+          </a:prstGeom>
+          <a:ln>
+            <a:solidFill>
+              <a:schemeClr val="tx1"/>
+            </a:solidFill>
+            <a:tailEnd type="triangle"/>
+          </a:ln>
+        </p:spPr>
+        <p:style>
+          <a:lnRef idx="1">
+            <a:schemeClr val="accent1"/>
+          </a:lnRef>
+          <a:fillRef idx="0">
+            <a:schemeClr val="accent1"/>
+          </a:fillRef>
+          <a:effectRef idx="0">
+            <a:schemeClr val="accent1"/>
+          </a:effectRef>
+          <a:fontRef idx="minor">
+            <a:schemeClr val="tx1"/>
+          </a:fontRef>
+        </p:style>
+      </p:cxnSp>
+      <p:cxnSp>
+        <p:nvCxnSpPr>
+          <p:cNvPr id="64" name="直線矢印コネクタ 63"/>
+          <p:cNvCxnSpPr>
+            <a:stCxn id="46" idx="2"/>
+            <a:endCxn id="15" idx="3"/>
+          </p:cNvCxnSpPr>
+          <p:nvPr/>
+        </p:nvCxnSpPr>
+        <p:spPr>
+          <a:xfrm flipH="1">
+            <a:off x="5968856" y="5657577"/>
+            <a:ext cx="743132" cy="0"/>
+          </a:xfrm>
+          <a:prstGeom prst="straightConnector1">
+            <a:avLst/>
+          </a:prstGeom>
+          <a:ln>
+            <a:solidFill>
+              <a:schemeClr val="tx1"/>
+            </a:solidFill>
+            <a:tailEnd type="triangle"/>
+          </a:ln>
+        </p:spPr>
+        <p:style>
+          <a:lnRef idx="1">
+            <a:schemeClr val="accent1"/>
+          </a:lnRef>
+          <a:fillRef idx="0">
+            <a:schemeClr val="accent1"/>
+          </a:fillRef>
+          <a:effectRef idx="0">
+            <a:schemeClr val="accent1"/>
+          </a:effectRef>
+          <a:fontRef idx="minor">
+            <a:schemeClr val="tx1"/>
+          </a:fontRef>
+        </p:style>
+      </p:cxnSp>
+    </p:spTree>
+    <p:extLst>
+      <p:ext uri="{BB962C8B-B14F-4D97-AF65-F5344CB8AC3E}">
+        <p14:creationId xmlns:p14="http://schemas.microsoft.com/office/powerpoint/2010/main" val="1211223704"/>
       </p:ext>
     </p:extLst>
   </p:cSld>
@@ -10648,6 +12688,10 @@
               <a:rPr kumimoji="1" lang="ja-JP" altLang="en-US" sz="1400" dirty="0"/>
               <a:t>一要因分散分析</a:t>
             </a:r>
+            <a:r>
+              <a:rPr kumimoji="1" lang="en-US" altLang="ja-JP" sz="1400" dirty="0"/>
+              <a:t/>
+            </a:r>
             <a:br>
               <a:rPr kumimoji="1" lang="en-US" altLang="ja-JP" sz="1400" dirty="0"/>
             </a:br>
@@ -10666,6 +12710,10 @@
             <a:r>
               <a:rPr kumimoji="1" lang="ja-JP" altLang="en-US" sz="1400" dirty="0"/>
               <a:t>二元配置分散分析</a:t>
+            </a:r>
+            <a:r>
+              <a:rPr kumimoji="1" lang="en-US" altLang="ja-JP" sz="1400" dirty="0"/>
+              <a:t/>
             </a:r>
             <a:br>
               <a:rPr kumimoji="1" lang="en-US" altLang="ja-JP" sz="1400" dirty="0"/>
@@ -10710,6 +12758,10 @@
               <a:rPr kumimoji="1" lang="ja-JP" altLang="en-US" sz="1400" dirty="0"/>
               <a:t>二要因分散分析</a:t>
             </a:r>
+            <a:r>
+              <a:rPr kumimoji="1" lang="en-US" altLang="ja-JP" sz="1400" dirty="0"/>
+              <a:t/>
+            </a:r>
             <a:br>
               <a:rPr kumimoji="1" lang="en-US" altLang="ja-JP" sz="1400" dirty="0"/>
             </a:br>
@@ -10728,6 +12780,10 @@
             <a:r>
               <a:rPr kumimoji="1" lang="ja-JP" altLang="en-US" sz="1400" dirty="0"/>
               <a:t>二元配置分散分析</a:t>
+            </a:r>
+            <a:r>
+              <a:rPr kumimoji="1" lang="en-US" altLang="ja-JP" sz="1400" dirty="0"/>
+              <a:t/>
             </a:r>
             <a:br>
               <a:rPr kumimoji="1" lang="en-US" altLang="ja-JP" sz="1400" dirty="0"/>
@@ -10906,6 +12962,10 @@
               <a:rPr kumimoji="1" lang="ja-JP" altLang="en-US" sz="1400" dirty="0"/>
               <a:t>二要因分散分析</a:t>
             </a:r>
+            <a:r>
+              <a:rPr kumimoji="1" lang="en-US" altLang="ja-JP" sz="1400" dirty="0"/>
+              <a:t/>
+            </a:r>
             <a:br>
               <a:rPr kumimoji="1" lang="en-US" altLang="ja-JP" sz="1400" dirty="0"/>
             </a:br>
@@ -10924,6 +12984,10 @@
             <a:r>
               <a:rPr kumimoji="1" lang="ja-JP" altLang="en-US" sz="1400" dirty="0"/>
               <a:t>二元配置分散分析</a:t>
+            </a:r>
+            <a:r>
+              <a:rPr kumimoji="1" lang="en-US" altLang="ja-JP" sz="1400" dirty="0"/>
+              <a:t/>
             </a:r>
             <a:br>
               <a:rPr kumimoji="1" lang="en-US" altLang="ja-JP" sz="1400" dirty="0"/>
@@ -11150,6 +13214,10 @@
               <a:rPr kumimoji="1" lang="ja-JP" altLang="en-US" sz="1400" dirty="0"/>
               <a:t>一要因分散分析</a:t>
             </a:r>
+            <a:r>
+              <a:rPr kumimoji="1" lang="en-US" altLang="ja-JP" sz="1400" dirty="0"/>
+              <a:t/>
+            </a:r>
             <a:br>
               <a:rPr kumimoji="1" lang="en-US" altLang="ja-JP" sz="1400" dirty="0"/>
             </a:br>
@@ -11168,6 +13236,10 @@
             <a:r>
               <a:rPr kumimoji="1" lang="ja-JP" altLang="en-US" sz="1400" dirty="0"/>
               <a:t>二元配置分散分析</a:t>
+            </a:r>
+            <a:r>
+              <a:rPr kumimoji="1" lang="en-US" altLang="ja-JP" sz="1400" dirty="0"/>
+              <a:t/>
             </a:r>
             <a:br>
               <a:rPr kumimoji="1" lang="en-US" altLang="ja-JP" sz="1400" dirty="0"/>
@@ -11212,6 +13284,10 @@
               <a:rPr kumimoji="1" lang="ja-JP" altLang="en-US" sz="1400" dirty="0"/>
               <a:t>二要因分散分析</a:t>
             </a:r>
+            <a:r>
+              <a:rPr kumimoji="1" lang="en-US" altLang="ja-JP" sz="1400" dirty="0"/>
+              <a:t/>
+            </a:r>
             <a:br>
               <a:rPr kumimoji="1" lang="en-US" altLang="ja-JP" sz="1400" dirty="0"/>
             </a:br>
@@ -11230,6 +13306,10 @@
             <a:r>
               <a:rPr kumimoji="1" lang="ja-JP" altLang="en-US" sz="1400" dirty="0"/>
               <a:t>二元配置分散分析</a:t>
+            </a:r>
+            <a:r>
+              <a:rPr kumimoji="1" lang="en-US" altLang="ja-JP" sz="1400" dirty="0"/>
+              <a:t/>
             </a:r>
             <a:br>
               <a:rPr kumimoji="1" lang="en-US" altLang="ja-JP" sz="1400" dirty="0"/>
@@ -11274,6 +13354,10 @@
               <a:rPr kumimoji="1" lang="ja-JP" altLang="en-US" sz="1400" dirty="0"/>
               <a:t>二要因分散分析</a:t>
             </a:r>
+            <a:r>
+              <a:rPr kumimoji="1" lang="en-US" altLang="ja-JP" sz="1400" dirty="0"/>
+              <a:t/>
+            </a:r>
             <a:br>
               <a:rPr kumimoji="1" lang="en-US" altLang="ja-JP" sz="1400" dirty="0"/>
             </a:br>
@@ -11292,6 +13376,10 @@
             <a:r>
               <a:rPr kumimoji="1" lang="ja-JP" altLang="en-US" sz="1400" dirty="0"/>
               <a:t>二元配置分散分析</a:t>
+            </a:r>
+            <a:r>
+              <a:rPr kumimoji="1" lang="en-US" altLang="ja-JP" sz="1400" dirty="0"/>
+              <a:t/>
             </a:r>
             <a:br>
               <a:rPr kumimoji="1" lang="en-US" altLang="ja-JP" sz="1400" dirty="0"/>
@@ -13322,6 +15410,10 @@
               <a:rPr kumimoji="1" lang="ja-JP" altLang="en-US" dirty="0"/>
               <a:t>水準：</a:t>
             </a:r>
+            <a:r>
+              <a:rPr kumimoji="1" lang="en-US" altLang="ja-JP" dirty="0"/>
+              <a:t/>
+            </a:r>
             <a:br>
               <a:rPr kumimoji="1" lang="en-US" altLang="ja-JP" dirty="0"/>
             </a:br>
@@ -13336,6 +15428,10 @@
             <a:r>
               <a:rPr kumimoji="1" lang="ja-JP" altLang="en-US" dirty="0"/>
               <a:t>石川</a:t>
+            </a:r>
+            <a:r>
+              <a:rPr kumimoji="1" lang="en-US" altLang="ja-JP" dirty="0"/>
+              <a:t/>
             </a:r>
             <a:br>
               <a:rPr kumimoji="1" lang="en-US" altLang="ja-JP" dirty="0"/>

--- a/Img/AnovaModeling.pptx
+++ b/Img/AnovaModeling.pptx
@@ -443,7 +443,7 @@
           <a:p>
             <a:fld id="{74503653-7382-4EF5-850F-AEDF0B3BD356}" type="datetimeFigureOut">
               <a:rPr kumimoji="1" lang="ja-JP" altLang="en-US" smtClean="0"/>
-              <a:t>2025/1/18</a:t>
+              <a:t>2025/1/20</a:t>
             </a:fld>
             <a:endParaRPr kumimoji="1" lang="ja-JP" altLang="en-US"/>
           </a:p>
@@ -968,7 +968,7 @@
           <a:p>
             <a:fld id="{E3020441-CB21-445C-817D-199401EC5197}" type="datetimeFigureOut">
               <a:rPr kumimoji="1" lang="ja-JP" altLang="en-US" smtClean="0"/>
-              <a:t>2025/1/18</a:t>
+              <a:t>2025/1/20</a:t>
             </a:fld>
             <a:endParaRPr kumimoji="1" lang="ja-JP" altLang="en-US"/>
           </a:p>
@@ -1170,7 +1170,7 @@
           <a:p>
             <a:fld id="{E3020441-CB21-445C-817D-199401EC5197}" type="datetimeFigureOut">
               <a:rPr kumimoji="1" lang="ja-JP" altLang="en-US" smtClean="0"/>
-              <a:t>2025/1/18</a:t>
+              <a:t>2025/1/20</a:t>
             </a:fld>
             <a:endParaRPr kumimoji="1" lang="ja-JP" altLang="en-US"/>
           </a:p>
@@ -1382,7 +1382,7 @@
           <a:p>
             <a:fld id="{E3020441-CB21-445C-817D-199401EC5197}" type="datetimeFigureOut">
               <a:rPr kumimoji="1" lang="ja-JP" altLang="en-US" smtClean="0"/>
-              <a:t>2025/1/18</a:t>
+              <a:t>2025/1/20</a:t>
             </a:fld>
             <a:endParaRPr kumimoji="1" lang="ja-JP" altLang="en-US"/>
           </a:p>
@@ -1584,7 +1584,7 @@
           <a:p>
             <a:fld id="{E3020441-CB21-445C-817D-199401EC5197}" type="datetimeFigureOut">
               <a:rPr kumimoji="1" lang="ja-JP" altLang="en-US" smtClean="0"/>
-              <a:t>2025/1/18</a:t>
+              <a:t>2025/1/20</a:t>
             </a:fld>
             <a:endParaRPr kumimoji="1" lang="ja-JP" altLang="en-US"/>
           </a:p>
@@ -1835,7 +1835,7 @@
           <a:p>
             <a:fld id="{E3020441-CB21-445C-817D-199401EC5197}" type="datetimeFigureOut">
               <a:rPr kumimoji="1" lang="ja-JP" altLang="en-US" smtClean="0"/>
-              <a:t>2025/1/18</a:t>
+              <a:t>2025/1/20</a:t>
             </a:fld>
             <a:endParaRPr kumimoji="1" lang="ja-JP" altLang="en-US"/>
           </a:p>
@@ -2131,7 +2131,7 @@
           <a:p>
             <a:fld id="{E3020441-CB21-445C-817D-199401EC5197}" type="datetimeFigureOut">
               <a:rPr kumimoji="1" lang="ja-JP" altLang="en-US" smtClean="0"/>
-              <a:t>2025/1/18</a:t>
+              <a:t>2025/1/20</a:t>
             </a:fld>
             <a:endParaRPr kumimoji="1" lang="ja-JP" altLang="en-US"/>
           </a:p>
@@ -2542,7 +2542,7 @@
           <a:p>
             <a:fld id="{E3020441-CB21-445C-817D-199401EC5197}" type="datetimeFigureOut">
               <a:rPr kumimoji="1" lang="ja-JP" altLang="en-US" smtClean="0"/>
-              <a:t>2025/1/18</a:t>
+              <a:t>2025/1/20</a:t>
             </a:fld>
             <a:endParaRPr kumimoji="1" lang="ja-JP" altLang="en-US"/>
           </a:p>
@@ -2660,7 +2660,7 @@
           <a:p>
             <a:fld id="{E3020441-CB21-445C-817D-199401EC5197}" type="datetimeFigureOut">
               <a:rPr kumimoji="1" lang="ja-JP" altLang="en-US" smtClean="0"/>
-              <a:t>2025/1/18</a:t>
+              <a:t>2025/1/20</a:t>
             </a:fld>
             <a:endParaRPr kumimoji="1" lang="ja-JP" altLang="en-US"/>
           </a:p>
@@ -2778,7 +2778,7 @@
           <a:p>
             <a:fld id="{E3020441-CB21-445C-817D-199401EC5197}" type="datetimeFigureOut">
               <a:rPr kumimoji="1" lang="ja-JP" altLang="en-US" smtClean="0"/>
-              <a:t>2025/1/18</a:t>
+              <a:t>2025/1/20</a:t>
             </a:fld>
             <a:endParaRPr kumimoji="1" lang="ja-JP" altLang="en-US"/>
           </a:p>
@@ -3094,7 +3094,7 @@
           <a:p>
             <a:fld id="{E3020441-CB21-445C-817D-199401EC5197}" type="datetimeFigureOut">
               <a:rPr kumimoji="1" lang="ja-JP" altLang="en-US" smtClean="0"/>
-              <a:t>2025/1/18</a:t>
+              <a:t>2025/1/20</a:t>
             </a:fld>
             <a:endParaRPr kumimoji="1" lang="ja-JP" altLang="en-US"/>
           </a:p>
@@ -3358,7 +3358,7 @@
           <a:p>
             <a:fld id="{E3020441-CB21-445C-817D-199401EC5197}" type="datetimeFigureOut">
               <a:rPr kumimoji="1" lang="ja-JP" altLang="en-US" smtClean="0"/>
-              <a:t>2025/1/18</a:t>
+              <a:t>2025/1/20</a:t>
             </a:fld>
             <a:endParaRPr kumimoji="1" lang="ja-JP" altLang="en-US"/>
           </a:p>
@@ -3604,7 +3604,7 @@
           <a:p>
             <a:fld id="{E3020441-CB21-445C-817D-199401EC5197}" type="datetimeFigureOut">
               <a:rPr kumimoji="1" lang="ja-JP" altLang="en-US" smtClean="0"/>
-              <a:t>2025/1/18</a:t>
+              <a:t>2025/1/20</a:t>
             </a:fld>
             <a:endParaRPr kumimoji="1" lang="ja-JP" altLang="en-US"/>
           </a:p>
@@ -5469,10 +5469,6 @@
               <a:rPr kumimoji="1" lang="ja-JP" altLang="en-US" dirty="0"/>
               <a:t>：</a:t>
             </a:r>
-            <a:r>
-              <a:rPr kumimoji="1" lang="en-US" altLang="ja-JP" dirty="0"/>
-              <a:t/>
-            </a:r>
             <a:br>
               <a:rPr kumimoji="1" lang="en-US" altLang="ja-JP" dirty="0"/>
             </a:br>
@@ -5601,10 +5597,6 @@
             <a:r>
               <a:rPr kumimoji="1" lang="ja-JP" altLang="en-US" dirty="0"/>
               <a:t>：</a:t>
-            </a:r>
-            <a:r>
-              <a:rPr kumimoji="1" lang="en-US" altLang="ja-JP" dirty="0"/>
-              <a:t/>
             </a:r>
             <a:br>
               <a:rPr kumimoji="1" lang="en-US" altLang="ja-JP" dirty="0"/>
@@ -5839,10 +5831,6 @@
               <a:rPr kumimoji="1" lang="ja-JP" altLang="en-US" dirty="0"/>
               <a:t>：</a:t>
             </a:r>
-            <a:r>
-              <a:rPr kumimoji="1" lang="en-US" altLang="ja-JP" dirty="0"/>
-              <a:t/>
-            </a:r>
             <a:br>
               <a:rPr kumimoji="1" lang="en-US" altLang="ja-JP" dirty="0"/>
             </a:br>
@@ -5971,10 +5959,6 @@
             <a:r>
               <a:rPr kumimoji="1" lang="ja-JP" altLang="en-US" dirty="0"/>
               <a:t>：</a:t>
-            </a:r>
-            <a:r>
-              <a:rPr kumimoji="1" lang="en-US" altLang="ja-JP" dirty="0"/>
-              <a:t/>
             </a:r>
             <a:br>
               <a:rPr kumimoji="1" lang="en-US" altLang="ja-JP" dirty="0"/>
@@ -6206,10 +6190,6 @@
               <a:rPr kumimoji="1" lang="ja-JP" altLang="en-US" dirty="0"/>
               <a:t>：</a:t>
             </a:r>
-            <a:r>
-              <a:rPr kumimoji="1" lang="en-US" altLang="ja-JP" dirty="0"/>
-              <a:t/>
-            </a:r>
             <a:br>
               <a:rPr kumimoji="1" lang="en-US" altLang="ja-JP" dirty="0"/>
             </a:br>
@@ -6338,10 +6318,6 @@
             <a:r>
               <a:rPr kumimoji="1" lang="ja-JP" altLang="en-US" dirty="0"/>
               <a:t>：</a:t>
-            </a:r>
-            <a:r>
-              <a:rPr kumimoji="1" lang="en-US" altLang="ja-JP" dirty="0"/>
-              <a:t/>
             </a:r>
             <a:br>
               <a:rPr kumimoji="1" lang="en-US" altLang="ja-JP" dirty="0"/>
@@ -6812,10 +6788,6 @@
               <a:rPr kumimoji="1" lang="ja-JP" altLang="en-US" dirty="0"/>
               <a:t>：</a:t>
             </a:r>
-            <a:r>
-              <a:rPr kumimoji="1" lang="en-US" altLang="ja-JP" dirty="0"/>
-              <a:t/>
-            </a:r>
             <a:br>
               <a:rPr kumimoji="1" lang="en-US" altLang="ja-JP" dirty="0"/>
             </a:br>
@@ -6970,10 +6942,6 @@
             <a:r>
               <a:rPr kumimoji="1" lang="ja-JP" altLang="en-US" dirty="0"/>
               <a:t>：</a:t>
-            </a:r>
-            <a:r>
-              <a:rPr kumimoji="1" lang="en-US" altLang="ja-JP" dirty="0"/>
-              <a:t/>
             </a:r>
             <a:br>
               <a:rPr kumimoji="1" lang="en-US" altLang="ja-JP" dirty="0"/>
@@ -7318,10 +7286,6 @@
               <a:rPr lang="ja-JP" altLang="en-US" dirty="0"/>
               <a:t>：</a:t>
             </a:r>
-            <a:r>
-              <a:rPr lang="en-US" altLang="ja-JP" dirty="0"/>
-              <a:t/>
-            </a:r>
             <a:br>
               <a:rPr lang="en-US" altLang="ja-JP" dirty="0"/>
             </a:br>
@@ -7467,10 +7431,6 @@
             <a:r>
               <a:rPr lang="ja-JP" altLang="en-US" dirty="0"/>
               <a:t>：</a:t>
-            </a:r>
-            <a:r>
-              <a:rPr lang="en-US" altLang="ja-JP" dirty="0"/>
-              <a:t/>
             </a:r>
             <a:br>
               <a:rPr lang="en-US" altLang="ja-JP" dirty="0"/>
@@ -7744,10 +7704,6 @@
               <a:rPr kumimoji="1" lang="ja-JP" altLang="en-US" dirty="0"/>
               <a:t>：</a:t>
             </a:r>
-            <a:r>
-              <a:rPr kumimoji="1" lang="en-US" altLang="ja-JP" dirty="0"/>
-              <a:t/>
-            </a:r>
             <a:br>
               <a:rPr kumimoji="1" lang="en-US" altLang="ja-JP" dirty="0"/>
             </a:br>
@@ -7843,10 +7799,6 @@
               <a:rPr kumimoji="1" lang="ja-JP" altLang="en-US" dirty="0"/>
               <a:t>：</a:t>
             </a:r>
-            <a:r>
-              <a:rPr kumimoji="1" lang="en-US" altLang="ja-JP" dirty="0"/>
-              <a:t/>
-            </a:r>
             <a:br>
               <a:rPr kumimoji="1" lang="en-US" altLang="ja-JP" dirty="0"/>
             </a:br>
@@ -8032,10 +7984,6 @@
             <a:r>
               <a:rPr kumimoji="1" lang="ja-JP" altLang="en-US" dirty="0"/>
               <a:t>：</a:t>
-            </a:r>
-            <a:r>
-              <a:rPr kumimoji="1" lang="en-US" altLang="ja-JP" dirty="0"/>
-              <a:t/>
             </a:r>
             <a:br>
               <a:rPr kumimoji="1" lang="en-US" altLang="ja-JP" dirty="0"/>
@@ -8163,10 +8111,6 @@
             <a:r>
               <a:rPr kumimoji="1" lang="ja-JP" altLang="en-US" dirty="0"/>
               <a:t>：</a:t>
-            </a:r>
-            <a:r>
-              <a:rPr kumimoji="1" lang="en-US" altLang="ja-JP" dirty="0"/>
-              <a:t/>
             </a:r>
             <a:br>
               <a:rPr kumimoji="1" lang="en-US" altLang="ja-JP" dirty="0"/>
@@ -8566,10 +8510,6 @@
               <a:rPr kumimoji="1" lang="ja-JP" altLang="en-US" dirty="0"/>
               <a:t>：</a:t>
             </a:r>
-            <a:r>
-              <a:rPr kumimoji="1" lang="en-US" altLang="ja-JP" dirty="0"/>
-              <a:t/>
-            </a:r>
             <a:br>
               <a:rPr kumimoji="1" lang="en-US" altLang="ja-JP" dirty="0"/>
             </a:br>
@@ -8762,10 +8702,6 @@
             <a:r>
               <a:rPr kumimoji="1" lang="ja-JP" altLang="en-US" dirty="0"/>
               <a:t>：</a:t>
-            </a:r>
-            <a:r>
-              <a:rPr kumimoji="1" lang="en-US" altLang="ja-JP" dirty="0"/>
-              <a:t/>
             </a:r>
             <a:br>
               <a:rPr kumimoji="1" lang="en-US" altLang="ja-JP" dirty="0"/>
@@ -8894,10 +8830,6 @@
             <a:r>
               <a:rPr kumimoji="1" lang="ja-JP" altLang="en-US" dirty="0"/>
               <a:t>：</a:t>
-            </a:r>
-            <a:r>
-              <a:rPr kumimoji="1" lang="en-US" altLang="ja-JP" dirty="0"/>
-              <a:t/>
             </a:r>
             <a:br>
               <a:rPr kumimoji="1" lang="en-US" altLang="ja-JP" dirty="0"/>
@@ -10423,10 +10355,6 @@
               <a:rPr kumimoji="1" lang="ja-JP" altLang="en-US" dirty="0"/>
               <a:t>これらの正規分布は</a:t>
             </a:r>
-            <a:r>
-              <a:rPr kumimoji="1" lang="en-US" altLang="ja-JP" dirty="0"/>
-              <a:t/>
-            </a:r>
             <a:br>
               <a:rPr kumimoji="1" lang="en-US" altLang="ja-JP" dirty="0"/>
             </a:br>
@@ -10441,10 +10369,6 @@
             <a:r>
               <a:rPr kumimoji="1" lang="ja-JP" altLang="en-US" dirty="0"/>
               <a:t>予測値，</a:t>
-            </a:r>
-            <a:r>
-              <a:rPr kumimoji="1" lang="en-US" altLang="ja-JP" dirty="0"/>
-              <a:t/>
             </a:r>
             <a:br>
               <a:rPr kumimoji="1" lang="en-US" altLang="ja-JP" dirty="0"/>
@@ -10605,7 +10529,7 @@
           <a:p>
             <a:pPr algn="ctr"/>
             <a:r>
-              <a:rPr kumimoji="1" lang="ja-JP" altLang="en-US" dirty="0" smtClean="0">
+              <a:rPr kumimoji="1" lang="ja-JP" altLang="en-US" dirty="0">
                 <a:solidFill>
                   <a:schemeClr val="tx1"/>
                 </a:solidFill>
@@ -10614,6 +10538,110 @@
               </a:rPr>
               <a:t>社交性</a:t>
             </a:r>
+          </a:p>
+        </p:txBody>
+      </p:sp>
+      <p:sp>
+        <p:nvSpPr>
+          <p:cNvPr id="6" name="楕円 5"/>
+          <p:cNvSpPr/>
+          <p:nvPr/>
+        </p:nvSpPr>
+        <p:spPr>
+          <a:xfrm>
+            <a:off x="1824156" y="4830454"/>
+            <a:ext cx="1304544" cy="579760"/>
+          </a:xfrm>
+          <a:prstGeom prst="ellipse">
+            <a:avLst/>
+          </a:prstGeom>
+          <a:ln>
+            <a:solidFill>
+              <a:schemeClr val="tx1"/>
+            </a:solidFill>
+          </a:ln>
+        </p:spPr>
+        <p:style>
+          <a:lnRef idx="2">
+            <a:schemeClr val="dk1"/>
+          </a:lnRef>
+          <a:fillRef idx="1">
+            <a:schemeClr val="lt1"/>
+          </a:fillRef>
+          <a:effectRef idx="0">
+            <a:schemeClr val="dk1"/>
+          </a:effectRef>
+          <a:fontRef idx="minor">
+            <a:schemeClr val="dk1"/>
+          </a:fontRef>
+        </p:style>
+        <p:txBody>
+          <a:bodyPr rtlCol="0" anchor="ctr"/>
+          <a:lstStyle/>
+          <a:p>
+            <a:pPr algn="ctr"/>
+            <a:r>
+              <a:rPr kumimoji="1" lang="ja-JP" altLang="en-US" dirty="0">
+                <a:solidFill>
+                  <a:schemeClr val="tx1"/>
+                </a:solidFill>
+                <a:latin typeface="游ゴシック Light" panose="020B0300000000000000" pitchFamily="50" charset="-128"/>
+                <a:ea typeface="游ゴシック Light" panose="020B0300000000000000" pitchFamily="50" charset="-128"/>
+              </a:rPr>
+              <a:t>計画性</a:t>
+            </a:r>
+          </a:p>
+        </p:txBody>
+      </p:sp>
+      <p:sp>
+        <p:nvSpPr>
+          <p:cNvPr id="7" name="正方形/長方形 6"/>
+          <p:cNvSpPr/>
+          <p:nvPr/>
+        </p:nvSpPr>
+        <p:spPr>
+          <a:xfrm>
+            <a:off x="5005688" y="1193428"/>
+            <a:ext cx="963168" cy="332396"/>
+          </a:xfrm>
+          <a:prstGeom prst="rect">
+            <a:avLst/>
+          </a:prstGeom>
+          <a:ln>
+            <a:solidFill>
+              <a:schemeClr val="tx1"/>
+            </a:solidFill>
+          </a:ln>
+        </p:spPr>
+        <p:style>
+          <a:lnRef idx="2">
+            <a:schemeClr val="dk1"/>
+          </a:lnRef>
+          <a:fillRef idx="1">
+            <a:schemeClr val="lt1"/>
+          </a:fillRef>
+          <a:effectRef idx="0">
+            <a:schemeClr val="dk1"/>
+          </a:effectRef>
+          <a:fontRef idx="minor">
+            <a:schemeClr val="dk1"/>
+          </a:fontRef>
+        </p:style>
+        <p:txBody>
+          <a:bodyPr rtlCol="0" anchor="ctr"/>
+          <a:lstStyle/>
+          <a:p>
+            <a:pPr algn="ctr"/>
+            <a:r>
+              <a:rPr kumimoji="1" lang="en-US" altLang="ja-JP" dirty="0">
+                <a:solidFill>
+                  <a:schemeClr val="tx1"/>
+                </a:solidFill>
+                <a:latin typeface="游ゴシック Light" panose="020B0300000000000000" pitchFamily="50" charset="-128"/>
+                <a:ea typeface="游ゴシック Light" panose="020B0300000000000000" pitchFamily="50" charset="-128"/>
+              </a:rPr>
+              <a:t>Q1</a:t>
+            </a:r>
             <a:endParaRPr kumimoji="1" lang="ja-JP" altLang="en-US" dirty="0">
               <a:solidFill>
                 <a:schemeClr val="tx1"/>
@@ -10626,16 +10654,16 @@
       </p:sp>
       <p:sp>
         <p:nvSpPr>
-          <p:cNvPr id="6" name="楕円 5"/>
+          <p:cNvPr id="8" name="正方形/長方形 7"/>
           <p:cNvSpPr/>
           <p:nvPr/>
         </p:nvSpPr>
         <p:spPr>
           <a:xfrm>
-            <a:off x="1824156" y="4830454"/>
-            <a:ext cx="1304544" cy="579760"/>
-          </a:xfrm>
-          <a:prstGeom prst="ellipse">
+            <a:off x="5005688" y="1730672"/>
+            <a:ext cx="963168" cy="332396"/>
+          </a:xfrm>
+          <a:prstGeom prst="rect">
             <a:avLst/>
           </a:prstGeom>
           <a:ln>
@@ -10664,14 +10692,14 @@
           <a:p>
             <a:pPr algn="ctr"/>
             <a:r>
-              <a:rPr kumimoji="1" lang="ja-JP" altLang="en-US" dirty="0" smtClean="0">
+              <a:rPr kumimoji="1" lang="en-US" altLang="ja-JP" dirty="0">
                 <a:solidFill>
                   <a:schemeClr val="tx1"/>
                 </a:solidFill>
                 <a:latin typeface="游ゴシック Light" panose="020B0300000000000000" pitchFamily="50" charset="-128"/>
                 <a:ea typeface="游ゴシック Light" panose="020B0300000000000000" pitchFamily="50" charset="-128"/>
               </a:rPr>
-              <a:t>計画性</a:t>
+              <a:t>Q4</a:t>
             </a:r>
             <a:endParaRPr kumimoji="1" lang="ja-JP" altLang="en-US" dirty="0">
               <a:solidFill>
@@ -10685,13 +10713,13 @@
       </p:sp>
       <p:sp>
         <p:nvSpPr>
-          <p:cNvPr id="7" name="正方形/長方形 6"/>
+          <p:cNvPr id="9" name="正方形/長方形 8"/>
           <p:cNvSpPr/>
           <p:nvPr/>
         </p:nvSpPr>
         <p:spPr>
           <a:xfrm>
-            <a:off x="5005688" y="1193428"/>
+            <a:off x="5005688" y="2267916"/>
             <a:ext cx="963168" cy="332396"/>
           </a:xfrm>
           <a:prstGeom prst="rect">
@@ -10723,14 +10751,14 @@
           <a:p>
             <a:pPr algn="ctr"/>
             <a:r>
-              <a:rPr kumimoji="1" lang="en-US" altLang="ja-JP" dirty="0" smtClean="0">
+              <a:rPr kumimoji="1" lang="en-US" altLang="ja-JP" dirty="0">
                 <a:solidFill>
                   <a:schemeClr val="tx1"/>
                 </a:solidFill>
                 <a:latin typeface="游ゴシック Light" panose="020B0300000000000000" pitchFamily="50" charset="-128"/>
                 <a:ea typeface="游ゴシック Light" panose="020B0300000000000000" pitchFamily="50" charset="-128"/>
               </a:rPr>
-              <a:t>Q1</a:t>
+              <a:t>Q7</a:t>
             </a:r>
             <a:endParaRPr kumimoji="1" lang="ja-JP" altLang="en-US" dirty="0">
               <a:solidFill>
@@ -10744,13 +10772,13 @@
       </p:sp>
       <p:sp>
         <p:nvSpPr>
-          <p:cNvPr id="8" name="正方形/長方形 7"/>
+          <p:cNvPr id="10" name="正方形/長方形 9"/>
           <p:cNvSpPr/>
           <p:nvPr/>
         </p:nvSpPr>
         <p:spPr>
           <a:xfrm>
-            <a:off x="5005688" y="1730672"/>
+            <a:off x="5005688" y="2805160"/>
             <a:ext cx="963168" cy="332396"/>
           </a:xfrm>
           <a:prstGeom prst="rect">
@@ -10782,7 +10810,7 @@
           <a:p>
             <a:pPr algn="ctr"/>
             <a:r>
-              <a:rPr kumimoji="1" lang="en-US" altLang="ja-JP" dirty="0" smtClean="0">
+              <a:rPr kumimoji="1" lang="en-US" altLang="ja-JP" dirty="0">
                 <a:solidFill>
                   <a:schemeClr val="tx1"/>
                 </a:solidFill>
@@ -10803,13 +10831,13 @@
       </p:sp>
       <p:sp>
         <p:nvSpPr>
-          <p:cNvPr id="9" name="正方形/長方形 8"/>
+          <p:cNvPr id="11" name="正方形/長方形 10"/>
           <p:cNvSpPr/>
           <p:nvPr/>
         </p:nvSpPr>
         <p:spPr>
           <a:xfrm>
-            <a:off x="5005688" y="2267916"/>
+            <a:off x="5005688" y="3342404"/>
             <a:ext cx="963168" cy="332396"/>
           </a:xfrm>
           <a:prstGeom prst="rect">
@@ -10841,7 +10869,125 @@
           <a:p>
             <a:pPr algn="ctr"/>
             <a:r>
-              <a:rPr kumimoji="1" lang="en-US" altLang="ja-JP" dirty="0" smtClean="0">
+              <a:rPr kumimoji="1" lang="en-US" altLang="ja-JP" dirty="0">
+                <a:solidFill>
+                  <a:schemeClr val="tx1"/>
+                </a:solidFill>
+                <a:latin typeface="游ゴシック Light" panose="020B0300000000000000" pitchFamily="50" charset="-128"/>
+                <a:ea typeface="游ゴシック Light" panose="020B0300000000000000" pitchFamily="50" charset="-128"/>
+              </a:rPr>
+              <a:t>Q5</a:t>
+            </a:r>
+            <a:endParaRPr kumimoji="1" lang="ja-JP" altLang="en-US" dirty="0">
+              <a:solidFill>
+                <a:schemeClr val="tx1"/>
+              </a:solidFill>
+              <a:latin typeface="游ゴシック Light" panose="020B0300000000000000" pitchFamily="50" charset="-128"/>
+              <a:ea typeface="游ゴシック Light" panose="020B0300000000000000" pitchFamily="50" charset="-128"/>
+            </a:endParaRPr>
+          </a:p>
+        </p:txBody>
+      </p:sp>
+      <p:sp>
+        <p:nvSpPr>
+          <p:cNvPr id="12" name="正方形/長方形 11"/>
+          <p:cNvSpPr/>
+          <p:nvPr/>
+        </p:nvSpPr>
+        <p:spPr>
+          <a:xfrm>
+            <a:off x="5005688" y="3879648"/>
+            <a:ext cx="963168" cy="332396"/>
+          </a:xfrm>
+          <a:prstGeom prst="rect">
+            <a:avLst/>
+          </a:prstGeom>
+          <a:ln>
+            <a:solidFill>
+              <a:schemeClr val="tx1"/>
+            </a:solidFill>
+          </a:ln>
+        </p:spPr>
+        <p:style>
+          <a:lnRef idx="2">
+            <a:schemeClr val="dk1"/>
+          </a:lnRef>
+          <a:fillRef idx="1">
+            <a:schemeClr val="lt1"/>
+          </a:fillRef>
+          <a:effectRef idx="0">
+            <a:schemeClr val="dk1"/>
+          </a:effectRef>
+          <a:fontRef idx="minor">
+            <a:schemeClr val="dk1"/>
+          </a:fontRef>
+        </p:style>
+        <p:txBody>
+          <a:bodyPr rtlCol="0" anchor="ctr"/>
+          <a:lstStyle/>
+          <a:p>
+            <a:pPr algn="ctr"/>
+            <a:r>
+              <a:rPr kumimoji="1" lang="en-US" altLang="ja-JP" dirty="0">
+                <a:solidFill>
+                  <a:schemeClr val="tx1"/>
+                </a:solidFill>
+                <a:latin typeface="游ゴシック Light" panose="020B0300000000000000" pitchFamily="50" charset="-128"/>
+                <a:ea typeface="游ゴシック Light" panose="020B0300000000000000" pitchFamily="50" charset="-128"/>
+              </a:rPr>
+              <a:t>Q8</a:t>
+            </a:r>
+            <a:endParaRPr kumimoji="1" lang="ja-JP" altLang="en-US" dirty="0">
+              <a:solidFill>
+                <a:schemeClr val="tx1"/>
+              </a:solidFill>
+              <a:latin typeface="游ゴシック Light" panose="020B0300000000000000" pitchFamily="50" charset="-128"/>
+              <a:ea typeface="游ゴシック Light" panose="020B0300000000000000" pitchFamily="50" charset="-128"/>
+            </a:endParaRPr>
+          </a:p>
+        </p:txBody>
+      </p:sp>
+      <p:sp>
+        <p:nvSpPr>
+          <p:cNvPr id="13" name="正方形/長方形 12"/>
+          <p:cNvSpPr/>
+          <p:nvPr/>
+        </p:nvSpPr>
+        <p:spPr>
+          <a:xfrm>
+            <a:off x="5005688" y="4416892"/>
+            <a:ext cx="963168" cy="332396"/>
+          </a:xfrm>
+          <a:prstGeom prst="rect">
+            <a:avLst/>
+          </a:prstGeom>
+          <a:ln>
+            <a:solidFill>
+              <a:schemeClr val="tx1"/>
+            </a:solidFill>
+          </a:ln>
+        </p:spPr>
+        <p:style>
+          <a:lnRef idx="2">
+            <a:schemeClr val="dk1"/>
+          </a:lnRef>
+          <a:fillRef idx="1">
+            <a:schemeClr val="lt1"/>
+          </a:fillRef>
+          <a:effectRef idx="0">
+            <a:schemeClr val="dk1"/>
+          </a:effectRef>
+          <a:fontRef idx="minor">
+            <a:schemeClr val="dk1"/>
+          </a:fontRef>
+        </p:style>
+        <p:txBody>
+          <a:bodyPr rtlCol="0" anchor="ctr"/>
+          <a:lstStyle/>
+          <a:p>
+            <a:pPr algn="ctr"/>
+            <a:r>
+              <a:rPr kumimoji="1" lang="en-US" altLang="ja-JP" dirty="0">
                 <a:solidFill>
                   <a:schemeClr val="tx1"/>
                 </a:solidFill>
@@ -10862,13 +11008,13 @@
       </p:sp>
       <p:sp>
         <p:nvSpPr>
-          <p:cNvPr id="10" name="正方形/長方形 9"/>
+          <p:cNvPr id="14" name="正方形/長方形 13"/>
           <p:cNvSpPr/>
           <p:nvPr/>
         </p:nvSpPr>
         <p:spPr>
           <a:xfrm>
-            <a:off x="5005688" y="2805160"/>
+            <a:off x="5005688" y="4954136"/>
             <a:ext cx="963168" cy="332396"/>
           </a:xfrm>
           <a:prstGeom prst="rect">
@@ -10900,14 +11046,14 @@
           <a:p>
             <a:pPr algn="ctr"/>
             <a:r>
-              <a:rPr kumimoji="1" lang="en-US" altLang="ja-JP" dirty="0" smtClean="0">
+              <a:rPr kumimoji="1" lang="en-US" altLang="ja-JP" dirty="0">
                 <a:solidFill>
                   <a:schemeClr val="tx1"/>
                 </a:solidFill>
                 <a:latin typeface="游ゴシック Light" panose="020B0300000000000000" pitchFamily="50" charset="-128"/>
                 <a:ea typeface="游ゴシック Light" panose="020B0300000000000000" pitchFamily="50" charset="-128"/>
               </a:rPr>
-              <a:t>Q4</a:t>
+              <a:t>Q6</a:t>
             </a:r>
             <a:endParaRPr kumimoji="1" lang="ja-JP" altLang="en-US" dirty="0">
               <a:solidFill>
@@ -10921,13 +11067,13 @@
       </p:sp>
       <p:sp>
         <p:nvSpPr>
-          <p:cNvPr id="11" name="正方形/長方形 10"/>
+          <p:cNvPr id="15" name="正方形/長方形 14"/>
           <p:cNvSpPr/>
           <p:nvPr/>
         </p:nvSpPr>
         <p:spPr>
           <a:xfrm>
-            <a:off x="5005688" y="3342404"/>
+            <a:off x="5005688" y="5491379"/>
             <a:ext cx="963168" cy="332396"/>
           </a:xfrm>
           <a:prstGeom prst="rect">
@@ -10959,243 +11105,7 @@
           <a:p>
             <a:pPr algn="ctr"/>
             <a:r>
-              <a:rPr kumimoji="1" lang="en-US" altLang="ja-JP" dirty="0" smtClean="0">
-                <a:solidFill>
-                  <a:schemeClr val="tx1"/>
-                </a:solidFill>
-                <a:latin typeface="游ゴシック Light" panose="020B0300000000000000" pitchFamily="50" charset="-128"/>
-                <a:ea typeface="游ゴシック Light" panose="020B0300000000000000" pitchFamily="50" charset="-128"/>
-              </a:rPr>
-              <a:t>Q5</a:t>
-            </a:r>
-            <a:endParaRPr kumimoji="1" lang="ja-JP" altLang="en-US" dirty="0">
-              <a:solidFill>
-                <a:schemeClr val="tx1"/>
-              </a:solidFill>
-              <a:latin typeface="游ゴシック Light" panose="020B0300000000000000" pitchFamily="50" charset="-128"/>
-              <a:ea typeface="游ゴシック Light" panose="020B0300000000000000" pitchFamily="50" charset="-128"/>
-            </a:endParaRPr>
-          </a:p>
-        </p:txBody>
-      </p:sp>
-      <p:sp>
-        <p:nvSpPr>
-          <p:cNvPr id="12" name="正方形/長方形 11"/>
-          <p:cNvSpPr/>
-          <p:nvPr/>
-        </p:nvSpPr>
-        <p:spPr>
-          <a:xfrm>
-            <a:off x="5005688" y="3879648"/>
-            <a:ext cx="963168" cy="332396"/>
-          </a:xfrm>
-          <a:prstGeom prst="rect">
-            <a:avLst/>
-          </a:prstGeom>
-          <a:ln>
-            <a:solidFill>
-              <a:schemeClr val="tx1"/>
-            </a:solidFill>
-          </a:ln>
-        </p:spPr>
-        <p:style>
-          <a:lnRef idx="2">
-            <a:schemeClr val="dk1"/>
-          </a:lnRef>
-          <a:fillRef idx="1">
-            <a:schemeClr val="lt1"/>
-          </a:fillRef>
-          <a:effectRef idx="0">
-            <a:schemeClr val="dk1"/>
-          </a:effectRef>
-          <a:fontRef idx="minor">
-            <a:schemeClr val="dk1"/>
-          </a:fontRef>
-        </p:style>
-        <p:txBody>
-          <a:bodyPr rtlCol="0" anchor="ctr"/>
-          <a:lstStyle/>
-          <a:p>
-            <a:pPr algn="ctr"/>
-            <a:r>
-              <a:rPr kumimoji="1" lang="en-US" altLang="ja-JP" dirty="0" smtClean="0">
-                <a:solidFill>
-                  <a:schemeClr val="tx1"/>
-                </a:solidFill>
-                <a:latin typeface="游ゴシック Light" panose="020B0300000000000000" pitchFamily="50" charset="-128"/>
-                <a:ea typeface="游ゴシック Light" panose="020B0300000000000000" pitchFamily="50" charset="-128"/>
-              </a:rPr>
-              <a:t>Q6</a:t>
-            </a:r>
-            <a:endParaRPr kumimoji="1" lang="ja-JP" altLang="en-US" dirty="0">
-              <a:solidFill>
-                <a:schemeClr val="tx1"/>
-              </a:solidFill>
-              <a:latin typeface="游ゴシック Light" panose="020B0300000000000000" pitchFamily="50" charset="-128"/>
-              <a:ea typeface="游ゴシック Light" panose="020B0300000000000000" pitchFamily="50" charset="-128"/>
-            </a:endParaRPr>
-          </a:p>
-        </p:txBody>
-      </p:sp>
-      <p:sp>
-        <p:nvSpPr>
-          <p:cNvPr id="13" name="正方形/長方形 12"/>
-          <p:cNvSpPr/>
-          <p:nvPr/>
-        </p:nvSpPr>
-        <p:spPr>
-          <a:xfrm>
-            <a:off x="5005688" y="4416892"/>
-            <a:ext cx="963168" cy="332396"/>
-          </a:xfrm>
-          <a:prstGeom prst="rect">
-            <a:avLst/>
-          </a:prstGeom>
-          <a:ln>
-            <a:solidFill>
-              <a:schemeClr val="tx1"/>
-            </a:solidFill>
-          </a:ln>
-        </p:spPr>
-        <p:style>
-          <a:lnRef idx="2">
-            <a:schemeClr val="dk1"/>
-          </a:lnRef>
-          <a:fillRef idx="1">
-            <a:schemeClr val="lt1"/>
-          </a:fillRef>
-          <a:effectRef idx="0">
-            <a:schemeClr val="dk1"/>
-          </a:effectRef>
-          <a:fontRef idx="minor">
-            <a:schemeClr val="dk1"/>
-          </a:fontRef>
-        </p:style>
-        <p:txBody>
-          <a:bodyPr rtlCol="0" anchor="ctr"/>
-          <a:lstStyle/>
-          <a:p>
-            <a:pPr algn="ctr"/>
-            <a:r>
-              <a:rPr kumimoji="1" lang="en-US" altLang="ja-JP" dirty="0" smtClean="0">
-                <a:solidFill>
-                  <a:schemeClr val="tx1"/>
-                </a:solidFill>
-                <a:latin typeface="游ゴシック Light" panose="020B0300000000000000" pitchFamily="50" charset="-128"/>
-                <a:ea typeface="游ゴシック Light" panose="020B0300000000000000" pitchFamily="50" charset="-128"/>
-              </a:rPr>
-              <a:t>Q7</a:t>
-            </a:r>
-            <a:endParaRPr kumimoji="1" lang="ja-JP" altLang="en-US" dirty="0">
-              <a:solidFill>
-                <a:schemeClr val="tx1"/>
-              </a:solidFill>
-              <a:latin typeface="游ゴシック Light" panose="020B0300000000000000" pitchFamily="50" charset="-128"/>
-              <a:ea typeface="游ゴシック Light" panose="020B0300000000000000" pitchFamily="50" charset="-128"/>
-            </a:endParaRPr>
-          </a:p>
-        </p:txBody>
-      </p:sp>
-      <p:sp>
-        <p:nvSpPr>
-          <p:cNvPr id="14" name="正方形/長方形 13"/>
-          <p:cNvSpPr/>
-          <p:nvPr/>
-        </p:nvSpPr>
-        <p:spPr>
-          <a:xfrm>
-            <a:off x="5005688" y="4954136"/>
-            <a:ext cx="963168" cy="332396"/>
-          </a:xfrm>
-          <a:prstGeom prst="rect">
-            <a:avLst/>
-          </a:prstGeom>
-          <a:ln>
-            <a:solidFill>
-              <a:schemeClr val="tx1"/>
-            </a:solidFill>
-          </a:ln>
-        </p:spPr>
-        <p:style>
-          <a:lnRef idx="2">
-            <a:schemeClr val="dk1"/>
-          </a:lnRef>
-          <a:fillRef idx="1">
-            <a:schemeClr val="lt1"/>
-          </a:fillRef>
-          <a:effectRef idx="0">
-            <a:schemeClr val="dk1"/>
-          </a:effectRef>
-          <a:fontRef idx="minor">
-            <a:schemeClr val="dk1"/>
-          </a:fontRef>
-        </p:style>
-        <p:txBody>
-          <a:bodyPr rtlCol="0" anchor="ctr"/>
-          <a:lstStyle/>
-          <a:p>
-            <a:pPr algn="ctr"/>
-            <a:r>
-              <a:rPr kumimoji="1" lang="en-US" altLang="ja-JP" dirty="0" smtClean="0">
-                <a:solidFill>
-                  <a:schemeClr val="tx1"/>
-                </a:solidFill>
-                <a:latin typeface="游ゴシック Light" panose="020B0300000000000000" pitchFamily="50" charset="-128"/>
-                <a:ea typeface="游ゴシック Light" panose="020B0300000000000000" pitchFamily="50" charset="-128"/>
-              </a:rPr>
-              <a:t>Q8</a:t>
-            </a:r>
-            <a:endParaRPr kumimoji="1" lang="ja-JP" altLang="en-US" dirty="0">
-              <a:solidFill>
-                <a:schemeClr val="tx1"/>
-              </a:solidFill>
-              <a:latin typeface="游ゴシック Light" panose="020B0300000000000000" pitchFamily="50" charset="-128"/>
-              <a:ea typeface="游ゴシック Light" panose="020B0300000000000000" pitchFamily="50" charset="-128"/>
-            </a:endParaRPr>
-          </a:p>
-        </p:txBody>
-      </p:sp>
-      <p:sp>
-        <p:nvSpPr>
-          <p:cNvPr id="15" name="正方形/長方形 14"/>
-          <p:cNvSpPr/>
-          <p:nvPr/>
-        </p:nvSpPr>
-        <p:spPr>
-          <a:xfrm>
-            <a:off x="5005688" y="5491379"/>
-            <a:ext cx="963168" cy="332396"/>
-          </a:xfrm>
-          <a:prstGeom prst="rect">
-            <a:avLst/>
-          </a:prstGeom>
-          <a:ln>
-            <a:solidFill>
-              <a:schemeClr val="tx1"/>
-            </a:solidFill>
-          </a:ln>
-        </p:spPr>
-        <p:style>
-          <a:lnRef idx="2">
-            <a:schemeClr val="dk1"/>
-          </a:lnRef>
-          <a:fillRef idx="1">
-            <a:schemeClr val="lt1"/>
-          </a:fillRef>
-          <a:effectRef idx="0">
-            <a:schemeClr val="dk1"/>
-          </a:effectRef>
-          <a:fontRef idx="minor">
-            <a:schemeClr val="dk1"/>
-          </a:fontRef>
-        </p:style>
-        <p:txBody>
-          <a:bodyPr rtlCol="0" anchor="ctr"/>
-          <a:lstStyle/>
-          <a:p>
-            <a:pPr algn="ctr"/>
-            <a:r>
-              <a:rPr kumimoji="1" lang="en-US" altLang="ja-JP" dirty="0" smtClean="0">
+              <a:rPr kumimoji="1" lang="en-US" altLang="ja-JP" dirty="0">
                 <a:solidFill>
                   <a:schemeClr val="tx1"/>
                 </a:solidFill>
@@ -11604,7 +11514,7 @@
           <a:p>
             <a:pPr algn="ctr"/>
             <a:r>
-              <a:rPr kumimoji="1" lang="en-US" altLang="ja-JP" dirty="0" smtClean="0">
+              <a:rPr kumimoji="1" lang="en-US" altLang="ja-JP" dirty="0">
                 <a:solidFill>
                   <a:schemeClr val="tx1"/>
                 </a:solidFill>
@@ -11663,7 +11573,7 @@
           <a:p>
             <a:pPr algn="ctr"/>
             <a:r>
-              <a:rPr kumimoji="1" lang="en-US" altLang="ja-JP" dirty="0" smtClean="0">
+              <a:rPr kumimoji="1" lang="en-US" altLang="ja-JP" dirty="0">
                 <a:solidFill>
                   <a:schemeClr val="tx1"/>
                 </a:solidFill>
@@ -11722,7 +11632,7 @@
           <a:p>
             <a:pPr algn="ctr"/>
             <a:r>
-              <a:rPr kumimoji="1" lang="en-US" altLang="ja-JP" dirty="0" smtClean="0">
+              <a:rPr kumimoji="1" lang="en-US" altLang="ja-JP" dirty="0">
                 <a:solidFill>
                   <a:schemeClr val="tx1"/>
                 </a:solidFill>
@@ -11781,7 +11691,7 @@
           <a:p>
             <a:pPr algn="ctr"/>
             <a:r>
-              <a:rPr kumimoji="1" lang="en-US" altLang="ja-JP" dirty="0" smtClean="0">
+              <a:rPr kumimoji="1" lang="en-US" altLang="ja-JP" dirty="0">
                 <a:solidFill>
                   <a:schemeClr val="tx1"/>
                 </a:solidFill>
@@ -11840,7 +11750,7 @@
           <a:p>
             <a:pPr algn="ctr"/>
             <a:r>
-              <a:rPr kumimoji="1" lang="en-US" altLang="ja-JP" dirty="0" smtClean="0">
+              <a:rPr kumimoji="1" lang="en-US" altLang="ja-JP" dirty="0">
                 <a:solidFill>
                   <a:schemeClr val="tx1"/>
                 </a:solidFill>
@@ -11899,7 +11809,7 @@
           <a:p>
             <a:pPr algn="ctr"/>
             <a:r>
-              <a:rPr kumimoji="1" lang="en-US" altLang="ja-JP" dirty="0" smtClean="0">
+              <a:rPr kumimoji="1" lang="en-US" altLang="ja-JP" dirty="0">
                 <a:solidFill>
                   <a:schemeClr val="tx1"/>
                 </a:solidFill>
@@ -11958,7 +11868,7 @@
           <a:p>
             <a:pPr algn="ctr"/>
             <a:r>
-              <a:rPr kumimoji="1" lang="en-US" altLang="ja-JP" dirty="0" smtClean="0">
+              <a:rPr kumimoji="1" lang="en-US" altLang="ja-JP" dirty="0">
                 <a:solidFill>
                   <a:schemeClr val="tx1"/>
                 </a:solidFill>
@@ -12017,7 +11927,7 @@
           <a:p>
             <a:pPr algn="ctr"/>
             <a:r>
-              <a:rPr kumimoji="1" lang="en-US" altLang="ja-JP" dirty="0" smtClean="0">
+              <a:rPr kumimoji="1" lang="en-US" altLang="ja-JP" dirty="0">
                 <a:solidFill>
                   <a:schemeClr val="tx1"/>
                 </a:solidFill>
@@ -12076,7 +11986,7 @@
           <a:p>
             <a:pPr algn="ctr"/>
             <a:r>
-              <a:rPr kumimoji="1" lang="en-US" altLang="ja-JP" dirty="0" smtClean="0">
+              <a:rPr kumimoji="1" lang="en-US" altLang="ja-JP" dirty="0">
                 <a:solidFill>
                   <a:schemeClr val="tx1"/>
                 </a:solidFill>
@@ -12688,10 +12598,6 @@
               <a:rPr kumimoji="1" lang="ja-JP" altLang="en-US" sz="1400" dirty="0"/>
               <a:t>一要因分散分析</a:t>
             </a:r>
-            <a:r>
-              <a:rPr kumimoji="1" lang="en-US" altLang="ja-JP" sz="1400" dirty="0"/>
-              <a:t/>
-            </a:r>
             <a:br>
               <a:rPr kumimoji="1" lang="en-US" altLang="ja-JP" sz="1400" dirty="0"/>
             </a:br>
@@ -12710,10 +12616,6 @@
             <a:r>
               <a:rPr kumimoji="1" lang="ja-JP" altLang="en-US" sz="1400" dirty="0"/>
               <a:t>二元配置分散分析</a:t>
-            </a:r>
-            <a:r>
-              <a:rPr kumimoji="1" lang="en-US" altLang="ja-JP" sz="1400" dirty="0"/>
-              <a:t/>
             </a:r>
             <a:br>
               <a:rPr kumimoji="1" lang="en-US" altLang="ja-JP" sz="1400" dirty="0"/>
@@ -12758,10 +12660,6 @@
               <a:rPr kumimoji="1" lang="ja-JP" altLang="en-US" sz="1400" dirty="0"/>
               <a:t>二要因分散分析</a:t>
             </a:r>
-            <a:r>
-              <a:rPr kumimoji="1" lang="en-US" altLang="ja-JP" sz="1400" dirty="0"/>
-              <a:t/>
-            </a:r>
             <a:br>
               <a:rPr kumimoji="1" lang="en-US" altLang="ja-JP" sz="1400" dirty="0"/>
             </a:br>
@@ -12780,10 +12678,6 @@
             <a:r>
               <a:rPr kumimoji="1" lang="ja-JP" altLang="en-US" sz="1400" dirty="0"/>
               <a:t>二元配置分散分析</a:t>
-            </a:r>
-            <a:r>
-              <a:rPr kumimoji="1" lang="en-US" altLang="ja-JP" sz="1400" dirty="0"/>
-              <a:t/>
             </a:r>
             <a:br>
               <a:rPr kumimoji="1" lang="en-US" altLang="ja-JP" sz="1400" dirty="0"/>
@@ -12962,10 +12856,6 @@
               <a:rPr kumimoji="1" lang="ja-JP" altLang="en-US" sz="1400" dirty="0"/>
               <a:t>二要因分散分析</a:t>
             </a:r>
-            <a:r>
-              <a:rPr kumimoji="1" lang="en-US" altLang="ja-JP" sz="1400" dirty="0"/>
-              <a:t/>
-            </a:r>
             <a:br>
               <a:rPr kumimoji="1" lang="en-US" altLang="ja-JP" sz="1400" dirty="0"/>
             </a:br>
@@ -12984,10 +12874,6 @@
             <a:r>
               <a:rPr kumimoji="1" lang="ja-JP" altLang="en-US" sz="1400" dirty="0"/>
               <a:t>二元配置分散分析</a:t>
-            </a:r>
-            <a:r>
-              <a:rPr kumimoji="1" lang="en-US" altLang="ja-JP" sz="1400" dirty="0"/>
-              <a:t/>
             </a:r>
             <a:br>
               <a:rPr kumimoji="1" lang="en-US" altLang="ja-JP" sz="1400" dirty="0"/>
@@ -13214,10 +13100,6 @@
               <a:rPr kumimoji="1" lang="ja-JP" altLang="en-US" sz="1400" dirty="0"/>
               <a:t>一要因分散分析</a:t>
             </a:r>
-            <a:r>
-              <a:rPr kumimoji="1" lang="en-US" altLang="ja-JP" sz="1400" dirty="0"/>
-              <a:t/>
-            </a:r>
             <a:br>
               <a:rPr kumimoji="1" lang="en-US" altLang="ja-JP" sz="1400" dirty="0"/>
             </a:br>
@@ -13236,10 +13118,6 @@
             <a:r>
               <a:rPr kumimoji="1" lang="ja-JP" altLang="en-US" sz="1400" dirty="0"/>
               <a:t>二元配置分散分析</a:t>
-            </a:r>
-            <a:r>
-              <a:rPr kumimoji="1" lang="en-US" altLang="ja-JP" sz="1400" dirty="0"/>
-              <a:t/>
             </a:r>
             <a:br>
               <a:rPr kumimoji="1" lang="en-US" altLang="ja-JP" sz="1400" dirty="0"/>
@@ -13284,10 +13162,6 @@
               <a:rPr kumimoji="1" lang="ja-JP" altLang="en-US" sz="1400" dirty="0"/>
               <a:t>二要因分散分析</a:t>
             </a:r>
-            <a:r>
-              <a:rPr kumimoji="1" lang="en-US" altLang="ja-JP" sz="1400" dirty="0"/>
-              <a:t/>
-            </a:r>
             <a:br>
               <a:rPr kumimoji="1" lang="en-US" altLang="ja-JP" sz="1400" dirty="0"/>
             </a:br>
@@ -13306,10 +13180,6 @@
             <a:r>
               <a:rPr kumimoji="1" lang="ja-JP" altLang="en-US" sz="1400" dirty="0"/>
               <a:t>二元配置分散分析</a:t>
-            </a:r>
-            <a:r>
-              <a:rPr kumimoji="1" lang="en-US" altLang="ja-JP" sz="1400" dirty="0"/>
-              <a:t/>
             </a:r>
             <a:br>
               <a:rPr kumimoji="1" lang="en-US" altLang="ja-JP" sz="1400" dirty="0"/>
@@ -13354,10 +13224,6 @@
               <a:rPr kumimoji="1" lang="ja-JP" altLang="en-US" sz="1400" dirty="0"/>
               <a:t>二要因分散分析</a:t>
             </a:r>
-            <a:r>
-              <a:rPr kumimoji="1" lang="en-US" altLang="ja-JP" sz="1400" dirty="0"/>
-              <a:t/>
-            </a:r>
             <a:br>
               <a:rPr kumimoji="1" lang="en-US" altLang="ja-JP" sz="1400" dirty="0"/>
             </a:br>
@@ -13376,10 +13242,6 @@
             <a:r>
               <a:rPr kumimoji="1" lang="ja-JP" altLang="en-US" sz="1400" dirty="0"/>
               <a:t>二元配置分散分析</a:t>
-            </a:r>
-            <a:r>
-              <a:rPr kumimoji="1" lang="en-US" altLang="ja-JP" sz="1400" dirty="0"/>
-              <a:t/>
             </a:r>
             <a:br>
               <a:rPr kumimoji="1" lang="en-US" altLang="ja-JP" sz="1400" dirty="0"/>
@@ -15410,10 +15272,6 @@
               <a:rPr kumimoji="1" lang="ja-JP" altLang="en-US" dirty="0"/>
               <a:t>水準：</a:t>
             </a:r>
-            <a:r>
-              <a:rPr kumimoji="1" lang="en-US" altLang="ja-JP" dirty="0"/>
-              <a:t/>
-            </a:r>
             <a:br>
               <a:rPr kumimoji="1" lang="en-US" altLang="ja-JP" dirty="0"/>
             </a:br>
@@ -15428,10 +15286,6 @@
             <a:r>
               <a:rPr kumimoji="1" lang="ja-JP" altLang="en-US" dirty="0"/>
               <a:t>石川</a:t>
-            </a:r>
-            <a:r>
-              <a:rPr kumimoji="1" lang="en-US" altLang="ja-JP" dirty="0"/>
-              <a:t/>
             </a:r>
             <a:br>
               <a:rPr kumimoji="1" lang="en-US" altLang="ja-JP" dirty="0"/>

--- a/Img/AnovaModeling.pptx
+++ b/Img/AnovaModeling.pptx
@@ -443,7 +443,7 @@
           <a:p>
             <a:fld id="{74503653-7382-4EF5-850F-AEDF0B3BD356}" type="datetimeFigureOut">
               <a:rPr kumimoji="1" lang="ja-JP" altLang="en-US" smtClean="0"/>
-              <a:t>2025/1/20</a:t>
+              <a:t>2025/2/1</a:t>
             </a:fld>
             <a:endParaRPr kumimoji="1" lang="ja-JP" altLang="en-US"/>
           </a:p>
@@ -968,7 +968,7 @@
           <a:p>
             <a:fld id="{E3020441-CB21-445C-817D-199401EC5197}" type="datetimeFigureOut">
               <a:rPr kumimoji="1" lang="ja-JP" altLang="en-US" smtClean="0"/>
-              <a:t>2025/1/20</a:t>
+              <a:t>2025/2/1</a:t>
             </a:fld>
             <a:endParaRPr kumimoji="1" lang="ja-JP" altLang="en-US"/>
           </a:p>
@@ -1170,7 +1170,7 @@
           <a:p>
             <a:fld id="{E3020441-CB21-445C-817D-199401EC5197}" type="datetimeFigureOut">
               <a:rPr kumimoji="1" lang="ja-JP" altLang="en-US" smtClean="0"/>
-              <a:t>2025/1/20</a:t>
+              <a:t>2025/2/1</a:t>
             </a:fld>
             <a:endParaRPr kumimoji="1" lang="ja-JP" altLang="en-US"/>
           </a:p>
@@ -1382,7 +1382,7 @@
           <a:p>
             <a:fld id="{E3020441-CB21-445C-817D-199401EC5197}" type="datetimeFigureOut">
               <a:rPr kumimoji="1" lang="ja-JP" altLang="en-US" smtClean="0"/>
-              <a:t>2025/1/20</a:t>
+              <a:t>2025/2/1</a:t>
             </a:fld>
             <a:endParaRPr kumimoji="1" lang="ja-JP" altLang="en-US"/>
           </a:p>
@@ -1584,7 +1584,7 @@
           <a:p>
             <a:fld id="{E3020441-CB21-445C-817D-199401EC5197}" type="datetimeFigureOut">
               <a:rPr kumimoji="1" lang="ja-JP" altLang="en-US" smtClean="0"/>
-              <a:t>2025/1/20</a:t>
+              <a:t>2025/2/1</a:t>
             </a:fld>
             <a:endParaRPr kumimoji="1" lang="ja-JP" altLang="en-US"/>
           </a:p>
@@ -1835,7 +1835,7 @@
           <a:p>
             <a:fld id="{E3020441-CB21-445C-817D-199401EC5197}" type="datetimeFigureOut">
               <a:rPr kumimoji="1" lang="ja-JP" altLang="en-US" smtClean="0"/>
-              <a:t>2025/1/20</a:t>
+              <a:t>2025/2/1</a:t>
             </a:fld>
             <a:endParaRPr kumimoji="1" lang="ja-JP" altLang="en-US"/>
           </a:p>
@@ -2131,7 +2131,7 @@
           <a:p>
             <a:fld id="{E3020441-CB21-445C-817D-199401EC5197}" type="datetimeFigureOut">
               <a:rPr kumimoji="1" lang="ja-JP" altLang="en-US" smtClean="0"/>
-              <a:t>2025/1/20</a:t>
+              <a:t>2025/2/1</a:t>
             </a:fld>
             <a:endParaRPr kumimoji="1" lang="ja-JP" altLang="en-US"/>
           </a:p>
@@ -2542,7 +2542,7 @@
           <a:p>
             <a:fld id="{E3020441-CB21-445C-817D-199401EC5197}" type="datetimeFigureOut">
               <a:rPr kumimoji="1" lang="ja-JP" altLang="en-US" smtClean="0"/>
-              <a:t>2025/1/20</a:t>
+              <a:t>2025/2/1</a:t>
             </a:fld>
             <a:endParaRPr kumimoji="1" lang="ja-JP" altLang="en-US"/>
           </a:p>
@@ -2660,7 +2660,7 @@
           <a:p>
             <a:fld id="{E3020441-CB21-445C-817D-199401EC5197}" type="datetimeFigureOut">
               <a:rPr kumimoji="1" lang="ja-JP" altLang="en-US" smtClean="0"/>
-              <a:t>2025/1/20</a:t>
+              <a:t>2025/2/1</a:t>
             </a:fld>
             <a:endParaRPr kumimoji="1" lang="ja-JP" altLang="en-US"/>
           </a:p>
@@ -2778,7 +2778,7 @@
           <a:p>
             <a:fld id="{E3020441-CB21-445C-817D-199401EC5197}" type="datetimeFigureOut">
               <a:rPr kumimoji="1" lang="ja-JP" altLang="en-US" smtClean="0"/>
-              <a:t>2025/1/20</a:t>
+              <a:t>2025/2/1</a:t>
             </a:fld>
             <a:endParaRPr kumimoji="1" lang="ja-JP" altLang="en-US"/>
           </a:p>
@@ -3094,7 +3094,7 @@
           <a:p>
             <a:fld id="{E3020441-CB21-445C-817D-199401EC5197}" type="datetimeFigureOut">
               <a:rPr kumimoji="1" lang="ja-JP" altLang="en-US" smtClean="0"/>
-              <a:t>2025/1/20</a:t>
+              <a:t>2025/2/1</a:t>
             </a:fld>
             <a:endParaRPr kumimoji="1" lang="ja-JP" altLang="en-US"/>
           </a:p>
@@ -3358,7 +3358,7 @@
           <a:p>
             <a:fld id="{E3020441-CB21-445C-817D-199401EC5197}" type="datetimeFigureOut">
               <a:rPr kumimoji="1" lang="ja-JP" altLang="en-US" smtClean="0"/>
-              <a:t>2025/1/20</a:t>
+              <a:t>2025/2/1</a:t>
             </a:fld>
             <a:endParaRPr kumimoji="1" lang="ja-JP" altLang="en-US"/>
           </a:p>
@@ -3604,7 +3604,7 @@
           <a:p>
             <a:fld id="{E3020441-CB21-445C-817D-199401EC5197}" type="datetimeFigureOut">
               <a:rPr kumimoji="1" lang="ja-JP" altLang="en-US" smtClean="0"/>
-              <a:t>2025/1/20</a:t>
+              <a:t>2025/2/1</a:t>
             </a:fld>
             <a:endParaRPr kumimoji="1" lang="ja-JP" altLang="en-US"/>
           </a:p>
@@ -5372,7 +5372,7 @@
         </p:nvSpPr>
         <p:spPr>
           <a:xfrm>
-            <a:off x="6934200" y="2990850"/>
+            <a:off x="6925689" y="2954338"/>
             <a:ext cx="2476500" cy="876300"/>
           </a:xfrm>
           <a:prstGeom prst="rect">
@@ -5417,7 +5417,106 @@
       </p:sp>
       <p:sp>
         <p:nvSpPr>
-          <p:cNvPr id="5" name="正方形/長方形 4">
+          <p:cNvPr id="7" name="正方形/長方形 6">
+            <a:extLst>
+              <a:ext uri="{FF2B5EF4-FFF2-40B4-BE49-F238E27FC236}">
+                <a16:creationId xmlns:a16="http://schemas.microsoft.com/office/drawing/2014/main" id="{CBC8A939-E168-8640-4151-6E3418F38040}"/>
+              </a:ext>
+            </a:extLst>
+          </p:cNvPr>
+          <p:cNvSpPr/>
+          <p:nvPr/>
+        </p:nvSpPr>
+        <p:spPr>
+          <a:xfrm>
+            <a:off x="1371600" y="2328542"/>
+            <a:ext cx="4319081" cy="2127891"/>
+          </a:xfrm>
+          <a:prstGeom prst="rect">
+            <a:avLst/>
+          </a:prstGeom>
+          <a:ln>
+            <a:solidFill>
+              <a:srgbClr val="FF0000"/>
+            </a:solidFill>
+          </a:ln>
+        </p:spPr>
+        <p:style>
+          <a:lnRef idx="2">
+            <a:schemeClr val="accent4">
+              <a:shade val="15000"/>
+            </a:schemeClr>
+          </a:lnRef>
+          <a:fillRef idx="1">
+            <a:schemeClr val="accent4"/>
+          </a:fillRef>
+          <a:effectRef idx="0">
+            <a:schemeClr val="accent4"/>
+          </a:effectRef>
+          <a:fontRef idx="minor">
+            <a:schemeClr val="lt1"/>
+          </a:fontRef>
+        </p:style>
+        <p:txBody>
+          <a:bodyPr rtlCol="0" anchor="t"/>
+          <a:lstStyle/>
+          <a:p>
+            <a:r>
+              <a:rPr lang="ja-JP" altLang="en-US" dirty="0"/>
+              <a:t>説明変数</a:t>
+            </a:r>
+            <a:r>
+              <a:rPr lang="en-US" altLang="ja-JP" dirty="0"/>
+              <a:t>3</a:t>
+            </a:r>
+            <a:r>
+              <a:rPr kumimoji="1" lang="ja-JP" altLang="en-US" dirty="0"/>
+              <a:t>：</a:t>
+            </a:r>
+            <a:r>
+              <a:rPr kumimoji="1" lang="en-US" altLang="ja-JP" dirty="0"/>
+              <a:t/>
+            </a:r>
+            <a:br>
+              <a:rPr kumimoji="1" lang="en-US" altLang="ja-JP" dirty="0"/>
+            </a:br>
+            <a:r>
+              <a:rPr kumimoji="1" lang="ja-JP" altLang="en-US" dirty="0"/>
+              <a:t>被験者</a:t>
+            </a:r>
+            <a:r>
+              <a:rPr kumimoji="1" lang="en-US" altLang="ja-JP" dirty="0"/>
+              <a:t>No.</a:t>
+            </a:r>
+          </a:p>
+          <a:p>
+            <a:pPr algn="ctr"/>
+            <a:endParaRPr kumimoji="1" lang="en-US" altLang="ja-JP" dirty="0"/>
+          </a:p>
+          <a:p>
+            <a:r>
+              <a:rPr kumimoji="1" lang="ja-JP" altLang="en-US" dirty="0"/>
+              <a:t>水準：</a:t>
+            </a:r>
+            <a:r>
+              <a:rPr kumimoji="1" lang="en-US" altLang="ja-JP" dirty="0"/>
+              <a:t>1,2,</a:t>
+            </a:r>
+            <a:r>
+              <a:rPr kumimoji="1" lang="ja-JP" altLang="en-US" dirty="0"/>
+              <a:t>・・・</a:t>
+            </a:r>
+            <a:r>
+              <a:rPr kumimoji="1" lang="en-US" altLang="ja-JP" dirty="0"/>
+              <a:t>20</a:t>
+            </a:r>
+            <a:endParaRPr lang="en-US" altLang="ja-JP" dirty="0"/>
+          </a:p>
+        </p:txBody>
+      </p:sp>
+      <p:sp>
+        <p:nvSpPr>
+          <p:cNvPr id="8" name="正方形/長方形 7">
             <a:extLst>
               <a:ext uri="{FF2B5EF4-FFF2-40B4-BE49-F238E27FC236}">
                 <a16:creationId xmlns:a16="http://schemas.microsoft.com/office/drawing/2014/main" id="{AC2650BC-2D2B-5AF3-86DA-8F1504AF3245}"/>
@@ -5429,7 +5528,7 @@
         </p:nvSpPr>
         <p:spPr>
           <a:xfrm>
-            <a:off x="2514600" y="1695449"/>
+            <a:off x="3117715" y="2649538"/>
             <a:ext cx="2371725" cy="1485900"/>
           </a:xfrm>
           <a:prstGeom prst="rect">
@@ -5469,6 +5568,10 @@
               <a:rPr kumimoji="1" lang="ja-JP" altLang="en-US" dirty="0"/>
               <a:t>：</a:t>
             </a:r>
+            <a:r>
+              <a:rPr kumimoji="1" lang="en-US" altLang="ja-JP" dirty="0"/>
+              <a:t/>
+            </a:r>
             <a:br>
               <a:rPr kumimoji="1" lang="en-US" altLang="ja-JP" dirty="0"/>
             </a:br>
@@ -5501,24 +5604,17 @@
       </p:sp>
       <p:cxnSp>
         <p:nvCxnSpPr>
-          <p:cNvPr id="6" name="直線矢印コネクタ 5">
-            <a:extLst>
-              <a:ext uri="{FF2B5EF4-FFF2-40B4-BE49-F238E27FC236}">
-                <a16:creationId xmlns:a16="http://schemas.microsoft.com/office/drawing/2014/main" id="{78716ED2-DF3B-D92E-7BD8-3AA09D91A477}"/>
-              </a:ext>
-            </a:extLst>
-          </p:cNvPr>
+          <p:cNvPr id="3" name="直線矢印コネクタ 2"/>
           <p:cNvCxnSpPr>
-            <a:cxnSpLocks/>
-            <a:stCxn id="5" idx="3"/>
+            <a:stCxn id="8" idx="3"/>
             <a:endCxn id="4" idx="1"/>
           </p:cNvCxnSpPr>
           <p:nvPr/>
         </p:nvCxnSpPr>
         <p:spPr>
           <a:xfrm>
-            <a:off x="4886325" y="2438399"/>
-            <a:ext cx="2047875" cy="990601"/>
+            <a:off x="5489440" y="3392488"/>
+            <a:ext cx="1436249" cy="0"/>
           </a:xfrm>
           <a:prstGeom prst="straightConnector1">
             <a:avLst/>
@@ -5528,156 +5624,17 @@
           </a:ln>
         </p:spPr>
         <p:style>
-          <a:lnRef idx="2">
-            <a:schemeClr val="accent3">
-              <a:shade val="15000"/>
-            </a:schemeClr>
-          </a:lnRef>
-          <a:fillRef idx="1">
-            <a:schemeClr val="accent3"/>
+          <a:lnRef idx="1">
+            <a:schemeClr val="dk1"/>
+          </a:lnRef>
+          <a:fillRef idx="0">
+            <a:schemeClr val="dk1"/>
           </a:fillRef>
           <a:effectRef idx="0">
-            <a:schemeClr val="accent3"/>
-          </a:effectRef>
-          <a:fontRef idx="minor">
-            <a:schemeClr val="lt1"/>
-          </a:fontRef>
-        </p:style>
-      </p:cxnSp>
-      <p:sp>
-        <p:nvSpPr>
-          <p:cNvPr id="9" name="正方形/長方形 8">
-            <a:extLst>
-              <a:ext uri="{FF2B5EF4-FFF2-40B4-BE49-F238E27FC236}">
-                <a16:creationId xmlns:a16="http://schemas.microsoft.com/office/drawing/2014/main" id="{CBC8A939-E168-8640-4151-6E3418F38040}"/>
-              </a:ext>
-            </a:extLst>
-          </p:cNvPr>
-          <p:cNvSpPr/>
-          <p:nvPr/>
-        </p:nvSpPr>
-        <p:spPr>
-          <a:xfrm>
-            <a:off x="2514600" y="3724276"/>
-            <a:ext cx="2371725" cy="1485900"/>
-          </a:xfrm>
-          <a:prstGeom prst="rect">
-            <a:avLst/>
-          </a:prstGeom>
-        </p:spPr>
-        <p:style>
-          <a:lnRef idx="2">
-            <a:schemeClr val="accent4">
-              <a:shade val="15000"/>
-            </a:schemeClr>
-          </a:lnRef>
-          <a:fillRef idx="1">
-            <a:schemeClr val="accent4"/>
-          </a:fillRef>
-          <a:effectRef idx="0">
-            <a:schemeClr val="accent4"/>
-          </a:effectRef>
-          <a:fontRef idx="minor">
-            <a:schemeClr val="lt1"/>
-          </a:fontRef>
-        </p:style>
-        <p:txBody>
-          <a:bodyPr rtlCol="0" anchor="ctr"/>
-          <a:lstStyle/>
-          <a:p>
-            <a:pPr algn="ctr"/>
-            <a:r>
-              <a:rPr kumimoji="1" lang="ja-JP" altLang="en-US" dirty="0"/>
-              <a:t>説明変数</a:t>
-            </a:r>
-            <a:r>
-              <a:rPr kumimoji="1" lang="en-US" altLang="ja-JP" dirty="0"/>
-              <a:t>2</a:t>
-            </a:r>
-            <a:r>
-              <a:rPr kumimoji="1" lang="ja-JP" altLang="en-US" dirty="0"/>
-              <a:t>：</a:t>
-            </a:r>
-            <a:br>
-              <a:rPr kumimoji="1" lang="en-US" altLang="ja-JP" dirty="0"/>
-            </a:br>
-            <a:r>
-              <a:rPr kumimoji="1" lang="ja-JP" altLang="en-US" dirty="0"/>
-              <a:t>被験者</a:t>
-            </a:r>
-            <a:r>
-              <a:rPr kumimoji="1" lang="en-US" altLang="ja-JP" dirty="0"/>
-              <a:t>No.</a:t>
-            </a:r>
-          </a:p>
-          <a:p>
-            <a:pPr algn="ctr"/>
-            <a:endParaRPr kumimoji="1" lang="en-US" altLang="ja-JP" dirty="0"/>
-          </a:p>
-          <a:p>
-            <a:pPr algn="ctr"/>
-            <a:r>
-              <a:rPr kumimoji="1" lang="ja-JP" altLang="en-US" dirty="0"/>
-              <a:t>水準：</a:t>
-            </a:r>
-            <a:r>
-              <a:rPr kumimoji="1" lang="en-US" altLang="ja-JP" dirty="0"/>
-              <a:t>1,2,</a:t>
-            </a:r>
-            <a:r>
-              <a:rPr kumimoji="1" lang="ja-JP" altLang="en-US" dirty="0"/>
-              <a:t>・・・</a:t>
-            </a:r>
-            <a:r>
-              <a:rPr kumimoji="1" lang="en-US" altLang="ja-JP" dirty="0"/>
-              <a:t>20</a:t>
-            </a:r>
-            <a:endParaRPr lang="en-US" altLang="ja-JP" dirty="0"/>
-          </a:p>
-        </p:txBody>
-      </p:sp>
-      <p:cxnSp>
-        <p:nvCxnSpPr>
-          <p:cNvPr id="10" name="直線矢印コネクタ 9">
-            <a:extLst>
-              <a:ext uri="{FF2B5EF4-FFF2-40B4-BE49-F238E27FC236}">
-                <a16:creationId xmlns:a16="http://schemas.microsoft.com/office/drawing/2014/main" id="{3692A9EC-9D53-BBF8-6010-1B3560DD9FC6}"/>
-              </a:ext>
-            </a:extLst>
-          </p:cNvPr>
-          <p:cNvCxnSpPr>
-            <a:cxnSpLocks/>
-            <a:stCxn id="9" idx="3"/>
-            <a:endCxn id="4" idx="1"/>
-          </p:cNvCxnSpPr>
-          <p:nvPr/>
-        </p:nvCxnSpPr>
-        <p:spPr>
-          <a:xfrm flipV="1">
-            <a:off x="4886325" y="3429000"/>
-            <a:ext cx="2047875" cy="1038226"/>
-          </a:xfrm>
-          <a:prstGeom prst="straightConnector1">
-            <a:avLst/>
-          </a:prstGeom>
-          <a:ln>
-            <a:tailEnd type="triangle"/>
-          </a:ln>
-        </p:spPr>
-        <p:style>
-          <a:lnRef idx="2">
-            <a:schemeClr val="accent3">
-              <a:shade val="15000"/>
-            </a:schemeClr>
-          </a:lnRef>
-          <a:fillRef idx="1">
-            <a:schemeClr val="accent3"/>
-          </a:fillRef>
-          <a:effectRef idx="0">
-            <a:schemeClr val="accent3"/>
-          </a:effectRef>
-          <a:fontRef idx="minor">
-            <a:schemeClr val="lt1"/>
+            <a:schemeClr val="dk1"/>
+          </a:effectRef>
+          <a:fontRef idx="minor">
+            <a:schemeClr val="tx1"/>
           </a:fontRef>
         </p:style>
       </p:cxnSp>
@@ -5831,6 +5788,10 @@
               <a:rPr kumimoji="1" lang="ja-JP" altLang="en-US" dirty="0"/>
               <a:t>：</a:t>
             </a:r>
+            <a:r>
+              <a:rPr kumimoji="1" lang="en-US" altLang="ja-JP" dirty="0"/>
+              <a:t/>
+            </a:r>
             <a:br>
               <a:rPr kumimoji="1" lang="en-US" altLang="ja-JP" dirty="0"/>
             </a:br>
@@ -5959,6 +5920,10 @@
             <a:r>
               <a:rPr kumimoji="1" lang="ja-JP" altLang="en-US" dirty="0"/>
               <a:t>：</a:t>
+            </a:r>
+            <a:r>
+              <a:rPr kumimoji="1" lang="en-US" altLang="ja-JP" dirty="0"/>
+              <a:t/>
             </a:r>
             <a:br>
               <a:rPr kumimoji="1" lang="en-US" altLang="ja-JP" dirty="0"/>
@@ -6190,6 +6155,10 @@
               <a:rPr kumimoji="1" lang="ja-JP" altLang="en-US" dirty="0"/>
               <a:t>：</a:t>
             </a:r>
+            <a:r>
+              <a:rPr kumimoji="1" lang="en-US" altLang="ja-JP" dirty="0"/>
+              <a:t/>
+            </a:r>
             <a:br>
               <a:rPr kumimoji="1" lang="en-US" altLang="ja-JP" dirty="0"/>
             </a:br>
@@ -6318,6 +6287,10 @@
             <a:r>
               <a:rPr kumimoji="1" lang="ja-JP" altLang="en-US" dirty="0"/>
               <a:t>：</a:t>
+            </a:r>
+            <a:r>
+              <a:rPr kumimoji="1" lang="en-US" altLang="ja-JP" dirty="0"/>
+              <a:t/>
             </a:r>
             <a:br>
               <a:rPr kumimoji="1" lang="en-US" altLang="ja-JP" dirty="0"/>
@@ -6788,6 +6761,10 @@
               <a:rPr kumimoji="1" lang="ja-JP" altLang="en-US" dirty="0"/>
               <a:t>：</a:t>
             </a:r>
+            <a:r>
+              <a:rPr kumimoji="1" lang="en-US" altLang="ja-JP" dirty="0"/>
+              <a:t/>
+            </a:r>
             <a:br>
               <a:rPr kumimoji="1" lang="en-US" altLang="ja-JP" dirty="0"/>
             </a:br>
@@ -6942,6 +6919,10 @@
             <a:r>
               <a:rPr kumimoji="1" lang="ja-JP" altLang="en-US" dirty="0"/>
               <a:t>：</a:t>
+            </a:r>
+            <a:r>
+              <a:rPr kumimoji="1" lang="en-US" altLang="ja-JP" dirty="0"/>
+              <a:t/>
             </a:r>
             <a:br>
               <a:rPr kumimoji="1" lang="en-US" altLang="ja-JP" dirty="0"/>
@@ -7286,6 +7267,10 @@
               <a:rPr lang="ja-JP" altLang="en-US" dirty="0"/>
               <a:t>：</a:t>
             </a:r>
+            <a:r>
+              <a:rPr lang="en-US" altLang="ja-JP" dirty="0"/>
+              <a:t/>
+            </a:r>
             <a:br>
               <a:rPr lang="en-US" altLang="ja-JP" dirty="0"/>
             </a:br>
@@ -7431,6 +7416,10 @@
             <a:r>
               <a:rPr lang="ja-JP" altLang="en-US" dirty="0"/>
               <a:t>：</a:t>
+            </a:r>
+            <a:r>
+              <a:rPr lang="en-US" altLang="ja-JP" dirty="0"/>
+              <a:t/>
             </a:r>
             <a:br>
               <a:rPr lang="en-US" altLang="ja-JP" dirty="0"/>
@@ -7704,6 +7693,10 @@
               <a:rPr kumimoji="1" lang="ja-JP" altLang="en-US" dirty="0"/>
               <a:t>：</a:t>
             </a:r>
+            <a:r>
+              <a:rPr kumimoji="1" lang="en-US" altLang="ja-JP" dirty="0"/>
+              <a:t/>
+            </a:r>
             <a:br>
               <a:rPr kumimoji="1" lang="en-US" altLang="ja-JP" dirty="0"/>
             </a:br>
@@ -7799,6 +7792,10 @@
               <a:rPr kumimoji="1" lang="ja-JP" altLang="en-US" dirty="0"/>
               <a:t>：</a:t>
             </a:r>
+            <a:r>
+              <a:rPr kumimoji="1" lang="en-US" altLang="ja-JP" dirty="0"/>
+              <a:t/>
+            </a:r>
             <a:br>
               <a:rPr kumimoji="1" lang="en-US" altLang="ja-JP" dirty="0"/>
             </a:br>
@@ -7984,6 +7981,10 @@
             <a:r>
               <a:rPr kumimoji="1" lang="ja-JP" altLang="en-US" dirty="0"/>
               <a:t>：</a:t>
+            </a:r>
+            <a:r>
+              <a:rPr kumimoji="1" lang="en-US" altLang="ja-JP" dirty="0"/>
+              <a:t/>
             </a:r>
             <a:br>
               <a:rPr kumimoji="1" lang="en-US" altLang="ja-JP" dirty="0"/>
@@ -8111,6 +8112,10 @@
             <a:r>
               <a:rPr kumimoji="1" lang="ja-JP" altLang="en-US" dirty="0"/>
               <a:t>：</a:t>
+            </a:r>
+            <a:r>
+              <a:rPr kumimoji="1" lang="en-US" altLang="ja-JP" dirty="0"/>
+              <a:t/>
             </a:r>
             <a:br>
               <a:rPr kumimoji="1" lang="en-US" altLang="ja-JP" dirty="0"/>
@@ -8510,6 +8515,10 @@
               <a:rPr kumimoji="1" lang="ja-JP" altLang="en-US" dirty="0"/>
               <a:t>：</a:t>
             </a:r>
+            <a:r>
+              <a:rPr kumimoji="1" lang="en-US" altLang="ja-JP" dirty="0"/>
+              <a:t/>
+            </a:r>
             <a:br>
               <a:rPr kumimoji="1" lang="en-US" altLang="ja-JP" dirty="0"/>
             </a:br>
@@ -8702,6 +8711,10 @@
             <a:r>
               <a:rPr kumimoji="1" lang="ja-JP" altLang="en-US" dirty="0"/>
               <a:t>：</a:t>
+            </a:r>
+            <a:r>
+              <a:rPr kumimoji="1" lang="en-US" altLang="ja-JP" dirty="0"/>
+              <a:t/>
             </a:r>
             <a:br>
               <a:rPr kumimoji="1" lang="en-US" altLang="ja-JP" dirty="0"/>
@@ -8830,6 +8843,10 @@
             <a:r>
               <a:rPr kumimoji="1" lang="ja-JP" altLang="en-US" dirty="0"/>
               <a:t>：</a:t>
+            </a:r>
+            <a:r>
+              <a:rPr kumimoji="1" lang="en-US" altLang="ja-JP" dirty="0"/>
+              <a:t/>
             </a:r>
             <a:br>
               <a:rPr kumimoji="1" lang="en-US" altLang="ja-JP" dirty="0"/>
@@ -10355,6 +10372,10 @@
               <a:rPr kumimoji="1" lang="ja-JP" altLang="en-US" dirty="0"/>
               <a:t>これらの正規分布は</a:t>
             </a:r>
+            <a:r>
+              <a:rPr kumimoji="1" lang="en-US" altLang="ja-JP" dirty="0"/>
+              <a:t/>
+            </a:r>
             <a:br>
               <a:rPr kumimoji="1" lang="en-US" altLang="ja-JP" dirty="0"/>
             </a:br>
@@ -10369,6 +10390,10 @@
             <a:r>
               <a:rPr kumimoji="1" lang="ja-JP" altLang="en-US" dirty="0"/>
               <a:t>予測値，</a:t>
+            </a:r>
+            <a:r>
+              <a:rPr kumimoji="1" lang="en-US" altLang="ja-JP" dirty="0"/>
+              <a:t/>
             </a:r>
             <a:br>
               <a:rPr kumimoji="1" lang="en-US" altLang="ja-JP" dirty="0"/>
@@ -12598,6 +12623,10 @@
               <a:rPr kumimoji="1" lang="ja-JP" altLang="en-US" sz="1400" dirty="0"/>
               <a:t>一要因分散分析</a:t>
             </a:r>
+            <a:r>
+              <a:rPr kumimoji="1" lang="en-US" altLang="ja-JP" sz="1400" dirty="0"/>
+              <a:t/>
+            </a:r>
             <a:br>
               <a:rPr kumimoji="1" lang="en-US" altLang="ja-JP" sz="1400" dirty="0"/>
             </a:br>
@@ -12616,6 +12645,10 @@
             <a:r>
               <a:rPr kumimoji="1" lang="ja-JP" altLang="en-US" sz="1400" dirty="0"/>
               <a:t>二元配置分散分析</a:t>
+            </a:r>
+            <a:r>
+              <a:rPr kumimoji="1" lang="en-US" altLang="ja-JP" sz="1400" dirty="0"/>
+              <a:t/>
             </a:r>
             <a:br>
               <a:rPr kumimoji="1" lang="en-US" altLang="ja-JP" sz="1400" dirty="0"/>
@@ -12660,6 +12693,10 @@
               <a:rPr kumimoji="1" lang="ja-JP" altLang="en-US" sz="1400" dirty="0"/>
               <a:t>二要因分散分析</a:t>
             </a:r>
+            <a:r>
+              <a:rPr kumimoji="1" lang="en-US" altLang="ja-JP" sz="1400" dirty="0"/>
+              <a:t/>
+            </a:r>
             <a:br>
               <a:rPr kumimoji="1" lang="en-US" altLang="ja-JP" sz="1400" dirty="0"/>
             </a:br>
@@ -12678,6 +12715,10 @@
             <a:r>
               <a:rPr kumimoji="1" lang="ja-JP" altLang="en-US" sz="1400" dirty="0"/>
               <a:t>二元配置分散分析</a:t>
+            </a:r>
+            <a:r>
+              <a:rPr kumimoji="1" lang="en-US" altLang="ja-JP" sz="1400" dirty="0"/>
+              <a:t/>
             </a:r>
             <a:br>
               <a:rPr kumimoji="1" lang="en-US" altLang="ja-JP" sz="1400" dirty="0"/>
@@ -12856,6 +12897,10 @@
               <a:rPr kumimoji="1" lang="ja-JP" altLang="en-US" sz="1400" dirty="0"/>
               <a:t>二要因分散分析</a:t>
             </a:r>
+            <a:r>
+              <a:rPr kumimoji="1" lang="en-US" altLang="ja-JP" sz="1400" dirty="0"/>
+              <a:t/>
+            </a:r>
             <a:br>
               <a:rPr kumimoji="1" lang="en-US" altLang="ja-JP" sz="1400" dirty="0"/>
             </a:br>
@@ -12874,6 +12919,10 @@
             <a:r>
               <a:rPr kumimoji="1" lang="ja-JP" altLang="en-US" sz="1400" dirty="0"/>
               <a:t>二元配置分散分析</a:t>
+            </a:r>
+            <a:r>
+              <a:rPr kumimoji="1" lang="en-US" altLang="ja-JP" sz="1400" dirty="0"/>
+              <a:t/>
             </a:r>
             <a:br>
               <a:rPr kumimoji="1" lang="en-US" altLang="ja-JP" sz="1400" dirty="0"/>
@@ -13100,6 +13149,10 @@
               <a:rPr kumimoji="1" lang="ja-JP" altLang="en-US" sz="1400" dirty="0"/>
               <a:t>一要因分散分析</a:t>
             </a:r>
+            <a:r>
+              <a:rPr kumimoji="1" lang="en-US" altLang="ja-JP" sz="1400" dirty="0"/>
+              <a:t/>
+            </a:r>
             <a:br>
               <a:rPr kumimoji="1" lang="en-US" altLang="ja-JP" sz="1400" dirty="0"/>
             </a:br>
@@ -13118,6 +13171,10 @@
             <a:r>
               <a:rPr kumimoji="1" lang="ja-JP" altLang="en-US" sz="1400" dirty="0"/>
               <a:t>二元配置分散分析</a:t>
+            </a:r>
+            <a:r>
+              <a:rPr kumimoji="1" lang="en-US" altLang="ja-JP" sz="1400" dirty="0"/>
+              <a:t/>
             </a:r>
             <a:br>
               <a:rPr kumimoji="1" lang="en-US" altLang="ja-JP" sz="1400" dirty="0"/>
@@ -13162,6 +13219,10 @@
               <a:rPr kumimoji="1" lang="ja-JP" altLang="en-US" sz="1400" dirty="0"/>
               <a:t>二要因分散分析</a:t>
             </a:r>
+            <a:r>
+              <a:rPr kumimoji="1" lang="en-US" altLang="ja-JP" sz="1400" dirty="0"/>
+              <a:t/>
+            </a:r>
             <a:br>
               <a:rPr kumimoji="1" lang="en-US" altLang="ja-JP" sz="1400" dirty="0"/>
             </a:br>
@@ -13180,6 +13241,10 @@
             <a:r>
               <a:rPr kumimoji="1" lang="ja-JP" altLang="en-US" sz="1400" dirty="0"/>
               <a:t>二元配置分散分析</a:t>
+            </a:r>
+            <a:r>
+              <a:rPr kumimoji="1" lang="en-US" altLang="ja-JP" sz="1400" dirty="0"/>
+              <a:t/>
             </a:r>
             <a:br>
               <a:rPr kumimoji="1" lang="en-US" altLang="ja-JP" sz="1400" dirty="0"/>
@@ -13224,6 +13289,10 @@
               <a:rPr kumimoji="1" lang="ja-JP" altLang="en-US" sz="1400" dirty="0"/>
               <a:t>二要因分散分析</a:t>
             </a:r>
+            <a:r>
+              <a:rPr kumimoji="1" lang="en-US" altLang="ja-JP" sz="1400" dirty="0"/>
+              <a:t/>
+            </a:r>
             <a:br>
               <a:rPr kumimoji="1" lang="en-US" altLang="ja-JP" sz="1400" dirty="0"/>
             </a:br>
@@ -13242,6 +13311,10 @@
             <a:r>
               <a:rPr kumimoji="1" lang="ja-JP" altLang="en-US" sz="1400" dirty="0"/>
               <a:t>二元配置分散分析</a:t>
+            </a:r>
+            <a:r>
+              <a:rPr kumimoji="1" lang="en-US" altLang="ja-JP" sz="1400" dirty="0"/>
+              <a:t/>
             </a:r>
             <a:br>
               <a:rPr kumimoji="1" lang="en-US" altLang="ja-JP" sz="1400" dirty="0"/>
@@ -15272,6 +15345,10 @@
               <a:rPr kumimoji="1" lang="ja-JP" altLang="en-US" dirty="0"/>
               <a:t>水準：</a:t>
             </a:r>
+            <a:r>
+              <a:rPr kumimoji="1" lang="en-US" altLang="ja-JP" dirty="0"/>
+              <a:t/>
+            </a:r>
             <a:br>
               <a:rPr kumimoji="1" lang="en-US" altLang="ja-JP" dirty="0"/>
             </a:br>
@@ -15286,6 +15363,10 @@
             <a:r>
               <a:rPr kumimoji="1" lang="ja-JP" altLang="en-US" dirty="0"/>
               <a:t>石川</a:t>
+            </a:r>
+            <a:r>
+              <a:rPr kumimoji="1" lang="en-US" altLang="ja-JP" dirty="0"/>
+              <a:t/>
             </a:r>
             <a:br>
               <a:rPr kumimoji="1" lang="en-US" altLang="ja-JP" dirty="0"/>
